--- a/lmu-branded-test.pptx
+++ b/lmu-branded-test.pptx
@@ -5,7 +5,7 @@
     <p:sldMasterId id="2147483648" r:id="rId1"/>
   </p:sldMasterIdLst>
   <p:notesMasterIdLst>
-    <p:notesMasterId r:id="rId45"/>
+    <p:notesMasterId r:id="rId47"/>
   </p:notesMasterIdLst>
   <p:sldIdLst>
     <p:sldId id="256" r:id="rId2"/>
@@ -51,6 +51,8 @@
     <p:sldId id="296" r:id="rId42"/>
     <p:sldId id="297" r:id="rId43"/>
     <p:sldId id="298" r:id="rId44"/>
+    <p:sldId id="299" r:id="rId45"/>
+    <p:sldId id="300" r:id="rId46"/>
   </p:sldIdLst>
   <p:sldSz cx="12192000" cy="6858000"/>
   <p:notesSz cx="6858000" cy="9144000"/>
@@ -581,7 +583,7 @@
           <a:p>
             <a:fld id="{1335DC12-1F25-3F4F-8976-F7B9B059DA07}" type="slidenum">
               <a:rPr lang="en-US"/>
-              <a:t>5</a:t>
+              <a:t>7</a:t>
             </a:fld>
             <a:endParaRPr lang="en-US"/>
           </a:p>
@@ -708,7 +710,7 @@
           <a:p>
             <a:fld id="{1335DC12-1F25-3F4F-8976-F7B9B059DA07}" type="slidenum">
               <a:rPr lang="en-US"/>
-              <a:t>17</a:t>
+              <a:t>19</a:t>
             </a:fld>
             <a:endParaRPr lang="en-US"/>
           </a:p>
@@ -849,7 +851,7 @@
           <a:p>
             <a:fld id="{1335DC12-1F25-3F4F-8976-F7B9B059DA07}" type="slidenum">
               <a:rPr lang="en-US"/>
-              <a:t>18</a:t>
+              <a:t>20</a:t>
             </a:fld>
             <a:endParaRPr lang="en-US"/>
           </a:p>
@@ -996,7 +998,7 @@
           <a:p>
             <a:fld id="{1335DC12-1F25-3F4F-8976-F7B9B059DA07}" type="slidenum">
               <a:rPr lang="en-US"/>
-              <a:t>19</a:t>
+              <a:t>21</a:t>
             </a:fld>
             <a:endParaRPr lang="en-US"/>
           </a:p>
@@ -1133,7 +1135,7 @@
           <a:p>
             <a:fld id="{1335DC12-1F25-3F4F-8976-F7B9B059DA07}" type="slidenum">
               <a:rPr lang="en-US"/>
-              <a:t>20</a:t>
+              <a:t>22</a:t>
             </a:fld>
             <a:endParaRPr lang="en-US"/>
           </a:p>
@@ -1233,7 +1235,7 @@
           <a:p>
             <a:fld id="{1335DC12-1F25-3F4F-8976-F7B9B059DA07}" type="slidenum">
               <a:rPr lang="en-US"/>
-              <a:t>21</a:t>
+              <a:t>23</a:t>
             </a:fld>
             <a:endParaRPr lang="en-US"/>
           </a:p>
@@ -1409,7 +1411,7 @@
           <a:p>
             <a:fld id="{1335DC12-1F25-3F4F-8976-F7B9B059DA07}" type="slidenum">
               <a:rPr lang="en-US"/>
-              <a:t>22</a:t>
+              <a:t>24</a:t>
             </a:fld>
             <a:endParaRPr lang="en-US"/>
           </a:p>
@@ -1519,7 +1521,7 @@
           <a:p>
             <a:fld id="{1335DC12-1F25-3F4F-8976-F7B9B059DA07}" type="slidenum">
               <a:rPr lang="en-US"/>
-              <a:t>23</a:t>
+              <a:t>25</a:t>
             </a:fld>
             <a:endParaRPr lang="en-US"/>
           </a:p>
@@ -1623,7 +1625,7 @@
           <a:p>
             <a:fld id="{1335DC12-1F25-3F4F-8976-F7B9B059DA07}" type="slidenum">
               <a:rPr lang="en-US"/>
-              <a:t>24</a:t>
+              <a:t>26</a:t>
             </a:fld>
             <a:endParaRPr lang="en-US"/>
           </a:p>
@@ -1795,7 +1797,7 @@
           <a:p>
             <a:fld id="{1335DC12-1F25-3F4F-8976-F7B9B059DA07}" type="slidenum">
               <a:rPr lang="en-US"/>
-              <a:t>25</a:t>
+              <a:t>27</a:t>
             </a:fld>
             <a:endParaRPr lang="en-US"/>
           </a:p>
@@ -1977,7 +1979,7 @@
           <a:p>
             <a:fld id="{1335DC12-1F25-3F4F-8976-F7B9B059DA07}" type="slidenum">
               <a:rPr lang="en-US"/>
-              <a:t>26</a:t>
+              <a:t>28</a:t>
             </a:fld>
             <a:endParaRPr lang="en-US"/>
           </a:p>
@@ -2081,7 +2083,7 @@
           <a:p>
             <a:fld id="{1335DC12-1F25-3F4F-8976-F7B9B059DA07}" type="slidenum">
               <a:rPr lang="en-US"/>
-              <a:t>7</a:t>
+              <a:t>9</a:t>
             </a:fld>
             <a:endParaRPr lang="en-US"/>
           </a:p>
@@ -2185,7 +2187,7 @@
           <a:p>
             <a:fld id="{1335DC12-1F25-3F4F-8976-F7B9B059DA07}" type="slidenum">
               <a:rPr lang="en-US"/>
-              <a:t>27</a:t>
+              <a:t>29</a:t>
             </a:fld>
             <a:endParaRPr lang="en-US"/>
           </a:p>
@@ -2309,7 +2311,7 @@
           <a:p>
             <a:fld id="{1335DC12-1F25-3F4F-8976-F7B9B059DA07}" type="slidenum">
               <a:rPr lang="en-US"/>
-              <a:t>29</a:t>
+              <a:t>31</a:t>
             </a:fld>
             <a:endParaRPr lang="en-US"/>
           </a:p>
@@ -2445,7 +2447,7 @@
           <a:p>
             <a:fld id="{1335DC12-1F25-3F4F-8976-F7B9B059DA07}" type="slidenum">
               <a:rPr lang="en-US"/>
-              <a:t>30</a:t>
+              <a:t>32</a:t>
             </a:fld>
             <a:endParaRPr lang="en-US"/>
           </a:p>
@@ -2549,7 +2551,7 @@
           <a:p>
             <a:fld id="{1335DC12-1F25-3F4F-8976-F7B9B059DA07}" type="slidenum">
               <a:rPr lang="en-US"/>
-              <a:t>31</a:t>
+              <a:t>33</a:t>
             </a:fld>
             <a:endParaRPr lang="en-US"/>
           </a:p>
@@ -2695,7 +2697,7 @@
           <a:p>
             <a:fld id="{1335DC12-1F25-3F4F-8976-F7B9B059DA07}" type="slidenum">
               <a:rPr lang="en-US"/>
-              <a:t>32</a:t>
+              <a:t>34</a:t>
             </a:fld>
             <a:endParaRPr lang="en-US"/>
           </a:p>
@@ -2924,7 +2926,7 @@
           <a:p>
             <a:fld id="{1335DC12-1F25-3F4F-8976-F7B9B059DA07}" type="slidenum">
               <a:rPr lang="en-US"/>
-              <a:t>33</a:t>
+              <a:t>35</a:t>
             </a:fld>
             <a:endParaRPr lang="en-US"/>
           </a:p>
@@ -3047,7 +3049,7 @@
           <a:p>
             <a:fld id="{1335DC12-1F25-3F4F-8976-F7B9B059DA07}" type="slidenum">
               <a:rPr lang="en-US"/>
-              <a:t>34</a:t>
+              <a:t>36</a:t>
             </a:fld>
             <a:endParaRPr lang="en-US"/>
           </a:p>
@@ -3165,7 +3167,7 @@
           <a:p>
             <a:fld id="{1335DC12-1F25-3F4F-8976-F7B9B059DA07}" type="slidenum">
               <a:rPr lang="en-US"/>
-              <a:t>35</a:t>
+              <a:t>37</a:t>
             </a:fld>
             <a:endParaRPr lang="en-US"/>
           </a:p>
@@ -3259,7 +3261,7 @@
           <a:p>
             <a:fld id="{1335DC12-1F25-3F4F-8976-F7B9B059DA07}" type="slidenum">
               <a:rPr lang="en-US"/>
-              <a:t>36</a:t>
+              <a:t>38</a:t>
             </a:fld>
             <a:endParaRPr lang="en-US"/>
           </a:p>
@@ -3383,7 +3385,7 @@
           <a:p>
             <a:fld id="{1335DC12-1F25-3F4F-8976-F7B9B059DA07}" type="slidenum">
               <a:rPr lang="en-US"/>
-              <a:t>39</a:t>
+              <a:t>41</a:t>
             </a:fld>
             <a:endParaRPr lang="en-US"/>
           </a:p>
@@ -3487,7 +3489,7 @@
           <a:p>
             <a:fld id="{1335DC12-1F25-3F4F-8976-F7B9B059DA07}" type="slidenum">
               <a:rPr lang="en-US"/>
-              <a:t>8</a:t>
+              <a:t>10</a:t>
             </a:fld>
             <a:endParaRPr lang="en-US"/>
           </a:p>
@@ -3609,7 +3611,7 @@
           <a:p>
             <a:fld id="{1335DC12-1F25-3F4F-8976-F7B9B059DA07}" type="slidenum">
               <a:rPr lang="en-US"/>
-              <a:t>42</a:t>
+              <a:t>44</a:t>
             </a:fld>
             <a:endParaRPr lang="en-US"/>
           </a:p>
@@ -3765,7 +3767,7 @@
           <a:p>
             <a:fld id="{1335DC12-1F25-3F4F-8976-F7B9B059DA07}" type="slidenum">
               <a:rPr lang="en-US"/>
-              <a:t>9</a:t>
+              <a:t>11</a:t>
             </a:fld>
             <a:endParaRPr lang="en-US"/>
           </a:p>
@@ -3897,7 +3899,7 @@
           <a:p>
             <a:fld id="{1335DC12-1F25-3F4F-8976-F7B9B059DA07}" type="slidenum">
               <a:rPr lang="en-US"/>
-              <a:t>10</a:t>
+              <a:t>12</a:t>
             </a:fld>
             <a:endParaRPr lang="en-US"/>
           </a:p>
@@ -4001,7 +4003,7 @@
           <a:p>
             <a:fld id="{1335DC12-1F25-3F4F-8976-F7B9B059DA07}" type="slidenum">
               <a:rPr lang="en-US"/>
-              <a:t>13</a:t>
+              <a:t>15</a:t>
             </a:fld>
             <a:endParaRPr lang="en-US"/>
           </a:p>
@@ -4133,7 +4135,7 @@
           <a:p>
             <a:fld id="{1335DC12-1F25-3F4F-8976-F7B9B059DA07}" type="slidenum">
               <a:rPr lang="en-US"/>
-              <a:t>14</a:t>
+              <a:t>16</a:t>
             </a:fld>
             <a:endParaRPr lang="en-US"/>
           </a:p>
@@ -4255,7 +4257,7 @@
           <a:p>
             <a:fld id="{1335DC12-1F25-3F4F-8976-F7B9B059DA07}" type="slidenum">
               <a:rPr lang="en-US"/>
-              <a:t>15</a:t>
+              <a:t>17</a:t>
             </a:fld>
             <a:endParaRPr lang="en-US"/>
           </a:p>
@@ -4378,7 +4380,7 @@
           <a:p>
             <a:fld id="{1335DC12-1F25-3F4F-8976-F7B9B059DA07}" type="slidenum">
               <a:rPr lang="en-US"/>
-              <a:t>16</a:t>
+              <a:t>18</a:t>
             </a:fld>
             <a:endParaRPr lang="en-US"/>
           </a:p>
@@ -8278,7 +8280,7 @@
             </a:pPr>
             <a:r>
               <a:rPr/>
-              <a:t>March 3, 2020</a:t>
+              <a:t>June 9, 2022</a:t>
             </a:r>
           </a:p>
         </p:txBody>
@@ -8353,7 +8355,7 @@
           <p:cNvPr id="2" name="Title 1">
             <a:extLst>
               <a:ext uri="{FF2B5EF4-FFF2-40B4-BE49-F238E27FC236}">
-                <a16:creationId xmlns:a16="http://schemas.microsoft.com/office/drawing/2014/main" id="{6BF04AE0-F94F-A586-34B8-68D9CAB6C6D1}"/>
+                <a16:creationId xmlns:a16="http://schemas.microsoft.com/office/drawing/2014/main" id="{12131F71-CF7E-3DA4-7847-3ACEC01625C3}"/>
               </a:ext>
             </a:extLst>
           </p:cNvPr>
@@ -8366,8 +8368,8 @@
         </p:nvSpPr>
         <p:spPr>
           <a:xfrm>
-            <a:off x="2295524" y="432532"/>
-            <a:ext cx="9450077" cy="825501"/>
+            <a:off x="446399" y="1392999"/>
+            <a:ext cx="4735201" cy="996952"/>
           </a:xfrm>
         </p:spPr>
         <p:txBody>
@@ -8379,17 +8381,17 @@
             </a:pPr>
             <a:r>
               <a:rPr/>
-              <a:t>Before we start: Survey time!</a:t>
-            </a:r>
-          </a:p>
-        </p:txBody>
-      </p:sp>
-      <p:sp>
-        <p:nvSpPr>
-          <p:cNvPr id="6" name="Slide Number Placeholder 5">
+              <a:t>Prerequisites (cont.)</a:t>
+            </a:r>
+          </a:p>
+        </p:txBody>
+      </p:sp>
+      <p:sp>
+        <p:nvSpPr>
+          <p:cNvPr id="4" name="Text Placeholder 3">
             <a:extLst>
               <a:ext uri="{FF2B5EF4-FFF2-40B4-BE49-F238E27FC236}">
-                <a16:creationId xmlns:a16="http://schemas.microsoft.com/office/drawing/2014/main" id="{5F33F24B-1A9E-2EAF-F2AB-89426454DEE9}"/>
+                <a16:creationId xmlns:a16="http://schemas.microsoft.com/office/drawing/2014/main" id="{7381D285-C44D-D095-90F1-6D3CF7B2C883}"/>
               </a:ext>
             </a:extLst>
           </p:cNvPr>
@@ -8397,13 +8399,88 @@
             <a:spLocks noGrp="1"/>
           </p:cNvSpPr>
           <p:nvPr>
+            <p:ph idx="2" sz="half" type="body"/>
+          </p:nvPr>
+        </p:nvSpPr>
+        <p:spPr/>
+        <p:txBody>
+          <a:bodyPr/>
+          <a:lstStyle/>
+          <a:p>
+            <a:pPr lvl="0"/>
+            <a:r>
+              <a:rPr/>
+              <a:t>Familiarity with the concept of </a:t>
+            </a:r>
+            <a:r>
+              <a:rPr b="1"/>
+              <a:t>literature review</a:t>
+            </a:r>
+            <a:r>
+              <a:rPr/>
+              <a:t>; how and where to access scientific papers, such as </a:t>
+            </a:r>
+            <a:r>
+              <a:rPr i="1"/>
+              <a:t>Google Scholar</a:t>
+            </a:r>
+            <a:r>
+              <a:rPr/>
+              <a:t>.</a:t>
+            </a:r>
+          </a:p>
+        </p:txBody>
+      </p:sp>
+      <p:pic>
+        <p:nvPicPr>
+          <p:cNvPr descr="images/GoogleScholar.png" id="0" name="Picture 1"/>
+          <p:cNvPicPr>
+            <a:picLocks noGrp="1" noChangeAspect="1"/>
+          </p:cNvPicPr>
+          <p:nvPr/>
+        </p:nvPicPr>
+        <p:blipFill>
+          <a:blip r:embed="rId3"/>
+          <a:stretch>
+            <a:fillRect/>
+          </a:stretch>
+        </p:blipFill>
+        <p:spPr bwMode="auto">
+          <a:xfrm>
+            <a:off x="5372100" y="1892300"/>
+            <a:ext cx="6362700" cy="3810000"/>
+          </a:xfrm>
+          <a:prstGeom prst="rect">
+            <a:avLst/>
+          </a:prstGeom>
+          <a:noFill/>
+          <a:ln w="9525">
+            <a:noFill/>
+            <a:headEnd/>
+            <a:tailEnd/>
+          </a:ln>
+        </p:spPr>
+      </p:pic>
+      <p:sp>
+        <p:nvSpPr>
+          <p:cNvPr id="7" name="Slide Number Placeholder 6">
+            <a:extLst>
+              <a:ext uri="{FF2B5EF4-FFF2-40B4-BE49-F238E27FC236}">
+                <a16:creationId xmlns:a16="http://schemas.microsoft.com/office/drawing/2014/main" id="{7EC0C6E5-A864-8D29-B45D-21E23026496C}"/>
+              </a:ext>
+            </a:extLst>
+          </p:cNvPr>
+          <p:cNvSpPr>
+            <a:spLocks noGrp="1"/>
+          </p:cNvSpPr>
+          <p:nvPr>
             <p:ph idx="12" sz="quarter" type="sldNum"/>
           </p:nvPr>
         </p:nvSpPr>
         <p:spPr>
           <a:xfrm>
-            <a:off x="8610599" y="6356350"/>
-            <a:ext cx="3135001" cy="365125"/>
+            <a:off x="8610600" y="6356350"/>
+            <a:ext cx="3135000" cy="365125"/>
           </a:xfrm>
         </p:spPr>
         <p:txBody>
@@ -8420,6 +8497,88 @@
       </p:sp>
     </p:spTree>
   </p:cSld>
+  <p:timing>
+    <p:tnLst>
+      <p:par>
+        <p:cTn id="1" dur="indefinite" restart="never" nodeType="tmRoot">
+          <p:childTnLst>
+            <p:seq concurrent="1" nextAc="seek">
+              <p:cTn id="2" dur="indefinite" nodeType="mainSeq">
+                <p:childTnLst>
+                  <p:par>
+                    <p:cTn id="3" fill="hold">
+                      <p:stCondLst>
+                        <p:cond delay="indefinite"/>
+                      </p:stCondLst>
+                      <p:childTnLst>
+                        <p:par>
+                          <p:cTn id="4" fill="hold">
+                            <p:stCondLst>
+                              <p:cond delay="0"/>
+                            </p:stCondLst>
+                            <p:childTnLst>
+                              <p:par>
+                                <p:cTn id="5" presetID="1" presetClass="entr" presetSubtype="0" fill="hold" grpId="0" nodeType="clickEffect">
+                                  <p:stCondLst>
+                                    <p:cond delay="0"/>
+                                  </p:stCondLst>
+                                  <p:childTnLst>
+                                    <p:set>
+                                      <p:cBhvr>
+                                        <p:cTn id="6" dur="1" fill="hold">
+                                          <p:stCondLst>
+                                            <p:cond delay="0"/>
+                                          </p:stCondLst>
+                                        </p:cTn>
+                                        <p:tgtEl>
+                                          <p:spTgt spid="4">
+                                            <p:txEl>
+                                              <p:pRg st="0" end="0"/>
+                                            </p:txEl>
+                                          </p:spTgt>
+                                        </p:tgtEl>
+                                        <p:attrNameLst>
+                                          <p:attrName>style.visibility</p:attrName>
+                                        </p:attrNameLst>
+                                      </p:cBhvr>
+                                      <p:to>
+                                        <p:strVal val="visible"/>
+                                      </p:to>
+                                    </p:set>
+                                  </p:childTnLst>
+                                </p:cTn>
+                              </p:par>
+                            </p:childTnLst>
+                          </p:cTn>
+                        </p:par>
+                      </p:childTnLst>
+                    </p:cTn>
+                  </p:par>
+                </p:childTnLst>
+              </p:cTn>
+              <p:prevCondLst>
+                <p:cond evt="onPrev" delay="0">
+                  <p:tgtEl>
+                    <p:sldTgt/>
+                  </p:tgtEl>
+                </p:cond>
+              </p:prevCondLst>
+              <p:nextCondLst>
+                <p:cond evt="onNext" delay="0">
+                  <p:tgtEl>
+                    <p:sldTgt/>
+                  </p:tgtEl>
+                </p:cond>
+              </p:nextCondLst>
+            </p:seq>
+          </p:childTnLst>
+        </p:cTn>
+      </p:par>
+    </p:tnLst>
+    <p:bldLst>
+      <p:bldP spid="4" grpId="0" uiExpand="1" build="p"/>
+    </p:bldLst>
+  </p:timing>
 </p:sld>
 </file>
 
@@ -8442,10 +8601,10 @@
       </p:grpSpPr>
       <p:sp>
         <p:nvSpPr>
-          <p:cNvPr id="3" name="Content Placeholder 2">
+          <p:cNvPr id="2" name="Title 1">
             <a:extLst>
               <a:ext uri="{FF2B5EF4-FFF2-40B4-BE49-F238E27FC236}">
-                <a16:creationId xmlns:a16="http://schemas.microsoft.com/office/drawing/2014/main" id="{372FA590-20E9-0368-85B4-90C26598F852}"/>
+                <a16:creationId xmlns:a16="http://schemas.microsoft.com/office/drawing/2014/main" id="{6BF04AE0-F94F-A586-34B8-68D9CAB6C6D1}"/>
               </a:ext>
             </a:extLst>
           </p:cNvPr>
@@ -8453,56 +8612,25 @@
             <a:spLocks noGrp="1"/>
           </p:cNvSpPr>
           <p:nvPr>
-            <p:ph idx="1"/>
-          </p:nvPr>
-        </p:nvSpPr>
-        <p:spPr/>
-        <p:txBody>
-          <a:bodyPr/>
-          <a:lstStyle/>
-          <a:p>
-            <a:pPr lvl="0" indent="0" marL="0">
-              <a:buNone/>
-            </a:pPr>
-            <a:r>
-              <a:rPr b="1"/>
-              <a:t>What is your level of familiarity with citing and referencing scientific papers?</a:t>
-            </a:r>
-          </a:p>
-          <a:p>
-            <a:pPr lvl="0" indent="-457200" marL="457200">
-              <a:buAutoNum type="alphaLcPeriod"/>
-            </a:pPr>
-            <a:r>
-              <a:rPr/>
-              <a:t>I have never heard of it before.</a:t>
-            </a:r>
-          </a:p>
-          <a:p>
-            <a:pPr lvl="0" indent="-457200" marL="457200">
-              <a:buAutoNum type="alphaLcPeriod"/>
-            </a:pPr>
-            <a:r>
-              <a:rPr/>
-              <a:t>I have heard of it but have never worked with it.</a:t>
-            </a:r>
-          </a:p>
-          <a:p>
-            <a:pPr lvl="0" indent="-457200" marL="457200">
-              <a:buAutoNum type="alphaLcPeriod"/>
-            </a:pPr>
-            <a:r>
-              <a:rPr/>
-              <a:t>I have basic understanding and experience with it.</a:t>
-            </a:r>
-          </a:p>
-          <a:p>
-            <a:pPr lvl="0" indent="-457200" marL="457200">
-              <a:buAutoNum type="alphaLcPeriod"/>
-            </a:pPr>
-            <a:r>
-              <a:rPr/>
-              <a:t>I am very familiar and have worked with it extensively.</a:t>
+            <p:ph type="title"/>
+          </p:nvPr>
+        </p:nvSpPr>
+        <p:spPr>
+          <a:xfrm>
+            <a:off x="2295524" y="432532"/>
+            <a:ext cx="9450077" cy="825501"/>
+          </a:xfrm>
+        </p:spPr>
+        <p:txBody>
+          <a:bodyPr/>
+          <a:lstStyle/>
+          <a:p>
+            <a:pPr lvl="0" indent="0" marL="0">
+              <a:buNone/>
+            </a:pPr>
+            <a:r>
+              <a:rPr/>
+              <a:t>Questions from the previous submodule?</a:t>
             </a:r>
           </a:p>
         </p:txBody>
@@ -8565,10 +8693,10 @@
       </p:grpSpPr>
       <p:sp>
         <p:nvSpPr>
-          <p:cNvPr id="3" name="Content Placeholder 2">
+          <p:cNvPr id="2" name="Title 1">
             <a:extLst>
               <a:ext uri="{FF2B5EF4-FFF2-40B4-BE49-F238E27FC236}">
-                <a16:creationId xmlns:a16="http://schemas.microsoft.com/office/drawing/2014/main" id="{372FA590-20E9-0368-85B4-90C26598F852}"/>
+                <a16:creationId xmlns:a16="http://schemas.microsoft.com/office/drawing/2014/main" id="{6BF04AE0-F94F-A586-34B8-68D9CAB6C6D1}"/>
               </a:ext>
             </a:extLst>
           </p:cNvPr>
@@ -8576,73 +8704,25 @@
             <a:spLocks noGrp="1"/>
           </p:cNvSpPr>
           <p:nvPr>
-            <p:ph idx="1"/>
-          </p:nvPr>
-        </p:nvSpPr>
-        <p:spPr/>
-        <p:txBody>
-          <a:bodyPr/>
-          <a:lstStyle/>
-          <a:p>
-            <a:pPr lvl="0" indent="0" marL="0">
-              <a:buNone/>
-            </a:pPr>
-            <a:r>
-              <a:rPr b="1"/>
-              <a:t>How confident do you feel with the Zotero workflow of collection, organisation, and citing?</a:t>
-            </a:r>
-            <a:r>
-              <a:rPr/>
-              <a:t> </a:t>
-            </a:r>
-            <a:r>
-              <a:rPr i="1"/>
-              <a:t>(1 = Not confident at all, 5 = Very confident)</a:t>
-            </a:r>
-          </a:p>
-          <a:p>
-            <a:pPr lvl="0" indent="-457200" marL="457200">
-              <a:buAutoNum type="alphaLcPeriod"/>
-            </a:pPr>
-            <a:r>
-              <a:rPr/>
-              <a:t>1</a:t>
-            </a:r>
-          </a:p>
-          <a:p>
-            <a:pPr lvl="0" indent="-457200" marL="457200">
-              <a:buAutoNum type="alphaLcPeriod"/>
-            </a:pPr>
-            <a:r>
-              <a:rPr/>
-              <a:t>2</a:t>
-            </a:r>
-          </a:p>
-          <a:p>
-            <a:pPr lvl="0" indent="-457200" marL="457200">
-              <a:buAutoNum type="alphaLcPeriod"/>
-            </a:pPr>
-            <a:r>
-              <a:rPr/>
-              <a:t>3</a:t>
-            </a:r>
-          </a:p>
-          <a:p>
-            <a:pPr lvl="0" indent="-457200" marL="457200">
-              <a:buAutoNum type="alphaLcPeriod"/>
-            </a:pPr>
-            <a:r>
-              <a:rPr/>
-              <a:t>4</a:t>
-            </a:r>
-          </a:p>
-          <a:p>
-            <a:pPr lvl="0" indent="-457200" marL="457200">
-              <a:buAutoNum type="alphaLcPeriod"/>
-            </a:pPr>
-            <a:r>
-              <a:rPr/>
-              <a:t>5</a:t>
+            <p:ph type="title"/>
+          </p:nvPr>
+        </p:nvSpPr>
+        <p:spPr>
+          <a:xfrm>
+            <a:off x="2295524" y="432532"/>
+            <a:ext cx="9450077" cy="825501"/>
+          </a:xfrm>
+        </p:spPr>
+        <p:txBody>
+          <a:bodyPr/>
+          <a:lstStyle/>
+          <a:p>
+            <a:pPr lvl="0" indent="0" marL="0">
+              <a:buNone/>
+            </a:pPr>
+            <a:r>
+              <a:rPr/>
+              <a:t>Before we start: Survey time!</a:t>
             </a:r>
           </a:p>
         </p:txBody>
@@ -8705,42 +8785,6 @@
       </p:grpSpPr>
       <p:sp>
         <p:nvSpPr>
-          <p:cNvPr id="2" name="Title 1">
-            <a:extLst>
-              <a:ext uri="{FF2B5EF4-FFF2-40B4-BE49-F238E27FC236}">
-                <a16:creationId xmlns:a16="http://schemas.microsoft.com/office/drawing/2014/main" id="{6BF04AE0-F94F-A586-34B8-68D9CAB6C6D1}"/>
-              </a:ext>
-            </a:extLst>
-          </p:cNvPr>
-          <p:cNvSpPr>
-            <a:spLocks noGrp="1"/>
-          </p:cNvSpPr>
-          <p:nvPr>
-            <p:ph type="title"/>
-          </p:nvPr>
-        </p:nvSpPr>
-        <p:spPr>
-          <a:xfrm>
-            <a:off x="2295524" y="432532"/>
-            <a:ext cx="9450077" cy="825501"/>
-          </a:xfrm>
-        </p:spPr>
-        <p:txBody>
-          <a:bodyPr/>
-          <a:lstStyle/>
-          <a:p>
-            <a:pPr lvl="0" indent="0" marL="0">
-              <a:buNone/>
-            </a:pPr>
-            <a:r>
-              <a:rPr/>
-              <a:t>Discussion of survey results</a:t>
-            </a:r>
-          </a:p>
-        </p:txBody>
-      </p:sp>
-      <p:sp>
-        <p:nvSpPr>
           <p:cNvPr id="3" name="Content Placeholder 2">
             <a:extLst>
               <a:ext uri="{FF2B5EF4-FFF2-40B4-BE49-F238E27FC236}">
@@ -8765,7 +8809,43 @@
             </a:pPr>
             <a:r>
               <a:rPr b="1"/>
-              <a:t>What do we see in the results?</a:t>
+              <a:t>What is your level of familiarity with citing and referencing scientific papers?</a:t>
+            </a:r>
+          </a:p>
+          <a:p>
+            <a:pPr lvl="0" indent="-457200" marL="457200">
+              <a:buAutoNum type="alphaLcPeriod"/>
+            </a:pPr>
+            <a:r>
+              <a:rPr/>
+              <a:t>I have never heard of it before.</a:t>
+            </a:r>
+          </a:p>
+          <a:p>
+            <a:pPr lvl="0" indent="-457200" marL="457200">
+              <a:buAutoNum type="alphaLcPeriod"/>
+            </a:pPr>
+            <a:r>
+              <a:rPr/>
+              <a:t>I have heard of it but have never worked with it.</a:t>
+            </a:r>
+          </a:p>
+          <a:p>
+            <a:pPr lvl="0" indent="-457200" marL="457200">
+              <a:buAutoNum type="alphaLcPeriod"/>
+            </a:pPr>
+            <a:r>
+              <a:rPr/>
+              <a:t>I have basic understanding and experience with it.</a:t>
+            </a:r>
+          </a:p>
+          <a:p>
+            <a:pPr lvl="0" indent="-457200" marL="457200">
+              <a:buAutoNum type="alphaLcPeriod"/>
+            </a:pPr>
+            <a:r>
+              <a:rPr/>
+              <a:t>I am very familiar and have worked with it extensively.</a:t>
             </a:r>
           </a:p>
         </p:txBody>
@@ -8806,6 +8886,235 @@
       </p:sp>
     </p:spTree>
   </p:cSld>
+  <p:timing>
+    <p:tnLst>
+      <p:par>
+        <p:cTn id="1" dur="indefinite" restart="never" nodeType="tmRoot">
+          <p:childTnLst>
+            <p:seq concurrent="1" nextAc="seek">
+              <p:cTn id="2" dur="indefinite" nodeType="mainSeq">
+                <p:childTnLst>
+                  <p:par>
+                    <p:cTn id="3" fill="hold">
+                      <p:stCondLst>
+                        <p:cond delay="indefinite"/>
+                      </p:stCondLst>
+                      <p:childTnLst>
+                        <p:par>
+                          <p:cTn id="4" fill="hold">
+                            <p:stCondLst>
+                              <p:cond delay="0"/>
+                            </p:stCondLst>
+                            <p:childTnLst>
+                              <p:par>
+                                <p:cTn id="5" presetID="1" presetClass="entr" presetSubtype="0" fill="hold" grpId="0" nodeType="clickEffect">
+                                  <p:stCondLst>
+                                    <p:cond delay="0"/>
+                                  </p:stCondLst>
+                                  <p:childTnLst>
+                                    <p:set>
+                                      <p:cBhvr>
+                                        <p:cTn id="6" dur="1" fill="hold">
+                                          <p:stCondLst>
+                                            <p:cond delay="0"/>
+                                          </p:stCondLst>
+                                        </p:cTn>
+                                        <p:tgtEl>
+                                          <p:spTgt spid="3">
+                                            <p:txEl>
+                                              <p:pRg st="1" end="1"/>
+                                            </p:txEl>
+                                          </p:spTgt>
+                                        </p:tgtEl>
+                                        <p:attrNameLst>
+                                          <p:attrName>style.visibility</p:attrName>
+                                        </p:attrNameLst>
+                                      </p:cBhvr>
+                                      <p:to>
+                                        <p:strVal val="visible"/>
+                                      </p:to>
+                                    </p:set>
+                                  </p:childTnLst>
+                                </p:cTn>
+                              </p:par>
+                            </p:childTnLst>
+                          </p:cTn>
+                        </p:par>
+                      </p:childTnLst>
+                    </p:cTn>
+                  </p:par>
+                  <p:par>
+                    <p:cTn id="7" fill="hold">
+                      <p:stCondLst>
+                        <p:cond delay="indefinite"/>
+                      </p:stCondLst>
+                      <p:childTnLst>
+                        <p:par>
+                          <p:cTn id="8" fill="hold">
+                            <p:stCondLst>
+                              <p:cond delay="0"/>
+                            </p:stCondLst>
+                            <p:childTnLst>
+                              <p:par>
+                                <p:cTn id="9" presetID="1" presetClass="entr" presetSubtype="0" fill="hold" grpId="0" nodeType="clickEffect">
+                                  <p:stCondLst>
+                                    <p:cond delay="0"/>
+                                  </p:stCondLst>
+                                  <p:childTnLst>
+                                    <p:set>
+                                      <p:cBhvr>
+                                        <p:cTn id="10" dur="1" fill="hold">
+                                          <p:stCondLst>
+                                            <p:cond delay="0"/>
+                                          </p:stCondLst>
+                                        </p:cTn>
+                                        <p:tgtEl>
+                                          <p:spTgt spid="3">
+                                            <p:txEl>
+                                              <p:pRg st="2" end="2"/>
+                                            </p:txEl>
+                                          </p:spTgt>
+                                        </p:tgtEl>
+                                        <p:attrNameLst>
+                                          <p:attrName>style.visibility</p:attrName>
+                                        </p:attrNameLst>
+                                      </p:cBhvr>
+                                      <p:to>
+                                        <p:strVal val="visible"/>
+                                      </p:to>
+                                    </p:set>
+                                  </p:childTnLst>
+                                </p:cTn>
+                              </p:par>
+                            </p:childTnLst>
+                          </p:cTn>
+                        </p:par>
+                      </p:childTnLst>
+                    </p:cTn>
+                  </p:par>
+                  <p:par>
+                    <p:cTn id="11" fill="hold">
+                      <p:stCondLst>
+                        <p:cond delay="indefinite"/>
+                      </p:stCondLst>
+                      <p:childTnLst>
+                        <p:par>
+                          <p:cTn id="12" fill="hold">
+                            <p:stCondLst>
+                              <p:cond delay="0"/>
+                            </p:stCondLst>
+                            <p:childTnLst>
+                              <p:par>
+                                <p:cTn id="13" presetID="1" presetClass="entr" presetSubtype="0" fill="hold" grpId="0" nodeType="clickEffect">
+                                  <p:stCondLst>
+                                    <p:cond delay="0"/>
+                                  </p:stCondLst>
+                                  <p:childTnLst>
+                                    <p:set>
+                                      <p:cBhvr>
+                                        <p:cTn id="14" dur="1" fill="hold">
+                                          <p:stCondLst>
+                                            <p:cond delay="0"/>
+                                          </p:stCondLst>
+                                        </p:cTn>
+                                        <p:tgtEl>
+                                          <p:spTgt spid="3">
+                                            <p:txEl>
+                                              <p:pRg st="3" end="3"/>
+                                            </p:txEl>
+                                          </p:spTgt>
+                                        </p:tgtEl>
+                                        <p:attrNameLst>
+                                          <p:attrName>style.visibility</p:attrName>
+                                        </p:attrNameLst>
+                                      </p:cBhvr>
+                                      <p:to>
+                                        <p:strVal val="visible"/>
+                                      </p:to>
+                                    </p:set>
+                                  </p:childTnLst>
+                                </p:cTn>
+                              </p:par>
+                            </p:childTnLst>
+                          </p:cTn>
+                        </p:par>
+                      </p:childTnLst>
+                    </p:cTn>
+                  </p:par>
+                  <p:par>
+                    <p:cTn id="15" fill="hold">
+                      <p:stCondLst>
+                        <p:cond delay="indefinite"/>
+                      </p:stCondLst>
+                      <p:childTnLst>
+                        <p:par>
+                          <p:cTn id="16" fill="hold">
+                            <p:stCondLst>
+                              <p:cond delay="0"/>
+                            </p:stCondLst>
+                            <p:childTnLst>
+                              <p:par>
+                                <p:cTn id="17" presetID="1" presetClass="entr" presetSubtype="0" fill="hold" grpId="0" nodeType="clickEffect">
+                                  <p:stCondLst>
+                                    <p:cond delay="0"/>
+                                  </p:stCondLst>
+                                  <p:childTnLst>
+                                    <p:set>
+                                      <p:cBhvr>
+                                        <p:cTn id="18" dur="1" fill="hold">
+                                          <p:stCondLst>
+                                            <p:cond delay="0"/>
+                                          </p:stCondLst>
+                                        </p:cTn>
+                                        <p:tgtEl>
+                                          <p:spTgt spid="3">
+                                            <p:txEl>
+                                              <p:pRg st="4" end="4"/>
+                                            </p:txEl>
+                                          </p:spTgt>
+                                        </p:tgtEl>
+                                        <p:attrNameLst>
+                                          <p:attrName>style.visibility</p:attrName>
+                                        </p:attrNameLst>
+                                      </p:cBhvr>
+                                      <p:to>
+                                        <p:strVal val="visible"/>
+                                      </p:to>
+                                    </p:set>
+                                  </p:childTnLst>
+                                </p:cTn>
+                              </p:par>
+                            </p:childTnLst>
+                          </p:cTn>
+                        </p:par>
+                      </p:childTnLst>
+                    </p:cTn>
+                  </p:par>
+                </p:childTnLst>
+              </p:cTn>
+              <p:prevCondLst>
+                <p:cond evt="onPrev" delay="0">
+                  <p:tgtEl>
+                    <p:sldTgt/>
+                  </p:tgtEl>
+                </p:cond>
+              </p:prevCondLst>
+              <p:nextCondLst>
+                <p:cond evt="onNext" delay="0">
+                  <p:tgtEl>
+                    <p:sldTgt/>
+                  </p:tgtEl>
+                </p:cond>
+              </p:nextCondLst>
+            </p:seq>
+          </p:childTnLst>
+        </p:cTn>
+      </p:par>
+    </p:tnLst>
+    <p:bldLst>
+      <p:bldP spid="3" grpId="0" uiExpand="1" build="p"/>
+    </p:bldLst>
+  </p:timing>
 </p:sld>
 </file>
 
@@ -8828,6 +9137,424 @@
       </p:grpSpPr>
       <p:sp>
         <p:nvSpPr>
+          <p:cNvPr id="3" name="Content Placeholder 2">
+            <a:extLst>
+              <a:ext uri="{FF2B5EF4-FFF2-40B4-BE49-F238E27FC236}">
+                <a16:creationId xmlns:a16="http://schemas.microsoft.com/office/drawing/2014/main" id="{372FA590-20E9-0368-85B4-90C26598F852}"/>
+              </a:ext>
+            </a:extLst>
+          </p:cNvPr>
+          <p:cNvSpPr>
+            <a:spLocks noGrp="1"/>
+          </p:cNvSpPr>
+          <p:nvPr>
+            <p:ph idx="1"/>
+          </p:nvPr>
+        </p:nvSpPr>
+        <p:spPr/>
+        <p:txBody>
+          <a:bodyPr/>
+          <a:lstStyle/>
+          <a:p>
+            <a:pPr lvl="0" indent="0" marL="0">
+              <a:buNone/>
+            </a:pPr>
+            <a:r>
+              <a:rPr b="1"/>
+              <a:t>How confident do you feel with the Zotero workflow of collection, organisation, and citing?</a:t>
+            </a:r>
+            <a:r>
+              <a:rPr/>
+              <a:t> </a:t>
+            </a:r>
+            <a:r>
+              <a:rPr i="1"/>
+              <a:t>(1 = Not confident at all, 5 = Very confident)</a:t>
+            </a:r>
+          </a:p>
+          <a:p>
+            <a:pPr lvl="0" indent="-457200" marL="457200">
+              <a:buAutoNum type="alphaLcPeriod"/>
+            </a:pPr>
+            <a:r>
+              <a:rPr/>
+              <a:t>1</a:t>
+            </a:r>
+          </a:p>
+          <a:p>
+            <a:pPr lvl="0" indent="-457200" marL="457200">
+              <a:buAutoNum type="alphaLcPeriod"/>
+            </a:pPr>
+            <a:r>
+              <a:rPr/>
+              <a:t>2</a:t>
+            </a:r>
+          </a:p>
+          <a:p>
+            <a:pPr lvl="0" indent="-457200" marL="457200">
+              <a:buAutoNum type="alphaLcPeriod"/>
+            </a:pPr>
+            <a:r>
+              <a:rPr/>
+              <a:t>3</a:t>
+            </a:r>
+          </a:p>
+          <a:p>
+            <a:pPr lvl="0" indent="-457200" marL="457200">
+              <a:buAutoNum type="alphaLcPeriod"/>
+            </a:pPr>
+            <a:r>
+              <a:rPr/>
+              <a:t>4</a:t>
+            </a:r>
+          </a:p>
+          <a:p>
+            <a:pPr lvl="0" indent="-457200" marL="457200">
+              <a:buAutoNum type="alphaLcPeriod"/>
+            </a:pPr>
+            <a:r>
+              <a:rPr/>
+              <a:t>5</a:t>
+            </a:r>
+          </a:p>
+        </p:txBody>
+      </p:sp>
+      <p:sp>
+        <p:nvSpPr>
+          <p:cNvPr id="6" name="Slide Number Placeholder 5">
+            <a:extLst>
+              <a:ext uri="{FF2B5EF4-FFF2-40B4-BE49-F238E27FC236}">
+                <a16:creationId xmlns:a16="http://schemas.microsoft.com/office/drawing/2014/main" id="{5F33F24B-1A9E-2EAF-F2AB-89426454DEE9}"/>
+              </a:ext>
+            </a:extLst>
+          </p:cNvPr>
+          <p:cNvSpPr>
+            <a:spLocks noGrp="1"/>
+          </p:cNvSpPr>
+          <p:nvPr>
+            <p:ph idx="12" sz="quarter" type="sldNum"/>
+          </p:nvPr>
+        </p:nvSpPr>
+        <p:spPr>
+          <a:xfrm>
+            <a:off x="8610599" y="6356350"/>
+            <a:ext cx="3135001" cy="365125"/>
+          </a:xfrm>
+        </p:spPr>
+        <p:txBody>
+          <a:bodyPr/>
+          <a:lstStyle/>
+          <a:p>
+            <a:fld id="{7FEFBAB6-26D0-44D8-BD53-612461CE1ACC}" type="slidenum">
+              <a:rPr lang="de-DE" smtClean="0"/>
+              <a:t>‹#›</a:t>
+            </a:fld>
+            <a:endParaRPr lang="de-DE"/>
+          </a:p>
+        </p:txBody>
+      </p:sp>
+    </p:spTree>
+  </p:cSld>
+  <p:timing>
+    <p:tnLst>
+      <p:par>
+        <p:cTn id="1" dur="indefinite" restart="never" nodeType="tmRoot">
+          <p:childTnLst>
+            <p:seq concurrent="1" nextAc="seek">
+              <p:cTn id="2" dur="indefinite" nodeType="mainSeq">
+                <p:childTnLst>
+                  <p:par>
+                    <p:cTn id="3" fill="hold">
+                      <p:stCondLst>
+                        <p:cond delay="indefinite"/>
+                      </p:stCondLst>
+                      <p:childTnLst>
+                        <p:par>
+                          <p:cTn id="4" fill="hold">
+                            <p:stCondLst>
+                              <p:cond delay="0"/>
+                            </p:stCondLst>
+                            <p:childTnLst>
+                              <p:par>
+                                <p:cTn id="5" presetID="1" presetClass="entr" presetSubtype="0" fill="hold" grpId="0" nodeType="clickEffect">
+                                  <p:stCondLst>
+                                    <p:cond delay="0"/>
+                                  </p:stCondLst>
+                                  <p:childTnLst>
+                                    <p:set>
+                                      <p:cBhvr>
+                                        <p:cTn id="6" dur="1" fill="hold">
+                                          <p:stCondLst>
+                                            <p:cond delay="0"/>
+                                          </p:stCondLst>
+                                        </p:cTn>
+                                        <p:tgtEl>
+                                          <p:spTgt spid="3">
+                                            <p:txEl>
+                                              <p:pRg st="1" end="1"/>
+                                            </p:txEl>
+                                          </p:spTgt>
+                                        </p:tgtEl>
+                                        <p:attrNameLst>
+                                          <p:attrName>style.visibility</p:attrName>
+                                        </p:attrNameLst>
+                                      </p:cBhvr>
+                                      <p:to>
+                                        <p:strVal val="visible"/>
+                                      </p:to>
+                                    </p:set>
+                                  </p:childTnLst>
+                                </p:cTn>
+                              </p:par>
+                            </p:childTnLst>
+                          </p:cTn>
+                        </p:par>
+                      </p:childTnLst>
+                    </p:cTn>
+                  </p:par>
+                  <p:par>
+                    <p:cTn id="7" fill="hold">
+                      <p:stCondLst>
+                        <p:cond delay="indefinite"/>
+                      </p:stCondLst>
+                      <p:childTnLst>
+                        <p:par>
+                          <p:cTn id="8" fill="hold">
+                            <p:stCondLst>
+                              <p:cond delay="0"/>
+                            </p:stCondLst>
+                            <p:childTnLst>
+                              <p:par>
+                                <p:cTn id="9" presetID="1" presetClass="entr" presetSubtype="0" fill="hold" grpId="0" nodeType="clickEffect">
+                                  <p:stCondLst>
+                                    <p:cond delay="0"/>
+                                  </p:stCondLst>
+                                  <p:childTnLst>
+                                    <p:set>
+                                      <p:cBhvr>
+                                        <p:cTn id="10" dur="1" fill="hold">
+                                          <p:stCondLst>
+                                            <p:cond delay="0"/>
+                                          </p:stCondLst>
+                                        </p:cTn>
+                                        <p:tgtEl>
+                                          <p:spTgt spid="3">
+                                            <p:txEl>
+                                              <p:pRg st="2" end="2"/>
+                                            </p:txEl>
+                                          </p:spTgt>
+                                        </p:tgtEl>
+                                        <p:attrNameLst>
+                                          <p:attrName>style.visibility</p:attrName>
+                                        </p:attrNameLst>
+                                      </p:cBhvr>
+                                      <p:to>
+                                        <p:strVal val="visible"/>
+                                      </p:to>
+                                    </p:set>
+                                  </p:childTnLst>
+                                </p:cTn>
+                              </p:par>
+                            </p:childTnLst>
+                          </p:cTn>
+                        </p:par>
+                      </p:childTnLst>
+                    </p:cTn>
+                  </p:par>
+                  <p:par>
+                    <p:cTn id="11" fill="hold">
+                      <p:stCondLst>
+                        <p:cond delay="indefinite"/>
+                      </p:stCondLst>
+                      <p:childTnLst>
+                        <p:par>
+                          <p:cTn id="12" fill="hold">
+                            <p:stCondLst>
+                              <p:cond delay="0"/>
+                            </p:stCondLst>
+                            <p:childTnLst>
+                              <p:par>
+                                <p:cTn id="13" presetID="1" presetClass="entr" presetSubtype="0" fill="hold" grpId="0" nodeType="clickEffect">
+                                  <p:stCondLst>
+                                    <p:cond delay="0"/>
+                                  </p:stCondLst>
+                                  <p:childTnLst>
+                                    <p:set>
+                                      <p:cBhvr>
+                                        <p:cTn id="14" dur="1" fill="hold">
+                                          <p:stCondLst>
+                                            <p:cond delay="0"/>
+                                          </p:stCondLst>
+                                        </p:cTn>
+                                        <p:tgtEl>
+                                          <p:spTgt spid="3">
+                                            <p:txEl>
+                                              <p:pRg st="3" end="3"/>
+                                            </p:txEl>
+                                          </p:spTgt>
+                                        </p:tgtEl>
+                                        <p:attrNameLst>
+                                          <p:attrName>style.visibility</p:attrName>
+                                        </p:attrNameLst>
+                                      </p:cBhvr>
+                                      <p:to>
+                                        <p:strVal val="visible"/>
+                                      </p:to>
+                                    </p:set>
+                                  </p:childTnLst>
+                                </p:cTn>
+                              </p:par>
+                            </p:childTnLst>
+                          </p:cTn>
+                        </p:par>
+                      </p:childTnLst>
+                    </p:cTn>
+                  </p:par>
+                  <p:par>
+                    <p:cTn id="15" fill="hold">
+                      <p:stCondLst>
+                        <p:cond delay="indefinite"/>
+                      </p:stCondLst>
+                      <p:childTnLst>
+                        <p:par>
+                          <p:cTn id="16" fill="hold">
+                            <p:stCondLst>
+                              <p:cond delay="0"/>
+                            </p:stCondLst>
+                            <p:childTnLst>
+                              <p:par>
+                                <p:cTn id="17" presetID="1" presetClass="entr" presetSubtype="0" fill="hold" grpId="0" nodeType="clickEffect">
+                                  <p:stCondLst>
+                                    <p:cond delay="0"/>
+                                  </p:stCondLst>
+                                  <p:childTnLst>
+                                    <p:set>
+                                      <p:cBhvr>
+                                        <p:cTn id="18" dur="1" fill="hold">
+                                          <p:stCondLst>
+                                            <p:cond delay="0"/>
+                                          </p:stCondLst>
+                                        </p:cTn>
+                                        <p:tgtEl>
+                                          <p:spTgt spid="3">
+                                            <p:txEl>
+                                              <p:pRg st="4" end="4"/>
+                                            </p:txEl>
+                                          </p:spTgt>
+                                        </p:tgtEl>
+                                        <p:attrNameLst>
+                                          <p:attrName>style.visibility</p:attrName>
+                                        </p:attrNameLst>
+                                      </p:cBhvr>
+                                      <p:to>
+                                        <p:strVal val="visible"/>
+                                      </p:to>
+                                    </p:set>
+                                  </p:childTnLst>
+                                </p:cTn>
+                              </p:par>
+                            </p:childTnLst>
+                          </p:cTn>
+                        </p:par>
+                      </p:childTnLst>
+                    </p:cTn>
+                  </p:par>
+                  <p:par>
+                    <p:cTn id="19" fill="hold">
+                      <p:stCondLst>
+                        <p:cond delay="indefinite"/>
+                      </p:stCondLst>
+                      <p:childTnLst>
+                        <p:par>
+                          <p:cTn id="20" fill="hold">
+                            <p:stCondLst>
+                              <p:cond delay="0"/>
+                            </p:stCondLst>
+                            <p:childTnLst>
+                              <p:par>
+                                <p:cTn id="21" presetID="1" presetClass="entr" presetSubtype="0" fill="hold" grpId="0" nodeType="clickEffect">
+                                  <p:stCondLst>
+                                    <p:cond delay="0"/>
+                                  </p:stCondLst>
+                                  <p:childTnLst>
+                                    <p:set>
+                                      <p:cBhvr>
+                                        <p:cTn id="22" dur="1" fill="hold">
+                                          <p:stCondLst>
+                                            <p:cond delay="0"/>
+                                          </p:stCondLst>
+                                        </p:cTn>
+                                        <p:tgtEl>
+                                          <p:spTgt spid="3">
+                                            <p:txEl>
+                                              <p:pRg st="5" end="5"/>
+                                            </p:txEl>
+                                          </p:spTgt>
+                                        </p:tgtEl>
+                                        <p:attrNameLst>
+                                          <p:attrName>style.visibility</p:attrName>
+                                        </p:attrNameLst>
+                                      </p:cBhvr>
+                                      <p:to>
+                                        <p:strVal val="visible"/>
+                                      </p:to>
+                                    </p:set>
+                                  </p:childTnLst>
+                                </p:cTn>
+                              </p:par>
+                            </p:childTnLst>
+                          </p:cTn>
+                        </p:par>
+                      </p:childTnLst>
+                    </p:cTn>
+                  </p:par>
+                </p:childTnLst>
+              </p:cTn>
+              <p:prevCondLst>
+                <p:cond evt="onPrev" delay="0">
+                  <p:tgtEl>
+                    <p:sldTgt/>
+                  </p:tgtEl>
+                </p:cond>
+              </p:prevCondLst>
+              <p:nextCondLst>
+                <p:cond evt="onNext" delay="0">
+                  <p:tgtEl>
+                    <p:sldTgt/>
+                  </p:tgtEl>
+                </p:cond>
+              </p:nextCondLst>
+            </p:seq>
+          </p:childTnLst>
+        </p:cTn>
+      </p:par>
+    </p:tnLst>
+    <p:bldLst>
+      <p:bldP spid="3" grpId="0" uiExpand="1" build="p"/>
+    </p:bldLst>
+  </p:timing>
+</p:sld>
+</file>
+
+<file path=ppt/slides/slide15.xml><?xml version="1.0" encoding="utf-8"?>
+<p:sld xmlns:a="http://schemas.openxmlformats.org/drawingml/2006/main" xmlns:r="http://schemas.openxmlformats.org/officeDocument/2006/relationships" xmlns:p="http://schemas.openxmlformats.org/presentationml/2006/main">
+  <p:cSld>
+    <p:spTree>
+      <p:nvGrpSpPr>
+        <p:cNvPr id="1" name=""/>
+        <p:cNvGrpSpPr/>
+        <p:nvPr/>
+      </p:nvGrpSpPr>
+      <p:grpSpPr>
+        <a:xfrm>
+          <a:off x="0" y="0"/>
+          <a:ext cx="0" cy="0"/>
+          <a:chOff x="0" y="0"/>
+          <a:chExt cx="0" cy="0"/>
+        </a:xfrm>
+      </p:grpSpPr>
+      <p:sp>
+        <p:nvSpPr>
           <p:cNvPr id="2" name="Title 1">
             <a:extLst>
               <a:ext uri="{FF2B5EF4-FFF2-40B4-BE49-F238E27FC236}">
@@ -8857,7 +9584,7 @@
             </a:pPr>
             <a:r>
               <a:rPr/>
-              <a:t>Where are we at?</a:t>
+              <a:t>Discussion of survey results</a:t>
             </a:r>
           </a:p>
         </p:txBody>
@@ -8888,73 +9615,7 @@
             </a:pPr>
             <a:r>
               <a:rPr b="1"/>
-              <a:t>Previously</a:t>
-            </a:r>
-            <a:r>
-              <a:rPr/>
-              <a:t>:</a:t>
-            </a:r>
-          </a:p>
-          <a:p>
-            <a:pPr lvl="0"/>
-            <a:r>
-              <a:rPr/>
-              <a:t>Familiarization with R basics</a:t>
-            </a:r>
-          </a:p>
-          <a:p>
-            <a:pPr lvl="0"/>
-            <a:r>
-              <a:rPr/>
-              <a:t>Advanced R skills</a:t>
-            </a:r>
-          </a:p>
-          <a:p>
-            <a:pPr lvl="0"/>
-            <a:r>
-              <a:rPr/>
-              <a:t>Version control with Git</a:t>
-            </a:r>
-          </a:p>
-          <a:p>
-            <a:pPr lvl="0"/>
-            <a:r>
-              <a:rPr/>
-              <a:t>Collaborative working with GitHub</a:t>
-            </a:r>
-          </a:p>
-          <a:p>
-            <a:pPr lvl="0"/>
-            <a:r>
-              <a:rPr/>
-              <a:t>Introduction to Quarto</a:t>
-            </a:r>
-          </a:p>
-          <a:p>
-            <a:pPr lvl="0" indent="0" marL="0">
-              <a:buNone/>
-            </a:pPr>
-            <a:r>
-              <a:rPr b="1"/>
-              <a:t>Up next</a:t>
-            </a:r>
-            <a:r>
-              <a:rPr/>
-              <a:t>:</a:t>
-            </a:r>
-          </a:p>
-          <a:p>
-            <a:pPr lvl="0"/>
-            <a:r>
-              <a:rPr/>
-              <a:t>Citations and references: What are they and when/how to use them</a:t>
-            </a:r>
-          </a:p>
-          <a:p>
-            <a:pPr lvl="0"/>
-            <a:r>
-              <a:rPr/>
-              <a:t>Citation management tool: Using Zotero in our workflow</a:t>
+              <a:t>What do we see in the results?</a:t>
             </a:r>
           </a:p>
         </p:txBody>
@@ -8998,7 +9659,572 @@
 </p:sld>
 </file>
 
-<file path=ppt/slides/slide15.xml><?xml version="1.0" encoding="utf-8"?>
+<file path=ppt/slides/slide16.xml><?xml version="1.0" encoding="utf-8"?>
+<p:sld xmlns:a="http://schemas.openxmlformats.org/drawingml/2006/main" xmlns:r="http://schemas.openxmlformats.org/officeDocument/2006/relationships" xmlns:p="http://schemas.openxmlformats.org/presentationml/2006/main">
+  <p:cSld>
+    <p:spTree>
+      <p:nvGrpSpPr>
+        <p:cNvPr id="1" name=""/>
+        <p:cNvGrpSpPr/>
+        <p:nvPr/>
+      </p:nvGrpSpPr>
+      <p:grpSpPr>
+        <a:xfrm>
+          <a:off x="0" y="0"/>
+          <a:ext cx="0" cy="0"/>
+          <a:chOff x="0" y="0"/>
+          <a:chExt cx="0" cy="0"/>
+        </a:xfrm>
+      </p:grpSpPr>
+      <p:sp>
+        <p:nvSpPr>
+          <p:cNvPr id="2" name="Title 1">
+            <a:extLst>
+              <a:ext uri="{FF2B5EF4-FFF2-40B4-BE49-F238E27FC236}">
+                <a16:creationId xmlns:a16="http://schemas.microsoft.com/office/drawing/2014/main" id="{6BF04AE0-F94F-A586-34B8-68D9CAB6C6D1}"/>
+              </a:ext>
+            </a:extLst>
+          </p:cNvPr>
+          <p:cNvSpPr>
+            <a:spLocks noGrp="1"/>
+          </p:cNvSpPr>
+          <p:nvPr>
+            <p:ph type="title"/>
+          </p:nvPr>
+        </p:nvSpPr>
+        <p:spPr>
+          <a:xfrm>
+            <a:off x="2295524" y="432532"/>
+            <a:ext cx="9450077" cy="825501"/>
+          </a:xfrm>
+        </p:spPr>
+        <p:txBody>
+          <a:bodyPr/>
+          <a:lstStyle/>
+          <a:p>
+            <a:pPr lvl="0" indent="0" marL="0">
+              <a:buNone/>
+            </a:pPr>
+            <a:r>
+              <a:rPr/>
+              <a:t>Where are we at?</a:t>
+            </a:r>
+          </a:p>
+        </p:txBody>
+      </p:sp>
+      <p:sp>
+        <p:nvSpPr>
+          <p:cNvPr id="3" name="Content Placeholder 2">
+            <a:extLst>
+              <a:ext uri="{FF2B5EF4-FFF2-40B4-BE49-F238E27FC236}">
+                <a16:creationId xmlns:a16="http://schemas.microsoft.com/office/drawing/2014/main" id="{372FA590-20E9-0368-85B4-90C26598F852}"/>
+              </a:ext>
+            </a:extLst>
+          </p:cNvPr>
+          <p:cNvSpPr>
+            <a:spLocks noGrp="1"/>
+          </p:cNvSpPr>
+          <p:nvPr>
+            <p:ph idx="1"/>
+          </p:nvPr>
+        </p:nvSpPr>
+        <p:spPr/>
+        <p:txBody>
+          <a:bodyPr/>
+          <a:lstStyle/>
+          <a:p>
+            <a:pPr lvl="0" indent="0" marL="0">
+              <a:buNone/>
+            </a:pPr>
+            <a:r>
+              <a:rPr b="1"/>
+              <a:t>Previously</a:t>
+            </a:r>
+            <a:r>
+              <a:rPr/>
+              <a:t>:</a:t>
+            </a:r>
+          </a:p>
+          <a:p>
+            <a:pPr lvl="0"/>
+            <a:r>
+              <a:rPr/>
+              <a:t>Familiarization with R basics</a:t>
+            </a:r>
+          </a:p>
+          <a:p>
+            <a:pPr lvl="0"/>
+            <a:r>
+              <a:rPr/>
+              <a:t>Advanced R skills</a:t>
+            </a:r>
+          </a:p>
+          <a:p>
+            <a:pPr lvl="0"/>
+            <a:r>
+              <a:rPr/>
+              <a:t>Version control with Git</a:t>
+            </a:r>
+          </a:p>
+          <a:p>
+            <a:pPr lvl="0"/>
+            <a:r>
+              <a:rPr/>
+              <a:t>Collaborative working with GitHub</a:t>
+            </a:r>
+          </a:p>
+          <a:p>
+            <a:pPr lvl="0"/>
+            <a:r>
+              <a:rPr/>
+              <a:t>Introduction to Quarto</a:t>
+            </a:r>
+          </a:p>
+          <a:p>
+            <a:pPr lvl="0" indent="0" marL="0">
+              <a:buNone/>
+            </a:pPr>
+            <a:r>
+              <a:rPr b="1"/>
+              <a:t>Up next</a:t>
+            </a:r>
+            <a:r>
+              <a:rPr/>
+              <a:t>:</a:t>
+            </a:r>
+          </a:p>
+          <a:p>
+            <a:pPr lvl="0"/>
+            <a:r>
+              <a:rPr/>
+              <a:t>Citations and references: What are they and when/how to use them</a:t>
+            </a:r>
+          </a:p>
+          <a:p>
+            <a:pPr lvl="0"/>
+            <a:r>
+              <a:rPr/>
+              <a:t>Citation management tool: Using Zotero in our workflow</a:t>
+            </a:r>
+          </a:p>
+        </p:txBody>
+      </p:sp>
+      <p:sp>
+        <p:nvSpPr>
+          <p:cNvPr id="6" name="Slide Number Placeholder 5">
+            <a:extLst>
+              <a:ext uri="{FF2B5EF4-FFF2-40B4-BE49-F238E27FC236}">
+                <a16:creationId xmlns:a16="http://schemas.microsoft.com/office/drawing/2014/main" id="{5F33F24B-1A9E-2EAF-F2AB-89426454DEE9}"/>
+              </a:ext>
+            </a:extLst>
+          </p:cNvPr>
+          <p:cNvSpPr>
+            <a:spLocks noGrp="1"/>
+          </p:cNvSpPr>
+          <p:nvPr>
+            <p:ph idx="12" sz="quarter" type="sldNum"/>
+          </p:nvPr>
+        </p:nvSpPr>
+        <p:spPr>
+          <a:xfrm>
+            <a:off x="8610599" y="6356350"/>
+            <a:ext cx="3135001" cy="365125"/>
+          </a:xfrm>
+        </p:spPr>
+        <p:txBody>
+          <a:bodyPr/>
+          <a:lstStyle/>
+          <a:p>
+            <a:fld id="{7FEFBAB6-26D0-44D8-BD53-612461CE1ACC}" type="slidenum">
+              <a:rPr lang="de-DE" smtClean="0"/>
+              <a:t>‹#›</a:t>
+            </a:fld>
+            <a:endParaRPr lang="de-DE"/>
+          </a:p>
+        </p:txBody>
+      </p:sp>
+    </p:spTree>
+  </p:cSld>
+  <p:timing>
+    <p:tnLst>
+      <p:par>
+        <p:cTn id="1" dur="indefinite" restart="never" nodeType="tmRoot">
+          <p:childTnLst>
+            <p:seq concurrent="1" nextAc="seek">
+              <p:cTn id="2" dur="indefinite" nodeType="mainSeq">
+                <p:childTnLst>
+                  <p:par>
+                    <p:cTn id="3" fill="hold">
+                      <p:stCondLst>
+                        <p:cond delay="indefinite"/>
+                      </p:stCondLst>
+                      <p:childTnLst>
+                        <p:par>
+                          <p:cTn id="4" fill="hold">
+                            <p:stCondLst>
+                              <p:cond delay="0"/>
+                            </p:stCondLst>
+                            <p:childTnLst>
+                              <p:par>
+                                <p:cTn id="5" presetID="1" presetClass="entr" presetSubtype="0" fill="hold" grpId="0" nodeType="clickEffect">
+                                  <p:stCondLst>
+                                    <p:cond delay="0"/>
+                                  </p:stCondLst>
+                                  <p:childTnLst>
+                                    <p:set>
+                                      <p:cBhvr>
+                                        <p:cTn id="6" dur="1" fill="hold">
+                                          <p:stCondLst>
+                                            <p:cond delay="0"/>
+                                          </p:stCondLst>
+                                        </p:cTn>
+                                        <p:tgtEl>
+                                          <p:spTgt spid="3">
+                                            <p:txEl>
+                                              <p:pRg st="1" end="1"/>
+                                            </p:txEl>
+                                          </p:spTgt>
+                                        </p:tgtEl>
+                                        <p:attrNameLst>
+                                          <p:attrName>style.visibility</p:attrName>
+                                        </p:attrNameLst>
+                                      </p:cBhvr>
+                                      <p:to>
+                                        <p:strVal val="visible"/>
+                                      </p:to>
+                                    </p:set>
+                                  </p:childTnLst>
+                                </p:cTn>
+                              </p:par>
+                            </p:childTnLst>
+                          </p:cTn>
+                        </p:par>
+                      </p:childTnLst>
+                    </p:cTn>
+                  </p:par>
+                  <p:par>
+                    <p:cTn id="7" fill="hold">
+                      <p:stCondLst>
+                        <p:cond delay="indefinite"/>
+                      </p:stCondLst>
+                      <p:childTnLst>
+                        <p:par>
+                          <p:cTn id="8" fill="hold">
+                            <p:stCondLst>
+                              <p:cond delay="0"/>
+                            </p:stCondLst>
+                            <p:childTnLst>
+                              <p:par>
+                                <p:cTn id="9" presetID="1" presetClass="entr" presetSubtype="0" fill="hold" grpId="0" nodeType="clickEffect">
+                                  <p:stCondLst>
+                                    <p:cond delay="0"/>
+                                  </p:stCondLst>
+                                  <p:childTnLst>
+                                    <p:set>
+                                      <p:cBhvr>
+                                        <p:cTn id="10" dur="1" fill="hold">
+                                          <p:stCondLst>
+                                            <p:cond delay="0"/>
+                                          </p:stCondLst>
+                                        </p:cTn>
+                                        <p:tgtEl>
+                                          <p:spTgt spid="3">
+                                            <p:txEl>
+                                              <p:pRg st="2" end="2"/>
+                                            </p:txEl>
+                                          </p:spTgt>
+                                        </p:tgtEl>
+                                        <p:attrNameLst>
+                                          <p:attrName>style.visibility</p:attrName>
+                                        </p:attrNameLst>
+                                      </p:cBhvr>
+                                      <p:to>
+                                        <p:strVal val="visible"/>
+                                      </p:to>
+                                    </p:set>
+                                  </p:childTnLst>
+                                </p:cTn>
+                              </p:par>
+                            </p:childTnLst>
+                          </p:cTn>
+                        </p:par>
+                      </p:childTnLst>
+                    </p:cTn>
+                  </p:par>
+                  <p:par>
+                    <p:cTn id="11" fill="hold">
+                      <p:stCondLst>
+                        <p:cond delay="indefinite"/>
+                      </p:stCondLst>
+                      <p:childTnLst>
+                        <p:par>
+                          <p:cTn id="12" fill="hold">
+                            <p:stCondLst>
+                              <p:cond delay="0"/>
+                            </p:stCondLst>
+                            <p:childTnLst>
+                              <p:par>
+                                <p:cTn id="13" presetID="1" presetClass="entr" presetSubtype="0" fill="hold" grpId="0" nodeType="clickEffect">
+                                  <p:stCondLst>
+                                    <p:cond delay="0"/>
+                                  </p:stCondLst>
+                                  <p:childTnLst>
+                                    <p:set>
+                                      <p:cBhvr>
+                                        <p:cTn id="14" dur="1" fill="hold">
+                                          <p:stCondLst>
+                                            <p:cond delay="0"/>
+                                          </p:stCondLst>
+                                        </p:cTn>
+                                        <p:tgtEl>
+                                          <p:spTgt spid="3">
+                                            <p:txEl>
+                                              <p:pRg st="3" end="3"/>
+                                            </p:txEl>
+                                          </p:spTgt>
+                                        </p:tgtEl>
+                                        <p:attrNameLst>
+                                          <p:attrName>style.visibility</p:attrName>
+                                        </p:attrNameLst>
+                                      </p:cBhvr>
+                                      <p:to>
+                                        <p:strVal val="visible"/>
+                                      </p:to>
+                                    </p:set>
+                                  </p:childTnLst>
+                                </p:cTn>
+                              </p:par>
+                            </p:childTnLst>
+                          </p:cTn>
+                        </p:par>
+                      </p:childTnLst>
+                    </p:cTn>
+                  </p:par>
+                  <p:par>
+                    <p:cTn id="15" fill="hold">
+                      <p:stCondLst>
+                        <p:cond delay="indefinite"/>
+                      </p:stCondLst>
+                      <p:childTnLst>
+                        <p:par>
+                          <p:cTn id="16" fill="hold">
+                            <p:stCondLst>
+                              <p:cond delay="0"/>
+                            </p:stCondLst>
+                            <p:childTnLst>
+                              <p:par>
+                                <p:cTn id="17" presetID="1" presetClass="entr" presetSubtype="0" fill="hold" grpId="0" nodeType="clickEffect">
+                                  <p:stCondLst>
+                                    <p:cond delay="0"/>
+                                  </p:stCondLst>
+                                  <p:childTnLst>
+                                    <p:set>
+                                      <p:cBhvr>
+                                        <p:cTn id="18" dur="1" fill="hold">
+                                          <p:stCondLst>
+                                            <p:cond delay="0"/>
+                                          </p:stCondLst>
+                                        </p:cTn>
+                                        <p:tgtEl>
+                                          <p:spTgt spid="3">
+                                            <p:txEl>
+                                              <p:pRg st="4" end="4"/>
+                                            </p:txEl>
+                                          </p:spTgt>
+                                        </p:tgtEl>
+                                        <p:attrNameLst>
+                                          <p:attrName>style.visibility</p:attrName>
+                                        </p:attrNameLst>
+                                      </p:cBhvr>
+                                      <p:to>
+                                        <p:strVal val="visible"/>
+                                      </p:to>
+                                    </p:set>
+                                  </p:childTnLst>
+                                </p:cTn>
+                              </p:par>
+                            </p:childTnLst>
+                          </p:cTn>
+                        </p:par>
+                      </p:childTnLst>
+                    </p:cTn>
+                  </p:par>
+                  <p:par>
+                    <p:cTn id="19" fill="hold">
+                      <p:stCondLst>
+                        <p:cond delay="indefinite"/>
+                      </p:stCondLst>
+                      <p:childTnLst>
+                        <p:par>
+                          <p:cTn id="20" fill="hold">
+                            <p:stCondLst>
+                              <p:cond delay="0"/>
+                            </p:stCondLst>
+                            <p:childTnLst>
+                              <p:par>
+                                <p:cTn id="21" presetID="1" presetClass="entr" presetSubtype="0" fill="hold" grpId="0" nodeType="clickEffect">
+                                  <p:stCondLst>
+                                    <p:cond delay="0"/>
+                                  </p:stCondLst>
+                                  <p:childTnLst>
+                                    <p:set>
+                                      <p:cBhvr>
+                                        <p:cTn id="22" dur="1" fill="hold">
+                                          <p:stCondLst>
+                                            <p:cond delay="0"/>
+                                          </p:stCondLst>
+                                        </p:cTn>
+                                        <p:tgtEl>
+                                          <p:spTgt spid="3">
+                                            <p:txEl>
+                                              <p:pRg st="5" end="5"/>
+                                            </p:txEl>
+                                          </p:spTgt>
+                                        </p:tgtEl>
+                                        <p:attrNameLst>
+                                          <p:attrName>style.visibility</p:attrName>
+                                        </p:attrNameLst>
+                                      </p:cBhvr>
+                                      <p:to>
+                                        <p:strVal val="visible"/>
+                                      </p:to>
+                                    </p:set>
+                                  </p:childTnLst>
+                                </p:cTn>
+                              </p:par>
+                            </p:childTnLst>
+                          </p:cTn>
+                        </p:par>
+                      </p:childTnLst>
+                    </p:cTn>
+                  </p:par>
+                  <p:par>
+                    <p:cTn id="23" fill="hold">
+                      <p:stCondLst>
+                        <p:cond delay="indefinite"/>
+                      </p:stCondLst>
+                      <p:childTnLst>
+                        <p:par>
+                          <p:cTn id="24" fill="hold">
+                            <p:stCondLst>
+                              <p:cond delay="0"/>
+                            </p:stCondLst>
+                            <p:childTnLst>
+                              <p:par>
+                                <p:cTn id="25" presetID="1" presetClass="entr" presetSubtype="0" fill="hold" grpId="0" nodeType="clickEffect">
+                                  <p:stCondLst>
+                                    <p:cond delay="0"/>
+                                  </p:stCondLst>
+                                  <p:childTnLst>
+                                    <p:set>
+                                      <p:cBhvr>
+                                        <p:cTn id="26" dur="1" fill="hold">
+                                          <p:stCondLst>
+                                            <p:cond delay="0"/>
+                                          </p:stCondLst>
+                                        </p:cTn>
+                                        <p:tgtEl>
+                                          <p:spTgt spid="3">
+                                            <p:txEl>
+                                              <p:pRg st="7" end="7"/>
+                                            </p:txEl>
+                                          </p:spTgt>
+                                        </p:tgtEl>
+                                        <p:attrNameLst>
+                                          <p:attrName>style.visibility</p:attrName>
+                                        </p:attrNameLst>
+                                      </p:cBhvr>
+                                      <p:to>
+                                        <p:strVal val="visible"/>
+                                      </p:to>
+                                    </p:set>
+                                  </p:childTnLst>
+                                </p:cTn>
+                              </p:par>
+                            </p:childTnLst>
+                          </p:cTn>
+                        </p:par>
+                      </p:childTnLst>
+                    </p:cTn>
+                  </p:par>
+                  <p:par>
+                    <p:cTn id="27" fill="hold">
+                      <p:stCondLst>
+                        <p:cond delay="indefinite"/>
+                      </p:stCondLst>
+                      <p:childTnLst>
+                        <p:par>
+                          <p:cTn id="28" fill="hold">
+                            <p:stCondLst>
+                              <p:cond delay="0"/>
+                            </p:stCondLst>
+                            <p:childTnLst>
+                              <p:par>
+                                <p:cTn id="29" presetID="1" presetClass="entr" presetSubtype="0" fill="hold" grpId="0" nodeType="clickEffect">
+                                  <p:stCondLst>
+                                    <p:cond delay="0"/>
+                                  </p:stCondLst>
+                                  <p:childTnLst>
+                                    <p:set>
+                                      <p:cBhvr>
+                                        <p:cTn id="30" dur="1" fill="hold">
+                                          <p:stCondLst>
+                                            <p:cond delay="0"/>
+                                          </p:stCondLst>
+                                        </p:cTn>
+                                        <p:tgtEl>
+                                          <p:spTgt spid="3">
+                                            <p:txEl>
+                                              <p:pRg st="8" end="8"/>
+                                            </p:txEl>
+                                          </p:spTgt>
+                                        </p:tgtEl>
+                                        <p:attrNameLst>
+                                          <p:attrName>style.visibility</p:attrName>
+                                        </p:attrNameLst>
+                                      </p:cBhvr>
+                                      <p:to>
+                                        <p:strVal val="visible"/>
+                                      </p:to>
+                                    </p:set>
+                                  </p:childTnLst>
+                                </p:cTn>
+                              </p:par>
+                            </p:childTnLst>
+                          </p:cTn>
+                        </p:par>
+                      </p:childTnLst>
+                    </p:cTn>
+                  </p:par>
+                </p:childTnLst>
+              </p:cTn>
+              <p:prevCondLst>
+                <p:cond evt="onPrev" delay="0">
+                  <p:tgtEl>
+                    <p:sldTgt/>
+                  </p:tgtEl>
+                </p:cond>
+              </p:prevCondLst>
+              <p:nextCondLst>
+                <p:cond evt="onNext" delay="0">
+                  <p:tgtEl>
+                    <p:sldTgt/>
+                  </p:tgtEl>
+                </p:cond>
+              </p:nextCondLst>
+            </p:seq>
+          </p:childTnLst>
+        </p:cTn>
+      </p:par>
+    </p:tnLst>
+    <p:bldLst>
+      <p:bldP spid="3" grpId="0" uiExpand="1" build="p"/>
+    </p:bldLst>
+  </p:timing>
+</p:sld>
+</file>
+
+<file path=ppt/slides/slide17.xml><?xml version="1.0" encoding="utf-8"?>
 <p:sld xmlns:a="http://schemas.openxmlformats.org/drawingml/2006/main" xmlns:r="http://schemas.openxmlformats.org/officeDocument/2006/relationships" xmlns:p="http://schemas.openxmlformats.org/presentationml/2006/main">
   <p:cSld>
     <p:spTree>
@@ -9445,7 +10671,7 @@
 </p:sld>
 </file>
 
-<file path=ppt/slides/slide16.xml><?xml version="1.0" encoding="utf-8"?>
+<file path=ppt/slides/slide18.xml><?xml version="1.0" encoding="utf-8"?>
 <p:sld xmlns:a="http://schemas.openxmlformats.org/drawingml/2006/main" xmlns:r="http://schemas.openxmlformats.org/officeDocument/2006/relationships" xmlns:p="http://schemas.openxmlformats.org/presentationml/2006/main">
   <p:cSld>
     <p:spTree>
@@ -9690,7 +10916,7 @@
 </p:sld>
 </file>
 
-<file path=ppt/slides/slide17.xml><?xml version="1.0" encoding="utf-8"?>
+<file path=ppt/slides/slide19.xml><?xml version="1.0" encoding="utf-8"?>
 <p:sld xmlns:a="http://schemas.openxmlformats.org/drawingml/2006/main" xmlns:r="http://schemas.openxmlformats.org/officeDocument/2006/relationships" xmlns:p="http://schemas.openxmlformats.org/presentationml/2006/main">
   <p:cSld>
     <p:spTree>
@@ -9850,10 +11076,239 @@
       </p:sp>
     </p:spTree>
   </p:cSld>
+  <p:timing>
+    <p:tnLst>
+      <p:par>
+        <p:cTn id="1" dur="indefinite" restart="never" nodeType="tmRoot">
+          <p:childTnLst>
+            <p:seq concurrent="1" nextAc="seek">
+              <p:cTn id="2" dur="indefinite" nodeType="mainSeq">
+                <p:childTnLst>
+                  <p:par>
+                    <p:cTn id="3" fill="hold">
+                      <p:stCondLst>
+                        <p:cond delay="indefinite"/>
+                      </p:stCondLst>
+                      <p:childTnLst>
+                        <p:par>
+                          <p:cTn id="4" fill="hold">
+                            <p:stCondLst>
+                              <p:cond delay="0"/>
+                            </p:stCondLst>
+                            <p:childTnLst>
+                              <p:par>
+                                <p:cTn id="5" presetID="1" presetClass="entr" presetSubtype="0" fill="hold" grpId="0" nodeType="clickEffect">
+                                  <p:stCondLst>
+                                    <p:cond delay="0"/>
+                                  </p:stCondLst>
+                                  <p:childTnLst>
+                                    <p:set>
+                                      <p:cBhvr>
+                                        <p:cTn id="6" dur="1" fill="hold">
+                                          <p:stCondLst>
+                                            <p:cond delay="0"/>
+                                          </p:stCondLst>
+                                        </p:cTn>
+                                        <p:tgtEl>
+                                          <p:spTgt spid="4">
+                                            <p:txEl>
+                                              <p:pRg st="0" end="0"/>
+                                            </p:txEl>
+                                          </p:spTgt>
+                                        </p:tgtEl>
+                                        <p:attrNameLst>
+                                          <p:attrName>style.visibility</p:attrName>
+                                        </p:attrNameLst>
+                                      </p:cBhvr>
+                                      <p:to>
+                                        <p:strVal val="visible"/>
+                                      </p:to>
+                                    </p:set>
+                                  </p:childTnLst>
+                                </p:cTn>
+                              </p:par>
+                            </p:childTnLst>
+                          </p:cTn>
+                        </p:par>
+                      </p:childTnLst>
+                    </p:cTn>
+                  </p:par>
+                </p:childTnLst>
+              </p:cTn>
+              <p:prevCondLst>
+                <p:cond evt="onPrev" delay="0">
+                  <p:tgtEl>
+                    <p:sldTgt/>
+                  </p:tgtEl>
+                </p:cond>
+              </p:prevCondLst>
+              <p:nextCondLst>
+                <p:cond evt="onNext" delay="0">
+                  <p:tgtEl>
+                    <p:sldTgt/>
+                  </p:tgtEl>
+                </p:cond>
+              </p:nextCondLst>
+            </p:seq>
+          </p:childTnLst>
+        </p:cTn>
+      </p:par>
+    </p:tnLst>
+    <p:bldLst>
+      <p:bldP spid="4" grpId="0" uiExpand="1" build="p"/>
+    </p:bldLst>
+  </p:timing>
 </p:sld>
 </file>
 
-<file path=ppt/slides/slide18.xml><?xml version="1.0" encoding="utf-8"?>
+<file path=ppt/slides/slide2.xml><?xml version="1.0" encoding="utf-8"?>
+<p:sld xmlns:a="http://schemas.openxmlformats.org/drawingml/2006/main" xmlns:r="http://schemas.openxmlformats.org/officeDocument/2006/relationships" xmlns:p="http://schemas.openxmlformats.org/presentationml/2006/main">
+  <p:cSld>
+    <p:spTree>
+      <p:nvGrpSpPr>
+        <p:cNvPr id="1" name=""/>
+        <p:cNvGrpSpPr/>
+        <p:nvPr/>
+      </p:nvGrpSpPr>
+      <p:grpSpPr>
+        <a:xfrm>
+          <a:off x="0" y="0"/>
+          <a:ext cx="0" cy="0"/>
+          <a:chOff x="0" y="0"/>
+          <a:chExt cx="0" cy="0"/>
+        </a:xfrm>
+      </p:grpSpPr>
+      <p:sp>
+        <p:nvSpPr>
+          <p:cNvPr id="2" name="Title 1">
+            <a:extLst>
+              <a:ext uri="{FF2B5EF4-FFF2-40B4-BE49-F238E27FC236}">
+                <a16:creationId xmlns:a16="http://schemas.microsoft.com/office/drawing/2014/main" id="{6BF04AE0-F94F-A586-34B8-68D9CAB6C6D1}"/>
+              </a:ext>
+            </a:extLst>
+          </p:cNvPr>
+          <p:cNvSpPr>
+            <a:spLocks noGrp="1"/>
+          </p:cNvSpPr>
+          <p:nvPr>
+            <p:ph type="title"/>
+          </p:nvPr>
+        </p:nvSpPr>
+        <p:spPr>
+          <a:xfrm>
+            <a:off x="2295524" y="432532"/>
+            <a:ext cx="9450077" cy="825501"/>
+          </a:xfrm>
+        </p:spPr>
+        <p:txBody>
+          <a:bodyPr/>
+          <a:lstStyle/>
+          <a:p>
+            <a:pPr lvl="0" indent="0" marL="0">
+              <a:buNone/>
+            </a:pPr>
+            <a:r>
+              <a:rPr/>
+              <a:t>Testing Slide</a:t>
+            </a:r>
+          </a:p>
+        </p:txBody>
+      </p:sp>
+      <p:sp>
+        <p:nvSpPr>
+          <p:cNvPr id="3" name="Content Placeholder 2">
+            <a:extLst>
+              <a:ext uri="{FF2B5EF4-FFF2-40B4-BE49-F238E27FC236}">
+                <a16:creationId xmlns:a16="http://schemas.microsoft.com/office/drawing/2014/main" id="{372FA590-20E9-0368-85B4-90C26598F852}"/>
+              </a:ext>
+            </a:extLst>
+          </p:cNvPr>
+          <p:cNvSpPr>
+            <a:spLocks noGrp="1"/>
+          </p:cNvSpPr>
+          <p:nvPr>
+            <p:ph idx="1"/>
+          </p:nvPr>
+        </p:nvSpPr>
+        <p:spPr/>
+        <p:txBody>
+          <a:bodyPr/>
+          <a:lstStyle/>
+          <a:p>
+            <a:pPr lvl="0" indent="0" marL="1270000">
+              <a:buNone/>
+            </a:pPr>
+            <a:r>
+              <a:rPr sz="2000" b="1"/>
+              <a:t>Tip</a:t>
+            </a:r>
+          </a:p>
+          <a:p>
+            <a:pPr lvl="0" indent="0" marL="1270000">
+              <a:buNone/>
+            </a:pPr>
+            <a:r>
+              <a:rPr sz="2000"/>
+              <a:t>This is a callout box test</a:t>
+            </a:r>
+          </a:p>
+          <a:p>
+            <a:pPr lvl="0" indent="0" marL="0">
+              <a:buNone/>
+            </a:pPr>
+            <a:r>
+              <a:rPr/>
+              <a:t>Test citation </a:t>
+            </a:r>
+            <a:r>
+              <a:rPr>
+                <a:hlinkClick r:id="rId2" action="ppaction://hlinksldjump"/>
+              </a:rPr>
+              <a:t>Jackson (1990)</a:t>
+            </a:r>
+          </a:p>
+        </p:txBody>
+      </p:sp>
+      <p:sp>
+        <p:nvSpPr>
+          <p:cNvPr id="6" name="Slide Number Placeholder 5">
+            <a:extLst>
+              <a:ext uri="{FF2B5EF4-FFF2-40B4-BE49-F238E27FC236}">
+                <a16:creationId xmlns:a16="http://schemas.microsoft.com/office/drawing/2014/main" id="{5F33F24B-1A9E-2EAF-F2AB-89426454DEE9}"/>
+              </a:ext>
+            </a:extLst>
+          </p:cNvPr>
+          <p:cNvSpPr>
+            <a:spLocks noGrp="1"/>
+          </p:cNvSpPr>
+          <p:nvPr>
+            <p:ph idx="12" sz="quarter" type="sldNum"/>
+          </p:nvPr>
+        </p:nvSpPr>
+        <p:spPr>
+          <a:xfrm>
+            <a:off x="8610599" y="6356350"/>
+            <a:ext cx="3135001" cy="365125"/>
+          </a:xfrm>
+        </p:spPr>
+        <p:txBody>
+          <a:bodyPr/>
+          <a:lstStyle/>
+          <a:p>
+            <a:fld id="{7FEFBAB6-26D0-44D8-BD53-612461CE1ACC}" type="slidenum">
+              <a:rPr lang="de-DE" smtClean="0"/>
+              <a:t>‹#›</a:t>
+            </a:fld>
+            <a:endParaRPr lang="de-DE"/>
+          </a:p>
+        </p:txBody>
+      </p:sp>
+    </p:spTree>
+  </p:cSld>
+</p:sld>
+</file>
+
+<file path=ppt/slides/slide20.xml><?xml version="1.0" encoding="utf-8"?>
 <p:sld xmlns:a="http://schemas.openxmlformats.org/drawingml/2006/main" xmlns:r="http://schemas.openxmlformats.org/officeDocument/2006/relationships" xmlns:p="http://schemas.openxmlformats.org/presentationml/2006/main">
   <p:cSld>
     <p:spTree>
@@ -10025,10 +11480,92 @@
       </p:sp>
     </p:spTree>
   </p:cSld>
+  <p:timing>
+    <p:tnLst>
+      <p:par>
+        <p:cTn id="1" dur="indefinite" restart="never" nodeType="tmRoot">
+          <p:childTnLst>
+            <p:seq concurrent="1" nextAc="seek">
+              <p:cTn id="2" dur="indefinite" nodeType="mainSeq">
+                <p:childTnLst>
+                  <p:par>
+                    <p:cTn id="3" fill="hold">
+                      <p:stCondLst>
+                        <p:cond delay="indefinite"/>
+                      </p:stCondLst>
+                      <p:childTnLst>
+                        <p:par>
+                          <p:cTn id="4" fill="hold">
+                            <p:stCondLst>
+                              <p:cond delay="0"/>
+                            </p:stCondLst>
+                            <p:childTnLst>
+                              <p:par>
+                                <p:cTn id="5" presetID="1" presetClass="entr" presetSubtype="0" fill="hold" grpId="0" nodeType="clickEffect">
+                                  <p:stCondLst>
+                                    <p:cond delay="0"/>
+                                  </p:stCondLst>
+                                  <p:childTnLst>
+                                    <p:set>
+                                      <p:cBhvr>
+                                        <p:cTn id="6" dur="1" fill="hold">
+                                          <p:stCondLst>
+                                            <p:cond delay="0"/>
+                                          </p:stCondLst>
+                                        </p:cTn>
+                                        <p:tgtEl>
+                                          <p:spTgt spid="4">
+                                            <p:txEl>
+                                              <p:pRg st="0" end="0"/>
+                                            </p:txEl>
+                                          </p:spTgt>
+                                        </p:tgtEl>
+                                        <p:attrNameLst>
+                                          <p:attrName>style.visibility</p:attrName>
+                                        </p:attrNameLst>
+                                      </p:cBhvr>
+                                      <p:to>
+                                        <p:strVal val="visible"/>
+                                      </p:to>
+                                    </p:set>
+                                  </p:childTnLst>
+                                </p:cTn>
+                              </p:par>
+                            </p:childTnLst>
+                          </p:cTn>
+                        </p:par>
+                      </p:childTnLst>
+                    </p:cTn>
+                  </p:par>
+                </p:childTnLst>
+              </p:cTn>
+              <p:prevCondLst>
+                <p:cond evt="onPrev" delay="0">
+                  <p:tgtEl>
+                    <p:sldTgt/>
+                  </p:tgtEl>
+                </p:cond>
+              </p:prevCondLst>
+              <p:nextCondLst>
+                <p:cond evt="onNext" delay="0">
+                  <p:tgtEl>
+                    <p:sldTgt/>
+                  </p:tgtEl>
+                </p:cond>
+              </p:nextCondLst>
+            </p:seq>
+          </p:childTnLst>
+        </p:cTn>
+      </p:par>
+    </p:tnLst>
+    <p:bldLst>
+      <p:bldP spid="4" grpId="0" uiExpand="1" build="p"/>
+    </p:bldLst>
+  </p:timing>
 </p:sld>
 </file>
 
-<file path=ppt/slides/slide19.xml><?xml version="1.0" encoding="utf-8"?>
+<file path=ppt/slides/slide21.xml><?xml version="1.0" encoding="utf-8"?>
 <p:sld xmlns:a="http://schemas.openxmlformats.org/drawingml/2006/main" xmlns:r="http://schemas.openxmlformats.org/officeDocument/2006/relationships" xmlns:p="http://schemas.openxmlformats.org/presentationml/2006/main">
   <p:cSld>
     <p:spTree>
@@ -10432,154 +11969,7 @@
 </p:sld>
 </file>
 
-<file path=ppt/slides/slide2.xml><?xml version="1.0" encoding="utf-8"?>
-<p:sld xmlns:a="http://schemas.openxmlformats.org/drawingml/2006/main" xmlns:r="http://schemas.openxmlformats.org/officeDocument/2006/relationships" xmlns:p="http://schemas.openxmlformats.org/presentationml/2006/main">
-  <p:cSld>
-    <p:spTree>
-      <p:nvGrpSpPr>
-        <p:cNvPr id="1" name=""/>
-        <p:cNvGrpSpPr/>
-        <p:nvPr/>
-      </p:nvGrpSpPr>
-      <p:grpSpPr>
-        <a:xfrm>
-          <a:off x="0" y="0"/>
-          <a:ext cx="0" cy="0"/>
-          <a:chOff x="0" y="0"/>
-          <a:chExt cx="0" cy="0"/>
-        </a:xfrm>
-      </p:grpSpPr>
-      <p:sp>
-        <p:nvSpPr>
-          <p:cNvPr id="2" name="Title 1">
-            <a:extLst>
-              <a:ext uri="{FF2B5EF4-FFF2-40B4-BE49-F238E27FC236}">
-                <a16:creationId xmlns:a16="http://schemas.microsoft.com/office/drawing/2014/main" id="{6BF04AE0-F94F-A586-34B8-68D9CAB6C6D1}"/>
-              </a:ext>
-            </a:extLst>
-          </p:cNvPr>
-          <p:cNvSpPr>
-            <a:spLocks noGrp="1"/>
-          </p:cNvSpPr>
-          <p:nvPr>
-            <p:ph type="title"/>
-          </p:nvPr>
-        </p:nvSpPr>
-        <p:spPr>
-          <a:xfrm>
-            <a:off x="2295524" y="432532"/>
-            <a:ext cx="9450077" cy="825501"/>
-          </a:xfrm>
-        </p:spPr>
-        <p:txBody>
-          <a:bodyPr/>
-          <a:lstStyle/>
-          <a:p>
-            <a:pPr lvl="0" indent="0" marL="0">
-              <a:buNone/>
-            </a:pPr>
-            <a:r>
-              <a:rPr/>
-              <a:t>Testing Slide</a:t>
-            </a:r>
-          </a:p>
-        </p:txBody>
-      </p:sp>
-      <p:sp>
-        <p:nvSpPr>
-          <p:cNvPr id="3" name="Content Placeholder 2">
-            <a:extLst>
-              <a:ext uri="{FF2B5EF4-FFF2-40B4-BE49-F238E27FC236}">
-                <a16:creationId xmlns:a16="http://schemas.microsoft.com/office/drawing/2014/main" id="{372FA590-20E9-0368-85B4-90C26598F852}"/>
-              </a:ext>
-            </a:extLst>
-          </p:cNvPr>
-          <p:cNvSpPr>
-            <a:spLocks noGrp="1"/>
-          </p:cNvSpPr>
-          <p:nvPr>
-            <p:ph idx="1"/>
-          </p:nvPr>
-        </p:nvSpPr>
-        <p:spPr/>
-        <p:txBody>
-          <a:bodyPr/>
-          <a:lstStyle/>
-          <a:p>
-            <a:pPr lvl="0" indent="0" marL="1270000">
-              <a:buNone/>
-            </a:pPr>
-            <a:r>
-              <a:rPr sz="2000" b="1"/>
-              <a:t>Tip</a:t>
-            </a:r>
-          </a:p>
-          <a:p>
-            <a:pPr lvl="0" indent="0" marL="1270000">
-              <a:buNone/>
-            </a:pPr>
-            <a:r>
-              <a:rPr sz="2000"/>
-              <a:t>This is a callout box test</a:t>
-            </a:r>
-          </a:p>
-          <a:p>
-            <a:pPr lvl="0" indent="0" marL="0">
-              <a:buNone/>
-            </a:pPr>
-            <a:r>
-              <a:rPr/>
-              <a:t>Test citation </a:t>
-            </a:r>
-            <a:r>
-              <a:rPr>
-                <a:hlinkClick r:id="rId2" action="ppaction://hlinksldjump"/>
-              </a:rPr>
-              <a:t>Jackson (1990)</a:t>
-            </a:r>
-          </a:p>
-        </p:txBody>
-      </p:sp>
-      <p:sp>
-        <p:nvSpPr>
-          <p:cNvPr id="6" name="Slide Number Placeholder 5">
-            <a:extLst>
-              <a:ext uri="{FF2B5EF4-FFF2-40B4-BE49-F238E27FC236}">
-                <a16:creationId xmlns:a16="http://schemas.microsoft.com/office/drawing/2014/main" id="{5F33F24B-1A9E-2EAF-F2AB-89426454DEE9}"/>
-              </a:ext>
-            </a:extLst>
-          </p:cNvPr>
-          <p:cNvSpPr>
-            <a:spLocks noGrp="1"/>
-          </p:cNvSpPr>
-          <p:nvPr>
-            <p:ph idx="12" sz="quarter" type="sldNum"/>
-          </p:nvPr>
-        </p:nvSpPr>
-        <p:spPr>
-          <a:xfrm>
-            <a:off x="8610599" y="6356350"/>
-            <a:ext cx="3135001" cy="365125"/>
-          </a:xfrm>
-        </p:spPr>
-        <p:txBody>
-          <a:bodyPr/>
-          <a:lstStyle/>
-          <a:p>
-            <a:fld id="{7FEFBAB6-26D0-44D8-BD53-612461CE1ACC}" type="slidenum">
-              <a:rPr lang="de-DE" smtClean="0"/>
-              <a:t>‹#›</a:t>
-            </a:fld>
-            <a:endParaRPr lang="de-DE"/>
-          </a:p>
-        </p:txBody>
-      </p:sp>
-    </p:spTree>
-  </p:cSld>
-</p:sld>
-</file>
-
-<file path=ppt/slides/slide20.xml><?xml version="1.0" encoding="utf-8"?>
+<file path=ppt/slides/slide22.xml><?xml version="1.0" encoding="utf-8"?>
 <p:sld xmlns:a="http://schemas.openxmlformats.org/drawingml/2006/main" xmlns:r="http://schemas.openxmlformats.org/officeDocument/2006/relationships" xmlns:p="http://schemas.openxmlformats.org/presentationml/2006/main">
   <p:cSld>
     <p:spTree>
@@ -11106,7 +12496,7 @@
 </p:sld>
 </file>
 
-<file path=ppt/slides/slide21.xml><?xml version="1.0" encoding="utf-8"?>
+<file path=ppt/slides/slide23.xml><?xml version="1.0" encoding="utf-8"?>
 <p:sld xmlns:a="http://schemas.openxmlformats.org/drawingml/2006/main" xmlns:r="http://schemas.openxmlformats.org/officeDocument/2006/relationships" xmlns:p="http://schemas.openxmlformats.org/presentationml/2006/main">
   <p:cSld>
     <p:spTree>
@@ -11324,10 +12714,337 @@
       </p:sp>
     </p:spTree>
   </p:cSld>
+  <p:timing>
+    <p:tnLst>
+      <p:par>
+        <p:cTn id="1" dur="indefinite" restart="never" nodeType="tmRoot">
+          <p:childTnLst>
+            <p:seq concurrent="1" nextAc="seek">
+              <p:cTn id="2" dur="indefinite" nodeType="mainSeq">
+                <p:childTnLst>
+                  <p:par>
+                    <p:cTn id="3" fill="hold">
+                      <p:stCondLst>
+                        <p:cond delay="indefinite"/>
+                      </p:stCondLst>
+                      <p:childTnLst>
+                        <p:par>
+                          <p:cTn id="4" fill="hold">
+                            <p:stCondLst>
+                              <p:cond delay="0"/>
+                            </p:stCondLst>
+                            <p:childTnLst>
+                              <p:par>
+                                <p:cTn id="5" presetID="1" presetClass="entr" presetSubtype="0" fill="hold" grpId="0" nodeType="clickEffect">
+                                  <p:stCondLst>
+                                    <p:cond delay="0"/>
+                                  </p:stCondLst>
+                                  <p:childTnLst>
+                                    <p:set>
+                                      <p:cBhvr>
+                                        <p:cTn id="6" dur="1" fill="hold">
+                                          <p:stCondLst>
+                                            <p:cond delay="0"/>
+                                          </p:stCondLst>
+                                        </p:cTn>
+                                        <p:tgtEl>
+                                          <p:spTgt spid="3">
+                                            <p:txEl>
+                                              <p:pRg st="0" end="0"/>
+                                            </p:txEl>
+                                          </p:spTgt>
+                                        </p:tgtEl>
+                                        <p:attrNameLst>
+                                          <p:attrName>style.visibility</p:attrName>
+                                        </p:attrNameLst>
+                                      </p:cBhvr>
+                                      <p:to>
+                                        <p:strVal val="visible"/>
+                                      </p:to>
+                                    </p:set>
+                                  </p:childTnLst>
+                                </p:cTn>
+                              </p:par>
+                            </p:childTnLst>
+                          </p:cTn>
+                        </p:par>
+                      </p:childTnLst>
+                    </p:cTn>
+                  </p:par>
+                  <p:par>
+                    <p:cTn id="7" fill="hold">
+                      <p:stCondLst>
+                        <p:cond delay="indefinite"/>
+                      </p:stCondLst>
+                      <p:childTnLst>
+                        <p:par>
+                          <p:cTn id="8" fill="hold">
+                            <p:stCondLst>
+                              <p:cond delay="0"/>
+                            </p:stCondLst>
+                            <p:childTnLst>
+                              <p:par>
+                                <p:cTn id="9" presetID="1" presetClass="entr" presetSubtype="0" fill="hold" grpId="0" nodeType="clickEffect">
+                                  <p:stCondLst>
+                                    <p:cond delay="0"/>
+                                  </p:stCondLst>
+                                  <p:childTnLst>
+                                    <p:set>
+                                      <p:cBhvr>
+                                        <p:cTn id="10" dur="1" fill="hold">
+                                          <p:stCondLst>
+                                            <p:cond delay="0"/>
+                                          </p:stCondLst>
+                                        </p:cTn>
+                                        <p:tgtEl>
+                                          <p:spTgt spid="3">
+                                            <p:txEl>
+                                              <p:pRg st="1" end="1"/>
+                                            </p:txEl>
+                                          </p:spTgt>
+                                        </p:tgtEl>
+                                        <p:attrNameLst>
+                                          <p:attrName>style.visibility</p:attrName>
+                                        </p:attrNameLst>
+                                      </p:cBhvr>
+                                      <p:to>
+                                        <p:strVal val="visible"/>
+                                      </p:to>
+                                    </p:set>
+                                  </p:childTnLst>
+                                </p:cTn>
+                              </p:par>
+                            </p:childTnLst>
+                          </p:cTn>
+                        </p:par>
+                      </p:childTnLst>
+                    </p:cTn>
+                  </p:par>
+                  <p:par>
+                    <p:cTn id="11" fill="hold">
+                      <p:stCondLst>
+                        <p:cond delay="indefinite"/>
+                      </p:stCondLst>
+                      <p:childTnLst>
+                        <p:par>
+                          <p:cTn id="12" fill="hold">
+                            <p:stCondLst>
+                              <p:cond delay="0"/>
+                            </p:stCondLst>
+                            <p:childTnLst>
+                              <p:par>
+                                <p:cTn id="13" presetID="1" presetClass="entr" presetSubtype="0" fill="hold" grpId="0" nodeType="clickEffect">
+                                  <p:stCondLst>
+                                    <p:cond delay="0"/>
+                                  </p:stCondLst>
+                                  <p:childTnLst>
+                                    <p:set>
+                                      <p:cBhvr>
+                                        <p:cTn id="14" dur="1" fill="hold">
+                                          <p:stCondLst>
+                                            <p:cond delay="0"/>
+                                          </p:stCondLst>
+                                        </p:cTn>
+                                        <p:tgtEl>
+                                          <p:spTgt spid="3">
+                                            <p:txEl>
+                                              <p:pRg st="2" end="2"/>
+                                            </p:txEl>
+                                          </p:spTgt>
+                                        </p:tgtEl>
+                                        <p:attrNameLst>
+                                          <p:attrName>style.visibility</p:attrName>
+                                        </p:attrNameLst>
+                                      </p:cBhvr>
+                                      <p:to>
+                                        <p:strVal val="visible"/>
+                                      </p:to>
+                                    </p:set>
+                                  </p:childTnLst>
+                                </p:cTn>
+                              </p:par>
+                            </p:childTnLst>
+                          </p:cTn>
+                        </p:par>
+                      </p:childTnLst>
+                    </p:cTn>
+                  </p:par>
+                  <p:par>
+                    <p:cTn id="15" fill="hold">
+                      <p:stCondLst>
+                        <p:cond delay="indefinite"/>
+                      </p:stCondLst>
+                      <p:childTnLst>
+                        <p:par>
+                          <p:cTn id="16" fill="hold">
+                            <p:stCondLst>
+                              <p:cond delay="0"/>
+                            </p:stCondLst>
+                            <p:childTnLst>
+                              <p:par>
+                                <p:cTn id="17" presetID="1" presetClass="entr" presetSubtype="0" fill="hold" grpId="0" nodeType="clickEffect">
+                                  <p:stCondLst>
+                                    <p:cond delay="0"/>
+                                  </p:stCondLst>
+                                  <p:childTnLst>
+                                    <p:set>
+                                      <p:cBhvr>
+                                        <p:cTn id="18" dur="1" fill="hold">
+                                          <p:stCondLst>
+                                            <p:cond delay="0"/>
+                                          </p:stCondLst>
+                                        </p:cTn>
+                                        <p:tgtEl>
+                                          <p:spTgt spid="3">
+                                            <p:txEl>
+                                              <p:pRg st="3" end="3"/>
+                                            </p:txEl>
+                                          </p:spTgt>
+                                        </p:tgtEl>
+                                        <p:attrNameLst>
+                                          <p:attrName>style.visibility</p:attrName>
+                                        </p:attrNameLst>
+                                      </p:cBhvr>
+                                      <p:to>
+                                        <p:strVal val="visible"/>
+                                      </p:to>
+                                    </p:set>
+                                  </p:childTnLst>
+                                </p:cTn>
+                              </p:par>
+                            </p:childTnLst>
+                          </p:cTn>
+                        </p:par>
+                      </p:childTnLst>
+                    </p:cTn>
+                  </p:par>
+                  <p:par>
+                    <p:cTn id="19" fill="hold">
+                      <p:stCondLst>
+                        <p:cond delay="indefinite"/>
+                      </p:stCondLst>
+                      <p:childTnLst>
+                        <p:par>
+                          <p:cTn id="20" fill="hold">
+                            <p:stCondLst>
+                              <p:cond delay="0"/>
+                            </p:stCondLst>
+                            <p:childTnLst>
+                              <p:par>
+                                <p:cTn id="21" presetID="1" presetClass="entr" presetSubtype="0" fill="hold" grpId="0" nodeType="clickEffect">
+                                  <p:stCondLst>
+                                    <p:cond delay="0"/>
+                                  </p:stCondLst>
+                                  <p:childTnLst>
+                                    <p:set>
+                                      <p:cBhvr>
+                                        <p:cTn id="22" dur="1" fill="hold">
+                                          <p:stCondLst>
+                                            <p:cond delay="0"/>
+                                          </p:stCondLst>
+                                        </p:cTn>
+                                        <p:tgtEl>
+                                          <p:spTgt spid="3">
+                                            <p:txEl>
+                                              <p:pRg st="4" end="4"/>
+                                            </p:txEl>
+                                          </p:spTgt>
+                                        </p:tgtEl>
+                                        <p:attrNameLst>
+                                          <p:attrName>style.visibility</p:attrName>
+                                        </p:attrNameLst>
+                                      </p:cBhvr>
+                                      <p:to>
+                                        <p:strVal val="visible"/>
+                                      </p:to>
+                                    </p:set>
+                                  </p:childTnLst>
+                                </p:cTn>
+                              </p:par>
+                            </p:childTnLst>
+                          </p:cTn>
+                        </p:par>
+                      </p:childTnLst>
+                    </p:cTn>
+                  </p:par>
+                  <p:par>
+                    <p:cTn id="23" fill="hold">
+                      <p:stCondLst>
+                        <p:cond delay="indefinite"/>
+                      </p:stCondLst>
+                      <p:childTnLst>
+                        <p:par>
+                          <p:cTn id="24" fill="hold">
+                            <p:stCondLst>
+                              <p:cond delay="0"/>
+                            </p:stCondLst>
+                            <p:childTnLst>
+                              <p:par>
+                                <p:cTn id="25" presetID="1" presetClass="entr" presetSubtype="0" fill="hold" grpId="0" nodeType="clickEffect">
+                                  <p:stCondLst>
+                                    <p:cond delay="0"/>
+                                  </p:stCondLst>
+                                  <p:childTnLst>
+                                    <p:set>
+                                      <p:cBhvr>
+                                        <p:cTn id="26" dur="1" fill="hold">
+                                          <p:stCondLst>
+                                            <p:cond delay="0"/>
+                                          </p:stCondLst>
+                                        </p:cTn>
+                                        <p:tgtEl>
+                                          <p:spTgt spid="3">
+                                            <p:txEl>
+                                              <p:pRg st="5" end="5"/>
+                                            </p:txEl>
+                                          </p:spTgt>
+                                        </p:tgtEl>
+                                        <p:attrNameLst>
+                                          <p:attrName>style.visibility</p:attrName>
+                                        </p:attrNameLst>
+                                      </p:cBhvr>
+                                      <p:to>
+                                        <p:strVal val="visible"/>
+                                      </p:to>
+                                    </p:set>
+                                  </p:childTnLst>
+                                </p:cTn>
+                              </p:par>
+                            </p:childTnLst>
+                          </p:cTn>
+                        </p:par>
+                      </p:childTnLst>
+                    </p:cTn>
+                  </p:par>
+                </p:childTnLst>
+              </p:cTn>
+              <p:prevCondLst>
+                <p:cond evt="onPrev" delay="0">
+                  <p:tgtEl>
+                    <p:sldTgt/>
+                  </p:tgtEl>
+                </p:cond>
+              </p:prevCondLst>
+              <p:nextCondLst>
+                <p:cond evt="onNext" delay="0">
+                  <p:tgtEl>
+                    <p:sldTgt/>
+                  </p:tgtEl>
+                </p:cond>
+              </p:nextCondLst>
+            </p:seq>
+          </p:childTnLst>
+        </p:cTn>
+      </p:par>
+    </p:tnLst>
+    <p:bldLst>
+      <p:bldP spid="3" grpId="0" uiExpand="1" build="p"/>
+    </p:bldLst>
+  </p:timing>
 </p:sld>
 </file>
 
-<file path=ppt/slides/slide22.xml><?xml version="1.0" encoding="utf-8"?>
+<file path=ppt/slides/slide24.xml><?xml version="1.0" encoding="utf-8"?>
 <p:sld xmlns:a="http://schemas.openxmlformats.org/drawingml/2006/main" xmlns:r="http://schemas.openxmlformats.org/officeDocument/2006/relationships" xmlns:p="http://schemas.openxmlformats.org/presentationml/2006/main">
   <p:cSld>
     <p:spTree>
@@ -11719,7 +13436,7 @@
 </p:sld>
 </file>
 
-<file path=ppt/slides/slide23.xml><?xml version="1.0" encoding="utf-8"?>
+<file path=ppt/slides/slide25.xml><?xml version="1.0" encoding="utf-8"?>
 <p:sld xmlns:a="http://schemas.openxmlformats.org/drawingml/2006/main" xmlns:r="http://schemas.openxmlformats.org/officeDocument/2006/relationships" xmlns:p="http://schemas.openxmlformats.org/presentationml/2006/main">
   <p:cSld>
     <p:spTree>
@@ -12039,7 +13756,7 @@
 </p:sld>
 </file>
 
-<file path=ppt/slides/slide24.xml><?xml version="1.0" encoding="utf-8"?>
+<file path=ppt/slides/slide26.xml><?xml version="1.0" encoding="utf-8"?>
 <p:sld xmlns:a="http://schemas.openxmlformats.org/drawingml/2006/main" xmlns:r="http://schemas.openxmlformats.org/officeDocument/2006/relationships" xmlns:p="http://schemas.openxmlformats.org/presentationml/2006/main">
   <p:cSld>
     <p:spTree>
@@ -12170,7 +13887,7 @@
 </p:sld>
 </file>
 
-<file path=ppt/slides/slide25.xml><?xml version="1.0" encoding="utf-8"?>
+<file path=ppt/slides/slide27.xml><?xml version="1.0" encoding="utf-8"?>
 <p:sld xmlns:a="http://schemas.openxmlformats.org/drawingml/2006/main" xmlns:r="http://schemas.openxmlformats.org/officeDocument/2006/relationships" xmlns:p="http://schemas.openxmlformats.org/presentationml/2006/main">
   <p:cSld>
     <p:spTree>
@@ -12349,10 +14066,190 @@
       </p:sp>
     </p:spTree>
   </p:cSld>
+  <p:timing>
+    <p:tnLst>
+      <p:par>
+        <p:cTn id="1" dur="indefinite" restart="never" nodeType="tmRoot">
+          <p:childTnLst>
+            <p:seq concurrent="1" nextAc="seek">
+              <p:cTn id="2" dur="indefinite" nodeType="mainSeq">
+                <p:childTnLst>
+                  <p:par>
+                    <p:cTn id="3" fill="hold">
+                      <p:stCondLst>
+                        <p:cond delay="indefinite"/>
+                      </p:stCondLst>
+                      <p:childTnLst>
+                        <p:par>
+                          <p:cTn id="4" fill="hold">
+                            <p:stCondLst>
+                              <p:cond delay="0"/>
+                            </p:stCondLst>
+                            <p:childTnLst>
+                              <p:par>
+                                <p:cTn id="5" presetID="1" presetClass="entr" presetSubtype="0" fill="hold" grpId="0" nodeType="clickEffect">
+                                  <p:stCondLst>
+                                    <p:cond delay="0"/>
+                                  </p:stCondLst>
+                                  <p:childTnLst>
+                                    <p:set>
+                                      <p:cBhvr>
+                                        <p:cTn id="6" dur="1" fill="hold">
+                                          <p:stCondLst>
+                                            <p:cond delay="0"/>
+                                          </p:stCondLst>
+                                        </p:cTn>
+                                        <p:tgtEl>
+                                          <p:spTgt spid="3">
+                                            <p:txEl>
+                                              <p:pRg st="1" end="1"/>
+                                            </p:txEl>
+                                          </p:spTgt>
+                                        </p:tgtEl>
+                                        <p:attrNameLst>
+                                          <p:attrName>style.visibility</p:attrName>
+                                        </p:attrNameLst>
+                                      </p:cBhvr>
+                                      <p:to>
+                                        <p:strVal val="visible"/>
+                                      </p:to>
+                                    </p:set>
+                                  </p:childTnLst>
+                                </p:cTn>
+                              </p:par>
+                            </p:childTnLst>
+                          </p:cTn>
+                        </p:par>
+                      </p:childTnLst>
+                    </p:cTn>
+                  </p:par>
+                  <p:par>
+                    <p:cTn id="7" fill="hold">
+                      <p:stCondLst>
+                        <p:cond delay="indefinite"/>
+                      </p:stCondLst>
+                      <p:childTnLst>
+                        <p:par>
+                          <p:cTn id="8" fill="hold">
+                            <p:stCondLst>
+                              <p:cond delay="0"/>
+                            </p:stCondLst>
+                            <p:childTnLst>
+                              <p:par>
+                                <p:cTn id="9" presetID="1" presetClass="entr" presetSubtype="0" fill="hold" grpId="0" nodeType="clickEffect">
+                                  <p:stCondLst>
+                                    <p:cond delay="0"/>
+                                  </p:stCondLst>
+                                  <p:childTnLst>
+                                    <p:set>
+                                      <p:cBhvr>
+                                        <p:cTn id="10" dur="1" fill="hold">
+                                          <p:stCondLst>
+                                            <p:cond delay="0"/>
+                                          </p:stCondLst>
+                                        </p:cTn>
+                                        <p:tgtEl>
+                                          <p:spTgt spid="3">
+                                            <p:txEl>
+                                              <p:pRg st="2" end="2"/>
+                                            </p:txEl>
+                                          </p:spTgt>
+                                        </p:tgtEl>
+                                        <p:attrNameLst>
+                                          <p:attrName>style.visibility</p:attrName>
+                                        </p:attrNameLst>
+                                      </p:cBhvr>
+                                      <p:to>
+                                        <p:strVal val="visible"/>
+                                      </p:to>
+                                    </p:set>
+                                  </p:childTnLst>
+                                </p:cTn>
+                              </p:par>
+                            </p:childTnLst>
+                          </p:cTn>
+                        </p:par>
+                      </p:childTnLst>
+                    </p:cTn>
+                  </p:par>
+                  <p:par>
+                    <p:cTn id="11" fill="hold">
+                      <p:stCondLst>
+                        <p:cond delay="indefinite"/>
+                      </p:stCondLst>
+                      <p:childTnLst>
+                        <p:par>
+                          <p:cTn id="12" fill="hold">
+                            <p:stCondLst>
+                              <p:cond delay="0"/>
+                            </p:stCondLst>
+                            <p:childTnLst>
+                              <p:par>
+                                <p:cTn id="13" presetID="1" presetClass="entr" presetSubtype="0" fill="hold" grpId="0" nodeType="clickEffect">
+                                  <p:stCondLst>
+                                    <p:cond delay="0"/>
+                                  </p:stCondLst>
+                                  <p:childTnLst>
+                                    <p:set>
+                                      <p:cBhvr>
+                                        <p:cTn id="14" dur="1" fill="hold">
+                                          <p:stCondLst>
+                                            <p:cond delay="0"/>
+                                          </p:stCondLst>
+                                        </p:cTn>
+                                        <p:tgtEl>
+                                          <p:spTgt spid="3">
+                                            <p:txEl>
+                                              <p:pRg st="3" end="3"/>
+                                            </p:txEl>
+                                          </p:spTgt>
+                                        </p:tgtEl>
+                                        <p:attrNameLst>
+                                          <p:attrName>style.visibility</p:attrName>
+                                        </p:attrNameLst>
+                                      </p:cBhvr>
+                                      <p:to>
+                                        <p:strVal val="visible"/>
+                                      </p:to>
+                                    </p:set>
+                                  </p:childTnLst>
+                                </p:cTn>
+                              </p:par>
+                            </p:childTnLst>
+                          </p:cTn>
+                        </p:par>
+                      </p:childTnLst>
+                    </p:cTn>
+                  </p:par>
+                </p:childTnLst>
+              </p:cTn>
+              <p:prevCondLst>
+                <p:cond evt="onPrev" delay="0">
+                  <p:tgtEl>
+                    <p:sldTgt/>
+                  </p:tgtEl>
+                </p:cond>
+              </p:prevCondLst>
+              <p:nextCondLst>
+                <p:cond evt="onNext" delay="0">
+                  <p:tgtEl>
+                    <p:sldTgt/>
+                  </p:tgtEl>
+                </p:cond>
+              </p:nextCondLst>
+            </p:seq>
+          </p:childTnLst>
+        </p:cTn>
+      </p:par>
+    </p:tnLst>
+    <p:bldLst>
+      <p:bldP spid="3" grpId="0" uiExpand="1" build="p"/>
+    </p:bldLst>
+  </p:timing>
 </p:sld>
 </file>
 
-<file path=ppt/slides/slide26.xml><?xml version="1.0" encoding="utf-8"?>
+<file path=ppt/slides/slide28.xml><?xml version="1.0" encoding="utf-8"?>
 <p:sld xmlns:a="http://schemas.openxmlformats.org/drawingml/2006/main" xmlns:r="http://schemas.openxmlformats.org/officeDocument/2006/relationships" xmlns:p="http://schemas.openxmlformats.org/presentationml/2006/main">
   <p:cSld>
     <p:spTree>
@@ -12885,7 +14782,7 @@
 </p:sld>
 </file>
 
-<file path=ppt/slides/slide27.xml><?xml version="1.0" encoding="utf-8"?>
+<file path=ppt/slides/slide29.xml><?xml version="1.0" encoding="utf-8"?>
 <p:sld xmlns:a="http://schemas.openxmlformats.org/drawingml/2006/main" xmlns:r="http://schemas.openxmlformats.org/officeDocument/2006/relationships" xmlns:p="http://schemas.openxmlformats.org/presentationml/2006/main">
   <p:cSld>
     <p:spTree>
@@ -12977,7 +14874,7 @@
 </p:sld>
 </file>
 
-<file path=ppt/slides/slide28.xml><?xml version="1.0" encoding="utf-8"?>
+<file path=ppt/slides/slide3.xml><?xml version="1.0" encoding="utf-8"?>
 <p:sld xmlns:a="http://schemas.openxmlformats.org/drawingml/2006/main" xmlns:r="http://schemas.openxmlformats.org/officeDocument/2006/relationships" xmlns:p="http://schemas.openxmlformats.org/presentationml/2006/main">
   <p:cSld>
     <p:spTree>
@@ -13025,7 +14922,7 @@
             </a:pPr>
             <a:r>
               <a:rPr/>
-              <a:t>Brief overview of Zotero</a:t>
+              <a:t>Section Header?</a:t>
             </a:r>
           </a:p>
         </p:txBody>
@@ -13069,7 +14966,99 @@
 </p:sld>
 </file>
 
-<file path=ppt/slides/slide29.xml><?xml version="1.0" encoding="utf-8"?>
+<file path=ppt/slides/slide30.xml><?xml version="1.0" encoding="utf-8"?>
+<p:sld xmlns:a="http://schemas.openxmlformats.org/drawingml/2006/main" xmlns:r="http://schemas.openxmlformats.org/officeDocument/2006/relationships" xmlns:p="http://schemas.openxmlformats.org/presentationml/2006/main">
+  <p:cSld>
+    <p:spTree>
+      <p:nvGrpSpPr>
+        <p:cNvPr id="1" name=""/>
+        <p:cNvGrpSpPr/>
+        <p:nvPr/>
+      </p:nvGrpSpPr>
+      <p:grpSpPr>
+        <a:xfrm>
+          <a:off x="0" y="0"/>
+          <a:ext cx="0" cy="0"/>
+          <a:chOff x="0" y="0"/>
+          <a:chExt cx="0" cy="0"/>
+        </a:xfrm>
+      </p:grpSpPr>
+      <p:sp>
+        <p:nvSpPr>
+          <p:cNvPr id="2" name="Title 1">
+            <a:extLst>
+              <a:ext uri="{FF2B5EF4-FFF2-40B4-BE49-F238E27FC236}">
+                <a16:creationId xmlns:a16="http://schemas.microsoft.com/office/drawing/2014/main" id="{125F7DD1-BC99-F967-7E0D-AD07C61B1543}"/>
+              </a:ext>
+            </a:extLst>
+          </p:cNvPr>
+          <p:cNvSpPr>
+            <a:spLocks noGrp="1"/>
+          </p:cNvSpPr>
+          <p:nvPr>
+            <p:ph type="title"/>
+          </p:nvPr>
+        </p:nvSpPr>
+        <p:spPr>
+          <a:xfrm>
+            <a:off x="831850" y="1709738"/>
+            <a:ext cx="10515600" cy="2852737"/>
+          </a:xfrm>
+        </p:spPr>
+        <p:txBody>
+          <a:bodyPr/>
+          <a:lstStyle/>
+          <a:p>
+            <a:pPr lvl="0" indent="0" marL="0">
+              <a:buNone/>
+            </a:pPr>
+            <a:r>
+              <a:rPr/>
+              <a:t>Brief overview of Zotero</a:t>
+            </a:r>
+          </a:p>
+        </p:txBody>
+      </p:sp>
+      <p:sp>
+        <p:nvSpPr>
+          <p:cNvPr id="6" name="Slide Number Placeholder 5">
+            <a:extLst>
+              <a:ext uri="{FF2B5EF4-FFF2-40B4-BE49-F238E27FC236}">
+                <a16:creationId xmlns:a16="http://schemas.microsoft.com/office/drawing/2014/main" id="{B93C94A4-D223-C226-398A-59B1A3955C6C}"/>
+              </a:ext>
+            </a:extLst>
+          </p:cNvPr>
+          <p:cNvSpPr>
+            <a:spLocks noGrp="1"/>
+          </p:cNvSpPr>
+          <p:nvPr>
+            <p:ph idx="12" sz="quarter" type="sldNum"/>
+          </p:nvPr>
+        </p:nvSpPr>
+        <p:spPr>
+          <a:xfrm>
+            <a:off x="8610599" y="6356350"/>
+            <a:ext cx="3135001" cy="365125"/>
+          </a:xfrm>
+        </p:spPr>
+        <p:txBody>
+          <a:bodyPr/>
+          <a:lstStyle/>
+          <a:p>
+            <a:fld id="{7FEFBAB6-26D0-44D8-BD53-612461CE1ACC}" type="slidenum">
+              <a:rPr lang="de-DE" smtClean="0"/>
+              <a:t>‹#›</a:t>
+            </a:fld>
+            <a:endParaRPr lang="de-DE"/>
+          </a:p>
+        </p:txBody>
+      </p:sp>
+    </p:spTree>
+  </p:cSld>
+</p:sld>
+</file>
+
+<file path=ppt/slides/slide31.xml><?xml version="1.0" encoding="utf-8"?>
 <p:sld xmlns:a="http://schemas.openxmlformats.org/drawingml/2006/main" xmlns:r="http://schemas.openxmlformats.org/officeDocument/2006/relationships" xmlns:p="http://schemas.openxmlformats.org/presentationml/2006/main">
   <p:cSld>
     <p:spTree>
@@ -13396,99 +15385,7 @@
 </p:sld>
 </file>
 
-<file path=ppt/slides/slide3.xml><?xml version="1.0" encoding="utf-8"?>
-<p:sld xmlns:a="http://schemas.openxmlformats.org/drawingml/2006/main" xmlns:r="http://schemas.openxmlformats.org/officeDocument/2006/relationships" xmlns:p="http://schemas.openxmlformats.org/presentationml/2006/main">
-  <p:cSld>
-    <p:spTree>
-      <p:nvGrpSpPr>
-        <p:cNvPr id="1" name=""/>
-        <p:cNvGrpSpPr/>
-        <p:nvPr/>
-      </p:nvGrpSpPr>
-      <p:grpSpPr>
-        <a:xfrm>
-          <a:off x="0" y="0"/>
-          <a:ext cx="0" cy="0"/>
-          <a:chOff x="0" y="0"/>
-          <a:chExt cx="0" cy="0"/>
-        </a:xfrm>
-      </p:grpSpPr>
-      <p:sp>
-        <p:nvSpPr>
-          <p:cNvPr id="2" name="Title 1">
-            <a:extLst>
-              <a:ext uri="{FF2B5EF4-FFF2-40B4-BE49-F238E27FC236}">
-                <a16:creationId xmlns:a16="http://schemas.microsoft.com/office/drawing/2014/main" id="{125F7DD1-BC99-F967-7E0D-AD07C61B1543}"/>
-              </a:ext>
-            </a:extLst>
-          </p:cNvPr>
-          <p:cNvSpPr>
-            <a:spLocks noGrp="1"/>
-          </p:cNvSpPr>
-          <p:nvPr>
-            <p:ph type="title"/>
-          </p:nvPr>
-        </p:nvSpPr>
-        <p:spPr>
-          <a:xfrm>
-            <a:off x="831850" y="1709738"/>
-            <a:ext cx="10515600" cy="2852737"/>
-          </a:xfrm>
-        </p:spPr>
-        <p:txBody>
-          <a:bodyPr/>
-          <a:lstStyle/>
-          <a:p>
-            <a:pPr lvl="0" indent="0" marL="0">
-              <a:buNone/>
-            </a:pPr>
-            <a:r>
-              <a:rPr/>
-              <a:t>Section Header?</a:t>
-            </a:r>
-          </a:p>
-        </p:txBody>
-      </p:sp>
-      <p:sp>
-        <p:nvSpPr>
-          <p:cNvPr id="6" name="Slide Number Placeholder 5">
-            <a:extLst>
-              <a:ext uri="{FF2B5EF4-FFF2-40B4-BE49-F238E27FC236}">
-                <a16:creationId xmlns:a16="http://schemas.microsoft.com/office/drawing/2014/main" id="{B93C94A4-D223-C226-398A-59B1A3955C6C}"/>
-              </a:ext>
-            </a:extLst>
-          </p:cNvPr>
-          <p:cNvSpPr>
-            <a:spLocks noGrp="1"/>
-          </p:cNvSpPr>
-          <p:nvPr>
-            <p:ph idx="12" sz="quarter" type="sldNum"/>
-          </p:nvPr>
-        </p:nvSpPr>
-        <p:spPr>
-          <a:xfrm>
-            <a:off x="8610599" y="6356350"/>
-            <a:ext cx="3135001" cy="365125"/>
-          </a:xfrm>
-        </p:spPr>
-        <p:txBody>
-          <a:bodyPr/>
-          <a:lstStyle/>
-          <a:p>
-            <a:fld id="{7FEFBAB6-26D0-44D8-BD53-612461CE1ACC}" type="slidenum">
-              <a:rPr lang="de-DE" smtClean="0"/>
-              <a:t>‹#›</a:t>
-            </a:fld>
-            <a:endParaRPr lang="de-DE"/>
-          </a:p>
-        </p:txBody>
-      </p:sp>
-    </p:spTree>
-  </p:cSld>
-</p:sld>
-</file>
-
-<file path=ppt/slides/slide30.xml><?xml version="1.0" encoding="utf-8"?>
+<file path=ppt/slides/slide32.xml><?xml version="1.0" encoding="utf-8"?>
 <p:sld xmlns:a="http://schemas.openxmlformats.org/drawingml/2006/main" xmlns:r="http://schemas.openxmlformats.org/officeDocument/2006/relationships" xmlns:p="http://schemas.openxmlformats.org/presentationml/2006/main">
   <p:cSld>
     <p:spTree>
@@ -13610,362 +15507,6 @@
 </p:sld>
 </file>
 
-<file path=ppt/slides/slide31.xml><?xml version="1.0" encoding="utf-8"?>
-<p:sld xmlns:a="http://schemas.openxmlformats.org/drawingml/2006/main" xmlns:r="http://schemas.openxmlformats.org/officeDocument/2006/relationships" xmlns:p="http://schemas.openxmlformats.org/presentationml/2006/main">
-  <p:cSld>
-    <p:spTree>
-      <p:nvGrpSpPr>
-        <p:cNvPr id="1" name=""/>
-        <p:cNvGrpSpPr/>
-        <p:nvPr/>
-      </p:nvGrpSpPr>
-      <p:grpSpPr>
-        <a:xfrm>
-          <a:off x="0" y="0"/>
-          <a:ext cx="0" cy="0"/>
-          <a:chOff x="0" y="0"/>
-          <a:chExt cx="0" cy="0"/>
-        </a:xfrm>
-      </p:grpSpPr>
-      <p:sp>
-        <p:nvSpPr>
-          <p:cNvPr id="2" name="Title 1">
-            <a:extLst>
-              <a:ext uri="{FF2B5EF4-FFF2-40B4-BE49-F238E27FC236}">
-                <a16:creationId xmlns:a16="http://schemas.microsoft.com/office/drawing/2014/main" id="{6BF04AE0-F94F-A586-34B8-68D9CAB6C6D1}"/>
-              </a:ext>
-            </a:extLst>
-          </p:cNvPr>
-          <p:cNvSpPr>
-            <a:spLocks noGrp="1"/>
-          </p:cNvSpPr>
-          <p:nvPr>
-            <p:ph type="title"/>
-          </p:nvPr>
-        </p:nvSpPr>
-        <p:spPr>
-          <a:xfrm>
-            <a:off x="2295524" y="432532"/>
-            <a:ext cx="9450077" cy="825501"/>
-          </a:xfrm>
-        </p:spPr>
-        <p:txBody>
-          <a:bodyPr/>
-          <a:lstStyle/>
-          <a:p>
-            <a:pPr lvl="0" indent="0" marL="0">
-              <a:buNone/>
-            </a:pPr>
-            <a:r>
-              <a:rPr/>
-              <a:t>Your turn!</a:t>
-            </a:r>
-          </a:p>
-        </p:txBody>
-      </p:sp>
-      <p:sp>
-        <p:nvSpPr>
-          <p:cNvPr id="3" name="Content Placeholder 2">
-            <a:extLst>
-              <a:ext uri="{FF2B5EF4-FFF2-40B4-BE49-F238E27FC236}">
-                <a16:creationId xmlns:a16="http://schemas.microsoft.com/office/drawing/2014/main" id="{372FA590-20E9-0368-85B4-90C26598F852}"/>
-              </a:ext>
-            </a:extLst>
-          </p:cNvPr>
-          <p:cNvSpPr>
-            <a:spLocks noGrp="1"/>
-          </p:cNvSpPr>
-          <p:nvPr>
-            <p:ph idx="1"/>
-          </p:nvPr>
-        </p:nvSpPr>
-        <p:spPr/>
-        <p:txBody>
-          <a:bodyPr/>
-          <a:lstStyle/>
-          <a:p>
-            <a:pPr lvl="0" indent="0" marL="0">
-              <a:buNone/>
-            </a:pPr>
-            <a:r>
-              <a:rPr/>
-              <a:t>In this next part, you will familiarize yourself with </a:t>
-            </a:r>
-            <a:r>
-              <a:rPr b="1"/>
-              <a:t>Zotero</a:t>
-            </a:r>
-            <a:r>
-              <a:rPr/>
-              <a:t> through </a:t>
-            </a:r>
-            <a:r>
-              <a:rPr b="1"/>
-              <a:t>hands-on exercices and activities</a:t>
-            </a:r>
-            <a:r>
-              <a:rPr/>
-              <a:t>:</a:t>
-            </a:r>
-          </a:p>
-          <a:p>
-            <a:pPr lvl="0"/>
-            <a:r>
-              <a:rPr/>
-              <a:t>Click here: </a:t>
-            </a:r>
-            <a:r>
-              <a:rPr>
-                <a:hlinkClick r:id="rId3"/>
-              </a:rPr>
-              <a:t>Zotero: Hands-on practical activities</a:t>
-            </a:r>
-          </a:p>
-          <a:p>
-            <a:pPr lvl="0"/>
-            <a:r>
-              <a:rPr/>
-              <a:t>Or follow: </a:t>
-            </a:r>
-            <a:r>
-              <a:rPr>
-                <a:hlinkClick r:id="rId4"/>
-              </a:rPr>
-              <a:t>https://lmu-osc.github.io/introduction-to-zotero/background/zotero_basics.html</a:t>
-            </a:r>
-          </a:p>
-          <a:p>
-            <a:pPr lvl="0" indent="0" marL="0">
-              <a:buNone/>
-            </a:pPr>
-            <a:r>
-              <a:rPr b="1"/>
-              <a:t>Tip:</a:t>
-            </a:r>
-          </a:p>
-          <a:p>
-            <a:pPr lvl="0" indent="0" marL="0">
-              <a:buNone/>
-            </a:pPr>
-            <a:r>
-              <a:rPr/>
-              <a:t>Since this is a self-paced tutorial, </a:t>
-            </a:r>
-            <a:r>
-              <a:rPr i="1"/>
-              <a:t>take your time</a:t>
-            </a:r>
-            <a:r>
-              <a:rPr/>
-              <a:t> on navigating it; and it can be finished at home as well. We will have a </a:t>
-            </a:r>
-            <a:r>
-              <a:rPr b="1"/>
-              <a:t>check-in moment</a:t>
-            </a:r>
-            <a:r>
-              <a:rPr/>
-              <a:t> at the end of this session and discuss any remaining questions.</a:t>
-            </a:r>
-          </a:p>
-        </p:txBody>
-      </p:sp>
-      <p:sp>
-        <p:nvSpPr>
-          <p:cNvPr id="6" name="Slide Number Placeholder 5">
-            <a:extLst>
-              <a:ext uri="{FF2B5EF4-FFF2-40B4-BE49-F238E27FC236}">
-                <a16:creationId xmlns:a16="http://schemas.microsoft.com/office/drawing/2014/main" id="{5F33F24B-1A9E-2EAF-F2AB-89426454DEE9}"/>
-              </a:ext>
-            </a:extLst>
-          </p:cNvPr>
-          <p:cNvSpPr>
-            <a:spLocks noGrp="1"/>
-          </p:cNvSpPr>
-          <p:nvPr>
-            <p:ph idx="12" sz="quarter" type="sldNum"/>
-          </p:nvPr>
-        </p:nvSpPr>
-        <p:spPr>
-          <a:xfrm>
-            <a:off x="8610599" y="6356350"/>
-            <a:ext cx="3135001" cy="365125"/>
-          </a:xfrm>
-        </p:spPr>
-        <p:txBody>
-          <a:bodyPr/>
-          <a:lstStyle/>
-          <a:p>
-            <a:fld id="{7FEFBAB6-26D0-44D8-BD53-612461CE1ACC}" type="slidenum">
-              <a:rPr lang="de-DE" smtClean="0"/>
-              <a:t>‹#›</a:t>
-            </a:fld>
-            <a:endParaRPr lang="de-DE"/>
-          </a:p>
-        </p:txBody>
-      </p:sp>
-    </p:spTree>
-  </p:cSld>
-</p:sld>
-</file>
-
-<file path=ppt/slides/slide32.xml><?xml version="1.0" encoding="utf-8"?>
-<p:sld xmlns:a="http://schemas.openxmlformats.org/drawingml/2006/main" xmlns:r="http://schemas.openxmlformats.org/officeDocument/2006/relationships" xmlns:p="http://schemas.openxmlformats.org/presentationml/2006/main">
-  <p:cSld>
-    <p:spTree>
-      <p:nvGrpSpPr>
-        <p:cNvPr id="1" name=""/>
-        <p:cNvGrpSpPr/>
-        <p:nvPr/>
-      </p:nvGrpSpPr>
-      <p:grpSpPr>
-        <a:xfrm>
-          <a:off x="0" y="0"/>
-          <a:ext cx="0" cy="0"/>
-          <a:chOff x="0" y="0"/>
-          <a:chExt cx="0" cy="0"/>
-        </a:xfrm>
-      </p:grpSpPr>
-      <p:sp>
-        <p:nvSpPr>
-          <p:cNvPr id="2" name="Title 1">
-            <a:extLst>
-              <a:ext uri="{FF2B5EF4-FFF2-40B4-BE49-F238E27FC236}">
-                <a16:creationId xmlns:a16="http://schemas.microsoft.com/office/drawing/2014/main" id="{6BF04AE0-F94F-A586-34B8-68D9CAB6C6D1}"/>
-              </a:ext>
-            </a:extLst>
-          </p:cNvPr>
-          <p:cNvSpPr>
-            <a:spLocks noGrp="1"/>
-          </p:cNvSpPr>
-          <p:nvPr>
-            <p:ph type="title"/>
-          </p:nvPr>
-        </p:nvSpPr>
-        <p:spPr>
-          <a:xfrm>
-            <a:off x="2295524" y="432532"/>
-            <a:ext cx="9450077" cy="825501"/>
-          </a:xfrm>
-        </p:spPr>
-        <p:txBody>
-          <a:bodyPr/>
-          <a:lstStyle/>
-          <a:p>
-            <a:pPr lvl="0" indent="0" marL="0">
-              <a:buNone/>
-            </a:pPr>
-            <a:r>
-              <a:rPr/>
-              <a:t>Wrapping up</a:t>
-            </a:r>
-          </a:p>
-        </p:txBody>
-      </p:sp>
-      <p:sp>
-        <p:nvSpPr>
-          <p:cNvPr id="3" name="Content Placeholder 2">
-            <a:extLst>
-              <a:ext uri="{FF2B5EF4-FFF2-40B4-BE49-F238E27FC236}">
-                <a16:creationId xmlns:a16="http://schemas.microsoft.com/office/drawing/2014/main" id="{372FA590-20E9-0368-85B4-90C26598F852}"/>
-              </a:ext>
-            </a:extLst>
-          </p:cNvPr>
-          <p:cNvSpPr>
-            <a:spLocks noGrp="1"/>
-          </p:cNvSpPr>
-          <p:nvPr>
-            <p:ph idx="1"/>
-          </p:nvPr>
-        </p:nvSpPr>
-        <p:spPr/>
-        <p:txBody>
-          <a:bodyPr/>
-          <a:lstStyle/>
-          <a:p>
-            <a:pPr lvl="0"/>
-            <a:r>
-              <a:rPr b="1"/>
-              <a:t>For later</a:t>
-            </a:r>
-            <a:r>
-              <a:rPr/>
-              <a:t>: Finish the remaining of the ‘Introduction to Zotero’ tutorial and its exercises at home.</a:t>
-            </a:r>
-          </a:p>
-          <a:p>
-            <a:pPr lvl="0"/>
-            <a:r>
-              <a:rPr b="1"/>
-              <a:t>For now</a:t>
-            </a:r>
-            <a:r>
-              <a:rPr/>
-              <a:t>: Take one minute to assess your learning progress from the tutorial:</a:t>
-            </a:r>
-          </a:p>
-          <a:p>
-            <a:pPr lvl="1"/>
-            <a:r>
-              <a:rPr/>
-              <a:t>What is one key concept about citations or Zotero that became clearer after completing the exercises?</a:t>
-            </a:r>
-          </a:p>
-          <a:p>
-            <a:pPr lvl="1"/>
-            <a:r>
-              <a:rPr/>
-              <a:t>Which Zotero task can you now perform confidently, and which one still feels challenging?</a:t>
-            </a:r>
-          </a:p>
-          <a:p>
-            <a:pPr lvl="1"/>
-            <a:r>
-              <a:rPr/>
-              <a:t>How easy has it been navigating different CSL formats?</a:t>
-            </a:r>
-          </a:p>
-        </p:txBody>
-      </p:sp>
-      <p:sp>
-        <p:nvSpPr>
-          <p:cNvPr id="6" name="Slide Number Placeholder 5">
-            <a:extLst>
-              <a:ext uri="{FF2B5EF4-FFF2-40B4-BE49-F238E27FC236}">
-                <a16:creationId xmlns:a16="http://schemas.microsoft.com/office/drawing/2014/main" id="{5F33F24B-1A9E-2EAF-F2AB-89426454DEE9}"/>
-              </a:ext>
-            </a:extLst>
-          </p:cNvPr>
-          <p:cNvSpPr>
-            <a:spLocks noGrp="1"/>
-          </p:cNvSpPr>
-          <p:nvPr>
-            <p:ph idx="12" sz="quarter" type="sldNum"/>
-          </p:nvPr>
-        </p:nvSpPr>
-        <p:spPr>
-          <a:xfrm>
-            <a:off x="8610599" y="6356350"/>
-            <a:ext cx="3135001" cy="365125"/>
-          </a:xfrm>
-        </p:spPr>
-        <p:txBody>
-          <a:bodyPr/>
-          <a:lstStyle/>
-          <a:p>
-            <a:fld id="{7FEFBAB6-26D0-44D8-BD53-612461CE1ACC}" type="slidenum">
-              <a:rPr lang="de-DE" smtClean="0"/>
-              <a:t>‹#›</a:t>
-            </a:fld>
-            <a:endParaRPr lang="de-DE"/>
-          </a:p>
-        </p:txBody>
-      </p:sp>
-    </p:spTree>
-  </p:cSld>
-</p:sld>
-</file>
-
 <file path=ppt/slides/slide33.xml><?xml version="1.0" encoding="utf-8"?>
 <p:sld xmlns:a="http://schemas.openxmlformats.org/drawingml/2006/main" xmlns:r="http://schemas.openxmlformats.org/officeDocument/2006/relationships" xmlns:p="http://schemas.openxmlformats.org/presentationml/2006/main">
   <p:cSld>
@@ -14014,7 +15555,7 @@
             </a:pPr>
             <a:r>
               <a:rPr/>
-              <a:t>Looking into the future</a:t>
+              <a:t>Your turn!</a:t>
             </a:r>
           </a:p>
         </p:txBody>
@@ -14040,66 +15581,88 @@
           <a:bodyPr/>
           <a:lstStyle/>
           <a:p>
-            <a:pPr lvl="0" indent="-457200" marL="457200">
-              <a:buAutoNum type="arabicPeriod"/>
-            </a:pPr>
+            <a:pPr lvl="0" indent="0" marL="0">
+              <a:buNone/>
+            </a:pPr>
+            <a:r>
+              <a:rPr/>
+              <a:t>In this next part, you will familiarize yourself with </a:t>
+            </a:r>
             <a:r>
               <a:rPr b="1"/>
-              <a:t>Take a minute to think about the following questions, first for yourself, then in a pair:</a:t>
+              <a:t>Zotero</a:t>
+            </a:r>
+            <a:r>
+              <a:rPr/>
+              <a:t> through </a:t>
+            </a:r>
+            <a:r>
+              <a:rPr b="1"/>
+              <a:t>hands-on exercices and activities</a:t>
+            </a:r>
+            <a:r>
+              <a:rPr/>
+              <a:t>:</a:t>
             </a:r>
           </a:p>
           <a:p>
             <a:pPr lvl="0"/>
             <a:r>
               <a:rPr/>
-              <a:t>Can you identify some </a:t>
-            </a:r>
+              <a:t>Click here: </a:t>
+            </a:r>
+            <a:r>
+              <a:rPr>
+                <a:hlinkClick r:id="rId3"/>
+              </a:rPr>
+              <a:t>Zotero: Hands-on practical activities</a:t>
+            </a:r>
+          </a:p>
+          <a:p>
+            <a:pPr lvl="0"/>
+            <a:r>
+              <a:rPr/>
+              <a:t>Or follow: </a:t>
+            </a:r>
+            <a:r>
+              <a:rPr>
+                <a:hlinkClick r:id="rId4"/>
+              </a:rPr>
+              <a:t>https://lmu-osc.github.io/introduction-to-zotero/background/zotero_basics.html</a:t>
+            </a:r>
+          </a:p>
+          <a:p>
+            <a:pPr lvl="0" indent="0" marL="0">
+              <a:buNone/>
+            </a:pPr>
             <a:r>
               <a:rPr b="1"/>
-              <a:t>practical benefits</a:t>
-            </a:r>
-            <a:r>
-              <a:rPr/>
-              <a:t> of using Zotero?</a:t>
-            </a:r>
-          </a:p>
-          <a:p>
-            <a:pPr lvl="0"/>
-            <a:r>
-              <a:rPr/>
-              <a:t>What </a:t>
+              <a:t>Tip:</a:t>
+            </a:r>
+          </a:p>
+          <a:p>
+            <a:pPr lvl="0" indent="0" marL="0">
+              <a:buNone/>
+            </a:pPr>
+            <a:r>
+              <a:rPr/>
+              <a:t>Since this is a self-paced tutorial, </a:t>
+            </a:r>
+            <a:r>
+              <a:rPr i="1"/>
+              <a:t>take your time</a:t>
+            </a:r>
+            <a:r>
+              <a:rPr/>
+              <a:t> on navigating it; and it can be finished at home as well. We will have a </a:t>
             </a:r>
             <a:r>
               <a:rPr b="1"/>
-              <a:t>obstacles</a:t>
-            </a:r>
-            <a:r>
-              <a:rPr/>
-              <a:t> do you anticipate in using it consistently?</a:t>
-            </a:r>
-          </a:p>
-          <a:p>
-            <a:pPr lvl="0"/>
-            <a:r>
-              <a:rPr/>
-              <a:t>How can Zotero support you in your </a:t>
-            </a:r>
-            <a:r>
-              <a:rPr b="1"/>
-              <a:t>upcoming projects</a:t>
-            </a:r>
-            <a:r>
-              <a:rPr/>
-              <a:t>?</a:t>
-            </a:r>
-          </a:p>
-          <a:p>
-            <a:pPr lvl="0" indent="-457200" marL="457200">
-              <a:buAutoNum startAt="2" type="arabicPeriod"/>
-            </a:pPr>
-            <a:r>
-              <a:rPr b="1"/>
-              <a:t>Share your thoughts with the group.</a:t>
+              <a:t>check-in moment</a:t>
+            </a:r>
+            <a:r>
+              <a:rPr/>
+              <a:t> at the end of this session and discuss any remaining questions.</a:t>
             </a:r>
           </a:p>
         </p:txBody>
@@ -14140,10 +15703,1031 @@
       </p:sp>
     </p:spTree>
   </p:cSld>
+  <p:timing>
+    <p:tnLst>
+      <p:par>
+        <p:cTn id="1" dur="indefinite" restart="never" nodeType="tmRoot">
+          <p:childTnLst>
+            <p:seq concurrent="1" nextAc="seek">
+              <p:cTn id="2" dur="indefinite" nodeType="mainSeq">
+                <p:childTnLst>
+                  <p:par>
+                    <p:cTn id="3" fill="hold">
+                      <p:stCondLst>
+                        <p:cond delay="indefinite"/>
+                      </p:stCondLst>
+                      <p:childTnLst>
+                        <p:par>
+                          <p:cTn id="4" fill="hold">
+                            <p:stCondLst>
+                              <p:cond delay="0"/>
+                            </p:stCondLst>
+                            <p:childTnLst>
+                              <p:par>
+                                <p:cTn id="5" presetID="1" presetClass="entr" presetSubtype="0" fill="hold" grpId="0" nodeType="clickEffect">
+                                  <p:stCondLst>
+                                    <p:cond delay="0"/>
+                                  </p:stCondLst>
+                                  <p:childTnLst>
+                                    <p:set>
+                                      <p:cBhvr>
+                                        <p:cTn id="6" dur="1" fill="hold">
+                                          <p:stCondLst>
+                                            <p:cond delay="0"/>
+                                          </p:stCondLst>
+                                        </p:cTn>
+                                        <p:tgtEl>
+                                          <p:spTgt spid="3">
+                                            <p:txEl>
+                                              <p:pRg st="1" end="1"/>
+                                            </p:txEl>
+                                          </p:spTgt>
+                                        </p:tgtEl>
+                                        <p:attrNameLst>
+                                          <p:attrName>style.visibility</p:attrName>
+                                        </p:attrNameLst>
+                                      </p:cBhvr>
+                                      <p:to>
+                                        <p:strVal val="visible"/>
+                                      </p:to>
+                                    </p:set>
+                                  </p:childTnLst>
+                                </p:cTn>
+                              </p:par>
+                            </p:childTnLst>
+                          </p:cTn>
+                        </p:par>
+                      </p:childTnLst>
+                    </p:cTn>
+                  </p:par>
+                  <p:par>
+                    <p:cTn id="7" fill="hold">
+                      <p:stCondLst>
+                        <p:cond delay="indefinite"/>
+                      </p:stCondLst>
+                      <p:childTnLst>
+                        <p:par>
+                          <p:cTn id="8" fill="hold">
+                            <p:stCondLst>
+                              <p:cond delay="0"/>
+                            </p:stCondLst>
+                            <p:childTnLst>
+                              <p:par>
+                                <p:cTn id="9" presetID="1" presetClass="entr" presetSubtype="0" fill="hold" grpId="0" nodeType="clickEffect">
+                                  <p:stCondLst>
+                                    <p:cond delay="0"/>
+                                  </p:stCondLst>
+                                  <p:childTnLst>
+                                    <p:set>
+                                      <p:cBhvr>
+                                        <p:cTn id="10" dur="1" fill="hold">
+                                          <p:stCondLst>
+                                            <p:cond delay="0"/>
+                                          </p:stCondLst>
+                                        </p:cTn>
+                                        <p:tgtEl>
+                                          <p:spTgt spid="3">
+                                            <p:txEl>
+                                              <p:pRg st="2" end="2"/>
+                                            </p:txEl>
+                                          </p:spTgt>
+                                        </p:tgtEl>
+                                        <p:attrNameLst>
+                                          <p:attrName>style.visibility</p:attrName>
+                                        </p:attrNameLst>
+                                      </p:cBhvr>
+                                      <p:to>
+                                        <p:strVal val="visible"/>
+                                      </p:to>
+                                    </p:set>
+                                  </p:childTnLst>
+                                </p:cTn>
+                              </p:par>
+                            </p:childTnLst>
+                          </p:cTn>
+                        </p:par>
+                      </p:childTnLst>
+                    </p:cTn>
+                  </p:par>
+                </p:childTnLst>
+              </p:cTn>
+              <p:prevCondLst>
+                <p:cond evt="onPrev" delay="0">
+                  <p:tgtEl>
+                    <p:sldTgt/>
+                  </p:tgtEl>
+                </p:cond>
+              </p:prevCondLst>
+              <p:nextCondLst>
+                <p:cond evt="onNext" delay="0">
+                  <p:tgtEl>
+                    <p:sldTgt/>
+                  </p:tgtEl>
+                </p:cond>
+              </p:nextCondLst>
+            </p:seq>
+          </p:childTnLst>
+        </p:cTn>
+      </p:par>
+    </p:tnLst>
+    <p:bldLst>
+      <p:bldP spid="3" grpId="0" uiExpand="1" build="p"/>
+    </p:bldLst>
+  </p:timing>
 </p:sld>
 </file>
 
 <file path=ppt/slides/slide34.xml><?xml version="1.0" encoding="utf-8"?>
+<p:sld xmlns:a="http://schemas.openxmlformats.org/drawingml/2006/main" xmlns:r="http://schemas.openxmlformats.org/officeDocument/2006/relationships" xmlns:p="http://schemas.openxmlformats.org/presentationml/2006/main">
+  <p:cSld>
+    <p:spTree>
+      <p:nvGrpSpPr>
+        <p:cNvPr id="1" name=""/>
+        <p:cNvGrpSpPr/>
+        <p:nvPr/>
+      </p:nvGrpSpPr>
+      <p:grpSpPr>
+        <a:xfrm>
+          <a:off x="0" y="0"/>
+          <a:ext cx="0" cy="0"/>
+          <a:chOff x="0" y="0"/>
+          <a:chExt cx="0" cy="0"/>
+        </a:xfrm>
+      </p:grpSpPr>
+      <p:sp>
+        <p:nvSpPr>
+          <p:cNvPr id="2" name="Title 1">
+            <a:extLst>
+              <a:ext uri="{FF2B5EF4-FFF2-40B4-BE49-F238E27FC236}">
+                <a16:creationId xmlns:a16="http://schemas.microsoft.com/office/drawing/2014/main" id="{6BF04AE0-F94F-A586-34B8-68D9CAB6C6D1}"/>
+              </a:ext>
+            </a:extLst>
+          </p:cNvPr>
+          <p:cNvSpPr>
+            <a:spLocks noGrp="1"/>
+          </p:cNvSpPr>
+          <p:nvPr>
+            <p:ph type="title"/>
+          </p:nvPr>
+        </p:nvSpPr>
+        <p:spPr>
+          <a:xfrm>
+            <a:off x="2295524" y="432532"/>
+            <a:ext cx="9450077" cy="825501"/>
+          </a:xfrm>
+        </p:spPr>
+        <p:txBody>
+          <a:bodyPr/>
+          <a:lstStyle/>
+          <a:p>
+            <a:pPr lvl="0" indent="0" marL="0">
+              <a:buNone/>
+            </a:pPr>
+            <a:r>
+              <a:rPr/>
+              <a:t>Wrapping up</a:t>
+            </a:r>
+          </a:p>
+        </p:txBody>
+      </p:sp>
+      <p:sp>
+        <p:nvSpPr>
+          <p:cNvPr id="3" name="Content Placeholder 2">
+            <a:extLst>
+              <a:ext uri="{FF2B5EF4-FFF2-40B4-BE49-F238E27FC236}">
+                <a16:creationId xmlns:a16="http://schemas.microsoft.com/office/drawing/2014/main" id="{372FA590-20E9-0368-85B4-90C26598F852}"/>
+              </a:ext>
+            </a:extLst>
+          </p:cNvPr>
+          <p:cNvSpPr>
+            <a:spLocks noGrp="1"/>
+          </p:cNvSpPr>
+          <p:nvPr>
+            <p:ph idx="1"/>
+          </p:nvPr>
+        </p:nvSpPr>
+        <p:spPr/>
+        <p:txBody>
+          <a:bodyPr/>
+          <a:lstStyle/>
+          <a:p>
+            <a:pPr lvl="0"/>
+            <a:r>
+              <a:rPr b="1"/>
+              <a:t>For later</a:t>
+            </a:r>
+            <a:r>
+              <a:rPr/>
+              <a:t>: Finish the remaining of the ‘Introduction to Zotero’ tutorial and its exercises at home.</a:t>
+            </a:r>
+          </a:p>
+          <a:p>
+            <a:pPr lvl="0"/>
+            <a:r>
+              <a:rPr b="1"/>
+              <a:t>For now</a:t>
+            </a:r>
+            <a:r>
+              <a:rPr/>
+              <a:t>: Take one minute to assess your learning progress from the tutorial:</a:t>
+            </a:r>
+          </a:p>
+          <a:p>
+            <a:pPr lvl="1"/>
+            <a:r>
+              <a:rPr/>
+              <a:t>What is one key concept about citations or Zotero that became clearer after completing the exercises?</a:t>
+            </a:r>
+          </a:p>
+          <a:p>
+            <a:pPr lvl="1"/>
+            <a:r>
+              <a:rPr/>
+              <a:t>Which Zotero task can you now perform confidently, and which one still feels challenging?</a:t>
+            </a:r>
+          </a:p>
+          <a:p>
+            <a:pPr lvl="1"/>
+            <a:r>
+              <a:rPr/>
+              <a:t>How easy has it been navigating different CSL formats?</a:t>
+            </a:r>
+          </a:p>
+        </p:txBody>
+      </p:sp>
+      <p:sp>
+        <p:nvSpPr>
+          <p:cNvPr id="6" name="Slide Number Placeholder 5">
+            <a:extLst>
+              <a:ext uri="{FF2B5EF4-FFF2-40B4-BE49-F238E27FC236}">
+                <a16:creationId xmlns:a16="http://schemas.microsoft.com/office/drawing/2014/main" id="{5F33F24B-1A9E-2EAF-F2AB-89426454DEE9}"/>
+              </a:ext>
+            </a:extLst>
+          </p:cNvPr>
+          <p:cNvSpPr>
+            <a:spLocks noGrp="1"/>
+          </p:cNvSpPr>
+          <p:nvPr>
+            <p:ph idx="12" sz="quarter" type="sldNum"/>
+          </p:nvPr>
+        </p:nvSpPr>
+        <p:spPr>
+          <a:xfrm>
+            <a:off x="8610599" y="6356350"/>
+            <a:ext cx="3135001" cy="365125"/>
+          </a:xfrm>
+        </p:spPr>
+        <p:txBody>
+          <a:bodyPr/>
+          <a:lstStyle/>
+          <a:p>
+            <a:fld id="{7FEFBAB6-26D0-44D8-BD53-612461CE1ACC}" type="slidenum">
+              <a:rPr lang="de-DE" smtClean="0"/>
+              <a:t>‹#›</a:t>
+            </a:fld>
+            <a:endParaRPr lang="de-DE"/>
+          </a:p>
+        </p:txBody>
+      </p:sp>
+    </p:spTree>
+  </p:cSld>
+  <p:timing>
+    <p:tnLst>
+      <p:par>
+        <p:cTn id="1" dur="indefinite" restart="never" nodeType="tmRoot">
+          <p:childTnLst>
+            <p:seq concurrent="1" nextAc="seek">
+              <p:cTn id="2" dur="indefinite" nodeType="mainSeq">
+                <p:childTnLst>
+                  <p:par>
+                    <p:cTn id="3" fill="hold">
+                      <p:stCondLst>
+                        <p:cond delay="indefinite"/>
+                      </p:stCondLst>
+                      <p:childTnLst>
+                        <p:par>
+                          <p:cTn id="4" fill="hold">
+                            <p:stCondLst>
+                              <p:cond delay="0"/>
+                            </p:stCondLst>
+                            <p:childTnLst>
+                              <p:par>
+                                <p:cTn id="5" presetID="1" presetClass="entr" presetSubtype="0" fill="hold" grpId="0" nodeType="clickEffect">
+                                  <p:stCondLst>
+                                    <p:cond delay="0"/>
+                                  </p:stCondLst>
+                                  <p:childTnLst>
+                                    <p:set>
+                                      <p:cBhvr>
+                                        <p:cTn id="6" dur="1" fill="hold">
+                                          <p:stCondLst>
+                                            <p:cond delay="0"/>
+                                          </p:stCondLst>
+                                        </p:cTn>
+                                        <p:tgtEl>
+                                          <p:spTgt spid="3">
+                                            <p:txEl>
+                                              <p:pRg st="0" end="0"/>
+                                            </p:txEl>
+                                          </p:spTgt>
+                                        </p:tgtEl>
+                                        <p:attrNameLst>
+                                          <p:attrName>style.visibility</p:attrName>
+                                        </p:attrNameLst>
+                                      </p:cBhvr>
+                                      <p:to>
+                                        <p:strVal val="visible"/>
+                                      </p:to>
+                                    </p:set>
+                                  </p:childTnLst>
+                                </p:cTn>
+                              </p:par>
+                            </p:childTnLst>
+                          </p:cTn>
+                        </p:par>
+                      </p:childTnLst>
+                    </p:cTn>
+                  </p:par>
+                  <p:par>
+                    <p:cTn id="7" fill="hold">
+                      <p:stCondLst>
+                        <p:cond delay="indefinite"/>
+                      </p:stCondLst>
+                      <p:childTnLst>
+                        <p:par>
+                          <p:cTn id="8" fill="hold">
+                            <p:stCondLst>
+                              <p:cond delay="0"/>
+                            </p:stCondLst>
+                            <p:childTnLst>
+                              <p:par>
+                                <p:cTn id="9" presetID="1" presetClass="entr" presetSubtype="0" fill="hold" grpId="0" nodeType="clickEffect">
+                                  <p:stCondLst>
+                                    <p:cond delay="0"/>
+                                  </p:stCondLst>
+                                  <p:childTnLst>
+                                    <p:set>
+                                      <p:cBhvr>
+                                        <p:cTn id="10" dur="1" fill="hold">
+                                          <p:stCondLst>
+                                            <p:cond delay="0"/>
+                                          </p:stCondLst>
+                                        </p:cTn>
+                                        <p:tgtEl>
+                                          <p:spTgt spid="3">
+                                            <p:txEl>
+                                              <p:pRg st="1" end="1"/>
+                                            </p:txEl>
+                                          </p:spTgt>
+                                        </p:tgtEl>
+                                        <p:attrNameLst>
+                                          <p:attrName>style.visibility</p:attrName>
+                                        </p:attrNameLst>
+                                      </p:cBhvr>
+                                      <p:to>
+                                        <p:strVal val="visible"/>
+                                      </p:to>
+                                    </p:set>
+                                  </p:childTnLst>
+                                </p:cTn>
+                              </p:par>
+                            </p:childTnLst>
+                          </p:cTn>
+                        </p:par>
+                      </p:childTnLst>
+                    </p:cTn>
+                  </p:par>
+                  <p:par>
+                    <p:cTn id="11" fill="hold">
+                      <p:stCondLst>
+                        <p:cond delay="indefinite"/>
+                      </p:stCondLst>
+                      <p:childTnLst>
+                        <p:par>
+                          <p:cTn id="12" fill="hold">
+                            <p:stCondLst>
+                              <p:cond delay="0"/>
+                            </p:stCondLst>
+                            <p:childTnLst>
+                              <p:par>
+                                <p:cTn id="13" presetID="1" presetClass="entr" presetSubtype="0" fill="hold" grpId="0" nodeType="clickEffect">
+                                  <p:stCondLst>
+                                    <p:cond delay="0"/>
+                                  </p:stCondLst>
+                                  <p:childTnLst>
+                                    <p:set>
+                                      <p:cBhvr>
+                                        <p:cTn id="14" dur="1" fill="hold">
+                                          <p:stCondLst>
+                                            <p:cond delay="0"/>
+                                          </p:stCondLst>
+                                        </p:cTn>
+                                        <p:tgtEl>
+                                          <p:spTgt spid="3">
+                                            <p:txEl>
+                                              <p:pRg st="2" end="2"/>
+                                            </p:txEl>
+                                          </p:spTgt>
+                                        </p:tgtEl>
+                                        <p:attrNameLst>
+                                          <p:attrName>style.visibility</p:attrName>
+                                        </p:attrNameLst>
+                                      </p:cBhvr>
+                                      <p:to>
+                                        <p:strVal val="visible"/>
+                                      </p:to>
+                                    </p:set>
+                                  </p:childTnLst>
+                                </p:cTn>
+                              </p:par>
+                            </p:childTnLst>
+                          </p:cTn>
+                        </p:par>
+                      </p:childTnLst>
+                    </p:cTn>
+                  </p:par>
+                  <p:par>
+                    <p:cTn id="15" fill="hold">
+                      <p:stCondLst>
+                        <p:cond delay="indefinite"/>
+                      </p:stCondLst>
+                      <p:childTnLst>
+                        <p:par>
+                          <p:cTn id="16" fill="hold">
+                            <p:stCondLst>
+                              <p:cond delay="0"/>
+                            </p:stCondLst>
+                            <p:childTnLst>
+                              <p:par>
+                                <p:cTn id="17" presetID="1" presetClass="entr" presetSubtype="0" fill="hold" grpId="0" nodeType="clickEffect">
+                                  <p:stCondLst>
+                                    <p:cond delay="0"/>
+                                  </p:stCondLst>
+                                  <p:childTnLst>
+                                    <p:set>
+                                      <p:cBhvr>
+                                        <p:cTn id="18" dur="1" fill="hold">
+                                          <p:stCondLst>
+                                            <p:cond delay="0"/>
+                                          </p:stCondLst>
+                                        </p:cTn>
+                                        <p:tgtEl>
+                                          <p:spTgt spid="3">
+                                            <p:txEl>
+                                              <p:pRg st="3" end="3"/>
+                                            </p:txEl>
+                                          </p:spTgt>
+                                        </p:tgtEl>
+                                        <p:attrNameLst>
+                                          <p:attrName>style.visibility</p:attrName>
+                                        </p:attrNameLst>
+                                      </p:cBhvr>
+                                      <p:to>
+                                        <p:strVal val="visible"/>
+                                      </p:to>
+                                    </p:set>
+                                  </p:childTnLst>
+                                </p:cTn>
+                              </p:par>
+                            </p:childTnLst>
+                          </p:cTn>
+                        </p:par>
+                      </p:childTnLst>
+                    </p:cTn>
+                  </p:par>
+                  <p:par>
+                    <p:cTn id="19" fill="hold">
+                      <p:stCondLst>
+                        <p:cond delay="indefinite"/>
+                      </p:stCondLst>
+                      <p:childTnLst>
+                        <p:par>
+                          <p:cTn id="20" fill="hold">
+                            <p:stCondLst>
+                              <p:cond delay="0"/>
+                            </p:stCondLst>
+                            <p:childTnLst>
+                              <p:par>
+                                <p:cTn id="21" presetID="1" presetClass="entr" presetSubtype="0" fill="hold" grpId="0" nodeType="clickEffect">
+                                  <p:stCondLst>
+                                    <p:cond delay="0"/>
+                                  </p:stCondLst>
+                                  <p:childTnLst>
+                                    <p:set>
+                                      <p:cBhvr>
+                                        <p:cTn id="22" dur="1" fill="hold">
+                                          <p:stCondLst>
+                                            <p:cond delay="0"/>
+                                          </p:stCondLst>
+                                        </p:cTn>
+                                        <p:tgtEl>
+                                          <p:spTgt spid="3">
+                                            <p:txEl>
+                                              <p:pRg st="4" end="4"/>
+                                            </p:txEl>
+                                          </p:spTgt>
+                                        </p:tgtEl>
+                                        <p:attrNameLst>
+                                          <p:attrName>style.visibility</p:attrName>
+                                        </p:attrNameLst>
+                                      </p:cBhvr>
+                                      <p:to>
+                                        <p:strVal val="visible"/>
+                                      </p:to>
+                                    </p:set>
+                                  </p:childTnLst>
+                                </p:cTn>
+                              </p:par>
+                            </p:childTnLst>
+                          </p:cTn>
+                        </p:par>
+                      </p:childTnLst>
+                    </p:cTn>
+                  </p:par>
+                </p:childTnLst>
+              </p:cTn>
+              <p:prevCondLst>
+                <p:cond evt="onPrev" delay="0">
+                  <p:tgtEl>
+                    <p:sldTgt/>
+                  </p:tgtEl>
+                </p:cond>
+              </p:prevCondLst>
+              <p:nextCondLst>
+                <p:cond evt="onNext" delay="0">
+                  <p:tgtEl>
+                    <p:sldTgt/>
+                  </p:tgtEl>
+                </p:cond>
+              </p:nextCondLst>
+            </p:seq>
+          </p:childTnLst>
+        </p:cTn>
+      </p:par>
+    </p:tnLst>
+    <p:bldLst>
+      <p:bldP spid="3" grpId="0" uiExpand="1" build="p"/>
+    </p:bldLst>
+  </p:timing>
+</p:sld>
+</file>
+
+<file path=ppt/slides/slide35.xml><?xml version="1.0" encoding="utf-8"?>
+<p:sld xmlns:a="http://schemas.openxmlformats.org/drawingml/2006/main" xmlns:r="http://schemas.openxmlformats.org/officeDocument/2006/relationships" xmlns:p="http://schemas.openxmlformats.org/presentationml/2006/main">
+  <p:cSld>
+    <p:spTree>
+      <p:nvGrpSpPr>
+        <p:cNvPr id="1" name=""/>
+        <p:cNvGrpSpPr/>
+        <p:nvPr/>
+      </p:nvGrpSpPr>
+      <p:grpSpPr>
+        <a:xfrm>
+          <a:off x="0" y="0"/>
+          <a:ext cx="0" cy="0"/>
+          <a:chOff x="0" y="0"/>
+          <a:chExt cx="0" cy="0"/>
+        </a:xfrm>
+      </p:grpSpPr>
+      <p:sp>
+        <p:nvSpPr>
+          <p:cNvPr id="2" name="Title 1">
+            <a:extLst>
+              <a:ext uri="{FF2B5EF4-FFF2-40B4-BE49-F238E27FC236}">
+                <a16:creationId xmlns:a16="http://schemas.microsoft.com/office/drawing/2014/main" id="{6BF04AE0-F94F-A586-34B8-68D9CAB6C6D1}"/>
+              </a:ext>
+            </a:extLst>
+          </p:cNvPr>
+          <p:cNvSpPr>
+            <a:spLocks noGrp="1"/>
+          </p:cNvSpPr>
+          <p:nvPr>
+            <p:ph type="title"/>
+          </p:nvPr>
+        </p:nvSpPr>
+        <p:spPr>
+          <a:xfrm>
+            <a:off x="2295524" y="432532"/>
+            <a:ext cx="9450077" cy="825501"/>
+          </a:xfrm>
+        </p:spPr>
+        <p:txBody>
+          <a:bodyPr/>
+          <a:lstStyle/>
+          <a:p>
+            <a:pPr lvl="0" indent="0" marL="0">
+              <a:buNone/>
+            </a:pPr>
+            <a:r>
+              <a:rPr/>
+              <a:t>Looking into the future</a:t>
+            </a:r>
+          </a:p>
+        </p:txBody>
+      </p:sp>
+      <p:sp>
+        <p:nvSpPr>
+          <p:cNvPr id="3" name="Content Placeholder 2">
+            <a:extLst>
+              <a:ext uri="{FF2B5EF4-FFF2-40B4-BE49-F238E27FC236}">
+                <a16:creationId xmlns:a16="http://schemas.microsoft.com/office/drawing/2014/main" id="{372FA590-20E9-0368-85B4-90C26598F852}"/>
+              </a:ext>
+            </a:extLst>
+          </p:cNvPr>
+          <p:cNvSpPr>
+            <a:spLocks noGrp="1"/>
+          </p:cNvSpPr>
+          <p:nvPr>
+            <p:ph idx="1"/>
+          </p:nvPr>
+        </p:nvSpPr>
+        <p:spPr/>
+        <p:txBody>
+          <a:bodyPr/>
+          <a:lstStyle/>
+          <a:p>
+            <a:pPr lvl="0" indent="-457200" marL="457200">
+              <a:buAutoNum type="arabicPeriod"/>
+            </a:pPr>
+            <a:r>
+              <a:rPr b="1"/>
+              <a:t>Take a minute to think about the following questions, first for yourself, then in a pair:</a:t>
+            </a:r>
+          </a:p>
+          <a:p>
+            <a:pPr lvl="0"/>
+            <a:r>
+              <a:rPr/>
+              <a:t>Can you identify some </a:t>
+            </a:r>
+            <a:r>
+              <a:rPr b="1"/>
+              <a:t>practical benefits</a:t>
+            </a:r>
+            <a:r>
+              <a:rPr/>
+              <a:t> of using Zotero?</a:t>
+            </a:r>
+          </a:p>
+          <a:p>
+            <a:pPr lvl="0"/>
+            <a:r>
+              <a:rPr/>
+              <a:t>What </a:t>
+            </a:r>
+            <a:r>
+              <a:rPr b="1"/>
+              <a:t>obstacles</a:t>
+            </a:r>
+            <a:r>
+              <a:rPr/>
+              <a:t> do you anticipate in using it consistently?</a:t>
+            </a:r>
+          </a:p>
+          <a:p>
+            <a:pPr lvl="0"/>
+            <a:r>
+              <a:rPr/>
+              <a:t>How can Zotero support you in your </a:t>
+            </a:r>
+            <a:r>
+              <a:rPr b="1"/>
+              <a:t>upcoming projects</a:t>
+            </a:r>
+            <a:r>
+              <a:rPr/>
+              <a:t>?</a:t>
+            </a:r>
+          </a:p>
+          <a:p>
+            <a:pPr lvl="0" indent="-457200" marL="457200">
+              <a:buAutoNum startAt="2" type="arabicPeriod"/>
+            </a:pPr>
+            <a:r>
+              <a:rPr b="1"/>
+              <a:t>Share your thoughts with the group.</a:t>
+            </a:r>
+          </a:p>
+        </p:txBody>
+      </p:sp>
+      <p:sp>
+        <p:nvSpPr>
+          <p:cNvPr id="6" name="Slide Number Placeholder 5">
+            <a:extLst>
+              <a:ext uri="{FF2B5EF4-FFF2-40B4-BE49-F238E27FC236}">
+                <a16:creationId xmlns:a16="http://schemas.microsoft.com/office/drawing/2014/main" id="{5F33F24B-1A9E-2EAF-F2AB-89426454DEE9}"/>
+              </a:ext>
+            </a:extLst>
+          </p:cNvPr>
+          <p:cNvSpPr>
+            <a:spLocks noGrp="1"/>
+          </p:cNvSpPr>
+          <p:nvPr>
+            <p:ph idx="12" sz="quarter" type="sldNum"/>
+          </p:nvPr>
+        </p:nvSpPr>
+        <p:spPr>
+          <a:xfrm>
+            <a:off x="8610599" y="6356350"/>
+            <a:ext cx="3135001" cy="365125"/>
+          </a:xfrm>
+        </p:spPr>
+        <p:txBody>
+          <a:bodyPr/>
+          <a:lstStyle/>
+          <a:p>
+            <a:fld id="{7FEFBAB6-26D0-44D8-BD53-612461CE1ACC}" type="slidenum">
+              <a:rPr lang="de-DE" smtClean="0"/>
+              <a:t>‹#›</a:t>
+            </a:fld>
+            <a:endParaRPr lang="de-DE"/>
+          </a:p>
+        </p:txBody>
+      </p:sp>
+    </p:spTree>
+  </p:cSld>
+  <p:timing>
+    <p:tnLst>
+      <p:par>
+        <p:cTn id="1" dur="indefinite" restart="never" nodeType="tmRoot">
+          <p:childTnLst>
+            <p:seq concurrent="1" nextAc="seek">
+              <p:cTn id="2" dur="indefinite" nodeType="mainSeq">
+                <p:childTnLst>
+                  <p:par>
+                    <p:cTn id="3" fill="hold">
+                      <p:stCondLst>
+                        <p:cond delay="indefinite"/>
+                      </p:stCondLst>
+                      <p:childTnLst>
+                        <p:par>
+                          <p:cTn id="4" fill="hold">
+                            <p:stCondLst>
+                              <p:cond delay="0"/>
+                            </p:stCondLst>
+                            <p:childTnLst>
+                              <p:par>
+                                <p:cTn id="5" presetID="1" presetClass="entr" presetSubtype="0" fill="hold" grpId="0" nodeType="clickEffect">
+                                  <p:stCondLst>
+                                    <p:cond delay="0"/>
+                                  </p:stCondLst>
+                                  <p:childTnLst>
+                                    <p:set>
+                                      <p:cBhvr>
+                                        <p:cTn id="6" dur="1" fill="hold">
+                                          <p:stCondLst>
+                                            <p:cond delay="0"/>
+                                          </p:stCondLst>
+                                        </p:cTn>
+                                        <p:tgtEl>
+                                          <p:spTgt spid="3">
+                                            <p:txEl>
+                                              <p:pRg st="0" end="0"/>
+                                            </p:txEl>
+                                          </p:spTgt>
+                                        </p:tgtEl>
+                                        <p:attrNameLst>
+                                          <p:attrName>style.visibility</p:attrName>
+                                        </p:attrNameLst>
+                                      </p:cBhvr>
+                                      <p:to>
+                                        <p:strVal val="visible"/>
+                                      </p:to>
+                                    </p:set>
+                                  </p:childTnLst>
+                                </p:cTn>
+                              </p:par>
+                            </p:childTnLst>
+                          </p:cTn>
+                        </p:par>
+                      </p:childTnLst>
+                    </p:cTn>
+                  </p:par>
+                  <p:par>
+                    <p:cTn id="7" fill="hold">
+                      <p:stCondLst>
+                        <p:cond delay="indefinite"/>
+                      </p:stCondLst>
+                      <p:childTnLst>
+                        <p:par>
+                          <p:cTn id="8" fill="hold">
+                            <p:stCondLst>
+                              <p:cond delay="0"/>
+                            </p:stCondLst>
+                            <p:childTnLst>
+                              <p:par>
+                                <p:cTn id="9" presetID="1" presetClass="entr" presetSubtype="0" fill="hold" grpId="0" nodeType="clickEffect">
+                                  <p:stCondLst>
+                                    <p:cond delay="0"/>
+                                  </p:stCondLst>
+                                  <p:childTnLst>
+                                    <p:set>
+                                      <p:cBhvr>
+                                        <p:cTn id="10" dur="1" fill="hold">
+                                          <p:stCondLst>
+                                            <p:cond delay="0"/>
+                                          </p:stCondLst>
+                                        </p:cTn>
+                                        <p:tgtEl>
+                                          <p:spTgt spid="3">
+                                            <p:txEl>
+                                              <p:pRg st="1" end="1"/>
+                                            </p:txEl>
+                                          </p:spTgt>
+                                        </p:tgtEl>
+                                        <p:attrNameLst>
+                                          <p:attrName>style.visibility</p:attrName>
+                                        </p:attrNameLst>
+                                      </p:cBhvr>
+                                      <p:to>
+                                        <p:strVal val="visible"/>
+                                      </p:to>
+                                    </p:set>
+                                  </p:childTnLst>
+                                </p:cTn>
+                              </p:par>
+                            </p:childTnLst>
+                          </p:cTn>
+                        </p:par>
+                      </p:childTnLst>
+                    </p:cTn>
+                  </p:par>
+                  <p:par>
+                    <p:cTn id="11" fill="hold">
+                      <p:stCondLst>
+                        <p:cond delay="indefinite"/>
+                      </p:stCondLst>
+                      <p:childTnLst>
+                        <p:par>
+                          <p:cTn id="12" fill="hold">
+                            <p:stCondLst>
+                              <p:cond delay="0"/>
+                            </p:stCondLst>
+                            <p:childTnLst>
+                              <p:par>
+                                <p:cTn id="13" presetID="1" presetClass="entr" presetSubtype="0" fill="hold" grpId="0" nodeType="clickEffect">
+                                  <p:stCondLst>
+                                    <p:cond delay="0"/>
+                                  </p:stCondLst>
+                                  <p:childTnLst>
+                                    <p:set>
+                                      <p:cBhvr>
+                                        <p:cTn id="14" dur="1" fill="hold">
+                                          <p:stCondLst>
+                                            <p:cond delay="0"/>
+                                          </p:stCondLst>
+                                        </p:cTn>
+                                        <p:tgtEl>
+                                          <p:spTgt spid="3">
+                                            <p:txEl>
+                                              <p:pRg st="2" end="2"/>
+                                            </p:txEl>
+                                          </p:spTgt>
+                                        </p:tgtEl>
+                                        <p:attrNameLst>
+                                          <p:attrName>style.visibility</p:attrName>
+                                        </p:attrNameLst>
+                                      </p:cBhvr>
+                                      <p:to>
+                                        <p:strVal val="visible"/>
+                                      </p:to>
+                                    </p:set>
+                                  </p:childTnLst>
+                                </p:cTn>
+                              </p:par>
+                            </p:childTnLst>
+                          </p:cTn>
+                        </p:par>
+                      </p:childTnLst>
+                    </p:cTn>
+                  </p:par>
+                  <p:par>
+                    <p:cTn id="15" fill="hold">
+                      <p:stCondLst>
+                        <p:cond delay="indefinite"/>
+                      </p:stCondLst>
+                      <p:childTnLst>
+                        <p:par>
+                          <p:cTn id="16" fill="hold">
+                            <p:stCondLst>
+                              <p:cond delay="0"/>
+                            </p:stCondLst>
+                            <p:childTnLst>
+                              <p:par>
+                                <p:cTn id="17" presetID="1" presetClass="entr" presetSubtype="0" fill="hold" grpId="0" nodeType="clickEffect">
+                                  <p:stCondLst>
+                                    <p:cond delay="0"/>
+                                  </p:stCondLst>
+                                  <p:childTnLst>
+                                    <p:set>
+                                      <p:cBhvr>
+                                        <p:cTn id="18" dur="1" fill="hold">
+                                          <p:stCondLst>
+                                            <p:cond delay="0"/>
+                                          </p:stCondLst>
+                                        </p:cTn>
+                                        <p:tgtEl>
+                                          <p:spTgt spid="3">
+                                            <p:txEl>
+                                              <p:pRg st="3" end="3"/>
+                                            </p:txEl>
+                                          </p:spTgt>
+                                        </p:tgtEl>
+                                        <p:attrNameLst>
+                                          <p:attrName>style.visibility</p:attrName>
+                                        </p:attrNameLst>
+                                      </p:cBhvr>
+                                      <p:to>
+                                        <p:strVal val="visible"/>
+                                      </p:to>
+                                    </p:set>
+                                  </p:childTnLst>
+                                </p:cTn>
+                              </p:par>
+                            </p:childTnLst>
+                          </p:cTn>
+                        </p:par>
+                      </p:childTnLst>
+                    </p:cTn>
+                  </p:par>
+                  <p:par>
+                    <p:cTn id="19" fill="hold">
+                      <p:stCondLst>
+                        <p:cond delay="indefinite"/>
+                      </p:stCondLst>
+                      <p:childTnLst>
+                        <p:par>
+                          <p:cTn id="20" fill="hold">
+                            <p:stCondLst>
+                              <p:cond delay="0"/>
+                            </p:stCondLst>
+                            <p:childTnLst>
+                              <p:par>
+                                <p:cTn id="21" presetID="1" presetClass="entr" presetSubtype="0" fill="hold" grpId="0" nodeType="clickEffect">
+                                  <p:stCondLst>
+                                    <p:cond delay="0"/>
+                                  </p:stCondLst>
+                                  <p:childTnLst>
+                                    <p:set>
+                                      <p:cBhvr>
+                                        <p:cTn id="22" dur="1" fill="hold">
+                                          <p:stCondLst>
+                                            <p:cond delay="0"/>
+                                          </p:stCondLst>
+                                        </p:cTn>
+                                        <p:tgtEl>
+                                          <p:spTgt spid="3">
+                                            <p:txEl>
+                                              <p:pRg st="4" end="4"/>
+                                            </p:txEl>
+                                          </p:spTgt>
+                                        </p:tgtEl>
+                                        <p:attrNameLst>
+                                          <p:attrName>style.visibility</p:attrName>
+                                        </p:attrNameLst>
+                                      </p:cBhvr>
+                                      <p:to>
+                                        <p:strVal val="visible"/>
+                                      </p:to>
+                                    </p:set>
+                                  </p:childTnLst>
+                                </p:cTn>
+                              </p:par>
+                            </p:childTnLst>
+                          </p:cTn>
+                        </p:par>
+                      </p:childTnLst>
+                    </p:cTn>
+                  </p:par>
+                </p:childTnLst>
+              </p:cTn>
+              <p:prevCondLst>
+                <p:cond evt="onPrev" delay="0">
+                  <p:tgtEl>
+                    <p:sldTgt/>
+                  </p:tgtEl>
+                </p:cond>
+              </p:prevCondLst>
+              <p:nextCondLst>
+                <p:cond evt="onNext" delay="0">
+                  <p:tgtEl>
+                    <p:sldTgt/>
+                  </p:tgtEl>
+                </p:cond>
+              </p:nextCondLst>
+            </p:seq>
+          </p:childTnLst>
+        </p:cTn>
+      </p:par>
+    </p:tnLst>
+    <p:bldLst>
+      <p:bldP spid="3" grpId="0" uiExpand="1" build="p"/>
+    </p:bldLst>
+  </p:timing>
+</p:sld>
+</file>
+
+<file path=ppt/slides/slide36.xml><?xml version="1.0" encoding="utf-8"?>
 <p:sld xmlns:a="http://schemas.openxmlformats.org/drawingml/2006/main" xmlns:r="http://schemas.openxmlformats.org/officeDocument/2006/relationships" xmlns:p="http://schemas.openxmlformats.org/presentationml/2006/main">
   <p:cSld>
     <p:spTree>
@@ -14452,7 +17036,7 @@
 </p:sld>
 </file>
 
-<file path=ppt/slides/slide35.xml><?xml version="1.0" encoding="utf-8"?>
+<file path=ppt/slides/slide37.xml><?xml version="1.0" encoding="utf-8"?>
 <p:sld xmlns:a="http://schemas.openxmlformats.org/drawingml/2006/main" xmlns:r="http://schemas.openxmlformats.org/officeDocument/2006/relationships" xmlns:p="http://schemas.openxmlformats.org/presentationml/2006/main">
   <p:cSld>
     <p:spTree>
@@ -14908,221 +17492,6 @@
 </p:sld>
 </file>
 
-<file path=ppt/slides/slide36.xml><?xml version="1.0" encoding="utf-8"?>
-<p:sld xmlns:a="http://schemas.openxmlformats.org/drawingml/2006/main" xmlns:r="http://schemas.openxmlformats.org/officeDocument/2006/relationships" xmlns:p="http://schemas.openxmlformats.org/presentationml/2006/main">
-  <p:cSld>
-    <p:spTree>
-      <p:nvGrpSpPr>
-        <p:cNvPr id="1" name=""/>
-        <p:cNvGrpSpPr/>
-        <p:nvPr/>
-      </p:nvGrpSpPr>
-      <p:grpSpPr>
-        <a:xfrm>
-          <a:off x="0" y="0"/>
-          <a:ext cx="0" cy="0"/>
-          <a:chOff x="0" y="0"/>
-          <a:chExt cx="0" cy="0"/>
-        </a:xfrm>
-      </p:grpSpPr>
-      <p:sp>
-        <p:nvSpPr>
-          <p:cNvPr id="2" name="Title 1">
-            <a:extLst>
-              <a:ext uri="{FF2B5EF4-FFF2-40B4-BE49-F238E27FC236}">
-                <a16:creationId xmlns:a16="http://schemas.microsoft.com/office/drawing/2014/main" id="{6BF04AE0-F94F-A586-34B8-68D9CAB6C6D1}"/>
-              </a:ext>
-            </a:extLst>
-          </p:cNvPr>
-          <p:cNvSpPr>
-            <a:spLocks noGrp="1"/>
-          </p:cNvSpPr>
-          <p:nvPr>
-            <p:ph type="title"/>
-          </p:nvPr>
-        </p:nvSpPr>
-        <p:spPr>
-          <a:xfrm>
-            <a:off x="2295524" y="432532"/>
-            <a:ext cx="9450077" cy="825501"/>
-          </a:xfrm>
-        </p:spPr>
-        <p:txBody>
-          <a:bodyPr/>
-          <a:lstStyle/>
-          <a:p>
-            <a:pPr lvl="0" indent="0" marL="0">
-              <a:buNone/>
-            </a:pPr>
-            <a:r>
-              <a:rPr/>
-              <a:t>To conclude: Survey time!</a:t>
-            </a:r>
-          </a:p>
-        </p:txBody>
-      </p:sp>
-      <p:sp>
-        <p:nvSpPr>
-          <p:cNvPr id="6" name="Slide Number Placeholder 5">
-            <a:extLst>
-              <a:ext uri="{FF2B5EF4-FFF2-40B4-BE49-F238E27FC236}">
-                <a16:creationId xmlns:a16="http://schemas.microsoft.com/office/drawing/2014/main" id="{5F33F24B-1A9E-2EAF-F2AB-89426454DEE9}"/>
-              </a:ext>
-            </a:extLst>
-          </p:cNvPr>
-          <p:cNvSpPr>
-            <a:spLocks noGrp="1"/>
-          </p:cNvSpPr>
-          <p:nvPr>
-            <p:ph idx="12" sz="quarter" type="sldNum"/>
-          </p:nvPr>
-        </p:nvSpPr>
-        <p:spPr>
-          <a:xfrm>
-            <a:off x="8610599" y="6356350"/>
-            <a:ext cx="3135001" cy="365125"/>
-          </a:xfrm>
-        </p:spPr>
-        <p:txBody>
-          <a:bodyPr/>
-          <a:lstStyle/>
-          <a:p>
-            <a:fld id="{7FEFBAB6-26D0-44D8-BD53-612461CE1ACC}" type="slidenum">
-              <a:rPr lang="de-DE" smtClean="0"/>
-              <a:t>‹#›</a:t>
-            </a:fld>
-            <a:endParaRPr lang="de-DE"/>
-          </a:p>
-        </p:txBody>
-      </p:sp>
-    </p:spTree>
-  </p:cSld>
-</p:sld>
-</file>
-
-<file path=ppt/slides/slide37.xml><?xml version="1.0" encoding="utf-8"?>
-<p:sld xmlns:a="http://schemas.openxmlformats.org/drawingml/2006/main" xmlns:r="http://schemas.openxmlformats.org/officeDocument/2006/relationships" xmlns:p="http://schemas.openxmlformats.org/presentationml/2006/main">
-  <p:cSld>
-    <p:spTree>
-      <p:nvGrpSpPr>
-        <p:cNvPr id="1" name=""/>
-        <p:cNvGrpSpPr/>
-        <p:nvPr/>
-      </p:nvGrpSpPr>
-      <p:grpSpPr>
-        <a:xfrm>
-          <a:off x="0" y="0"/>
-          <a:ext cx="0" cy="0"/>
-          <a:chOff x="0" y="0"/>
-          <a:chExt cx="0" cy="0"/>
-        </a:xfrm>
-      </p:grpSpPr>
-      <p:sp>
-        <p:nvSpPr>
-          <p:cNvPr id="3" name="Content Placeholder 2">
-            <a:extLst>
-              <a:ext uri="{FF2B5EF4-FFF2-40B4-BE49-F238E27FC236}">
-                <a16:creationId xmlns:a16="http://schemas.microsoft.com/office/drawing/2014/main" id="{372FA590-20E9-0368-85B4-90C26598F852}"/>
-              </a:ext>
-            </a:extLst>
-          </p:cNvPr>
-          <p:cNvSpPr>
-            <a:spLocks noGrp="1"/>
-          </p:cNvSpPr>
-          <p:nvPr>
-            <p:ph idx="1"/>
-          </p:nvPr>
-        </p:nvSpPr>
-        <p:spPr/>
-        <p:txBody>
-          <a:bodyPr/>
-          <a:lstStyle/>
-          <a:p>
-            <a:pPr lvl="0" indent="0" marL="0">
-              <a:buNone/>
-            </a:pPr>
-            <a:r>
-              <a:rPr b="1"/>
-              <a:t>What is your level of familiarity with citing and referencing scientific papers?</a:t>
-            </a:r>
-          </a:p>
-          <a:p>
-            <a:pPr lvl="0" indent="-457200" marL="457200">
-              <a:buAutoNum type="alphaLcPeriod"/>
-            </a:pPr>
-            <a:r>
-              <a:rPr/>
-              <a:t>I have never heard of it before.</a:t>
-            </a:r>
-          </a:p>
-          <a:p>
-            <a:pPr lvl="0" indent="-457200" marL="457200">
-              <a:buAutoNum type="alphaLcPeriod"/>
-            </a:pPr>
-            <a:r>
-              <a:rPr/>
-              <a:t>I have heard of it but have never worked with it.</a:t>
-            </a:r>
-          </a:p>
-          <a:p>
-            <a:pPr lvl="0" indent="-457200" marL="457200">
-              <a:buAutoNum type="alphaLcPeriod"/>
-            </a:pPr>
-            <a:r>
-              <a:rPr/>
-              <a:t>I have basic understanding and experience with it.</a:t>
-            </a:r>
-          </a:p>
-          <a:p>
-            <a:pPr lvl="0" indent="-457200" marL="457200">
-              <a:buAutoNum type="alphaLcPeriod"/>
-            </a:pPr>
-            <a:r>
-              <a:rPr/>
-              <a:t>I am very familiar and have worked with it extensively.</a:t>
-            </a:r>
-          </a:p>
-        </p:txBody>
-      </p:sp>
-      <p:sp>
-        <p:nvSpPr>
-          <p:cNvPr id="6" name="Slide Number Placeholder 5">
-            <a:extLst>
-              <a:ext uri="{FF2B5EF4-FFF2-40B4-BE49-F238E27FC236}">
-                <a16:creationId xmlns:a16="http://schemas.microsoft.com/office/drawing/2014/main" id="{5F33F24B-1A9E-2EAF-F2AB-89426454DEE9}"/>
-              </a:ext>
-            </a:extLst>
-          </p:cNvPr>
-          <p:cNvSpPr>
-            <a:spLocks noGrp="1"/>
-          </p:cNvSpPr>
-          <p:nvPr>
-            <p:ph idx="12" sz="quarter" type="sldNum"/>
-          </p:nvPr>
-        </p:nvSpPr>
-        <p:spPr>
-          <a:xfrm>
-            <a:off x="8610599" y="6356350"/>
-            <a:ext cx="3135001" cy="365125"/>
-          </a:xfrm>
-        </p:spPr>
-        <p:txBody>
-          <a:bodyPr/>
-          <a:lstStyle/>
-          <a:p>
-            <a:fld id="{7FEFBAB6-26D0-44D8-BD53-612461CE1ACC}" type="slidenum">
-              <a:rPr lang="de-DE" smtClean="0"/>
-              <a:t>‹#›</a:t>
-            </a:fld>
-            <a:endParaRPr lang="de-DE"/>
-          </a:p>
-        </p:txBody>
-      </p:sp>
-    </p:spTree>
-  </p:cSld>
-</p:sld>
-</file>
-
 <file path=ppt/slides/slide38.xml><?xml version="1.0" encoding="utf-8"?>
 <p:sld xmlns:a="http://schemas.openxmlformats.org/drawingml/2006/main" xmlns:r="http://schemas.openxmlformats.org/officeDocument/2006/relationships" xmlns:p="http://schemas.openxmlformats.org/presentationml/2006/main">
   <p:cSld>
@@ -15142,10 +17511,10 @@
       </p:grpSpPr>
       <p:sp>
         <p:nvSpPr>
-          <p:cNvPr id="3" name="Content Placeholder 2">
+          <p:cNvPr id="2" name="Title 1">
             <a:extLst>
               <a:ext uri="{FF2B5EF4-FFF2-40B4-BE49-F238E27FC236}">
-                <a16:creationId xmlns:a16="http://schemas.microsoft.com/office/drawing/2014/main" id="{372FA590-20E9-0368-85B4-90C26598F852}"/>
+                <a16:creationId xmlns:a16="http://schemas.microsoft.com/office/drawing/2014/main" id="{6BF04AE0-F94F-A586-34B8-68D9CAB6C6D1}"/>
               </a:ext>
             </a:extLst>
           </p:cNvPr>
@@ -15153,73 +17522,25 @@
             <a:spLocks noGrp="1"/>
           </p:cNvSpPr>
           <p:nvPr>
-            <p:ph idx="1"/>
-          </p:nvPr>
-        </p:nvSpPr>
-        <p:spPr/>
-        <p:txBody>
-          <a:bodyPr/>
-          <a:lstStyle/>
-          <a:p>
-            <a:pPr lvl="0" indent="0" marL="0">
-              <a:buNone/>
-            </a:pPr>
-            <a:r>
-              <a:rPr b="1"/>
-              <a:t>How confident do you feel with the Zotero workflow of collection, organisation, and citing?</a:t>
-            </a:r>
-            <a:r>
-              <a:rPr/>
-              <a:t> </a:t>
-            </a:r>
-            <a:r>
-              <a:rPr i="1"/>
-              <a:t>(1 = Not confident at all, 5 = Very confident)</a:t>
-            </a:r>
-          </a:p>
-          <a:p>
-            <a:pPr lvl="0" indent="-457200" marL="457200">
-              <a:buAutoNum type="alphaLcPeriod"/>
-            </a:pPr>
-            <a:r>
-              <a:rPr/>
-              <a:t>1</a:t>
-            </a:r>
-          </a:p>
-          <a:p>
-            <a:pPr lvl="0" indent="-457200" marL="457200">
-              <a:buAutoNum type="alphaLcPeriod"/>
-            </a:pPr>
-            <a:r>
-              <a:rPr/>
-              <a:t>2</a:t>
-            </a:r>
-          </a:p>
-          <a:p>
-            <a:pPr lvl="0" indent="-457200" marL="457200">
-              <a:buAutoNum type="alphaLcPeriod"/>
-            </a:pPr>
-            <a:r>
-              <a:rPr/>
-              <a:t>3</a:t>
-            </a:r>
-          </a:p>
-          <a:p>
-            <a:pPr lvl="0" indent="-457200" marL="457200">
-              <a:buAutoNum type="alphaLcPeriod"/>
-            </a:pPr>
-            <a:r>
-              <a:rPr/>
-              <a:t>4</a:t>
-            </a:r>
-          </a:p>
-          <a:p>
-            <a:pPr lvl="0" indent="-457200" marL="457200">
-              <a:buAutoNum type="alphaLcPeriod"/>
-            </a:pPr>
-            <a:r>
-              <a:rPr/>
-              <a:t>5</a:t>
+            <p:ph type="title"/>
+          </p:nvPr>
+        </p:nvSpPr>
+        <p:spPr>
+          <a:xfrm>
+            <a:off x="2295524" y="432532"/>
+            <a:ext cx="9450077" cy="825501"/>
+          </a:xfrm>
+        </p:spPr>
+        <p:txBody>
+          <a:bodyPr/>
+          <a:lstStyle/>
+          <a:p>
+            <a:pPr lvl="0" indent="0" marL="0">
+              <a:buNone/>
+            </a:pPr>
+            <a:r>
+              <a:rPr/>
+              <a:t>To conclude: Survey time!</a:t>
             </a:r>
           </a:p>
         </p:txBody>
@@ -15282,42 +17603,6 @@
       </p:grpSpPr>
       <p:sp>
         <p:nvSpPr>
-          <p:cNvPr id="2" name="Title 1">
-            <a:extLst>
-              <a:ext uri="{FF2B5EF4-FFF2-40B4-BE49-F238E27FC236}">
-                <a16:creationId xmlns:a16="http://schemas.microsoft.com/office/drawing/2014/main" id="{6BF04AE0-F94F-A586-34B8-68D9CAB6C6D1}"/>
-              </a:ext>
-            </a:extLst>
-          </p:cNvPr>
-          <p:cNvSpPr>
-            <a:spLocks noGrp="1"/>
-          </p:cNvSpPr>
-          <p:nvPr>
-            <p:ph type="title"/>
-          </p:nvPr>
-        </p:nvSpPr>
-        <p:spPr>
-          <a:xfrm>
-            <a:off x="2295524" y="432532"/>
-            <a:ext cx="9450077" cy="825501"/>
-          </a:xfrm>
-        </p:spPr>
-        <p:txBody>
-          <a:bodyPr/>
-          <a:lstStyle/>
-          <a:p>
-            <a:pPr lvl="0" indent="0" marL="0">
-              <a:buNone/>
-            </a:pPr>
-            <a:r>
-              <a:rPr/>
-              <a:t>Discussion of survey results</a:t>
-            </a:r>
-          </a:p>
-        </p:txBody>
-      </p:sp>
-      <p:sp>
-        <p:nvSpPr>
           <p:cNvPr id="3" name="Content Placeholder 2">
             <a:extLst>
               <a:ext uri="{FF2B5EF4-FFF2-40B4-BE49-F238E27FC236}">
@@ -15342,7 +17627,43 @@
             </a:pPr>
             <a:r>
               <a:rPr b="1"/>
-              <a:t>What do we see in the results?</a:t>
+              <a:t>What is your level of familiarity with citing and referencing scientific papers?</a:t>
+            </a:r>
+          </a:p>
+          <a:p>
+            <a:pPr lvl="0" indent="-457200" marL="457200">
+              <a:buAutoNum type="alphaLcPeriod"/>
+            </a:pPr>
+            <a:r>
+              <a:rPr/>
+              <a:t>I have never heard of it before.</a:t>
+            </a:r>
+          </a:p>
+          <a:p>
+            <a:pPr lvl="0" indent="-457200" marL="457200">
+              <a:buAutoNum type="alphaLcPeriod"/>
+            </a:pPr>
+            <a:r>
+              <a:rPr/>
+              <a:t>I have heard of it but have never worked with it.</a:t>
+            </a:r>
+          </a:p>
+          <a:p>
+            <a:pPr lvl="0" indent="-457200" marL="457200">
+              <a:buAutoNum type="alphaLcPeriod"/>
+            </a:pPr>
+            <a:r>
+              <a:rPr/>
+              <a:t>I have basic understanding and experience with it.</a:t>
+            </a:r>
+          </a:p>
+          <a:p>
+            <a:pPr lvl="0" indent="-457200" marL="457200">
+              <a:buAutoNum type="alphaLcPeriod"/>
+            </a:pPr>
+            <a:r>
+              <a:rPr/>
+              <a:t>I am very familiar and have worked with it extensively.</a:t>
             </a:r>
           </a:p>
         </p:txBody>
@@ -15383,6 +17704,235 @@
       </p:sp>
     </p:spTree>
   </p:cSld>
+  <p:timing>
+    <p:tnLst>
+      <p:par>
+        <p:cTn id="1" dur="indefinite" restart="never" nodeType="tmRoot">
+          <p:childTnLst>
+            <p:seq concurrent="1" nextAc="seek">
+              <p:cTn id="2" dur="indefinite" nodeType="mainSeq">
+                <p:childTnLst>
+                  <p:par>
+                    <p:cTn id="3" fill="hold">
+                      <p:stCondLst>
+                        <p:cond delay="indefinite"/>
+                      </p:stCondLst>
+                      <p:childTnLst>
+                        <p:par>
+                          <p:cTn id="4" fill="hold">
+                            <p:stCondLst>
+                              <p:cond delay="0"/>
+                            </p:stCondLst>
+                            <p:childTnLst>
+                              <p:par>
+                                <p:cTn id="5" presetID="1" presetClass="entr" presetSubtype="0" fill="hold" grpId="0" nodeType="clickEffect">
+                                  <p:stCondLst>
+                                    <p:cond delay="0"/>
+                                  </p:stCondLst>
+                                  <p:childTnLst>
+                                    <p:set>
+                                      <p:cBhvr>
+                                        <p:cTn id="6" dur="1" fill="hold">
+                                          <p:stCondLst>
+                                            <p:cond delay="0"/>
+                                          </p:stCondLst>
+                                        </p:cTn>
+                                        <p:tgtEl>
+                                          <p:spTgt spid="3">
+                                            <p:txEl>
+                                              <p:pRg st="1" end="1"/>
+                                            </p:txEl>
+                                          </p:spTgt>
+                                        </p:tgtEl>
+                                        <p:attrNameLst>
+                                          <p:attrName>style.visibility</p:attrName>
+                                        </p:attrNameLst>
+                                      </p:cBhvr>
+                                      <p:to>
+                                        <p:strVal val="visible"/>
+                                      </p:to>
+                                    </p:set>
+                                  </p:childTnLst>
+                                </p:cTn>
+                              </p:par>
+                            </p:childTnLst>
+                          </p:cTn>
+                        </p:par>
+                      </p:childTnLst>
+                    </p:cTn>
+                  </p:par>
+                  <p:par>
+                    <p:cTn id="7" fill="hold">
+                      <p:stCondLst>
+                        <p:cond delay="indefinite"/>
+                      </p:stCondLst>
+                      <p:childTnLst>
+                        <p:par>
+                          <p:cTn id="8" fill="hold">
+                            <p:stCondLst>
+                              <p:cond delay="0"/>
+                            </p:stCondLst>
+                            <p:childTnLst>
+                              <p:par>
+                                <p:cTn id="9" presetID="1" presetClass="entr" presetSubtype="0" fill="hold" grpId="0" nodeType="clickEffect">
+                                  <p:stCondLst>
+                                    <p:cond delay="0"/>
+                                  </p:stCondLst>
+                                  <p:childTnLst>
+                                    <p:set>
+                                      <p:cBhvr>
+                                        <p:cTn id="10" dur="1" fill="hold">
+                                          <p:stCondLst>
+                                            <p:cond delay="0"/>
+                                          </p:stCondLst>
+                                        </p:cTn>
+                                        <p:tgtEl>
+                                          <p:spTgt spid="3">
+                                            <p:txEl>
+                                              <p:pRg st="2" end="2"/>
+                                            </p:txEl>
+                                          </p:spTgt>
+                                        </p:tgtEl>
+                                        <p:attrNameLst>
+                                          <p:attrName>style.visibility</p:attrName>
+                                        </p:attrNameLst>
+                                      </p:cBhvr>
+                                      <p:to>
+                                        <p:strVal val="visible"/>
+                                      </p:to>
+                                    </p:set>
+                                  </p:childTnLst>
+                                </p:cTn>
+                              </p:par>
+                            </p:childTnLst>
+                          </p:cTn>
+                        </p:par>
+                      </p:childTnLst>
+                    </p:cTn>
+                  </p:par>
+                  <p:par>
+                    <p:cTn id="11" fill="hold">
+                      <p:stCondLst>
+                        <p:cond delay="indefinite"/>
+                      </p:stCondLst>
+                      <p:childTnLst>
+                        <p:par>
+                          <p:cTn id="12" fill="hold">
+                            <p:stCondLst>
+                              <p:cond delay="0"/>
+                            </p:stCondLst>
+                            <p:childTnLst>
+                              <p:par>
+                                <p:cTn id="13" presetID="1" presetClass="entr" presetSubtype="0" fill="hold" grpId="0" nodeType="clickEffect">
+                                  <p:stCondLst>
+                                    <p:cond delay="0"/>
+                                  </p:stCondLst>
+                                  <p:childTnLst>
+                                    <p:set>
+                                      <p:cBhvr>
+                                        <p:cTn id="14" dur="1" fill="hold">
+                                          <p:stCondLst>
+                                            <p:cond delay="0"/>
+                                          </p:stCondLst>
+                                        </p:cTn>
+                                        <p:tgtEl>
+                                          <p:spTgt spid="3">
+                                            <p:txEl>
+                                              <p:pRg st="3" end="3"/>
+                                            </p:txEl>
+                                          </p:spTgt>
+                                        </p:tgtEl>
+                                        <p:attrNameLst>
+                                          <p:attrName>style.visibility</p:attrName>
+                                        </p:attrNameLst>
+                                      </p:cBhvr>
+                                      <p:to>
+                                        <p:strVal val="visible"/>
+                                      </p:to>
+                                    </p:set>
+                                  </p:childTnLst>
+                                </p:cTn>
+                              </p:par>
+                            </p:childTnLst>
+                          </p:cTn>
+                        </p:par>
+                      </p:childTnLst>
+                    </p:cTn>
+                  </p:par>
+                  <p:par>
+                    <p:cTn id="15" fill="hold">
+                      <p:stCondLst>
+                        <p:cond delay="indefinite"/>
+                      </p:stCondLst>
+                      <p:childTnLst>
+                        <p:par>
+                          <p:cTn id="16" fill="hold">
+                            <p:stCondLst>
+                              <p:cond delay="0"/>
+                            </p:stCondLst>
+                            <p:childTnLst>
+                              <p:par>
+                                <p:cTn id="17" presetID="1" presetClass="entr" presetSubtype="0" fill="hold" grpId="0" nodeType="clickEffect">
+                                  <p:stCondLst>
+                                    <p:cond delay="0"/>
+                                  </p:stCondLst>
+                                  <p:childTnLst>
+                                    <p:set>
+                                      <p:cBhvr>
+                                        <p:cTn id="18" dur="1" fill="hold">
+                                          <p:stCondLst>
+                                            <p:cond delay="0"/>
+                                          </p:stCondLst>
+                                        </p:cTn>
+                                        <p:tgtEl>
+                                          <p:spTgt spid="3">
+                                            <p:txEl>
+                                              <p:pRg st="4" end="4"/>
+                                            </p:txEl>
+                                          </p:spTgt>
+                                        </p:tgtEl>
+                                        <p:attrNameLst>
+                                          <p:attrName>style.visibility</p:attrName>
+                                        </p:attrNameLst>
+                                      </p:cBhvr>
+                                      <p:to>
+                                        <p:strVal val="visible"/>
+                                      </p:to>
+                                    </p:set>
+                                  </p:childTnLst>
+                                </p:cTn>
+                              </p:par>
+                            </p:childTnLst>
+                          </p:cTn>
+                        </p:par>
+                      </p:childTnLst>
+                    </p:cTn>
+                  </p:par>
+                </p:childTnLst>
+              </p:cTn>
+              <p:prevCondLst>
+                <p:cond evt="onPrev" delay="0">
+                  <p:tgtEl>
+                    <p:sldTgt/>
+                  </p:tgtEl>
+                </p:cond>
+              </p:prevCondLst>
+              <p:nextCondLst>
+                <p:cond evt="onNext" delay="0">
+                  <p:tgtEl>
+                    <p:sldTgt/>
+                  </p:tgtEl>
+                </p:cond>
+              </p:nextCondLst>
+            </p:seq>
+          </p:childTnLst>
+        </p:cTn>
+      </p:par>
+    </p:tnLst>
+    <p:bldLst>
+      <p:bldP spid="3" grpId="0" uiExpand="1" build="p"/>
+    </p:bldLst>
+  </p:timing>
 </p:sld>
 </file>
 
@@ -15492,42 +18042,6 @@
       </p:grpSpPr>
       <p:sp>
         <p:nvSpPr>
-          <p:cNvPr id="2" name="Title 1">
-            <a:extLst>
-              <a:ext uri="{FF2B5EF4-FFF2-40B4-BE49-F238E27FC236}">
-                <a16:creationId xmlns:a16="http://schemas.microsoft.com/office/drawing/2014/main" id="{6BF04AE0-F94F-A586-34B8-68D9CAB6C6D1}"/>
-              </a:ext>
-            </a:extLst>
-          </p:cNvPr>
-          <p:cNvSpPr>
-            <a:spLocks noGrp="1"/>
-          </p:cNvSpPr>
-          <p:nvPr>
-            <p:ph type="title"/>
-          </p:nvPr>
-        </p:nvSpPr>
-        <p:spPr>
-          <a:xfrm>
-            <a:off x="2295524" y="432532"/>
-            <a:ext cx="9450077" cy="825501"/>
-          </a:xfrm>
-        </p:spPr>
-        <p:txBody>
-          <a:bodyPr/>
-          <a:lstStyle/>
-          <a:p>
-            <a:pPr lvl="0" indent="0" marL="0">
-              <a:buNone/>
-            </a:pPr>
-            <a:r>
-              <a:rPr/>
-              <a:t>References</a:t>
-            </a:r>
-          </a:p>
-        </p:txBody>
-      </p:sp>
-      <p:sp>
-        <p:nvSpPr>
           <p:cNvPr id="3" name="Content Placeholder 2">
             <a:extLst>
               <a:ext uri="{FF2B5EF4-FFF2-40B4-BE49-F238E27FC236}">
@@ -15551,16 +18065,61 @@
               <a:buNone/>
             </a:pPr>
             <a:r>
-              <a:rPr/>
-              <a:t>Jackson, P. (1990). The Daily Grind. In </a:t>
+              <a:rPr b="1"/>
+              <a:t>How confident do you feel with the Zotero workflow of collection, organisation, and citing?</a:t>
+            </a:r>
+            <a:r>
+              <a:rPr/>
+              <a:t> </a:t>
             </a:r>
             <a:r>
               <a:rPr i="1"/>
-              <a:t>Life in Classrooms</a:t>
-            </a:r>
-            <a:r>
-              <a:rPr/>
-              <a:t> (2nd ed., pp. 34–35). Teachers College Press.</a:t>
+              <a:t>(1 = Not confident at all, 5 = Very confident)</a:t>
+            </a:r>
+          </a:p>
+          <a:p>
+            <a:pPr lvl="0" indent="-457200" marL="457200">
+              <a:buAutoNum type="alphaLcPeriod"/>
+            </a:pPr>
+            <a:r>
+              <a:rPr/>
+              <a:t>1</a:t>
+            </a:r>
+          </a:p>
+          <a:p>
+            <a:pPr lvl="0" indent="-457200" marL="457200">
+              <a:buAutoNum type="alphaLcPeriod"/>
+            </a:pPr>
+            <a:r>
+              <a:rPr/>
+              <a:t>2</a:t>
+            </a:r>
+          </a:p>
+          <a:p>
+            <a:pPr lvl="0" indent="-457200" marL="457200">
+              <a:buAutoNum type="alphaLcPeriod"/>
+            </a:pPr>
+            <a:r>
+              <a:rPr/>
+              <a:t>3</a:t>
+            </a:r>
+          </a:p>
+          <a:p>
+            <a:pPr lvl="0" indent="-457200" marL="457200">
+              <a:buAutoNum type="alphaLcPeriod"/>
+            </a:pPr>
+            <a:r>
+              <a:rPr/>
+              <a:t>4</a:t>
+            </a:r>
+          </a:p>
+          <a:p>
+            <a:pPr lvl="0" indent="-457200" marL="457200">
+              <a:buAutoNum type="alphaLcPeriod"/>
+            </a:pPr>
+            <a:r>
+              <a:rPr/>
+              <a:t>5</a:t>
             </a:r>
           </a:p>
         </p:txBody>
@@ -15601,6 +18160,284 @@
       </p:sp>
     </p:spTree>
   </p:cSld>
+  <p:timing>
+    <p:tnLst>
+      <p:par>
+        <p:cTn id="1" dur="indefinite" restart="never" nodeType="tmRoot">
+          <p:childTnLst>
+            <p:seq concurrent="1" nextAc="seek">
+              <p:cTn id="2" dur="indefinite" nodeType="mainSeq">
+                <p:childTnLst>
+                  <p:par>
+                    <p:cTn id="3" fill="hold">
+                      <p:stCondLst>
+                        <p:cond delay="indefinite"/>
+                      </p:stCondLst>
+                      <p:childTnLst>
+                        <p:par>
+                          <p:cTn id="4" fill="hold">
+                            <p:stCondLst>
+                              <p:cond delay="0"/>
+                            </p:stCondLst>
+                            <p:childTnLst>
+                              <p:par>
+                                <p:cTn id="5" presetID="1" presetClass="entr" presetSubtype="0" fill="hold" grpId="0" nodeType="clickEffect">
+                                  <p:stCondLst>
+                                    <p:cond delay="0"/>
+                                  </p:stCondLst>
+                                  <p:childTnLst>
+                                    <p:set>
+                                      <p:cBhvr>
+                                        <p:cTn id="6" dur="1" fill="hold">
+                                          <p:stCondLst>
+                                            <p:cond delay="0"/>
+                                          </p:stCondLst>
+                                        </p:cTn>
+                                        <p:tgtEl>
+                                          <p:spTgt spid="3">
+                                            <p:txEl>
+                                              <p:pRg st="1" end="1"/>
+                                            </p:txEl>
+                                          </p:spTgt>
+                                        </p:tgtEl>
+                                        <p:attrNameLst>
+                                          <p:attrName>style.visibility</p:attrName>
+                                        </p:attrNameLst>
+                                      </p:cBhvr>
+                                      <p:to>
+                                        <p:strVal val="visible"/>
+                                      </p:to>
+                                    </p:set>
+                                  </p:childTnLst>
+                                </p:cTn>
+                              </p:par>
+                            </p:childTnLst>
+                          </p:cTn>
+                        </p:par>
+                      </p:childTnLst>
+                    </p:cTn>
+                  </p:par>
+                  <p:par>
+                    <p:cTn id="7" fill="hold">
+                      <p:stCondLst>
+                        <p:cond delay="indefinite"/>
+                      </p:stCondLst>
+                      <p:childTnLst>
+                        <p:par>
+                          <p:cTn id="8" fill="hold">
+                            <p:stCondLst>
+                              <p:cond delay="0"/>
+                            </p:stCondLst>
+                            <p:childTnLst>
+                              <p:par>
+                                <p:cTn id="9" presetID="1" presetClass="entr" presetSubtype="0" fill="hold" grpId="0" nodeType="clickEffect">
+                                  <p:stCondLst>
+                                    <p:cond delay="0"/>
+                                  </p:stCondLst>
+                                  <p:childTnLst>
+                                    <p:set>
+                                      <p:cBhvr>
+                                        <p:cTn id="10" dur="1" fill="hold">
+                                          <p:stCondLst>
+                                            <p:cond delay="0"/>
+                                          </p:stCondLst>
+                                        </p:cTn>
+                                        <p:tgtEl>
+                                          <p:spTgt spid="3">
+                                            <p:txEl>
+                                              <p:pRg st="2" end="2"/>
+                                            </p:txEl>
+                                          </p:spTgt>
+                                        </p:tgtEl>
+                                        <p:attrNameLst>
+                                          <p:attrName>style.visibility</p:attrName>
+                                        </p:attrNameLst>
+                                      </p:cBhvr>
+                                      <p:to>
+                                        <p:strVal val="visible"/>
+                                      </p:to>
+                                    </p:set>
+                                  </p:childTnLst>
+                                </p:cTn>
+                              </p:par>
+                            </p:childTnLst>
+                          </p:cTn>
+                        </p:par>
+                      </p:childTnLst>
+                    </p:cTn>
+                  </p:par>
+                  <p:par>
+                    <p:cTn id="11" fill="hold">
+                      <p:stCondLst>
+                        <p:cond delay="indefinite"/>
+                      </p:stCondLst>
+                      <p:childTnLst>
+                        <p:par>
+                          <p:cTn id="12" fill="hold">
+                            <p:stCondLst>
+                              <p:cond delay="0"/>
+                            </p:stCondLst>
+                            <p:childTnLst>
+                              <p:par>
+                                <p:cTn id="13" presetID="1" presetClass="entr" presetSubtype="0" fill="hold" grpId="0" nodeType="clickEffect">
+                                  <p:stCondLst>
+                                    <p:cond delay="0"/>
+                                  </p:stCondLst>
+                                  <p:childTnLst>
+                                    <p:set>
+                                      <p:cBhvr>
+                                        <p:cTn id="14" dur="1" fill="hold">
+                                          <p:stCondLst>
+                                            <p:cond delay="0"/>
+                                          </p:stCondLst>
+                                        </p:cTn>
+                                        <p:tgtEl>
+                                          <p:spTgt spid="3">
+                                            <p:txEl>
+                                              <p:pRg st="3" end="3"/>
+                                            </p:txEl>
+                                          </p:spTgt>
+                                        </p:tgtEl>
+                                        <p:attrNameLst>
+                                          <p:attrName>style.visibility</p:attrName>
+                                        </p:attrNameLst>
+                                      </p:cBhvr>
+                                      <p:to>
+                                        <p:strVal val="visible"/>
+                                      </p:to>
+                                    </p:set>
+                                  </p:childTnLst>
+                                </p:cTn>
+                              </p:par>
+                            </p:childTnLst>
+                          </p:cTn>
+                        </p:par>
+                      </p:childTnLst>
+                    </p:cTn>
+                  </p:par>
+                  <p:par>
+                    <p:cTn id="15" fill="hold">
+                      <p:stCondLst>
+                        <p:cond delay="indefinite"/>
+                      </p:stCondLst>
+                      <p:childTnLst>
+                        <p:par>
+                          <p:cTn id="16" fill="hold">
+                            <p:stCondLst>
+                              <p:cond delay="0"/>
+                            </p:stCondLst>
+                            <p:childTnLst>
+                              <p:par>
+                                <p:cTn id="17" presetID="1" presetClass="entr" presetSubtype="0" fill="hold" grpId="0" nodeType="clickEffect">
+                                  <p:stCondLst>
+                                    <p:cond delay="0"/>
+                                  </p:stCondLst>
+                                  <p:childTnLst>
+                                    <p:set>
+                                      <p:cBhvr>
+                                        <p:cTn id="18" dur="1" fill="hold">
+                                          <p:stCondLst>
+                                            <p:cond delay="0"/>
+                                          </p:stCondLst>
+                                        </p:cTn>
+                                        <p:tgtEl>
+                                          <p:spTgt spid="3">
+                                            <p:txEl>
+                                              <p:pRg st="4" end="4"/>
+                                            </p:txEl>
+                                          </p:spTgt>
+                                        </p:tgtEl>
+                                        <p:attrNameLst>
+                                          <p:attrName>style.visibility</p:attrName>
+                                        </p:attrNameLst>
+                                      </p:cBhvr>
+                                      <p:to>
+                                        <p:strVal val="visible"/>
+                                      </p:to>
+                                    </p:set>
+                                  </p:childTnLst>
+                                </p:cTn>
+                              </p:par>
+                            </p:childTnLst>
+                          </p:cTn>
+                        </p:par>
+                      </p:childTnLst>
+                    </p:cTn>
+                  </p:par>
+                  <p:par>
+                    <p:cTn id="19" fill="hold">
+                      <p:stCondLst>
+                        <p:cond delay="indefinite"/>
+                      </p:stCondLst>
+                      <p:childTnLst>
+                        <p:par>
+                          <p:cTn id="20" fill="hold">
+                            <p:stCondLst>
+                              <p:cond delay="0"/>
+                            </p:stCondLst>
+                            <p:childTnLst>
+                              <p:par>
+                                <p:cTn id="21" presetID="1" presetClass="entr" presetSubtype="0" fill="hold" grpId="0" nodeType="clickEffect">
+                                  <p:stCondLst>
+                                    <p:cond delay="0"/>
+                                  </p:stCondLst>
+                                  <p:childTnLst>
+                                    <p:set>
+                                      <p:cBhvr>
+                                        <p:cTn id="22" dur="1" fill="hold">
+                                          <p:stCondLst>
+                                            <p:cond delay="0"/>
+                                          </p:stCondLst>
+                                        </p:cTn>
+                                        <p:tgtEl>
+                                          <p:spTgt spid="3">
+                                            <p:txEl>
+                                              <p:pRg st="5" end="5"/>
+                                            </p:txEl>
+                                          </p:spTgt>
+                                        </p:tgtEl>
+                                        <p:attrNameLst>
+                                          <p:attrName>style.visibility</p:attrName>
+                                        </p:attrNameLst>
+                                      </p:cBhvr>
+                                      <p:to>
+                                        <p:strVal val="visible"/>
+                                      </p:to>
+                                    </p:set>
+                                  </p:childTnLst>
+                                </p:cTn>
+                              </p:par>
+                            </p:childTnLst>
+                          </p:cTn>
+                        </p:par>
+                      </p:childTnLst>
+                    </p:cTn>
+                  </p:par>
+                </p:childTnLst>
+              </p:cTn>
+              <p:prevCondLst>
+                <p:cond evt="onPrev" delay="0">
+                  <p:tgtEl>
+                    <p:sldTgt/>
+                  </p:tgtEl>
+                </p:cond>
+              </p:prevCondLst>
+              <p:nextCondLst>
+                <p:cond evt="onNext" delay="0">
+                  <p:tgtEl>
+                    <p:sldTgt/>
+                  </p:tgtEl>
+                </p:cond>
+              </p:nextCondLst>
+            </p:seq>
+          </p:childTnLst>
+        </p:cTn>
+      </p:par>
+    </p:tnLst>
+    <p:bldLst>
+      <p:bldP spid="3" grpId="0" uiExpand="1" build="p"/>
+    </p:bldLst>
+  </p:timing>
 </p:sld>
 </file>
 
@@ -15652,7 +18489,7 @@
             </a:pPr>
             <a:r>
               <a:rPr/>
-              <a:t>Thanks!</a:t>
+              <a:t>Discussion of survey results</a:t>
             </a:r>
           </a:p>
         </p:txBody>
@@ -15682,8 +18519,8 @@
               <a:buNone/>
             </a:pPr>
             <a:r>
-              <a:rPr/>
-              <a:t>See you next session :)</a:t>
+              <a:rPr b="1"/>
+              <a:t>What do we see in the results?</a:t>
             </a:r>
           </a:p>
         </p:txBody>
@@ -15775,7 +18612,7 @@
             </a:pPr>
             <a:r>
               <a:rPr/>
-              <a:t>Additional in-class activity</a:t>
+              <a:t>References</a:t>
             </a:r>
           </a:p>
         </p:txBody>
@@ -15801,14 +18638,20 @@
           <a:bodyPr/>
           <a:lstStyle/>
           <a:p>
-            <a:pPr lvl="0"/>
-            <a:r>
-              <a:rPr b="1"/>
-              <a:t>Activity</a:t>
-            </a:r>
-            <a:r>
-              <a:rPr/>
-              <a:t>: Get in a pair, navigate a literature database (Google Scholar), find a paper of your choice with its full text, analyse the citations and the reference list. Note what features you see and share in class.</a:t>
+            <a:pPr lvl="0" indent="0" marL="0">
+              <a:buNone/>
+            </a:pPr>
+            <a:r>
+              <a:rPr/>
+              <a:t>Jackson, P. (1990). The Daily Grind. In </a:t>
+            </a:r>
+            <a:r>
+              <a:rPr i="1"/>
+              <a:t>Life in Classrooms</a:t>
+            </a:r>
+            <a:r>
+              <a:rPr/>
+              <a:t> (2nd ed., pp. 34–35). Teachers College Press.</a:t>
             </a:r>
           </a:p>
         </p:txBody>
@@ -15900,6 +18743,336 @@
             </a:pPr>
             <a:r>
               <a:rPr/>
+              <a:t>Thanks!</a:t>
+            </a:r>
+          </a:p>
+        </p:txBody>
+      </p:sp>
+      <p:sp>
+        <p:nvSpPr>
+          <p:cNvPr id="3" name="Content Placeholder 2">
+            <a:extLst>
+              <a:ext uri="{FF2B5EF4-FFF2-40B4-BE49-F238E27FC236}">
+                <a16:creationId xmlns:a16="http://schemas.microsoft.com/office/drawing/2014/main" id="{372FA590-20E9-0368-85B4-90C26598F852}"/>
+              </a:ext>
+            </a:extLst>
+          </p:cNvPr>
+          <p:cNvSpPr>
+            <a:spLocks noGrp="1"/>
+          </p:cNvSpPr>
+          <p:nvPr>
+            <p:ph idx="1"/>
+          </p:nvPr>
+        </p:nvSpPr>
+        <p:spPr/>
+        <p:txBody>
+          <a:bodyPr/>
+          <a:lstStyle/>
+          <a:p>
+            <a:pPr lvl="0" indent="0" marL="0">
+              <a:buNone/>
+            </a:pPr>
+            <a:r>
+              <a:rPr/>
+              <a:t>See you next session :)</a:t>
+            </a:r>
+          </a:p>
+        </p:txBody>
+      </p:sp>
+      <p:sp>
+        <p:nvSpPr>
+          <p:cNvPr id="6" name="Slide Number Placeholder 5">
+            <a:extLst>
+              <a:ext uri="{FF2B5EF4-FFF2-40B4-BE49-F238E27FC236}">
+                <a16:creationId xmlns:a16="http://schemas.microsoft.com/office/drawing/2014/main" id="{5F33F24B-1A9E-2EAF-F2AB-89426454DEE9}"/>
+              </a:ext>
+            </a:extLst>
+          </p:cNvPr>
+          <p:cNvSpPr>
+            <a:spLocks noGrp="1"/>
+          </p:cNvSpPr>
+          <p:nvPr>
+            <p:ph idx="12" sz="quarter" type="sldNum"/>
+          </p:nvPr>
+        </p:nvSpPr>
+        <p:spPr>
+          <a:xfrm>
+            <a:off x="8610599" y="6356350"/>
+            <a:ext cx="3135001" cy="365125"/>
+          </a:xfrm>
+        </p:spPr>
+        <p:txBody>
+          <a:bodyPr/>
+          <a:lstStyle/>
+          <a:p>
+            <a:fld id="{7FEFBAB6-26D0-44D8-BD53-612461CE1ACC}" type="slidenum">
+              <a:rPr lang="de-DE" smtClean="0"/>
+              <a:t>‹#›</a:t>
+            </a:fld>
+            <a:endParaRPr lang="de-DE"/>
+          </a:p>
+        </p:txBody>
+      </p:sp>
+    </p:spTree>
+  </p:cSld>
+</p:sld>
+</file>
+
+<file path=ppt/slides/slide44.xml><?xml version="1.0" encoding="utf-8"?>
+<p:sld xmlns:a="http://schemas.openxmlformats.org/drawingml/2006/main" xmlns:r="http://schemas.openxmlformats.org/officeDocument/2006/relationships" xmlns:p="http://schemas.openxmlformats.org/presentationml/2006/main">
+  <p:cSld>
+    <p:spTree>
+      <p:nvGrpSpPr>
+        <p:cNvPr id="1" name=""/>
+        <p:cNvGrpSpPr/>
+        <p:nvPr/>
+      </p:nvGrpSpPr>
+      <p:grpSpPr>
+        <a:xfrm>
+          <a:off x="0" y="0"/>
+          <a:ext cx="0" cy="0"/>
+          <a:chOff x="0" y="0"/>
+          <a:chExt cx="0" cy="0"/>
+        </a:xfrm>
+      </p:grpSpPr>
+      <p:sp>
+        <p:nvSpPr>
+          <p:cNvPr id="2" name="Title 1">
+            <a:extLst>
+              <a:ext uri="{FF2B5EF4-FFF2-40B4-BE49-F238E27FC236}">
+                <a16:creationId xmlns:a16="http://schemas.microsoft.com/office/drawing/2014/main" id="{6BF04AE0-F94F-A586-34B8-68D9CAB6C6D1}"/>
+              </a:ext>
+            </a:extLst>
+          </p:cNvPr>
+          <p:cNvSpPr>
+            <a:spLocks noGrp="1"/>
+          </p:cNvSpPr>
+          <p:nvPr>
+            <p:ph type="title"/>
+          </p:nvPr>
+        </p:nvSpPr>
+        <p:spPr>
+          <a:xfrm>
+            <a:off x="2295524" y="432532"/>
+            <a:ext cx="9450077" cy="825501"/>
+          </a:xfrm>
+        </p:spPr>
+        <p:txBody>
+          <a:bodyPr/>
+          <a:lstStyle/>
+          <a:p>
+            <a:pPr lvl="0" indent="0" marL="0">
+              <a:buNone/>
+            </a:pPr>
+            <a:r>
+              <a:rPr/>
+              <a:t>Additional in-class activity</a:t>
+            </a:r>
+          </a:p>
+        </p:txBody>
+      </p:sp>
+      <p:sp>
+        <p:nvSpPr>
+          <p:cNvPr id="3" name="Content Placeholder 2">
+            <a:extLst>
+              <a:ext uri="{FF2B5EF4-FFF2-40B4-BE49-F238E27FC236}">
+                <a16:creationId xmlns:a16="http://schemas.microsoft.com/office/drawing/2014/main" id="{372FA590-20E9-0368-85B4-90C26598F852}"/>
+              </a:ext>
+            </a:extLst>
+          </p:cNvPr>
+          <p:cNvSpPr>
+            <a:spLocks noGrp="1"/>
+          </p:cNvSpPr>
+          <p:nvPr>
+            <p:ph idx="1"/>
+          </p:nvPr>
+        </p:nvSpPr>
+        <p:spPr/>
+        <p:txBody>
+          <a:bodyPr/>
+          <a:lstStyle/>
+          <a:p>
+            <a:pPr lvl="0"/>
+            <a:r>
+              <a:rPr b="1"/>
+              <a:t>Activity</a:t>
+            </a:r>
+            <a:r>
+              <a:rPr/>
+              <a:t>: Get in a pair, navigate a literature database (Google Scholar), find a paper of your choice with its full text, analyse the citations and the reference list. Note what features you see and share in class.</a:t>
+            </a:r>
+          </a:p>
+        </p:txBody>
+      </p:sp>
+      <p:sp>
+        <p:nvSpPr>
+          <p:cNvPr id="6" name="Slide Number Placeholder 5">
+            <a:extLst>
+              <a:ext uri="{FF2B5EF4-FFF2-40B4-BE49-F238E27FC236}">
+                <a16:creationId xmlns:a16="http://schemas.microsoft.com/office/drawing/2014/main" id="{5F33F24B-1A9E-2EAF-F2AB-89426454DEE9}"/>
+              </a:ext>
+            </a:extLst>
+          </p:cNvPr>
+          <p:cNvSpPr>
+            <a:spLocks noGrp="1"/>
+          </p:cNvSpPr>
+          <p:nvPr>
+            <p:ph idx="12" sz="quarter" type="sldNum"/>
+          </p:nvPr>
+        </p:nvSpPr>
+        <p:spPr>
+          <a:xfrm>
+            <a:off x="8610599" y="6356350"/>
+            <a:ext cx="3135001" cy="365125"/>
+          </a:xfrm>
+        </p:spPr>
+        <p:txBody>
+          <a:bodyPr/>
+          <a:lstStyle/>
+          <a:p>
+            <a:fld id="{7FEFBAB6-26D0-44D8-BD53-612461CE1ACC}" type="slidenum">
+              <a:rPr lang="de-DE" smtClean="0"/>
+              <a:t>‹#›</a:t>
+            </a:fld>
+            <a:endParaRPr lang="de-DE"/>
+          </a:p>
+        </p:txBody>
+      </p:sp>
+    </p:spTree>
+  </p:cSld>
+  <p:timing>
+    <p:tnLst>
+      <p:par>
+        <p:cTn id="1" dur="indefinite" restart="never" nodeType="tmRoot">
+          <p:childTnLst>
+            <p:seq concurrent="1" nextAc="seek">
+              <p:cTn id="2" dur="indefinite" nodeType="mainSeq">
+                <p:childTnLst>
+                  <p:par>
+                    <p:cTn id="3" fill="hold">
+                      <p:stCondLst>
+                        <p:cond delay="indefinite"/>
+                      </p:stCondLst>
+                      <p:childTnLst>
+                        <p:par>
+                          <p:cTn id="4" fill="hold">
+                            <p:stCondLst>
+                              <p:cond delay="0"/>
+                            </p:stCondLst>
+                            <p:childTnLst>
+                              <p:par>
+                                <p:cTn id="5" presetID="1" presetClass="entr" presetSubtype="0" fill="hold" grpId="0" nodeType="clickEffect">
+                                  <p:stCondLst>
+                                    <p:cond delay="0"/>
+                                  </p:stCondLst>
+                                  <p:childTnLst>
+                                    <p:set>
+                                      <p:cBhvr>
+                                        <p:cTn id="6" dur="1" fill="hold">
+                                          <p:stCondLst>
+                                            <p:cond delay="0"/>
+                                          </p:stCondLst>
+                                        </p:cTn>
+                                        <p:tgtEl>
+                                          <p:spTgt spid="3">
+                                            <p:txEl>
+                                              <p:pRg st="0" end="0"/>
+                                            </p:txEl>
+                                          </p:spTgt>
+                                        </p:tgtEl>
+                                        <p:attrNameLst>
+                                          <p:attrName>style.visibility</p:attrName>
+                                        </p:attrNameLst>
+                                      </p:cBhvr>
+                                      <p:to>
+                                        <p:strVal val="visible"/>
+                                      </p:to>
+                                    </p:set>
+                                  </p:childTnLst>
+                                </p:cTn>
+                              </p:par>
+                            </p:childTnLst>
+                          </p:cTn>
+                        </p:par>
+                      </p:childTnLst>
+                    </p:cTn>
+                  </p:par>
+                </p:childTnLst>
+              </p:cTn>
+              <p:prevCondLst>
+                <p:cond evt="onPrev" delay="0">
+                  <p:tgtEl>
+                    <p:sldTgt/>
+                  </p:tgtEl>
+                </p:cond>
+              </p:prevCondLst>
+              <p:nextCondLst>
+                <p:cond evt="onNext" delay="0">
+                  <p:tgtEl>
+                    <p:sldTgt/>
+                  </p:tgtEl>
+                </p:cond>
+              </p:nextCondLst>
+            </p:seq>
+          </p:childTnLst>
+        </p:cTn>
+      </p:par>
+    </p:tnLst>
+    <p:bldLst>
+      <p:bldP spid="3" grpId="0" uiExpand="1" build="p"/>
+    </p:bldLst>
+  </p:timing>
+</p:sld>
+</file>
+
+<file path=ppt/slides/slide45.xml><?xml version="1.0" encoding="utf-8"?>
+<p:sld xmlns:a="http://schemas.openxmlformats.org/drawingml/2006/main" xmlns:r="http://schemas.openxmlformats.org/officeDocument/2006/relationships" xmlns:p="http://schemas.openxmlformats.org/presentationml/2006/main">
+  <p:cSld>
+    <p:spTree>
+      <p:nvGrpSpPr>
+        <p:cNvPr id="1" name=""/>
+        <p:cNvGrpSpPr/>
+        <p:nvPr/>
+      </p:nvGrpSpPr>
+      <p:grpSpPr>
+        <a:xfrm>
+          <a:off x="0" y="0"/>
+          <a:ext cx="0" cy="0"/>
+          <a:chOff x="0" y="0"/>
+          <a:chExt cx="0" cy="0"/>
+        </a:xfrm>
+      </p:grpSpPr>
+      <p:sp>
+        <p:nvSpPr>
+          <p:cNvPr id="2" name="Title 1">
+            <a:extLst>
+              <a:ext uri="{FF2B5EF4-FFF2-40B4-BE49-F238E27FC236}">
+                <a16:creationId xmlns:a16="http://schemas.microsoft.com/office/drawing/2014/main" id="{6BF04AE0-F94F-A586-34B8-68D9CAB6C6D1}"/>
+              </a:ext>
+            </a:extLst>
+          </p:cNvPr>
+          <p:cNvSpPr>
+            <a:spLocks noGrp="1"/>
+          </p:cNvSpPr>
+          <p:nvPr>
+            <p:ph type="title"/>
+          </p:nvPr>
+        </p:nvSpPr>
+        <p:spPr>
+          <a:xfrm>
+            <a:off x="2295524" y="432532"/>
+            <a:ext cx="9450077" cy="825501"/>
+          </a:xfrm>
+        </p:spPr>
+        <p:txBody>
+          <a:bodyPr/>
+          <a:lstStyle/>
+          <a:p>
+            <a:pPr lvl="0" indent="0" marL="0">
+              <a:buNone/>
+            </a:pPr>
+            <a:r>
+              <a:rPr/>
               <a:t>CREDiT Contribution Statement - TO DO</a:t>
             </a:r>
           </a:p>
@@ -16052,7 +19225,7 @@
             </a:pPr>
             <a:r>
               <a:rPr/>
-              <a:t>Licence</a:t>
+              <a:t>a section</a:t>
             </a:r>
           </a:p>
         </p:txBody>
@@ -16078,72 +19251,31 @@
           <a:bodyPr/>
           <a:lstStyle/>
           <a:p>
-            <a:pPr lvl="0" indent="0" marL="0">
-              <a:buNone/>
-            </a:pPr>
-            <a:r>
-              <a:rPr/>
-              <a:t>This work was originally created by Pat Callahan and Dejana Damjanovic under a CC-BY-SA 4.0 </a:t>
-            </a:r>
-            <a:r>
-              <a:rPr>
-                <a:hlinkClick r:id="rId3"/>
-              </a:rPr>
-              <a:t>Creative Commons Attribution 4.0 International License</a:t>
-            </a:r>
-            <a:r>
-              <a:rPr/>
-              <a:t> and a CC0 1.0 </a:t>
-            </a:r>
-            <a:r>
-              <a:rPr>
-                <a:hlinkClick r:id="rId4"/>
-              </a:rPr>
-              <a:t>Creative Commons Universal</a:t>
-            </a:r>
-            <a:r>
-              <a:rPr/>
-              <a:t> licence for code snippets. It was subsequently adapted and revised by </a:t>
-            </a:r>
-            <a:r>
-              <a:rPr>
-                <a:hlinkClick r:id="rId5"/>
-              </a:rPr>
-              <a:t>Sarah von Grebmer zu Wolfsthurn</a:t>
-            </a:r>
-            <a:r>
-              <a:rPr/>
-              <a:t>. This current work by </a:t>
-            </a:r>
-            <a:r>
-              <a:rPr>
-                <a:hlinkClick r:id="rId6"/>
-              </a:rPr>
-              <a:t>Tejaswini Sharma</a:t>
-            </a:r>
-            <a:r>
-              <a:rPr/>
-              <a:t> and Sarah von Grebmer zu Wolfsthurn is licensed under a CC-BY-SA 4.0 </a:t>
-            </a:r>
-            <a:r>
-              <a:rPr>
-                <a:hlinkClick r:id="rId7"/>
-              </a:rPr>
-              <a:t>Creative Commons Attribution 4.0 International SA License</a:t>
-            </a:r>
-            <a:r>
-              <a:rPr/>
-              <a:t>. permits unrestricted re-use, distribution, and reproduction in any medium, provided the original work is properly cited. If you remix, transform, or build upon the material, you must distribute your contributions under the same license as the original. Code snippets are dedicated to the public domain and licenced under a CC0 1.0 </a:t>
-            </a:r>
-            <a:r>
-              <a:rPr>
-                <a:hlinkClick r:id="rId8"/>
-              </a:rPr>
-              <a:t>Creative Commons Universal Licence</a:t>
-            </a:r>
-            <a:r>
-              <a:rPr/>
-              <a:t>. You may use, modify, distribute, and sell the code snippets for any purpose, without permission or attribution. The code snippets are provided “as is”, without warranty of any kind.</a:t>
+            <a:pPr lvl="0"/>
+            <a:r>
+              <a:rPr/>
+              <a:t>some text</a:t>
+            </a:r>
+          </a:p>
+          <a:p>
+            <a:pPr lvl="0"/>
+            <a:r>
+              <a:rPr/>
+              <a:t>another bullet point</a:t>
+            </a:r>
+          </a:p>
+          <a:p>
+            <a:pPr lvl="0"/>
+            <a:r>
+              <a:rPr b="1"/>
+              <a:t>bold</a:t>
+            </a:r>
+          </a:p>
+          <a:p>
+            <a:pPr lvl="0"/>
+            <a:r>
+              <a:rPr i="1"/>
+              <a:t>italics</a:t>
             </a:r>
           </a:p>
         </p:txBody>
@@ -16184,6 +19316,235 @@
       </p:sp>
     </p:spTree>
   </p:cSld>
+  <p:timing>
+    <p:tnLst>
+      <p:par>
+        <p:cTn id="1" dur="indefinite" restart="never" nodeType="tmRoot">
+          <p:childTnLst>
+            <p:seq concurrent="1" nextAc="seek">
+              <p:cTn id="2" dur="indefinite" nodeType="mainSeq">
+                <p:childTnLst>
+                  <p:par>
+                    <p:cTn id="3" fill="hold">
+                      <p:stCondLst>
+                        <p:cond delay="indefinite"/>
+                      </p:stCondLst>
+                      <p:childTnLst>
+                        <p:par>
+                          <p:cTn id="4" fill="hold">
+                            <p:stCondLst>
+                              <p:cond delay="0"/>
+                            </p:stCondLst>
+                            <p:childTnLst>
+                              <p:par>
+                                <p:cTn id="5" presetID="1" presetClass="entr" presetSubtype="0" fill="hold" grpId="0" nodeType="clickEffect">
+                                  <p:stCondLst>
+                                    <p:cond delay="0"/>
+                                  </p:stCondLst>
+                                  <p:childTnLst>
+                                    <p:set>
+                                      <p:cBhvr>
+                                        <p:cTn id="6" dur="1" fill="hold">
+                                          <p:stCondLst>
+                                            <p:cond delay="0"/>
+                                          </p:stCondLst>
+                                        </p:cTn>
+                                        <p:tgtEl>
+                                          <p:spTgt spid="3">
+                                            <p:txEl>
+                                              <p:pRg st="0" end="0"/>
+                                            </p:txEl>
+                                          </p:spTgt>
+                                        </p:tgtEl>
+                                        <p:attrNameLst>
+                                          <p:attrName>style.visibility</p:attrName>
+                                        </p:attrNameLst>
+                                      </p:cBhvr>
+                                      <p:to>
+                                        <p:strVal val="visible"/>
+                                      </p:to>
+                                    </p:set>
+                                  </p:childTnLst>
+                                </p:cTn>
+                              </p:par>
+                            </p:childTnLst>
+                          </p:cTn>
+                        </p:par>
+                      </p:childTnLst>
+                    </p:cTn>
+                  </p:par>
+                  <p:par>
+                    <p:cTn id="7" fill="hold">
+                      <p:stCondLst>
+                        <p:cond delay="indefinite"/>
+                      </p:stCondLst>
+                      <p:childTnLst>
+                        <p:par>
+                          <p:cTn id="8" fill="hold">
+                            <p:stCondLst>
+                              <p:cond delay="0"/>
+                            </p:stCondLst>
+                            <p:childTnLst>
+                              <p:par>
+                                <p:cTn id="9" presetID="1" presetClass="entr" presetSubtype="0" fill="hold" grpId="0" nodeType="clickEffect">
+                                  <p:stCondLst>
+                                    <p:cond delay="0"/>
+                                  </p:stCondLst>
+                                  <p:childTnLst>
+                                    <p:set>
+                                      <p:cBhvr>
+                                        <p:cTn id="10" dur="1" fill="hold">
+                                          <p:stCondLst>
+                                            <p:cond delay="0"/>
+                                          </p:stCondLst>
+                                        </p:cTn>
+                                        <p:tgtEl>
+                                          <p:spTgt spid="3">
+                                            <p:txEl>
+                                              <p:pRg st="1" end="1"/>
+                                            </p:txEl>
+                                          </p:spTgt>
+                                        </p:tgtEl>
+                                        <p:attrNameLst>
+                                          <p:attrName>style.visibility</p:attrName>
+                                        </p:attrNameLst>
+                                      </p:cBhvr>
+                                      <p:to>
+                                        <p:strVal val="visible"/>
+                                      </p:to>
+                                    </p:set>
+                                  </p:childTnLst>
+                                </p:cTn>
+                              </p:par>
+                            </p:childTnLst>
+                          </p:cTn>
+                        </p:par>
+                      </p:childTnLst>
+                    </p:cTn>
+                  </p:par>
+                  <p:par>
+                    <p:cTn id="11" fill="hold">
+                      <p:stCondLst>
+                        <p:cond delay="indefinite"/>
+                      </p:stCondLst>
+                      <p:childTnLst>
+                        <p:par>
+                          <p:cTn id="12" fill="hold">
+                            <p:stCondLst>
+                              <p:cond delay="0"/>
+                            </p:stCondLst>
+                            <p:childTnLst>
+                              <p:par>
+                                <p:cTn id="13" presetID="1" presetClass="entr" presetSubtype="0" fill="hold" grpId="0" nodeType="clickEffect">
+                                  <p:stCondLst>
+                                    <p:cond delay="0"/>
+                                  </p:stCondLst>
+                                  <p:childTnLst>
+                                    <p:set>
+                                      <p:cBhvr>
+                                        <p:cTn id="14" dur="1" fill="hold">
+                                          <p:stCondLst>
+                                            <p:cond delay="0"/>
+                                          </p:stCondLst>
+                                        </p:cTn>
+                                        <p:tgtEl>
+                                          <p:spTgt spid="3">
+                                            <p:txEl>
+                                              <p:pRg st="2" end="2"/>
+                                            </p:txEl>
+                                          </p:spTgt>
+                                        </p:tgtEl>
+                                        <p:attrNameLst>
+                                          <p:attrName>style.visibility</p:attrName>
+                                        </p:attrNameLst>
+                                      </p:cBhvr>
+                                      <p:to>
+                                        <p:strVal val="visible"/>
+                                      </p:to>
+                                    </p:set>
+                                  </p:childTnLst>
+                                </p:cTn>
+                              </p:par>
+                            </p:childTnLst>
+                          </p:cTn>
+                        </p:par>
+                      </p:childTnLst>
+                    </p:cTn>
+                  </p:par>
+                  <p:par>
+                    <p:cTn id="15" fill="hold">
+                      <p:stCondLst>
+                        <p:cond delay="indefinite"/>
+                      </p:stCondLst>
+                      <p:childTnLst>
+                        <p:par>
+                          <p:cTn id="16" fill="hold">
+                            <p:stCondLst>
+                              <p:cond delay="0"/>
+                            </p:stCondLst>
+                            <p:childTnLst>
+                              <p:par>
+                                <p:cTn id="17" presetID="1" presetClass="entr" presetSubtype="0" fill="hold" grpId="0" nodeType="clickEffect">
+                                  <p:stCondLst>
+                                    <p:cond delay="0"/>
+                                  </p:stCondLst>
+                                  <p:childTnLst>
+                                    <p:set>
+                                      <p:cBhvr>
+                                        <p:cTn id="18" dur="1" fill="hold">
+                                          <p:stCondLst>
+                                            <p:cond delay="0"/>
+                                          </p:stCondLst>
+                                        </p:cTn>
+                                        <p:tgtEl>
+                                          <p:spTgt spid="3">
+                                            <p:txEl>
+                                              <p:pRg st="3" end="3"/>
+                                            </p:txEl>
+                                          </p:spTgt>
+                                        </p:tgtEl>
+                                        <p:attrNameLst>
+                                          <p:attrName>style.visibility</p:attrName>
+                                        </p:attrNameLst>
+                                      </p:cBhvr>
+                                      <p:to>
+                                        <p:strVal val="visible"/>
+                                      </p:to>
+                                    </p:set>
+                                  </p:childTnLst>
+                                </p:cTn>
+                              </p:par>
+                            </p:childTnLst>
+                          </p:cTn>
+                        </p:par>
+                      </p:childTnLst>
+                    </p:cTn>
+                  </p:par>
+                </p:childTnLst>
+              </p:cTn>
+              <p:prevCondLst>
+                <p:cond evt="onPrev" delay="0">
+                  <p:tgtEl>
+                    <p:sldTgt/>
+                  </p:tgtEl>
+                </p:cond>
+              </p:prevCondLst>
+              <p:nextCondLst>
+                <p:cond evt="onNext" delay="0">
+                  <p:tgtEl>
+                    <p:sldTgt/>
+                  </p:tgtEl>
+                </p:cond>
+              </p:nextCondLst>
+            </p:seq>
+          </p:childTnLst>
+        </p:cTn>
+      </p:par>
+    </p:tnLst>
+    <p:bldLst>
+      <p:bldP spid="3" grpId="0" uiExpand="1" build="p"/>
+    </p:bldLst>
+  </p:timing>
 </p:sld>
 </file>
 
@@ -16233,53 +19594,7 @@
             </a:pPr>
             <a:r>
               <a:rPr b="1"/>
-              <a:t>Contribution statement</a:t>
-            </a:r>
-          </a:p>
-          <a:p>
-            <a:pPr lvl="0" indent="0" marL="0">
-              <a:buNone/>
-            </a:pPr>
-            <a:r>
-              <a:rPr b="1"/>
-              <a:t>Creator</a:t>
-            </a:r>
-            <a:r>
-              <a:rPr/>
-              <a:t>: Sharma, Tejaswini (</a:t>
-            </a:r>
-            <a:r>
-              <a:rPr>
-                <a:hlinkClick r:id="rId2"/>
-              </a:rPr>
-              <a:t>Orcid-ID: 00009-0000-0305-9751</a:t>
-            </a:r>
-            <a:r>
-              <a:rPr/>
-              <a:t>)</a:t>
-            </a:r>
-          </a:p>
-          <a:p>
-            <a:pPr lvl="0" indent="0" marL="0">
-              <a:buNone/>
-            </a:pPr>
-            <a:r>
-              <a:rPr b="1"/>
-              <a:t>Reviewer</a:t>
-            </a:r>
-            <a:r>
-              <a:rPr/>
-              <a:t>: Von Grebmer zu Wolfsthurn, Sarah (</a:t>
-            </a:r>
-            <a:r>
-              <a:rPr>
-                <a:hlinkClick r:id="rId3"/>
-              </a:rPr>
-              <a:t>Ordcid-ID: 0000-0002-6413-3895</a:t>
-            </a:r>
-            <a:r>
-              <a:rPr/>
-              <a:t>)</a:t>
+              <a:t>this is a level three headers</a:t>
             </a:r>
           </a:p>
         </p:txBody>
@@ -16324,6 +19639,325 @@
 </file>
 
 <file path=ppt/slides/slide7.xml><?xml version="1.0" encoding="utf-8"?>
+<p:sld xmlns:a="http://schemas.openxmlformats.org/drawingml/2006/main" xmlns:r="http://schemas.openxmlformats.org/officeDocument/2006/relationships" xmlns:p="http://schemas.openxmlformats.org/presentationml/2006/main">
+  <p:cSld>
+    <p:spTree>
+      <p:nvGrpSpPr>
+        <p:cNvPr id="1" name=""/>
+        <p:cNvGrpSpPr/>
+        <p:nvPr/>
+      </p:nvGrpSpPr>
+      <p:grpSpPr>
+        <a:xfrm>
+          <a:off x="0" y="0"/>
+          <a:ext cx="0" cy="0"/>
+          <a:chOff x="0" y="0"/>
+          <a:chExt cx="0" cy="0"/>
+        </a:xfrm>
+      </p:grpSpPr>
+      <p:sp>
+        <p:nvSpPr>
+          <p:cNvPr id="2" name="Title 1">
+            <a:extLst>
+              <a:ext uri="{FF2B5EF4-FFF2-40B4-BE49-F238E27FC236}">
+                <a16:creationId xmlns:a16="http://schemas.microsoft.com/office/drawing/2014/main" id="{6BF04AE0-F94F-A586-34B8-68D9CAB6C6D1}"/>
+              </a:ext>
+            </a:extLst>
+          </p:cNvPr>
+          <p:cNvSpPr>
+            <a:spLocks noGrp="1"/>
+          </p:cNvSpPr>
+          <p:nvPr>
+            <p:ph type="title"/>
+          </p:nvPr>
+        </p:nvSpPr>
+        <p:spPr>
+          <a:xfrm>
+            <a:off x="2295524" y="432532"/>
+            <a:ext cx="9450077" cy="825501"/>
+          </a:xfrm>
+        </p:spPr>
+        <p:txBody>
+          <a:bodyPr/>
+          <a:lstStyle/>
+          <a:p>
+            <a:pPr lvl="0" indent="0" marL="0">
+              <a:buNone/>
+            </a:pPr>
+            <a:r>
+              <a:rPr/>
+              <a:t>Licence</a:t>
+            </a:r>
+          </a:p>
+        </p:txBody>
+      </p:sp>
+      <p:sp>
+        <p:nvSpPr>
+          <p:cNvPr id="3" name="Content Placeholder 2">
+            <a:extLst>
+              <a:ext uri="{FF2B5EF4-FFF2-40B4-BE49-F238E27FC236}">
+                <a16:creationId xmlns:a16="http://schemas.microsoft.com/office/drawing/2014/main" id="{372FA590-20E9-0368-85B4-90C26598F852}"/>
+              </a:ext>
+            </a:extLst>
+          </p:cNvPr>
+          <p:cNvSpPr>
+            <a:spLocks noGrp="1"/>
+          </p:cNvSpPr>
+          <p:nvPr>
+            <p:ph idx="1"/>
+          </p:nvPr>
+        </p:nvSpPr>
+        <p:spPr/>
+        <p:txBody>
+          <a:bodyPr/>
+          <a:lstStyle/>
+          <a:p>
+            <a:pPr lvl="0" indent="0" marL="0">
+              <a:buNone/>
+            </a:pPr>
+            <a:r>
+              <a:rPr/>
+              <a:t>This work was originally created by Pat Callahan and Dejana Damjanovic under a CC-BY-SA 4.0 </a:t>
+            </a:r>
+            <a:r>
+              <a:rPr>
+                <a:hlinkClick r:id="rId3"/>
+              </a:rPr>
+              <a:t>Creative Commons Attribution 4.0 International License</a:t>
+            </a:r>
+            <a:r>
+              <a:rPr/>
+              <a:t> and a CC0 1.0 </a:t>
+            </a:r>
+            <a:r>
+              <a:rPr>
+                <a:hlinkClick r:id="rId4"/>
+              </a:rPr>
+              <a:t>Creative Commons Universal</a:t>
+            </a:r>
+            <a:r>
+              <a:rPr/>
+              <a:t> licence for code snippets. It was subsequently adapted and revised by </a:t>
+            </a:r>
+            <a:r>
+              <a:rPr>
+                <a:hlinkClick r:id="rId5"/>
+              </a:rPr>
+              <a:t>Sarah von Grebmer zu Wolfsthurn</a:t>
+            </a:r>
+            <a:r>
+              <a:rPr/>
+              <a:t>. This current work by </a:t>
+            </a:r>
+            <a:r>
+              <a:rPr>
+                <a:hlinkClick r:id="rId6"/>
+              </a:rPr>
+              <a:t>Tejaswini Sharma</a:t>
+            </a:r>
+            <a:r>
+              <a:rPr/>
+              <a:t> and Sarah von Grebmer zu Wolfsthurn is licensed under a CC-BY-SA 4.0 </a:t>
+            </a:r>
+            <a:r>
+              <a:rPr>
+                <a:hlinkClick r:id="rId7"/>
+              </a:rPr>
+              <a:t>Creative Commons Attribution 4.0 International SA License</a:t>
+            </a:r>
+            <a:r>
+              <a:rPr/>
+              <a:t>. permits unrestricted re-use, distribution, and reproduction in any medium, provided the original work is properly cited. If you remix, transform, or build upon the material, you must distribute your contributions under the same license as the original. Code snippets are dedicated to the public domain and licenced under a CC0 1.0 </a:t>
+            </a:r>
+            <a:r>
+              <a:rPr>
+                <a:hlinkClick r:id="rId8"/>
+              </a:rPr>
+              <a:t>Creative Commons Universal Licence</a:t>
+            </a:r>
+            <a:r>
+              <a:rPr/>
+              <a:t>. You may use, modify, distribute, and sell the code snippets for any purpose, without permission or attribution. The code snippets are provided “as is”, without warranty of any kind.</a:t>
+            </a:r>
+          </a:p>
+        </p:txBody>
+      </p:sp>
+      <p:sp>
+        <p:nvSpPr>
+          <p:cNvPr id="6" name="Slide Number Placeholder 5">
+            <a:extLst>
+              <a:ext uri="{FF2B5EF4-FFF2-40B4-BE49-F238E27FC236}">
+                <a16:creationId xmlns:a16="http://schemas.microsoft.com/office/drawing/2014/main" id="{5F33F24B-1A9E-2EAF-F2AB-89426454DEE9}"/>
+              </a:ext>
+            </a:extLst>
+          </p:cNvPr>
+          <p:cNvSpPr>
+            <a:spLocks noGrp="1"/>
+          </p:cNvSpPr>
+          <p:nvPr>
+            <p:ph idx="12" sz="quarter" type="sldNum"/>
+          </p:nvPr>
+        </p:nvSpPr>
+        <p:spPr>
+          <a:xfrm>
+            <a:off x="8610599" y="6356350"/>
+            <a:ext cx="3135001" cy="365125"/>
+          </a:xfrm>
+        </p:spPr>
+        <p:txBody>
+          <a:bodyPr/>
+          <a:lstStyle/>
+          <a:p>
+            <a:fld id="{7FEFBAB6-26D0-44D8-BD53-612461CE1ACC}" type="slidenum">
+              <a:rPr lang="de-DE" smtClean="0"/>
+              <a:t>‹#›</a:t>
+            </a:fld>
+            <a:endParaRPr lang="de-DE"/>
+          </a:p>
+        </p:txBody>
+      </p:sp>
+    </p:spTree>
+  </p:cSld>
+</p:sld>
+</file>
+
+<file path=ppt/slides/slide8.xml><?xml version="1.0" encoding="utf-8"?>
+<p:sld xmlns:a="http://schemas.openxmlformats.org/drawingml/2006/main" xmlns:r="http://schemas.openxmlformats.org/officeDocument/2006/relationships" xmlns:p="http://schemas.openxmlformats.org/presentationml/2006/main">
+  <p:cSld>
+    <p:spTree>
+      <p:nvGrpSpPr>
+        <p:cNvPr id="1" name=""/>
+        <p:cNvGrpSpPr/>
+        <p:nvPr/>
+      </p:nvGrpSpPr>
+      <p:grpSpPr>
+        <a:xfrm>
+          <a:off x="0" y="0"/>
+          <a:ext cx="0" cy="0"/>
+          <a:chOff x="0" y="0"/>
+          <a:chExt cx="0" cy="0"/>
+        </a:xfrm>
+      </p:grpSpPr>
+      <p:sp>
+        <p:nvSpPr>
+          <p:cNvPr id="3" name="Content Placeholder 2">
+            <a:extLst>
+              <a:ext uri="{FF2B5EF4-FFF2-40B4-BE49-F238E27FC236}">
+                <a16:creationId xmlns:a16="http://schemas.microsoft.com/office/drawing/2014/main" id="{372FA590-20E9-0368-85B4-90C26598F852}"/>
+              </a:ext>
+            </a:extLst>
+          </p:cNvPr>
+          <p:cNvSpPr>
+            <a:spLocks noGrp="1"/>
+          </p:cNvSpPr>
+          <p:nvPr>
+            <p:ph idx="1"/>
+          </p:nvPr>
+        </p:nvSpPr>
+        <p:spPr/>
+        <p:txBody>
+          <a:bodyPr/>
+          <a:lstStyle/>
+          <a:p>
+            <a:pPr lvl="0" indent="0" marL="0">
+              <a:spcBef>
+                <a:spcPts val="3000"/>
+              </a:spcBef>
+              <a:buNone/>
+            </a:pPr>
+            <a:r>
+              <a:rPr b="1"/>
+              <a:t>Contribution statement</a:t>
+            </a:r>
+          </a:p>
+          <a:p>
+            <a:pPr lvl="0" indent="0" marL="0">
+              <a:buNone/>
+            </a:pPr>
+            <a:r>
+              <a:rPr b="1"/>
+              <a:t>Creator</a:t>
+            </a:r>
+            <a:r>
+              <a:rPr/>
+              <a:t>: Sharma, Tejaswini (</a:t>
+            </a:r>
+            <a:r>
+              <a:rPr>
+                <a:hlinkClick r:id="rId2"/>
+              </a:rPr>
+              <a:t>Orcid-ID: 00009-0000-0305-9751</a:t>
+            </a:r>
+            <a:r>
+              <a:rPr/>
+              <a:t>)</a:t>
+            </a:r>
+          </a:p>
+          <a:p>
+            <a:pPr lvl="0" indent="0" marL="0">
+              <a:buNone/>
+            </a:pPr>
+            <a:r>
+              <a:rPr b="1"/>
+              <a:t>Reviewer</a:t>
+            </a:r>
+            <a:r>
+              <a:rPr/>
+              <a:t>: Von Grebmer zu Wolfsthurn, Sarah (</a:t>
+            </a:r>
+            <a:r>
+              <a:rPr>
+                <a:hlinkClick r:id="rId3"/>
+              </a:rPr>
+              <a:t>Ordcid-ID: 0000-0002-6413-3895</a:t>
+            </a:r>
+            <a:r>
+              <a:rPr/>
+              <a:t>)</a:t>
+            </a:r>
+          </a:p>
+        </p:txBody>
+      </p:sp>
+      <p:sp>
+        <p:nvSpPr>
+          <p:cNvPr id="6" name="Slide Number Placeholder 5">
+            <a:extLst>
+              <a:ext uri="{FF2B5EF4-FFF2-40B4-BE49-F238E27FC236}">
+                <a16:creationId xmlns:a16="http://schemas.microsoft.com/office/drawing/2014/main" id="{5F33F24B-1A9E-2EAF-F2AB-89426454DEE9}"/>
+              </a:ext>
+            </a:extLst>
+          </p:cNvPr>
+          <p:cNvSpPr>
+            <a:spLocks noGrp="1"/>
+          </p:cNvSpPr>
+          <p:nvPr>
+            <p:ph idx="12" sz="quarter" type="sldNum"/>
+          </p:nvPr>
+        </p:nvSpPr>
+        <p:spPr>
+          <a:xfrm>
+            <a:off x="8610599" y="6356350"/>
+            <a:ext cx="3135001" cy="365125"/>
+          </a:xfrm>
+        </p:spPr>
+        <p:txBody>
+          <a:bodyPr/>
+          <a:lstStyle/>
+          <a:p>
+            <a:fld id="{7FEFBAB6-26D0-44D8-BD53-612461CE1ACC}" type="slidenum">
+              <a:rPr lang="de-DE" smtClean="0"/>
+              <a:t>‹#›</a:t>
+            </a:fld>
+            <a:endParaRPr lang="de-DE"/>
+          </a:p>
+        </p:txBody>
+      </p:sp>
+    </p:spTree>
+  </p:cSld>
+</p:sld>
+</file>
+
+<file path=ppt/slides/slide9.xml><?xml version="1.0" encoding="utf-8"?>
 <p:sld xmlns:a="http://schemas.openxmlformats.org/drawingml/2006/main" xmlns:r="http://schemas.openxmlformats.org/officeDocument/2006/relationships" xmlns:p="http://schemas.openxmlformats.org/presentationml/2006/main">
   <p:cSld>
     <p:spTree>
@@ -16657,265 +20291,6 @@
           <a:xfrm>
             <a:off x="8610600" y="6356350"/>
             <a:ext cx="3135000" cy="365125"/>
-          </a:xfrm>
-        </p:spPr>
-        <p:txBody>
-          <a:bodyPr/>
-          <a:lstStyle/>
-          <a:p>
-            <a:fld id="{7FEFBAB6-26D0-44D8-BD53-612461CE1ACC}" type="slidenum">
-              <a:rPr lang="de-DE" smtClean="0"/>
-              <a:t>‹#›</a:t>
-            </a:fld>
-            <a:endParaRPr lang="de-DE"/>
-          </a:p>
-        </p:txBody>
-      </p:sp>
-    </p:spTree>
-  </p:cSld>
-</p:sld>
-</file>
-
-<file path=ppt/slides/slide8.xml><?xml version="1.0" encoding="utf-8"?>
-<p:sld xmlns:a="http://schemas.openxmlformats.org/drawingml/2006/main" xmlns:r="http://schemas.openxmlformats.org/officeDocument/2006/relationships" xmlns:p="http://schemas.openxmlformats.org/presentationml/2006/main">
-  <p:cSld>
-    <p:spTree>
-      <p:nvGrpSpPr>
-        <p:cNvPr id="1" name=""/>
-        <p:cNvGrpSpPr/>
-        <p:nvPr/>
-      </p:nvGrpSpPr>
-      <p:grpSpPr>
-        <a:xfrm>
-          <a:off x="0" y="0"/>
-          <a:ext cx="0" cy="0"/>
-          <a:chOff x="0" y="0"/>
-          <a:chExt cx="0" cy="0"/>
-        </a:xfrm>
-      </p:grpSpPr>
-      <p:sp>
-        <p:nvSpPr>
-          <p:cNvPr id="2" name="Title 1">
-            <a:extLst>
-              <a:ext uri="{FF2B5EF4-FFF2-40B4-BE49-F238E27FC236}">
-                <a16:creationId xmlns:a16="http://schemas.microsoft.com/office/drawing/2014/main" id="{12131F71-CF7E-3DA4-7847-3ACEC01625C3}"/>
-              </a:ext>
-            </a:extLst>
-          </p:cNvPr>
-          <p:cNvSpPr>
-            <a:spLocks noGrp="1"/>
-          </p:cNvSpPr>
-          <p:nvPr>
-            <p:ph type="title"/>
-          </p:nvPr>
-        </p:nvSpPr>
-        <p:spPr>
-          <a:xfrm>
-            <a:off x="446399" y="1392999"/>
-            <a:ext cx="4735201" cy="996952"/>
-          </a:xfrm>
-        </p:spPr>
-        <p:txBody>
-          <a:bodyPr/>
-          <a:lstStyle/>
-          <a:p>
-            <a:pPr lvl="0" indent="0" marL="0">
-              <a:buNone/>
-            </a:pPr>
-            <a:r>
-              <a:rPr/>
-              <a:t>Prerequisites (cont.)</a:t>
-            </a:r>
-          </a:p>
-        </p:txBody>
-      </p:sp>
-      <p:sp>
-        <p:nvSpPr>
-          <p:cNvPr id="4" name="Text Placeholder 3">
-            <a:extLst>
-              <a:ext uri="{FF2B5EF4-FFF2-40B4-BE49-F238E27FC236}">
-                <a16:creationId xmlns:a16="http://schemas.microsoft.com/office/drawing/2014/main" id="{7381D285-C44D-D095-90F1-6D3CF7B2C883}"/>
-              </a:ext>
-            </a:extLst>
-          </p:cNvPr>
-          <p:cNvSpPr>
-            <a:spLocks noGrp="1"/>
-          </p:cNvSpPr>
-          <p:nvPr>
-            <p:ph idx="2" sz="half" type="body"/>
-          </p:nvPr>
-        </p:nvSpPr>
-        <p:spPr/>
-        <p:txBody>
-          <a:bodyPr/>
-          <a:lstStyle/>
-          <a:p>
-            <a:pPr lvl="0"/>
-            <a:r>
-              <a:rPr/>
-              <a:t>Familiarity with the concept of </a:t>
-            </a:r>
-            <a:r>
-              <a:rPr b="1"/>
-              <a:t>literature review</a:t>
-            </a:r>
-            <a:r>
-              <a:rPr/>
-              <a:t>; how and where to access scientific papers, such as </a:t>
-            </a:r>
-            <a:r>
-              <a:rPr i="1"/>
-              <a:t>Google Scholar</a:t>
-            </a:r>
-            <a:r>
-              <a:rPr/>
-              <a:t>.</a:t>
-            </a:r>
-          </a:p>
-        </p:txBody>
-      </p:sp>
-      <p:pic>
-        <p:nvPicPr>
-          <p:cNvPr descr="images/GoogleScholar.png" id="0" name="Picture 1"/>
-          <p:cNvPicPr>
-            <a:picLocks noGrp="1" noChangeAspect="1"/>
-          </p:cNvPicPr>
-          <p:nvPr/>
-        </p:nvPicPr>
-        <p:blipFill>
-          <a:blip r:embed="rId3"/>
-          <a:stretch>
-            <a:fillRect/>
-          </a:stretch>
-        </p:blipFill>
-        <p:spPr bwMode="auto">
-          <a:xfrm>
-            <a:off x="5372100" y="1892300"/>
-            <a:ext cx="6362700" cy="3810000"/>
-          </a:xfrm>
-          <a:prstGeom prst="rect">
-            <a:avLst/>
-          </a:prstGeom>
-          <a:noFill/>
-          <a:ln w="9525">
-            <a:noFill/>
-            <a:headEnd/>
-            <a:tailEnd/>
-          </a:ln>
-        </p:spPr>
-      </p:pic>
-      <p:sp>
-        <p:nvSpPr>
-          <p:cNvPr id="7" name="Slide Number Placeholder 6">
-            <a:extLst>
-              <a:ext uri="{FF2B5EF4-FFF2-40B4-BE49-F238E27FC236}">
-                <a16:creationId xmlns:a16="http://schemas.microsoft.com/office/drawing/2014/main" id="{7EC0C6E5-A864-8D29-B45D-21E23026496C}"/>
-              </a:ext>
-            </a:extLst>
-          </p:cNvPr>
-          <p:cNvSpPr>
-            <a:spLocks noGrp="1"/>
-          </p:cNvSpPr>
-          <p:nvPr>
-            <p:ph idx="12" sz="quarter" type="sldNum"/>
-          </p:nvPr>
-        </p:nvSpPr>
-        <p:spPr>
-          <a:xfrm>
-            <a:off x="8610600" y="6356350"/>
-            <a:ext cx="3135000" cy="365125"/>
-          </a:xfrm>
-        </p:spPr>
-        <p:txBody>
-          <a:bodyPr/>
-          <a:lstStyle/>
-          <a:p>
-            <a:fld id="{7FEFBAB6-26D0-44D8-BD53-612461CE1ACC}" type="slidenum">
-              <a:rPr lang="de-DE" smtClean="0"/>
-              <a:t>‹#›</a:t>
-            </a:fld>
-            <a:endParaRPr lang="de-DE"/>
-          </a:p>
-        </p:txBody>
-      </p:sp>
-    </p:spTree>
-  </p:cSld>
-</p:sld>
-</file>
-
-<file path=ppt/slides/slide9.xml><?xml version="1.0" encoding="utf-8"?>
-<p:sld xmlns:a="http://schemas.openxmlformats.org/drawingml/2006/main" xmlns:r="http://schemas.openxmlformats.org/officeDocument/2006/relationships" xmlns:p="http://schemas.openxmlformats.org/presentationml/2006/main">
-  <p:cSld>
-    <p:spTree>
-      <p:nvGrpSpPr>
-        <p:cNvPr id="1" name=""/>
-        <p:cNvGrpSpPr/>
-        <p:nvPr/>
-      </p:nvGrpSpPr>
-      <p:grpSpPr>
-        <a:xfrm>
-          <a:off x="0" y="0"/>
-          <a:ext cx="0" cy="0"/>
-          <a:chOff x="0" y="0"/>
-          <a:chExt cx="0" cy="0"/>
-        </a:xfrm>
-      </p:grpSpPr>
-      <p:sp>
-        <p:nvSpPr>
-          <p:cNvPr id="2" name="Title 1">
-            <a:extLst>
-              <a:ext uri="{FF2B5EF4-FFF2-40B4-BE49-F238E27FC236}">
-                <a16:creationId xmlns:a16="http://schemas.microsoft.com/office/drawing/2014/main" id="{6BF04AE0-F94F-A586-34B8-68D9CAB6C6D1}"/>
-              </a:ext>
-            </a:extLst>
-          </p:cNvPr>
-          <p:cNvSpPr>
-            <a:spLocks noGrp="1"/>
-          </p:cNvSpPr>
-          <p:nvPr>
-            <p:ph type="title"/>
-          </p:nvPr>
-        </p:nvSpPr>
-        <p:spPr>
-          <a:xfrm>
-            <a:off x="2295524" y="432532"/>
-            <a:ext cx="9450077" cy="825501"/>
-          </a:xfrm>
-        </p:spPr>
-        <p:txBody>
-          <a:bodyPr/>
-          <a:lstStyle/>
-          <a:p>
-            <a:pPr lvl="0" indent="0" marL="0">
-              <a:buNone/>
-            </a:pPr>
-            <a:r>
-              <a:rPr/>
-              <a:t>Questions from the previous submodule?</a:t>
-            </a:r>
-          </a:p>
-        </p:txBody>
-      </p:sp>
-      <p:sp>
-        <p:nvSpPr>
-          <p:cNvPr id="6" name="Slide Number Placeholder 5">
-            <a:extLst>
-              <a:ext uri="{FF2B5EF4-FFF2-40B4-BE49-F238E27FC236}">
-                <a16:creationId xmlns:a16="http://schemas.microsoft.com/office/drawing/2014/main" id="{5F33F24B-1A9E-2EAF-F2AB-89426454DEE9}"/>
-              </a:ext>
-            </a:extLst>
-          </p:cNvPr>
-          <p:cNvSpPr>
-            <a:spLocks noGrp="1"/>
-          </p:cNvSpPr>
-          <p:nvPr>
-            <p:ph idx="12" sz="quarter" type="sldNum"/>
-          </p:nvPr>
-        </p:nvSpPr>
-        <p:spPr>
-          <a:xfrm>
-            <a:off x="8610599" y="6356350"/>
-            <a:ext cx="3135001" cy="365125"/>
           </a:xfrm>
         </p:spPr>
         <p:txBody>

--- a/lmu-branded-test.pptx
+++ b/lmu-branded-test.pptx
@@ -8280,7 +8280,7 @@
             </a:pPr>
             <a:r>
               <a:rPr/>
-              <a:t>June 9, 2022</a:t>
+              <a:t>September 30, 2020</a:t>
             </a:r>
           </a:p>
         </p:txBody>

--- a/lmu-branded-test.pptx
+++ b/lmu-branded-test.pptx
@@ -5,7 +5,7 @@
     <p:sldMasterId id="2147483648" r:id="rId1"/>
   </p:sldMasterIdLst>
   <p:notesMasterIdLst>
-    <p:notesMasterId r:id="rId47"/>
+    <p:notesMasterId r:id="rId42"/>
   </p:notesMasterIdLst>
   <p:sldIdLst>
     <p:sldId id="256" r:id="rId2"/>
@@ -48,11 +48,6 @@
     <p:sldId id="293" r:id="rId39"/>
     <p:sldId id="294" r:id="rId40"/>
     <p:sldId id="295" r:id="rId41"/>
-    <p:sldId id="296" r:id="rId42"/>
-    <p:sldId id="297" r:id="rId43"/>
-    <p:sldId id="298" r:id="rId44"/>
-    <p:sldId id="299" r:id="rId45"/>
-    <p:sldId id="300" r:id="rId46"/>
   </p:sldIdLst>
   <p:sldSz cx="12192000" cy="6858000"/>
   <p:notesSz cx="6858000" cy="9144000"/>
@@ -583,7 +578,7 @@
           <a:p>
             <a:fld id="{1335DC12-1F25-3F4F-8976-F7B9B059DA07}" type="slidenum">
               <a:rPr lang="en-US"/>
-              <a:t>7</a:t>
+              <a:t>2</a:t>
             </a:fld>
             <a:endParaRPr lang="en-US"/>
           </a:p>
@@ -710,7 +705,7 @@
           <a:p>
             <a:fld id="{1335DC12-1F25-3F4F-8976-F7B9B059DA07}" type="slidenum">
               <a:rPr lang="en-US"/>
-              <a:t>19</a:t>
+              <a:t>14</a:t>
             </a:fld>
             <a:endParaRPr lang="en-US"/>
           </a:p>
@@ -851,7 +846,7 @@
           <a:p>
             <a:fld id="{1335DC12-1F25-3F4F-8976-F7B9B059DA07}" type="slidenum">
               <a:rPr lang="en-US"/>
-              <a:t>20</a:t>
+              <a:t>15</a:t>
             </a:fld>
             <a:endParaRPr lang="en-US"/>
           </a:p>
@@ -998,7 +993,7 @@
           <a:p>
             <a:fld id="{1335DC12-1F25-3F4F-8976-F7B9B059DA07}" type="slidenum">
               <a:rPr lang="en-US"/>
-              <a:t>21</a:t>
+              <a:t>16</a:t>
             </a:fld>
             <a:endParaRPr lang="en-US"/>
           </a:p>
@@ -1135,7 +1130,7 @@
           <a:p>
             <a:fld id="{1335DC12-1F25-3F4F-8976-F7B9B059DA07}" type="slidenum">
               <a:rPr lang="en-US"/>
-              <a:t>22</a:t>
+              <a:t>17</a:t>
             </a:fld>
             <a:endParaRPr lang="en-US"/>
           </a:p>
@@ -1235,7 +1230,7 @@
           <a:p>
             <a:fld id="{1335DC12-1F25-3F4F-8976-F7B9B059DA07}" type="slidenum">
               <a:rPr lang="en-US"/>
-              <a:t>23</a:t>
+              <a:t>18</a:t>
             </a:fld>
             <a:endParaRPr lang="en-US"/>
           </a:p>
@@ -1411,7 +1406,7 @@
           <a:p>
             <a:fld id="{1335DC12-1F25-3F4F-8976-F7B9B059DA07}" type="slidenum">
               <a:rPr lang="en-US"/>
-              <a:t>24</a:t>
+              <a:t>19</a:t>
             </a:fld>
             <a:endParaRPr lang="en-US"/>
           </a:p>
@@ -1521,7 +1516,7 @@
           <a:p>
             <a:fld id="{1335DC12-1F25-3F4F-8976-F7B9B059DA07}" type="slidenum">
               <a:rPr lang="en-US"/>
-              <a:t>25</a:t>
+              <a:t>20</a:t>
             </a:fld>
             <a:endParaRPr lang="en-US"/>
           </a:p>
@@ -1625,7 +1620,7 @@
           <a:p>
             <a:fld id="{1335DC12-1F25-3F4F-8976-F7B9B059DA07}" type="slidenum">
               <a:rPr lang="en-US"/>
-              <a:t>26</a:t>
+              <a:t>21</a:t>
             </a:fld>
             <a:endParaRPr lang="en-US"/>
           </a:p>
@@ -1797,7 +1792,7 @@
           <a:p>
             <a:fld id="{1335DC12-1F25-3F4F-8976-F7B9B059DA07}" type="slidenum">
               <a:rPr lang="en-US"/>
-              <a:t>27</a:t>
+              <a:t>22</a:t>
             </a:fld>
             <a:endParaRPr lang="en-US"/>
           </a:p>
@@ -1979,7 +1974,7 @@
           <a:p>
             <a:fld id="{1335DC12-1F25-3F4F-8976-F7B9B059DA07}" type="slidenum">
               <a:rPr lang="en-US"/>
-              <a:t>28</a:t>
+              <a:t>23</a:t>
             </a:fld>
             <a:endParaRPr lang="en-US"/>
           </a:p>
@@ -2083,7 +2078,7 @@
           <a:p>
             <a:fld id="{1335DC12-1F25-3F4F-8976-F7B9B059DA07}" type="slidenum">
               <a:rPr lang="en-US"/>
-              <a:t>9</a:t>
+              <a:t>4</a:t>
             </a:fld>
             <a:endParaRPr lang="en-US"/>
           </a:p>
@@ -2187,7 +2182,7 @@
           <a:p>
             <a:fld id="{1335DC12-1F25-3F4F-8976-F7B9B059DA07}" type="slidenum">
               <a:rPr lang="en-US"/>
-              <a:t>29</a:t>
+              <a:t>24</a:t>
             </a:fld>
             <a:endParaRPr lang="en-US"/>
           </a:p>
@@ -2311,7 +2306,7 @@
           <a:p>
             <a:fld id="{1335DC12-1F25-3F4F-8976-F7B9B059DA07}" type="slidenum">
               <a:rPr lang="en-US"/>
-              <a:t>31</a:t>
+              <a:t>26</a:t>
             </a:fld>
             <a:endParaRPr lang="en-US"/>
           </a:p>
@@ -2447,7 +2442,7 @@
           <a:p>
             <a:fld id="{1335DC12-1F25-3F4F-8976-F7B9B059DA07}" type="slidenum">
               <a:rPr lang="en-US"/>
-              <a:t>32</a:t>
+              <a:t>27</a:t>
             </a:fld>
             <a:endParaRPr lang="en-US"/>
           </a:p>
@@ -2551,7 +2546,7 @@
           <a:p>
             <a:fld id="{1335DC12-1F25-3F4F-8976-F7B9B059DA07}" type="slidenum">
               <a:rPr lang="en-US"/>
-              <a:t>33</a:t>
+              <a:t>28</a:t>
             </a:fld>
             <a:endParaRPr lang="en-US"/>
           </a:p>
@@ -2697,7 +2692,7 @@
           <a:p>
             <a:fld id="{1335DC12-1F25-3F4F-8976-F7B9B059DA07}" type="slidenum">
               <a:rPr lang="en-US"/>
-              <a:t>34</a:t>
+              <a:t>29</a:t>
             </a:fld>
             <a:endParaRPr lang="en-US"/>
           </a:p>
@@ -2926,7 +2921,7 @@
           <a:p>
             <a:fld id="{1335DC12-1F25-3F4F-8976-F7B9B059DA07}" type="slidenum">
               <a:rPr lang="en-US"/>
-              <a:t>35</a:t>
+              <a:t>30</a:t>
             </a:fld>
             <a:endParaRPr lang="en-US"/>
           </a:p>
@@ -3049,7 +3044,7 @@
           <a:p>
             <a:fld id="{1335DC12-1F25-3F4F-8976-F7B9B059DA07}" type="slidenum">
               <a:rPr lang="en-US"/>
-              <a:t>36</a:t>
+              <a:t>31</a:t>
             </a:fld>
             <a:endParaRPr lang="en-US"/>
           </a:p>
@@ -3167,7 +3162,7 @@
           <a:p>
             <a:fld id="{1335DC12-1F25-3F4F-8976-F7B9B059DA07}" type="slidenum">
               <a:rPr lang="en-US"/>
-              <a:t>37</a:t>
+              <a:t>32</a:t>
             </a:fld>
             <a:endParaRPr lang="en-US"/>
           </a:p>
@@ -3261,7 +3256,7 @@
           <a:p>
             <a:fld id="{1335DC12-1F25-3F4F-8976-F7B9B059DA07}" type="slidenum">
               <a:rPr lang="en-US"/>
-              <a:t>38</a:t>
+              <a:t>33</a:t>
             </a:fld>
             <a:endParaRPr lang="en-US"/>
           </a:p>
@@ -3385,7 +3380,7 @@
           <a:p>
             <a:fld id="{1335DC12-1F25-3F4F-8976-F7B9B059DA07}" type="slidenum">
               <a:rPr lang="en-US"/>
-              <a:t>41</a:t>
+              <a:t>36</a:t>
             </a:fld>
             <a:endParaRPr lang="en-US"/>
           </a:p>
@@ -3489,7 +3484,7 @@
           <a:p>
             <a:fld id="{1335DC12-1F25-3F4F-8976-F7B9B059DA07}" type="slidenum">
               <a:rPr lang="en-US"/>
-              <a:t>10</a:t>
+              <a:t>5</a:t>
             </a:fld>
             <a:endParaRPr lang="en-US"/>
           </a:p>
@@ -3611,7 +3606,7 @@
           <a:p>
             <a:fld id="{1335DC12-1F25-3F4F-8976-F7B9B059DA07}" type="slidenum">
               <a:rPr lang="en-US"/>
-              <a:t>44</a:t>
+              <a:t>39</a:t>
             </a:fld>
             <a:endParaRPr lang="en-US"/>
           </a:p>
@@ -3767,7 +3762,7 @@
           <a:p>
             <a:fld id="{1335DC12-1F25-3F4F-8976-F7B9B059DA07}" type="slidenum">
               <a:rPr lang="en-US"/>
-              <a:t>11</a:t>
+              <a:t>6</a:t>
             </a:fld>
             <a:endParaRPr lang="en-US"/>
           </a:p>
@@ -3899,7 +3894,7 @@
           <a:p>
             <a:fld id="{1335DC12-1F25-3F4F-8976-F7B9B059DA07}" type="slidenum">
               <a:rPr lang="en-US"/>
-              <a:t>12</a:t>
+              <a:t>7</a:t>
             </a:fld>
             <a:endParaRPr lang="en-US"/>
           </a:p>
@@ -4003,7 +3998,7 @@
           <a:p>
             <a:fld id="{1335DC12-1F25-3F4F-8976-F7B9B059DA07}" type="slidenum">
               <a:rPr lang="en-US"/>
-              <a:t>15</a:t>
+              <a:t>10</a:t>
             </a:fld>
             <a:endParaRPr lang="en-US"/>
           </a:p>
@@ -4135,7 +4130,7 @@
           <a:p>
             <a:fld id="{1335DC12-1F25-3F4F-8976-F7B9B059DA07}" type="slidenum">
               <a:rPr lang="en-US"/>
-              <a:t>16</a:t>
+              <a:t>11</a:t>
             </a:fld>
             <a:endParaRPr lang="en-US"/>
           </a:p>
@@ -4257,7 +4252,7 @@
           <a:p>
             <a:fld id="{1335DC12-1F25-3F4F-8976-F7B9B059DA07}" type="slidenum">
               <a:rPr lang="en-US"/>
-              <a:t>17</a:t>
+              <a:t>12</a:t>
             </a:fld>
             <a:endParaRPr lang="en-US"/>
           </a:p>
@@ -4380,7 +4375,7 @@
           <a:p>
             <a:fld id="{1335DC12-1F25-3F4F-8976-F7B9B059DA07}" type="slidenum">
               <a:rPr lang="en-US"/>
-              <a:t>18</a:t>
+              <a:t>13</a:t>
             </a:fld>
             <a:endParaRPr lang="en-US"/>
           </a:p>
@@ -8355,255 +8350,6 @@
           <p:cNvPr id="2" name="Title 1">
             <a:extLst>
               <a:ext uri="{FF2B5EF4-FFF2-40B4-BE49-F238E27FC236}">
-                <a16:creationId xmlns:a16="http://schemas.microsoft.com/office/drawing/2014/main" id="{12131F71-CF7E-3DA4-7847-3ACEC01625C3}"/>
-              </a:ext>
-            </a:extLst>
-          </p:cNvPr>
-          <p:cNvSpPr>
-            <a:spLocks noGrp="1"/>
-          </p:cNvSpPr>
-          <p:nvPr>
-            <p:ph type="title"/>
-          </p:nvPr>
-        </p:nvSpPr>
-        <p:spPr>
-          <a:xfrm>
-            <a:off x="446399" y="1392999"/>
-            <a:ext cx="4735201" cy="996952"/>
-          </a:xfrm>
-        </p:spPr>
-        <p:txBody>
-          <a:bodyPr/>
-          <a:lstStyle/>
-          <a:p>
-            <a:pPr lvl="0" indent="0" marL="0">
-              <a:buNone/>
-            </a:pPr>
-            <a:r>
-              <a:rPr/>
-              <a:t>Prerequisites (cont.)</a:t>
-            </a:r>
-          </a:p>
-        </p:txBody>
-      </p:sp>
-      <p:sp>
-        <p:nvSpPr>
-          <p:cNvPr id="4" name="Text Placeholder 3">
-            <a:extLst>
-              <a:ext uri="{FF2B5EF4-FFF2-40B4-BE49-F238E27FC236}">
-                <a16:creationId xmlns:a16="http://schemas.microsoft.com/office/drawing/2014/main" id="{7381D285-C44D-D095-90F1-6D3CF7B2C883}"/>
-              </a:ext>
-            </a:extLst>
-          </p:cNvPr>
-          <p:cNvSpPr>
-            <a:spLocks noGrp="1"/>
-          </p:cNvSpPr>
-          <p:nvPr>
-            <p:ph idx="2" sz="half" type="body"/>
-          </p:nvPr>
-        </p:nvSpPr>
-        <p:spPr/>
-        <p:txBody>
-          <a:bodyPr/>
-          <a:lstStyle/>
-          <a:p>
-            <a:pPr lvl="0"/>
-            <a:r>
-              <a:rPr/>
-              <a:t>Familiarity with the concept of </a:t>
-            </a:r>
-            <a:r>
-              <a:rPr b="1"/>
-              <a:t>literature review</a:t>
-            </a:r>
-            <a:r>
-              <a:rPr/>
-              <a:t>; how and where to access scientific papers, such as </a:t>
-            </a:r>
-            <a:r>
-              <a:rPr i="1"/>
-              <a:t>Google Scholar</a:t>
-            </a:r>
-            <a:r>
-              <a:rPr/>
-              <a:t>.</a:t>
-            </a:r>
-          </a:p>
-        </p:txBody>
-      </p:sp>
-      <p:pic>
-        <p:nvPicPr>
-          <p:cNvPr descr="images/GoogleScholar.png" id="0" name="Picture 1"/>
-          <p:cNvPicPr>
-            <a:picLocks noGrp="1" noChangeAspect="1"/>
-          </p:cNvPicPr>
-          <p:nvPr/>
-        </p:nvPicPr>
-        <p:blipFill>
-          <a:blip r:embed="rId3"/>
-          <a:stretch>
-            <a:fillRect/>
-          </a:stretch>
-        </p:blipFill>
-        <p:spPr bwMode="auto">
-          <a:xfrm>
-            <a:off x="5372100" y="1892300"/>
-            <a:ext cx="6362700" cy="3810000"/>
-          </a:xfrm>
-          <a:prstGeom prst="rect">
-            <a:avLst/>
-          </a:prstGeom>
-          <a:noFill/>
-          <a:ln w="9525">
-            <a:noFill/>
-            <a:headEnd/>
-            <a:tailEnd/>
-          </a:ln>
-        </p:spPr>
-      </p:pic>
-      <p:sp>
-        <p:nvSpPr>
-          <p:cNvPr id="7" name="Slide Number Placeholder 6">
-            <a:extLst>
-              <a:ext uri="{FF2B5EF4-FFF2-40B4-BE49-F238E27FC236}">
-                <a16:creationId xmlns:a16="http://schemas.microsoft.com/office/drawing/2014/main" id="{7EC0C6E5-A864-8D29-B45D-21E23026496C}"/>
-              </a:ext>
-            </a:extLst>
-          </p:cNvPr>
-          <p:cNvSpPr>
-            <a:spLocks noGrp="1"/>
-          </p:cNvSpPr>
-          <p:nvPr>
-            <p:ph idx="12" sz="quarter" type="sldNum"/>
-          </p:nvPr>
-        </p:nvSpPr>
-        <p:spPr>
-          <a:xfrm>
-            <a:off x="8610600" y="6356350"/>
-            <a:ext cx="3135000" cy="365125"/>
-          </a:xfrm>
-        </p:spPr>
-        <p:txBody>
-          <a:bodyPr/>
-          <a:lstStyle/>
-          <a:p>
-            <a:fld id="{7FEFBAB6-26D0-44D8-BD53-612461CE1ACC}" type="slidenum">
-              <a:rPr lang="de-DE" smtClean="0"/>
-              <a:t>‹#›</a:t>
-            </a:fld>
-            <a:endParaRPr lang="de-DE"/>
-          </a:p>
-        </p:txBody>
-      </p:sp>
-    </p:spTree>
-  </p:cSld>
-  <p:timing>
-    <p:tnLst>
-      <p:par>
-        <p:cTn id="1" dur="indefinite" restart="never" nodeType="tmRoot">
-          <p:childTnLst>
-            <p:seq concurrent="1" nextAc="seek">
-              <p:cTn id="2" dur="indefinite" nodeType="mainSeq">
-                <p:childTnLst>
-                  <p:par>
-                    <p:cTn id="3" fill="hold">
-                      <p:stCondLst>
-                        <p:cond delay="indefinite"/>
-                      </p:stCondLst>
-                      <p:childTnLst>
-                        <p:par>
-                          <p:cTn id="4" fill="hold">
-                            <p:stCondLst>
-                              <p:cond delay="0"/>
-                            </p:stCondLst>
-                            <p:childTnLst>
-                              <p:par>
-                                <p:cTn id="5" presetID="1" presetClass="entr" presetSubtype="0" fill="hold" grpId="0" nodeType="clickEffect">
-                                  <p:stCondLst>
-                                    <p:cond delay="0"/>
-                                  </p:stCondLst>
-                                  <p:childTnLst>
-                                    <p:set>
-                                      <p:cBhvr>
-                                        <p:cTn id="6" dur="1" fill="hold">
-                                          <p:stCondLst>
-                                            <p:cond delay="0"/>
-                                          </p:stCondLst>
-                                        </p:cTn>
-                                        <p:tgtEl>
-                                          <p:spTgt spid="4">
-                                            <p:txEl>
-                                              <p:pRg st="0" end="0"/>
-                                            </p:txEl>
-                                          </p:spTgt>
-                                        </p:tgtEl>
-                                        <p:attrNameLst>
-                                          <p:attrName>style.visibility</p:attrName>
-                                        </p:attrNameLst>
-                                      </p:cBhvr>
-                                      <p:to>
-                                        <p:strVal val="visible"/>
-                                      </p:to>
-                                    </p:set>
-                                  </p:childTnLst>
-                                </p:cTn>
-                              </p:par>
-                            </p:childTnLst>
-                          </p:cTn>
-                        </p:par>
-                      </p:childTnLst>
-                    </p:cTn>
-                  </p:par>
-                </p:childTnLst>
-              </p:cTn>
-              <p:prevCondLst>
-                <p:cond evt="onPrev" delay="0">
-                  <p:tgtEl>
-                    <p:sldTgt/>
-                  </p:tgtEl>
-                </p:cond>
-              </p:prevCondLst>
-              <p:nextCondLst>
-                <p:cond evt="onNext" delay="0">
-                  <p:tgtEl>
-                    <p:sldTgt/>
-                  </p:tgtEl>
-                </p:cond>
-              </p:nextCondLst>
-            </p:seq>
-          </p:childTnLst>
-        </p:cTn>
-      </p:par>
-    </p:tnLst>
-    <p:bldLst>
-      <p:bldP spid="4" grpId="0" uiExpand="1" build="p"/>
-    </p:bldLst>
-  </p:timing>
-</p:sld>
-</file>
-
-<file path=ppt/slides/slide11.xml><?xml version="1.0" encoding="utf-8"?>
-<p:sld xmlns:a="http://schemas.openxmlformats.org/drawingml/2006/main" xmlns:r="http://schemas.openxmlformats.org/officeDocument/2006/relationships" xmlns:p="http://schemas.openxmlformats.org/presentationml/2006/main">
-  <p:cSld>
-    <p:spTree>
-      <p:nvGrpSpPr>
-        <p:cNvPr id="1" name=""/>
-        <p:cNvGrpSpPr/>
-        <p:nvPr/>
-      </p:nvGrpSpPr>
-      <p:grpSpPr>
-        <a:xfrm>
-          <a:off x="0" y="0"/>
-          <a:ext cx="0" cy="0"/>
-          <a:chOff x="0" y="0"/>
-          <a:chExt cx="0" cy="0"/>
-        </a:xfrm>
-      </p:grpSpPr>
-      <p:sp>
-        <p:nvSpPr>
-          <p:cNvPr id="2" name="Title 1">
-            <a:extLst>
-              <a:ext uri="{FF2B5EF4-FFF2-40B4-BE49-F238E27FC236}">
                 <a16:creationId xmlns:a16="http://schemas.microsoft.com/office/drawing/2014/main" id="{6BF04AE0-F94F-A586-34B8-68D9CAB6C6D1}"/>
               </a:ext>
             </a:extLst>
@@ -8630,7 +8376,38 @@
             </a:pPr>
             <a:r>
               <a:rPr/>
-              <a:t>Questions from the previous submodule?</a:t>
+              <a:t>Discussion of survey results</a:t>
+            </a:r>
+          </a:p>
+        </p:txBody>
+      </p:sp>
+      <p:sp>
+        <p:nvSpPr>
+          <p:cNvPr id="3" name="Content Placeholder 2">
+            <a:extLst>
+              <a:ext uri="{FF2B5EF4-FFF2-40B4-BE49-F238E27FC236}">
+                <a16:creationId xmlns:a16="http://schemas.microsoft.com/office/drawing/2014/main" id="{372FA590-20E9-0368-85B4-90C26598F852}"/>
+              </a:ext>
+            </a:extLst>
+          </p:cNvPr>
+          <p:cNvSpPr>
+            <a:spLocks noGrp="1"/>
+          </p:cNvSpPr>
+          <p:nvPr>
+            <p:ph idx="1"/>
+          </p:nvPr>
+        </p:nvSpPr>
+        <p:spPr/>
+        <p:txBody>
+          <a:bodyPr/>
+          <a:lstStyle/>
+          <a:p>
+            <a:pPr lvl="0" indent="0" marL="0">
+              <a:buNone/>
+            </a:pPr>
+            <a:r>
+              <a:rPr b="1"/>
+              <a:t>What do we see in the results?</a:t>
             </a:r>
           </a:p>
         </p:txBody>
@@ -8674,992 +8451,7 @@
 </p:sld>
 </file>
 
-<file path=ppt/slides/slide12.xml><?xml version="1.0" encoding="utf-8"?>
-<p:sld xmlns:a="http://schemas.openxmlformats.org/drawingml/2006/main" xmlns:r="http://schemas.openxmlformats.org/officeDocument/2006/relationships" xmlns:p="http://schemas.openxmlformats.org/presentationml/2006/main">
-  <p:cSld>
-    <p:spTree>
-      <p:nvGrpSpPr>
-        <p:cNvPr id="1" name=""/>
-        <p:cNvGrpSpPr/>
-        <p:nvPr/>
-      </p:nvGrpSpPr>
-      <p:grpSpPr>
-        <a:xfrm>
-          <a:off x="0" y="0"/>
-          <a:ext cx="0" cy="0"/>
-          <a:chOff x="0" y="0"/>
-          <a:chExt cx="0" cy="0"/>
-        </a:xfrm>
-      </p:grpSpPr>
-      <p:sp>
-        <p:nvSpPr>
-          <p:cNvPr id="2" name="Title 1">
-            <a:extLst>
-              <a:ext uri="{FF2B5EF4-FFF2-40B4-BE49-F238E27FC236}">
-                <a16:creationId xmlns:a16="http://schemas.microsoft.com/office/drawing/2014/main" id="{6BF04AE0-F94F-A586-34B8-68D9CAB6C6D1}"/>
-              </a:ext>
-            </a:extLst>
-          </p:cNvPr>
-          <p:cNvSpPr>
-            <a:spLocks noGrp="1"/>
-          </p:cNvSpPr>
-          <p:nvPr>
-            <p:ph type="title"/>
-          </p:nvPr>
-        </p:nvSpPr>
-        <p:spPr>
-          <a:xfrm>
-            <a:off x="2295524" y="432532"/>
-            <a:ext cx="9450077" cy="825501"/>
-          </a:xfrm>
-        </p:spPr>
-        <p:txBody>
-          <a:bodyPr/>
-          <a:lstStyle/>
-          <a:p>
-            <a:pPr lvl="0" indent="0" marL="0">
-              <a:buNone/>
-            </a:pPr>
-            <a:r>
-              <a:rPr/>
-              <a:t>Before we start: Survey time!</a:t>
-            </a:r>
-          </a:p>
-        </p:txBody>
-      </p:sp>
-      <p:sp>
-        <p:nvSpPr>
-          <p:cNvPr id="6" name="Slide Number Placeholder 5">
-            <a:extLst>
-              <a:ext uri="{FF2B5EF4-FFF2-40B4-BE49-F238E27FC236}">
-                <a16:creationId xmlns:a16="http://schemas.microsoft.com/office/drawing/2014/main" id="{5F33F24B-1A9E-2EAF-F2AB-89426454DEE9}"/>
-              </a:ext>
-            </a:extLst>
-          </p:cNvPr>
-          <p:cNvSpPr>
-            <a:spLocks noGrp="1"/>
-          </p:cNvSpPr>
-          <p:nvPr>
-            <p:ph idx="12" sz="quarter" type="sldNum"/>
-          </p:nvPr>
-        </p:nvSpPr>
-        <p:spPr>
-          <a:xfrm>
-            <a:off x="8610599" y="6356350"/>
-            <a:ext cx="3135001" cy="365125"/>
-          </a:xfrm>
-        </p:spPr>
-        <p:txBody>
-          <a:bodyPr/>
-          <a:lstStyle/>
-          <a:p>
-            <a:fld id="{7FEFBAB6-26D0-44D8-BD53-612461CE1ACC}" type="slidenum">
-              <a:rPr lang="de-DE" smtClean="0"/>
-              <a:t>‹#›</a:t>
-            </a:fld>
-            <a:endParaRPr lang="de-DE"/>
-          </a:p>
-        </p:txBody>
-      </p:sp>
-    </p:spTree>
-  </p:cSld>
-</p:sld>
-</file>
-
-<file path=ppt/slides/slide13.xml><?xml version="1.0" encoding="utf-8"?>
-<p:sld xmlns:a="http://schemas.openxmlformats.org/drawingml/2006/main" xmlns:r="http://schemas.openxmlformats.org/officeDocument/2006/relationships" xmlns:p="http://schemas.openxmlformats.org/presentationml/2006/main">
-  <p:cSld>
-    <p:spTree>
-      <p:nvGrpSpPr>
-        <p:cNvPr id="1" name=""/>
-        <p:cNvGrpSpPr/>
-        <p:nvPr/>
-      </p:nvGrpSpPr>
-      <p:grpSpPr>
-        <a:xfrm>
-          <a:off x="0" y="0"/>
-          <a:ext cx="0" cy="0"/>
-          <a:chOff x="0" y="0"/>
-          <a:chExt cx="0" cy="0"/>
-        </a:xfrm>
-      </p:grpSpPr>
-      <p:sp>
-        <p:nvSpPr>
-          <p:cNvPr id="3" name="Content Placeholder 2">
-            <a:extLst>
-              <a:ext uri="{FF2B5EF4-FFF2-40B4-BE49-F238E27FC236}">
-                <a16:creationId xmlns:a16="http://schemas.microsoft.com/office/drawing/2014/main" id="{372FA590-20E9-0368-85B4-90C26598F852}"/>
-              </a:ext>
-            </a:extLst>
-          </p:cNvPr>
-          <p:cNvSpPr>
-            <a:spLocks noGrp="1"/>
-          </p:cNvSpPr>
-          <p:nvPr>
-            <p:ph idx="1"/>
-          </p:nvPr>
-        </p:nvSpPr>
-        <p:spPr/>
-        <p:txBody>
-          <a:bodyPr/>
-          <a:lstStyle/>
-          <a:p>
-            <a:pPr lvl="0" indent="0" marL="0">
-              <a:buNone/>
-            </a:pPr>
-            <a:r>
-              <a:rPr b="1"/>
-              <a:t>What is your level of familiarity with citing and referencing scientific papers?</a:t>
-            </a:r>
-          </a:p>
-          <a:p>
-            <a:pPr lvl="0" indent="-457200" marL="457200">
-              <a:buAutoNum type="alphaLcPeriod"/>
-            </a:pPr>
-            <a:r>
-              <a:rPr/>
-              <a:t>I have never heard of it before.</a:t>
-            </a:r>
-          </a:p>
-          <a:p>
-            <a:pPr lvl="0" indent="-457200" marL="457200">
-              <a:buAutoNum type="alphaLcPeriod"/>
-            </a:pPr>
-            <a:r>
-              <a:rPr/>
-              <a:t>I have heard of it but have never worked with it.</a:t>
-            </a:r>
-          </a:p>
-          <a:p>
-            <a:pPr lvl="0" indent="-457200" marL="457200">
-              <a:buAutoNum type="alphaLcPeriod"/>
-            </a:pPr>
-            <a:r>
-              <a:rPr/>
-              <a:t>I have basic understanding and experience with it.</a:t>
-            </a:r>
-          </a:p>
-          <a:p>
-            <a:pPr lvl="0" indent="-457200" marL="457200">
-              <a:buAutoNum type="alphaLcPeriod"/>
-            </a:pPr>
-            <a:r>
-              <a:rPr/>
-              <a:t>I am very familiar and have worked with it extensively.</a:t>
-            </a:r>
-          </a:p>
-        </p:txBody>
-      </p:sp>
-      <p:sp>
-        <p:nvSpPr>
-          <p:cNvPr id="6" name="Slide Number Placeholder 5">
-            <a:extLst>
-              <a:ext uri="{FF2B5EF4-FFF2-40B4-BE49-F238E27FC236}">
-                <a16:creationId xmlns:a16="http://schemas.microsoft.com/office/drawing/2014/main" id="{5F33F24B-1A9E-2EAF-F2AB-89426454DEE9}"/>
-              </a:ext>
-            </a:extLst>
-          </p:cNvPr>
-          <p:cNvSpPr>
-            <a:spLocks noGrp="1"/>
-          </p:cNvSpPr>
-          <p:nvPr>
-            <p:ph idx="12" sz="quarter" type="sldNum"/>
-          </p:nvPr>
-        </p:nvSpPr>
-        <p:spPr>
-          <a:xfrm>
-            <a:off x="8610599" y="6356350"/>
-            <a:ext cx="3135001" cy="365125"/>
-          </a:xfrm>
-        </p:spPr>
-        <p:txBody>
-          <a:bodyPr/>
-          <a:lstStyle/>
-          <a:p>
-            <a:fld id="{7FEFBAB6-26D0-44D8-BD53-612461CE1ACC}" type="slidenum">
-              <a:rPr lang="de-DE" smtClean="0"/>
-              <a:t>‹#›</a:t>
-            </a:fld>
-            <a:endParaRPr lang="de-DE"/>
-          </a:p>
-        </p:txBody>
-      </p:sp>
-    </p:spTree>
-  </p:cSld>
-  <p:timing>
-    <p:tnLst>
-      <p:par>
-        <p:cTn id="1" dur="indefinite" restart="never" nodeType="tmRoot">
-          <p:childTnLst>
-            <p:seq concurrent="1" nextAc="seek">
-              <p:cTn id="2" dur="indefinite" nodeType="mainSeq">
-                <p:childTnLst>
-                  <p:par>
-                    <p:cTn id="3" fill="hold">
-                      <p:stCondLst>
-                        <p:cond delay="indefinite"/>
-                      </p:stCondLst>
-                      <p:childTnLst>
-                        <p:par>
-                          <p:cTn id="4" fill="hold">
-                            <p:stCondLst>
-                              <p:cond delay="0"/>
-                            </p:stCondLst>
-                            <p:childTnLst>
-                              <p:par>
-                                <p:cTn id="5" presetID="1" presetClass="entr" presetSubtype="0" fill="hold" grpId="0" nodeType="clickEffect">
-                                  <p:stCondLst>
-                                    <p:cond delay="0"/>
-                                  </p:stCondLst>
-                                  <p:childTnLst>
-                                    <p:set>
-                                      <p:cBhvr>
-                                        <p:cTn id="6" dur="1" fill="hold">
-                                          <p:stCondLst>
-                                            <p:cond delay="0"/>
-                                          </p:stCondLst>
-                                        </p:cTn>
-                                        <p:tgtEl>
-                                          <p:spTgt spid="3">
-                                            <p:txEl>
-                                              <p:pRg st="1" end="1"/>
-                                            </p:txEl>
-                                          </p:spTgt>
-                                        </p:tgtEl>
-                                        <p:attrNameLst>
-                                          <p:attrName>style.visibility</p:attrName>
-                                        </p:attrNameLst>
-                                      </p:cBhvr>
-                                      <p:to>
-                                        <p:strVal val="visible"/>
-                                      </p:to>
-                                    </p:set>
-                                  </p:childTnLst>
-                                </p:cTn>
-                              </p:par>
-                            </p:childTnLst>
-                          </p:cTn>
-                        </p:par>
-                      </p:childTnLst>
-                    </p:cTn>
-                  </p:par>
-                  <p:par>
-                    <p:cTn id="7" fill="hold">
-                      <p:stCondLst>
-                        <p:cond delay="indefinite"/>
-                      </p:stCondLst>
-                      <p:childTnLst>
-                        <p:par>
-                          <p:cTn id="8" fill="hold">
-                            <p:stCondLst>
-                              <p:cond delay="0"/>
-                            </p:stCondLst>
-                            <p:childTnLst>
-                              <p:par>
-                                <p:cTn id="9" presetID="1" presetClass="entr" presetSubtype="0" fill="hold" grpId="0" nodeType="clickEffect">
-                                  <p:stCondLst>
-                                    <p:cond delay="0"/>
-                                  </p:stCondLst>
-                                  <p:childTnLst>
-                                    <p:set>
-                                      <p:cBhvr>
-                                        <p:cTn id="10" dur="1" fill="hold">
-                                          <p:stCondLst>
-                                            <p:cond delay="0"/>
-                                          </p:stCondLst>
-                                        </p:cTn>
-                                        <p:tgtEl>
-                                          <p:spTgt spid="3">
-                                            <p:txEl>
-                                              <p:pRg st="2" end="2"/>
-                                            </p:txEl>
-                                          </p:spTgt>
-                                        </p:tgtEl>
-                                        <p:attrNameLst>
-                                          <p:attrName>style.visibility</p:attrName>
-                                        </p:attrNameLst>
-                                      </p:cBhvr>
-                                      <p:to>
-                                        <p:strVal val="visible"/>
-                                      </p:to>
-                                    </p:set>
-                                  </p:childTnLst>
-                                </p:cTn>
-                              </p:par>
-                            </p:childTnLst>
-                          </p:cTn>
-                        </p:par>
-                      </p:childTnLst>
-                    </p:cTn>
-                  </p:par>
-                  <p:par>
-                    <p:cTn id="11" fill="hold">
-                      <p:stCondLst>
-                        <p:cond delay="indefinite"/>
-                      </p:stCondLst>
-                      <p:childTnLst>
-                        <p:par>
-                          <p:cTn id="12" fill="hold">
-                            <p:stCondLst>
-                              <p:cond delay="0"/>
-                            </p:stCondLst>
-                            <p:childTnLst>
-                              <p:par>
-                                <p:cTn id="13" presetID="1" presetClass="entr" presetSubtype="0" fill="hold" grpId="0" nodeType="clickEffect">
-                                  <p:stCondLst>
-                                    <p:cond delay="0"/>
-                                  </p:stCondLst>
-                                  <p:childTnLst>
-                                    <p:set>
-                                      <p:cBhvr>
-                                        <p:cTn id="14" dur="1" fill="hold">
-                                          <p:stCondLst>
-                                            <p:cond delay="0"/>
-                                          </p:stCondLst>
-                                        </p:cTn>
-                                        <p:tgtEl>
-                                          <p:spTgt spid="3">
-                                            <p:txEl>
-                                              <p:pRg st="3" end="3"/>
-                                            </p:txEl>
-                                          </p:spTgt>
-                                        </p:tgtEl>
-                                        <p:attrNameLst>
-                                          <p:attrName>style.visibility</p:attrName>
-                                        </p:attrNameLst>
-                                      </p:cBhvr>
-                                      <p:to>
-                                        <p:strVal val="visible"/>
-                                      </p:to>
-                                    </p:set>
-                                  </p:childTnLst>
-                                </p:cTn>
-                              </p:par>
-                            </p:childTnLst>
-                          </p:cTn>
-                        </p:par>
-                      </p:childTnLst>
-                    </p:cTn>
-                  </p:par>
-                  <p:par>
-                    <p:cTn id="15" fill="hold">
-                      <p:stCondLst>
-                        <p:cond delay="indefinite"/>
-                      </p:stCondLst>
-                      <p:childTnLst>
-                        <p:par>
-                          <p:cTn id="16" fill="hold">
-                            <p:stCondLst>
-                              <p:cond delay="0"/>
-                            </p:stCondLst>
-                            <p:childTnLst>
-                              <p:par>
-                                <p:cTn id="17" presetID="1" presetClass="entr" presetSubtype="0" fill="hold" grpId="0" nodeType="clickEffect">
-                                  <p:stCondLst>
-                                    <p:cond delay="0"/>
-                                  </p:stCondLst>
-                                  <p:childTnLst>
-                                    <p:set>
-                                      <p:cBhvr>
-                                        <p:cTn id="18" dur="1" fill="hold">
-                                          <p:stCondLst>
-                                            <p:cond delay="0"/>
-                                          </p:stCondLst>
-                                        </p:cTn>
-                                        <p:tgtEl>
-                                          <p:spTgt spid="3">
-                                            <p:txEl>
-                                              <p:pRg st="4" end="4"/>
-                                            </p:txEl>
-                                          </p:spTgt>
-                                        </p:tgtEl>
-                                        <p:attrNameLst>
-                                          <p:attrName>style.visibility</p:attrName>
-                                        </p:attrNameLst>
-                                      </p:cBhvr>
-                                      <p:to>
-                                        <p:strVal val="visible"/>
-                                      </p:to>
-                                    </p:set>
-                                  </p:childTnLst>
-                                </p:cTn>
-                              </p:par>
-                            </p:childTnLst>
-                          </p:cTn>
-                        </p:par>
-                      </p:childTnLst>
-                    </p:cTn>
-                  </p:par>
-                </p:childTnLst>
-              </p:cTn>
-              <p:prevCondLst>
-                <p:cond evt="onPrev" delay="0">
-                  <p:tgtEl>
-                    <p:sldTgt/>
-                  </p:tgtEl>
-                </p:cond>
-              </p:prevCondLst>
-              <p:nextCondLst>
-                <p:cond evt="onNext" delay="0">
-                  <p:tgtEl>
-                    <p:sldTgt/>
-                  </p:tgtEl>
-                </p:cond>
-              </p:nextCondLst>
-            </p:seq>
-          </p:childTnLst>
-        </p:cTn>
-      </p:par>
-    </p:tnLst>
-    <p:bldLst>
-      <p:bldP spid="3" grpId="0" uiExpand="1" build="p"/>
-    </p:bldLst>
-  </p:timing>
-</p:sld>
-</file>
-
-<file path=ppt/slides/slide14.xml><?xml version="1.0" encoding="utf-8"?>
-<p:sld xmlns:a="http://schemas.openxmlformats.org/drawingml/2006/main" xmlns:r="http://schemas.openxmlformats.org/officeDocument/2006/relationships" xmlns:p="http://schemas.openxmlformats.org/presentationml/2006/main">
-  <p:cSld>
-    <p:spTree>
-      <p:nvGrpSpPr>
-        <p:cNvPr id="1" name=""/>
-        <p:cNvGrpSpPr/>
-        <p:nvPr/>
-      </p:nvGrpSpPr>
-      <p:grpSpPr>
-        <a:xfrm>
-          <a:off x="0" y="0"/>
-          <a:ext cx="0" cy="0"/>
-          <a:chOff x="0" y="0"/>
-          <a:chExt cx="0" cy="0"/>
-        </a:xfrm>
-      </p:grpSpPr>
-      <p:sp>
-        <p:nvSpPr>
-          <p:cNvPr id="3" name="Content Placeholder 2">
-            <a:extLst>
-              <a:ext uri="{FF2B5EF4-FFF2-40B4-BE49-F238E27FC236}">
-                <a16:creationId xmlns:a16="http://schemas.microsoft.com/office/drawing/2014/main" id="{372FA590-20E9-0368-85B4-90C26598F852}"/>
-              </a:ext>
-            </a:extLst>
-          </p:cNvPr>
-          <p:cNvSpPr>
-            <a:spLocks noGrp="1"/>
-          </p:cNvSpPr>
-          <p:nvPr>
-            <p:ph idx="1"/>
-          </p:nvPr>
-        </p:nvSpPr>
-        <p:spPr/>
-        <p:txBody>
-          <a:bodyPr/>
-          <a:lstStyle/>
-          <a:p>
-            <a:pPr lvl="0" indent="0" marL="0">
-              <a:buNone/>
-            </a:pPr>
-            <a:r>
-              <a:rPr b="1"/>
-              <a:t>How confident do you feel with the Zotero workflow of collection, organisation, and citing?</a:t>
-            </a:r>
-            <a:r>
-              <a:rPr/>
-              <a:t> </a:t>
-            </a:r>
-            <a:r>
-              <a:rPr i="1"/>
-              <a:t>(1 = Not confident at all, 5 = Very confident)</a:t>
-            </a:r>
-          </a:p>
-          <a:p>
-            <a:pPr lvl="0" indent="-457200" marL="457200">
-              <a:buAutoNum type="alphaLcPeriod"/>
-            </a:pPr>
-            <a:r>
-              <a:rPr/>
-              <a:t>1</a:t>
-            </a:r>
-          </a:p>
-          <a:p>
-            <a:pPr lvl="0" indent="-457200" marL="457200">
-              <a:buAutoNum type="alphaLcPeriod"/>
-            </a:pPr>
-            <a:r>
-              <a:rPr/>
-              <a:t>2</a:t>
-            </a:r>
-          </a:p>
-          <a:p>
-            <a:pPr lvl="0" indent="-457200" marL="457200">
-              <a:buAutoNum type="alphaLcPeriod"/>
-            </a:pPr>
-            <a:r>
-              <a:rPr/>
-              <a:t>3</a:t>
-            </a:r>
-          </a:p>
-          <a:p>
-            <a:pPr lvl="0" indent="-457200" marL="457200">
-              <a:buAutoNum type="alphaLcPeriod"/>
-            </a:pPr>
-            <a:r>
-              <a:rPr/>
-              <a:t>4</a:t>
-            </a:r>
-          </a:p>
-          <a:p>
-            <a:pPr lvl="0" indent="-457200" marL="457200">
-              <a:buAutoNum type="alphaLcPeriod"/>
-            </a:pPr>
-            <a:r>
-              <a:rPr/>
-              <a:t>5</a:t>
-            </a:r>
-          </a:p>
-        </p:txBody>
-      </p:sp>
-      <p:sp>
-        <p:nvSpPr>
-          <p:cNvPr id="6" name="Slide Number Placeholder 5">
-            <a:extLst>
-              <a:ext uri="{FF2B5EF4-FFF2-40B4-BE49-F238E27FC236}">
-                <a16:creationId xmlns:a16="http://schemas.microsoft.com/office/drawing/2014/main" id="{5F33F24B-1A9E-2EAF-F2AB-89426454DEE9}"/>
-              </a:ext>
-            </a:extLst>
-          </p:cNvPr>
-          <p:cNvSpPr>
-            <a:spLocks noGrp="1"/>
-          </p:cNvSpPr>
-          <p:nvPr>
-            <p:ph idx="12" sz="quarter" type="sldNum"/>
-          </p:nvPr>
-        </p:nvSpPr>
-        <p:spPr>
-          <a:xfrm>
-            <a:off x="8610599" y="6356350"/>
-            <a:ext cx="3135001" cy="365125"/>
-          </a:xfrm>
-        </p:spPr>
-        <p:txBody>
-          <a:bodyPr/>
-          <a:lstStyle/>
-          <a:p>
-            <a:fld id="{7FEFBAB6-26D0-44D8-BD53-612461CE1ACC}" type="slidenum">
-              <a:rPr lang="de-DE" smtClean="0"/>
-              <a:t>‹#›</a:t>
-            </a:fld>
-            <a:endParaRPr lang="de-DE"/>
-          </a:p>
-        </p:txBody>
-      </p:sp>
-    </p:spTree>
-  </p:cSld>
-  <p:timing>
-    <p:tnLst>
-      <p:par>
-        <p:cTn id="1" dur="indefinite" restart="never" nodeType="tmRoot">
-          <p:childTnLst>
-            <p:seq concurrent="1" nextAc="seek">
-              <p:cTn id="2" dur="indefinite" nodeType="mainSeq">
-                <p:childTnLst>
-                  <p:par>
-                    <p:cTn id="3" fill="hold">
-                      <p:stCondLst>
-                        <p:cond delay="indefinite"/>
-                      </p:stCondLst>
-                      <p:childTnLst>
-                        <p:par>
-                          <p:cTn id="4" fill="hold">
-                            <p:stCondLst>
-                              <p:cond delay="0"/>
-                            </p:stCondLst>
-                            <p:childTnLst>
-                              <p:par>
-                                <p:cTn id="5" presetID="1" presetClass="entr" presetSubtype="0" fill="hold" grpId="0" nodeType="clickEffect">
-                                  <p:stCondLst>
-                                    <p:cond delay="0"/>
-                                  </p:stCondLst>
-                                  <p:childTnLst>
-                                    <p:set>
-                                      <p:cBhvr>
-                                        <p:cTn id="6" dur="1" fill="hold">
-                                          <p:stCondLst>
-                                            <p:cond delay="0"/>
-                                          </p:stCondLst>
-                                        </p:cTn>
-                                        <p:tgtEl>
-                                          <p:spTgt spid="3">
-                                            <p:txEl>
-                                              <p:pRg st="1" end="1"/>
-                                            </p:txEl>
-                                          </p:spTgt>
-                                        </p:tgtEl>
-                                        <p:attrNameLst>
-                                          <p:attrName>style.visibility</p:attrName>
-                                        </p:attrNameLst>
-                                      </p:cBhvr>
-                                      <p:to>
-                                        <p:strVal val="visible"/>
-                                      </p:to>
-                                    </p:set>
-                                  </p:childTnLst>
-                                </p:cTn>
-                              </p:par>
-                            </p:childTnLst>
-                          </p:cTn>
-                        </p:par>
-                      </p:childTnLst>
-                    </p:cTn>
-                  </p:par>
-                  <p:par>
-                    <p:cTn id="7" fill="hold">
-                      <p:stCondLst>
-                        <p:cond delay="indefinite"/>
-                      </p:stCondLst>
-                      <p:childTnLst>
-                        <p:par>
-                          <p:cTn id="8" fill="hold">
-                            <p:stCondLst>
-                              <p:cond delay="0"/>
-                            </p:stCondLst>
-                            <p:childTnLst>
-                              <p:par>
-                                <p:cTn id="9" presetID="1" presetClass="entr" presetSubtype="0" fill="hold" grpId="0" nodeType="clickEffect">
-                                  <p:stCondLst>
-                                    <p:cond delay="0"/>
-                                  </p:stCondLst>
-                                  <p:childTnLst>
-                                    <p:set>
-                                      <p:cBhvr>
-                                        <p:cTn id="10" dur="1" fill="hold">
-                                          <p:stCondLst>
-                                            <p:cond delay="0"/>
-                                          </p:stCondLst>
-                                        </p:cTn>
-                                        <p:tgtEl>
-                                          <p:spTgt spid="3">
-                                            <p:txEl>
-                                              <p:pRg st="2" end="2"/>
-                                            </p:txEl>
-                                          </p:spTgt>
-                                        </p:tgtEl>
-                                        <p:attrNameLst>
-                                          <p:attrName>style.visibility</p:attrName>
-                                        </p:attrNameLst>
-                                      </p:cBhvr>
-                                      <p:to>
-                                        <p:strVal val="visible"/>
-                                      </p:to>
-                                    </p:set>
-                                  </p:childTnLst>
-                                </p:cTn>
-                              </p:par>
-                            </p:childTnLst>
-                          </p:cTn>
-                        </p:par>
-                      </p:childTnLst>
-                    </p:cTn>
-                  </p:par>
-                  <p:par>
-                    <p:cTn id="11" fill="hold">
-                      <p:stCondLst>
-                        <p:cond delay="indefinite"/>
-                      </p:stCondLst>
-                      <p:childTnLst>
-                        <p:par>
-                          <p:cTn id="12" fill="hold">
-                            <p:stCondLst>
-                              <p:cond delay="0"/>
-                            </p:stCondLst>
-                            <p:childTnLst>
-                              <p:par>
-                                <p:cTn id="13" presetID="1" presetClass="entr" presetSubtype="0" fill="hold" grpId="0" nodeType="clickEffect">
-                                  <p:stCondLst>
-                                    <p:cond delay="0"/>
-                                  </p:stCondLst>
-                                  <p:childTnLst>
-                                    <p:set>
-                                      <p:cBhvr>
-                                        <p:cTn id="14" dur="1" fill="hold">
-                                          <p:stCondLst>
-                                            <p:cond delay="0"/>
-                                          </p:stCondLst>
-                                        </p:cTn>
-                                        <p:tgtEl>
-                                          <p:spTgt spid="3">
-                                            <p:txEl>
-                                              <p:pRg st="3" end="3"/>
-                                            </p:txEl>
-                                          </p:spTgt>
-                                        </p:tgtEl>
-                                        <p:attrNameLst>
-                                          <p:attrName>style.visibility</p:attrName>
-                                        </p:attrNameLst>
-                                      </p:cBhvr>
-                                      <p:to>
-                                        <p:strVal val="visible"/>
-                                      </p:to>
-                                    </p:set>
-                                  </p:childTnLst>
-                                </p:cTn>
-                              </p:par>
-                            </p:childTnLst>
-                          </p:cTn>
-                        </p:par>
-                      </p:childTnLst>
-                    </p:cTn>
-                  </p:par>
-                  <p:par>
-                    <p:cTn id="15" fill="hold">
-                      <p:stCondLst>
-                        <p:cond delay="indefinite"/>
-                      </p:stCondLst>
-                      <p:childTnLst>
-                        <p:par>
-                          <p:cTn id="16" fill="hold">
-                            <p:stCondLst>
-                              <p:cond delay="0"/>
-                            </p:stCondLst>
-                            <p:childTnLst>
-                              <p:par>
-                                <p:cTn id="17" presetID="1" presetClass="entr" presetSubtype="0" fill="hold" grpId="0" nodeType="clickEffect">
-                                  <p:stCondLst>
-                                    <p:cond delay="0"/>
-                                  </p:stCondLst>
-                                  <p:childTnLst>
-                                    <p:set>
-                                      <p:cBhvr>
-                                        <p:cTn id="18" dur="1" fill="hold">
-                                          <p:stCondLst>
-                                            <p:cond delay="0"/>
-                                          </p:stCondLst>
-                                        </p:cTn>
-                                        <p:tgtEl>
-                                          <p:spTgt spid="3">
-                                            <p:txEl>
-                                              <p:pRg st="4" end="4"/>
-                                            </p:txEl>
-                                          </p:spTgt>
-                                        </p:tgtEl>
-                                        <p:attrNameLst>
-                                          <p:attrName>style.visibility</p:attrName>
-                                        </p:attrNameLst>
-                                      </p:cBhvr>
-                                      <p:to>
-                                        <p:strVal val="visible"/>
-                                      </p:to>
-                                    </p:set>
-                                  </p:childTnLst>
-                                </p:cTn>
-                              </p:par>
-                            </p:childTnLst>
-                          </p:cTn>
-                        </p:par>
-                      </p:childTnLst>
-                    </p:cTn>
-                  </p:par>
-                  <p:par>
-                    <p:cTn id="19" fill="hold">
-                      <p:stCondLst>
-                        <p:cond delay="indefinite"/>
-                      </p:stCondLst>
-                      <p:childTnLst>
-                        <p:par>
-                          <p:cTn id="20" fill="hold">
-                            <p:stCondLst>
-                              <p:cond delay="0"/>
-                            </p:stCondLst>
-                            <p:childTnLst>
-                              <p:par>
-                                <p:cTn id="21" presetID="1" presetClass="entr" presetSubtype="0" fill="hold" grpId="0" nodeType="clickEffect">
-                                  <p:stCondLst>
-                                    <p:cond delay="0"/>
-                                  </p:stCondLst>
-                                  <p:childTnLst>
-                                    <p:set>
-                                      <p:cBhvr>
-                                        <p:cTn id="22" dur="1" fill="hold">
-                                          <p:stCondLst>
-                                            <p:cond delay="0"/>
-                                          </p:stCondLst>
-                                        </p:cTn>
-                                        <p:tgtEl>
-                                          <p:spTgt spid="3">
-                                            <p:txEl>
-                                              <p:pRg st="5" end="5"/>
-                                            </p:txEl>
-                                          </p:spTgt>
-                                        </p:tgtEl>
-                                        <p:attrNameLst>
-                                          <p:attrName>style.visibility</p:attrName>
-                                        </p:attrNameLst>
-                                      </p:cBhvr>
-                                      <p:to>
-                                        <p:strVal val="visible"/>
-                                      </p:to>
-                                    </p:set>
-                                  </p:childTnLst>
-                                </p:cTn>
-                              </p:par>
-                            </p:childTnLst>
-                          </p:cTn>
-                        </p:par>
-                      </p:childTnLst>
-                    </p:cTn>
-                  </p:par>
-                </p:childTnLst>
-              </p:cTn>
-              <p:prevCondLst>
-                <p:cond evt="onPrev" delay="0">
-                  <p:tgtEl>
-                    <p:sldTgt/>
-                  </p:tgtEl>
-                </p:cond>
-              </p:prevCondLst>
-              <p:nextCondLst>
-                <p:cond evt="onNext" delay="0">
-                  <p:tgtEl>
-                    <p:sldTgt/>
-                  </p:tgtEl>
-                </p:cond>
-              </p:nextCondLst>
-            </p:seq>
-          </p:childTnLst>
-        </p:cTn>
-      </p:par>
-    </p:tnLst>
-    <p:bldLst>
-      <p:bldP spid="3" grpId="0" uiExpand="1" build="p"/>
-    </p:bldLst>
-  </p:timing>
-</p:sld>
-</file>
-
-<file path=ppt/slides/slide15.xml><?xml version="1.0" encoding="utf-8"?>
-<p:sld xmlns:a="http://schemas.openxmlformats.org/drawingml/2006/main" xmlns:r="http://schemas.openxmlformats.org/officeDocument/2006/relationships" xmlns:p="http://schemas.openxmlformats.org/presentationml/2006/main">
-  <p:cSld>
-    <p:spTree>
-      <p:nvGrpSpPr>
-        <p:cNvPr id="1" name=""/>
-        <p:cNvGrpSpPr/>
-        <p:nvPr/>
-      </p:nvGrpSpPr>
-      <p:grpSpPr>
-        <a:xfrm>
-          <a:off x="0" y="0"/>
-          <a:ext cx="0" cy="0"/>
-          <a:chOff x="0" y="0"/>
-          <a:chExt cx="0" cy="0"/>
-        </a:xfrm>
-      </p:grpSpPr>
-      <p:sp>
-        <p:nvSpPr>
-          <p:cNvPr id="2" name="Title 1">
-            <a:extLst>
-              <a:ext uri="{FF2B5EF4-FFF2-40B4-BE49-F238E27FC236}">
-                <a16:creationId xmlns:a16="http://schemas.microsoft.com/office/drawing/2014/main" id="{6BF04AE0-F94F-A586-34B8-68D9CAB6C6D1}"/>
-              </a:ext>
-            </a:extLst>
-          </p:cNvPr>
-          <p:cNvSpPr>
-            <a:spLocks noGrp="1"/>
-          </p:cNvSpPr>
-          <p:nvPr>
-            <p:ph type="title"/>
-          </p:nvPr>
-        </p:nvSpPr>
-        <p:spPr>
-          <a:xfrm>
-            <a:off x="2295524" y="432532"/>
-            <a:ext cx="9450077" cy="825501"/>
-          </a:xfrm>
-        </p:spPr>
-        <p:txBody>
-          <a:bodyPr/>
-          <a:lstStyle/>
-          <a:p>
-            <a:pPr lvl="0" indent="0" marL="0">
-              <a:buNone/>
-            </a:pPr>
-            <a:r>
-              <a:rPr/>
-              <a:t>Discussion of survey results</a:t>
-            </a:r>
-          </a:p>
-        </p:txBody>
-      </p:sp>
-      <p:sp>
-        <p:nvSpPr>
-          <p:cNvPr id="3" name="Content Placeholder 2">
-            <a:extLst>
-              <a:ext uri="{FF2B5EF4-FFF2-40B4-BE49-F238E27FC236}">
-                <a16:creationId xmlns:a16="http://schemas.microsoft.com/office/drawing/2014/main" id="{372FA590-20E9-0368-85B4-90C26598F852}"/>
-              </a:ext>
-            </a:extLst>
-          </p:cNvPr>
-          <p:cNvSpPr>
-            <a:spLocks noGrp="1"/>
-          </p:cNvSpPr>
-          <p:nvPr>
-            <p:ph idx="1"/>
-          </p:nvPr>
-        </p:nvSpPr>
-        <p:spPr/>
-        <p:txBody>
-          <a:bodyPr/>
-          <a:lstStyle/>
-          <a:p>
-            <a:pPr lvl="0" indent="0" marL="0">
-              <a:buNone/>
-            </a:pPr>
-            <a:r>
-              <a:rPr b="1"/>
-              <a:t>What do we see in the results?</a:t>
-            </a:r>
-          </a:p>
-        </p:txBody>
-      </p:sp>
-      <p:sp>
-        <p:nvSpPr>
-          <p:cNvPr id="6" name="Slide Number Placeholder 5">
-            <a:extLst>
-              <a:ext uri="{FF2B5EF4-FFF2-40B4-BE49-F238E27FC236}">
-                <a16:creationId xmlns:a16="http://schemas.microsoft.com/office/drawing/2014/main" id="{5F33F24B-1A9E-2EAF-F2AB-89426454DEE9}"/>
-              </a:ext>
-            </a:extLst>
-          </p:cNvPr>
-          <p:cNvSpPr>
-            <a:spLocks noGrp="1"/>
-          </p:cNvSpPr>
-          <p:nvPr>
-            <p:ph idx="12" sz="quarter" type="sldNum"/>
-          </p:nvPr>
-        </p:nvSpPr>
-        <p:spPr>
-          <a:xfrm>
-            <a:off x="8610599" y="6356350"/>
-            <a:ext cx="3135001" cy="365125"/>
-          </a:xfrm>
-        </p:spPr>
-        <p:txBody>
-          <a:bodyPr/>
-          <a:lstStyle/>
-          <a:p>
-            <a:fld id="{7FEFBAB6-26D0-44D8-BD53-612461CE1ACC}" type="slidenum">
-              <a:rPr lang="de-DE" smtClean="0"/>
-              <a:t>‹#›</a:t>
-            </a:fld>
-            <a:endParaRPr lang="de-DE"/>
-          </a:p>
-        </p:txBody>
-      </p:sp>
-    </p:spTree>
-  </p:cSld>
-</p:sld>
-</file>
-
-<file path=ppt/slides/slide16.xml><?xml version="1.0" encoding="utf-8"?>
+<file path=ppt/slides/slide11.xml><?xml version="1.0" encoding="utf-8"?>
 <p:sld xmlns:a="http://schemas.openxmlformats.org/drawingml/2006/main" xmlns:r="http://schemas.openxmlformats.org/officeDocument/2006/relationships" xmlns:p="http://schemas.openxmlformats.org/presentationml/2006/main">
   <p:cSld>
     <p:spTree>
@@ -10224,7 +9016,7 @@
 </p:sld>
 </file>
 
-<file path=ppt/slides/slide17.xml><?xml version="1.0" encoding="utf-8"?>
+<file path=ppt/slides/slide12.xml><?xml version="1.0" encoding="utf-8"?>
 <p:sld xmlns:a="http://schemas.openxmlformats.org/drawingml/2006/main" xmlns:r="http://schemas.openxmlformats.org/officeDocument/2006/relationships" xmlns:p="http://schemas.openxmlformats.org/presentationml/2006/main">
   <p:cSld>
     <p:spTree>
@@ -10671,7 +9463,7 @@
 </p:sld>
 </file>
 
-<file path=ppt/slides/slide18.xml><?xml version="1.0" encoding="utf-8"?>
+<file path=ppt/slides/slide13.xml><?xml version="1.0" encoding="utf-8"?>
 <p:sld xmlns:a="http://schemas.openxmlformats.org/drawingml/2006/main" xmlns:r="http://schemas.openxmlformats.org/officeDocument/2006/relationships" xmlns:p="http://schemas.openxmlformats.org/presentationml/2006/main">
   <p:cSld>
     <p:spTree>
@@ -10916,7 +9708,7 @@
 </p:sld>
 </file>
 
-<file path=ppt/slides/slide19.xml><?xml version="1.0" encoding="utf-8"?>
+<file path=ppt/slides/slide14.xml><?xml version="1.0" encoding="utf-8"?>
 <p:sld xmlns:a="http://schemas.openxmlformats.org/drawingml/2006/main" xmlns:r="http://schemas.openxmlformats.org/officeDocument/2006/relationships" xmlns:p="http://schemas.openxmlformats.org/presentationml/2006/main">
   <p:cSld>
     <p:spTree>
@@ -11161,154 +9953,7 @@
 </p:sld>
 </file>
 
-<file path=ppt/slides/slide2.xml><?xml version="1.0" encoding="utf-8"?>
-<p:sld xmlns:a="http://schemas.openxmlformats.org/drawingml/2006/main" xmlns:r="http://schemas.openxmlformats.org/officeDocument/2006/relationships" xmlns:p="http://schemas.openxmlformats.org/presentationml/2006/main">
-  <p:cSld>
-    <p:spTree>
-      <p:nvGrpSpPr>
-        <p:cNvPr id="1" name=""/>
-        <p:cNvGrpSpPr/>
-        <p:nvPr/>
-      </p:nvGrpSpPr>
-      <p:grpSpPr>
-        <a:xfrm>
-          <a:off x="0" y="0"/>
-          <a:ext cx="0" cy="0"/>
-          <a:chOff x="0" y="0"/>
-          <a:chExt cx="0" cy="0"/>
-        </a:xfrm>
-      </p:grpSpPr>
-      <p:sp>
-        <p:nvSpPr>
-          <p:cNvPr id="2" name="Title 1">
-            <a:extLst>
-              <a:ext uri="{FF2B5EF4-FFF2-40B4-BE49-F238E27FC236}">
-                <a16:creationId xmlns:a16="http://schemas.microsoft.com/office/drawing/2014/main" id="{6BF04AE0-F94F-A586-34B8-68D9CAB6C6D1}"/>
-              </a:ext>
-            </a:extLst>
-          </p:cNvPr>
-          <p:cNvSpPr>
-            <a:spLocks noGrp="1"/>
-          </p:cNvSpPr>
-          <p:nvPr>
-            <p:ph type="title"/>
-          </p:nvPr>
-        </p:nvSpPr>
-        <p:spPr>
-          <a:xfrm>
-            <a:off x="2295524" y="432532"/>
-            <a:ext cx="9450077" cy="825501"/>
-          </a:xfrm>
-        </p:spPr>
-        <p:txBody>
-          <a:bodyPr/>
-          <a:lstStyle/>
-          <a:p>
-            <a:pPr lvl="0" indent="0" marL="0">
-              <a:buNone/>
-            </a:pPr>
-            <a:r>
-              <a:rPr/>
-              <a:t>Testing Slide</a:t>
-            </a:r>
-          </a:p>
-        </p:txBody>
-      </p:sp>
-      <p:sp>
-        <p:nvSpPr>
-          <p:cNvPr id="3" name="Content Placeholder 2">
-            <a:extLst>
-              <a:ext uri="{FF2B5EF4-FFF2-40B4-BE49-F238E27FC236}">
-                <a16:creationId xmlns:a16="http://schemas.microsoft.com/office/drawing/2014/main" id="{372FA590-20E9-0368-85B4-90C26598F852}"/>
-              </a:ext>
-            </a:extLst>
-          </p:cNvPr>
-          <p:cNvSpPr>
-            <a:spLocks noGrp="1"/>
-          </p:cNvSpPr>
-          <p:nvPr>
-            <p:ph idx="1"/>
-          </p:nvPr>
-        </p:nvSpPr>
-        <p:spPr/>
-        <p:txBody>
-          <a:bodyPr/>
-          <a:lstStyle/>
-          <a:p>
-            <a:pPr lvl="0" indent="0" marL="1270000">
-              <a:buNone/>
-            </a:pPr>
-            <a:r>
-              <a:rPr sz="2000" b="1"/>
-              <a:t>Tip</a:t>
-            </a:r>
-          </a:p>
-          <a:p>
-            <a:pPr lvl="0" indent="0" marL="1270000">
-              <a:buNone/>
-            </a:pPr>
-            <a:r>
-              <a:rPr sz="2000"/>
-              <a:t>This is a callout box test</a:t>
-            </a:r>
-          </a:p>
-          <a:p>
-            <a:pPr lvl="0" indent="0" marL="0">
-              <a:buNone/>
-            </a:pPr>
-            <a:r>
-              <a:rPr/>
-              <a:t>Test citation </a:t>
-            </a:r>
-            <a:r>
-              <a:rPr>
-                <a:hlinkClick r:id="rId2" action="ppaction://hlinksldjump"/>
-              </a:rPr>
-              <a:t>Jackson (1990)</a:t>
-            </a:r>
-          </a:p>
-        </p:txBody>
-      </p:sp>
-      <p:sp>
-        <p:nvSpPr>
-          <p:cNvPr id="6" name="Slide Number Placeholder 5">
-            <a:extLst>
-              <a:ext uri="{FF2B5EF4-FFF2-40B4-BE49-F238E27FC236}">
-                <a16:creationId xmlns:a16="http://schemas.microsoft.com/office/drawing/2014/main" id="{5F33F24B-1A9E-2EAF-F2AB-89426454DEE9}"/>
-              </a:ext>
-            </a:extLst>
-          </p:cNvPr>
-          <p:cNvSpPr>
-            <a:spLocks noGrp="1"/>
-          </p:cNvSpPr>
-          <p:nvPr>
-            <p:ph idx="12" sz="quarter" type="sldNum"/>
-          </p:nvPr>
-        </p:nvSpPr>
-        <p:spPr>
-          <a:xfrm>
-            <a:off x="8610599" y="6356350"/>
-            <a:ext cx="3135001" cy="365125"/>
-          </a:xfrm>
-        </p:spPr>
-        <p:txBody>
-          <a:bodyPr/>
-          <a:lstStyle/>
-          <a:p>
-            <a:fld id="{7FEFBAB6-26D0-44D8-BD53-612461CE1ACC}" type="slidenum">
-              <a:rPr lang="de-DE" smtClean="0"/>
-              <a:t>‹#›</a:t>
-            </a:fld>
-            <a:endParaRPr lang="de-DE"/>
-          </a:p>
-        </p:txBody>
-      </p:sp>
-    </p:spTree>
-  </p:cSld>
-</p:sld>
-</file>
-
-<file path=ppt/slides/slide20.xml><?xml version="1.0" encoding="utf-8"?>
+<file path=ppt/slides/slide15.xml><?xml version="1.0" encoding="utf-8"?>
 <p:sld xmlns:a="http://schemas.openxmlformats.org/drawingml/2006/main" xmlns:r="http://schemas.openxmlformats.org/officeDocument/2006/relationships" xmlns:p="http://schemas.openxmlformats.org/presentationml/2006/main">
   <p:cSld>
     <p:spTree>
@@ -11565,7 +10210,7 @@
 </p:sld>
 </file>
 
-<file path=ppt/slides/slide21.xml><?xml version="1.0" encoding="utf-8"?>
+<file path=ppt/slides/slide16.xml><?xml version="1.0" encoding="utf-8"?>
 <p:sld xmlns:a="http://schemas.openxmlformats.org/drawingml/2006/main" xmlns:r="http://schemas.openxmlformats.org/officeDocument/2006/relationships" xmlns:p="http://schemas.openxmlformats.org/presentationml/2006/main">
   <p:cSld>
     <p:spTree>
@@ -11969,7 +10614,7 @@
 </p:sld>
 </file>
 
-<file path=ppt/slides/slide22.xml><?xml version="1.0" encoding="utf-8"?>
+<file path=ppt/slides/slide17.xml><?xml version="1.0" encoding="utf-8"?>
 <p:sld xmlns:a="http://schemas.openxmlformats.org/drawingml/2006/main" xmlns:r="http://schemas.openxmlformats.org/officeDocument/2006/relationships" xmlns:p="http://schemas.openxmlformats.org/presentationml/2006/main">
   <p:cSld>
     <p:spTree>
@@ -12496,7 +11141,7 @@
 </p:sld>
 </file>
 
-<file path=ppt/slides/slide23.xml><?xml version="1.0" encoding="utf-8"?>
+<file path=ppt/slides/slide18.xml><?xml version="1.0" encoding="utf-8"?>
 <p:sld xmlns:a="http://schemas.openxmlformats.org/drawingml/2006/main" xmlns:r="http://schemas.openxmlformats.org/officeDocument/2006/relationships" xmlns:p="http://schemas.openxmlformats.org/presentationml/2006/main">
   <p:cSld>
     <p:spTree>
@@ -13044,7 +11689,7 @@
 </p:sld>
 </file>
 
-<file path=ppt/slides/slide24.xml><?xml version="1.0" encoding="utf-8"?>
+<file path=ppt/slides/slide19.xml><?xml version="1.0" encoding="utf-8"?>
 <p:sld xmlns:a="http://schemas.openxmlformats.org/drawingml/2006/main" xmlns:r="http://schemas.openxmlformats.org/officeDocument/2006/relationships" xmlns:p="http://schemas.openxmlformats.org/presentationml/2006/main">
   <p:cSld>
     <p:spTree>
@@ -13436,7 +12081,190 @@
 </p:sld>
 </file>
 
-<file path=ppt/slides/slide25.xml><?xml version="1.0" encoding="utf-8"?>
+<file path=ppt/slides/slide2.xml><?xml version="1.0" encoding="utf-8"?>
+<p:sld xmlns:a="http://schemas.openxmlformats.org/drawingml/2006/main" xmlns:r="http://schemas.openxmlformats.org/officeDocument/2006/relationships" xmlns:p="http://schemas.openxmlformats.org/presentationml/2006/main">
+  <p:cSld>
+    <p:spTree>
+      <p:nvGrpSpPr>
+        <p:cNvPr id="1" name=""/>
+        <p:cNvGrpSpPr/>
+        <p:nvPr/>
+      </p:nvGrpSpPr>
+      <p:grpSpPr>
+        <a:xfrm>
+          <a:off x="0" y="0"/>
+          <a:ext cx="0" cy="0"/>
+          <a:chOff x="0" y="0"/>
+          <a:chExt cx="0" cy="0"/>
+        </a:xfrm>
+      </p:grpSpPr>
+      <p:sp>
+        <p:nvSpPr>
+          <p:cNvPr id="2" name="Title 1">
+            <a:extLst>
+              <a:ext uri="{FF2B5EF4-FFF2-40B4-BE49-F238E27FC236}">
+                <a16:creationId xmlns:a16="http://schemas.microsoft.com/office/drawing/2014/main" id="{6BF04AE0-F94F-A586-34B8-68D9CAB6C6D1}"/>
+              </a:ext>
+            </a:extLst>
+          </p:cNvPr>
+          <p:cNvSpPr>
+            <a:spLocks noGrp="1"/>
+          </p:cNvSpPr>
+          <p:nvPr>
+            <p:ph type="title"/>
+          </p:nvPr>
+        </p:nvSpPr>
+        <p:spPr>
+          <a:xfrm>
+            <a:off x="2295524" y="432532"/>
+            <a:ext cx="9450077" cy="825501"/>
+          </a:xfrm>
+        </p:spPr>
+        <p:txBody>
+          <a:bodyPr/>
+          <a:lstStyle/>
+          <a:p>
+            <a:pPr lvl="0" indent="0" marL="0">
+              <a:buNone/>
+            </a:pPr>
+            <a:r>
+              <a:rPr/>
+              <a:t>Licence</a:t>
+            </a:r>
+          </a:p>
+        </p:txBody>
+      </p:sp>
+      <p:sp>
+        <p:nvSpPr>
+          <p:cNvPr id="3" name="Content Placeholder 2">
+            <a:extLst>
+              <a:ext uri="{FF2B5EF4-FFF2-40B4-BE49-F238E27FC236}">
+                <a16:creationId xmlns:a16="http://schemas.microsoft.com/office/drawing/2014/main" id="{372FA590-20E9-0368-85B4-90C26598F852}"/>
+              </a:ext>
+            </a:extLst>
+          </p:cNvPr>
+          <p:cNvSpPr>
+            <a:spLocks noGrp="1"/>
+          </p:cNvSpPr>
+          <p:nvPr>
+            <p:ph idx="1"/>
+          </p:nvPr>
+        </p:nvSpPr>
+        <p:spPr/>
+        <p:txBody>
+          <a:bodyPr/>
+          <a:lstStyle/>
+          <a:p>
+            <a:pPr lvl="0" indent="0" marL="0">
+              <a:buNone/>
+            </a:pPr>
+            <a:r>
+              <a:rPr/>
+              <a:t>This work was originally created by Pat Callahan and Dejana Damjanovic under a CC-BY-SA 4.0 </a:t>
+            </a:r>
+            <a:r>
+              <a:rPr>
+                <a:hlinkClick r:id="rId3"/>
+              </a:rPr>
+              <a:t>Creative Commons Attribution 4.0 International License</a:t>
+            </a:r>
+            <a:r>
+              <a:rPr/>
+              <a:t> and a CC0 1.0 </a:t>
+            </a:r>
+            <a:r>
+              <a:rPr>
+                <a:hlinkClick r:id="rId4"/>
+              </a:rPr>
+              <a:t>Creative Commons Universal</a:t>
+            </a:r>
+            <a:r>
+              <a:rPr/>
+              <a:t> licence for code snippets. It was subsequently adapted and revised by </a:t>
+            </a:r>
+            <a:r>
+              <a:rPr>
+                <a:hlinkClick r:id="rId5"/>
+              </a:rPr>
+              <a:t>Sarah von Grebmer zu Wolfsthurn</a:t>
+            </a:r>
+            <a:r>
+              <a:rPr/>
+              <a:t>. This current work by </a:t>
+            </a:r>
+            <a:r>
+              <a:rPr>
+                <a:hlinkClick r:id="rId6"/>
+              </a:rPr>
+              <a:t>Tejaswini Sharma</a:t>
+            </a:r>
+            <a:r>
+              <a:rPr/>
+              <a:t> and Sarah von Grebmer zu Wolfsthurn is licensed under a CC-BY-SA 4.0 </a:t>
+            </a:r>
+            <a:r>
+              <a:rPr>
+                <a:hlinkClick r:id="rId7"/>
+              </a:rPr>
+              <a:t>Creative Commons Attribution 4.0 International SA License</a:t>
+            </a:r>
+            <a:r>
+              <a:rPr/>
+              <a:t>. permits unrestricted re-use, distribution, and reproduction in any medium, provided the original work is properly cited. If you remix, transform, or build upon the material, you must distribute your contributions under the same license as the original. Code snippets are dedicated to the public domain and licenced under a CC0 1.0 </a:t>
+            </a:r>
+            <a:r>
+              <a:rPr>
+                <a:hlinkClick r:id="rId8"/>
+              </a:rPr>
+              <a:t>Creative Commons Universal Licence</a:t>
+            </a:r>
+            <a:r>
+              <a:rPr/>
+              <a:t>. You may use, modify, distribute, and sell the code snippets for any purpose, without permission or attribution. The code snippets are provided “as is”, without warranty of any kind.</a:t>
+            </a:r>
+          </a:p>
+        </p:txBody>
+      </p:sp>
+      <p:sp>
+        <p:nvSpPr>
+          <p:cNvPr id="6" name="Slide Number Placeholder 5">
+            <a:extLst>
+              <a:ext uri="{FF2B5EF4-FFF2-40B4-BE49-F238E27FC236}">
+                <a16:creationId xmlns:a16="http://schemas.microsoft.com/office/drawing/2014/main" id="{5F33F24B-1A9E-2EAF-F2AB-89426454DEE9}"/>
+              </a:ext>
+            </a:extLst>
+          </p:cNvPr>
+          <p:cNvSpPr>
+            <a:spLocks noGrp="1"/>
+          </p:cNvSpPr>
+          <p:nvPr>
+            <p:ph idx="12" sz="quarter" type="sldNum"/>
+          </p:nvPr>
+        </p:nvSpPr>
+        <p:spPr>
+          <a:xfrm>
+            <a:off x="8610599" y="6356350"/>
+            <a:ext cx="3135001" cy="365125"/>
+          </a:xfrm>
+        </p:spPr>
+        <p:txBody>
+          <a:bodyPr/>
+          <a:lstStyle/>
+          <a:p>
+            <a:fld id="{7FEFBAB6-26D0-44D8-BD53-612461CE1ACC}" type="slidenum">
+              <a:rPr lang="de-DE" smtClean="0"/>
+              <a:t>‹#›</a:t>
+            </a:fld>
+            <a:endParaRPr lang="de-DE"/>
+          </a:p>
+        </p:txBody>
+      </p:sp>
+    </p:spTree>
+  </p:cSld>
+</p:sld>
+</file>
+
+<file path=ppt/slides/slide20.xml><?xml version="1.0" encoding="utf-8"?>
 <p:sld xmlns:a="http://schemas.openxmlformats.org/drawingml/2006/main" xmlns:r="http://schemas.openxmlformats.org/officeDocument/2006/relationships" xmlns:p="http://schemas.openxmlformats.org/presentationml/2006/main">
   <p:cSld>
     <p:spTree>
@@ -13756,7 +12584,7 @@
 </p:sld>
 </file>
 
-<file path=ppt/slides/slide26.xml><?xml version="1.0" encoding="utf-8"?>
+<file path=ppt/slides/slide21.xml><?xml version="1.0" encoding="utf-8"?>
 <p:sld xmlns:a="http://schemas.openxmlformats.org/drawingml/2006/main" xmlns:r="http://schemas.openxmlformats.org/officeDocument/2006/relationships" xmlns:p="http://schemas.openxmlformats.org/presentationml/2006/main">
   <p:cSld>
     <p:spTree>
@@ -13887,7 +12715,7 @@
 </p:sld>
 </file>
 
-<file path=ppt/slides/slide27.xml><?xml version="1.0" encoding="utf-8"?>
+<file path=ppt/slides/slide22.xml><?xml version="1.0" encoding="utf-8"?>
 <p:sld xmlns:a="http://schemas.openxmlformats.org/drawingml/2006/main" xmlns:r="http://schemas.openxmlformats.org/officeDocument/2006/relationships" xmlns:p="http://schemas.openxmlformats.org/presentationml/2006/main">
   <p:cSld>
     <p:spTree>
@@ -14249,7 +13077,7 @@
 </p:sld>
 </file>
 
-<file path=ppt/slides/slide28.xml><?xml version="1.0" encoding="utf-8"?>
+<file path=ppt/slides/slide23.xml><?xml version="1.0" encoding="utf-8"?>
 <p:sld xmlns:a="http://schemas.openxmlformats.org/drawingml/2006/main" xmlns:r="http://schemas.openxmlformats.org/officeDocument/2006/relationships" xmlns:p="http://schemas.openxmlformats.org/presentationml/2006/main">
   <p:cSld>
     <p:spTree>
@@ -14782,7 +13610,7 @@
 </p:sld>
 </file>
 
-<file path=ppt/slides/slide29.xml><?xml version="1.0" encoding="utf-8"?>
+<file path=ppt/slides/slide24.xml><?xml version="1.0" encoding="utf-8"?>
 <p:sld xmlns:a="http://schemas.openxmlformats.org/drawingml/2006/main" xmlns:r="http://schemas.openxmlformats.org/officeDocument/2006/relationships" xmlns:p="http://schemas.openxmlformats.org/presentationml/2006/main">
   <p:cSld>
     <p:spTree>
@@ -14874,7 +13702,7 @@
 </p:sld>
 </file>
 
-<file path=ppt/slides/slide3.xml><?xml version="1.0" encoding="utf-8"?>
+<file path=ppt/slides/slide25.xml><?xml version="1.0" encoding="utf-8"?>
 <p:sld xmlns:a="http://schemas.openxmlformats.org/drawingml/2006/main" xmlns:r="http://schemas.openxmlformats.org/officeDocument/2006/relationships" xmlns:p="http://schemas.openxmlformats.org/presentationml/2006/main">
   <p:cSld>
     <p:spTree>
@@ -14922,7 +13750,7 @@
             </a:pPr>
             <a:r>
               <a:rPr/>
-              <a:t>Section Header?</a:t>
+              <a:t>Brief overview of Zotero</a:t>
             </a:r>
           </a:p>
         </p:txBody>
@@ -14966,99 +13794,7 @@
 </p:sld>
 </file>
 
-<file path=ppt/slides/slide30.xml><?xml version="1.0" encoding="utf-8"?>
-<p:sld xmlns:a="http://schemas.openxmlformats.org/drawingml/2006/main" xmlns:r="http://schemas.openxmlformats.org/officeDocument/2006/relationships" xmlns:p="http://schemas.openxmlformats.org/presentationml/2006/main">
-  <p:cSld>
-    <p:spTree>
-      <p:nvGrpSpPr>
-        <p:cNvPr id="1" name=""/>
-        <p:cNvGrpSpPr/>
-        <p:nvPr/>
-      </p:nvGrpSpPr>
-      <p:grpSpPr>
-        <a:xfrm>
-          <a:off x="0" y="0"/>
-          <a:ext cx="0" cy="0"/>
-          <a:chOff x="0" y="0"/>
-          <a:chExt cx="0" cy="0"/>
-        </a:xfrm>
-      </p:grpSpPr>
-      <p:sp>
-        <p:nvSpPr>
-          <p:cNvPr id="2" name="Title 1">
-            <a:extLst>
-              <a:ext uri="{FF2B5EF4-FFF2-40B4-BE49-F238E27FC236}">
-                <a16:creationId xmlns:a16="http://schemas.microsoft.com/office/drawing/2014/main" id="{125F7DD1-BC99-F967-7E0D-AD07C61B1543}"/>
-              </a:ext>
-            </a:extLst>
-          </p:cNvPr>
-          <p:cNvSpPr>
-            <a:spLocks noGrp="1"/>
-          </p:cNvSpPr>
-          <p:nvPr>
-            <p:ph type="title"/>
-          </p:nvPr>
-        </p:nvSpPr>
-        <p:spPr>
-          <a:xfrm>
-            <a:off x="831850" y="1709738"/>
-            <a:ext cx="10515600" cy="2852737"/>
-          </a:xfrm>
-        </p:spPr>
-        <p:txBody>
-          <a:bodyPr/>
-          <a:lstStyle/>
-          <a:p>
-            <a:pPr lvl="0" indent="0" marL="0">
-              <a:buNone/>
-            </a:pPr>
-            <a:r>
-              <a:rPr/>
-              <a:t>Brief overview of Zotero</a:t>
-            </a:r>
-          </a:p>
-        </p:txBody>
-      </p:sp>
-      <p:sp>
-        <p:nvSpPr>
-          <p:cNvPr id="6" name="Slide Number Placeholder 5">
-            <a:extLst>
-              <a:ext uri="{FF2B5EF4-FFF2-40B4-BE49-F238E27FC236}">
-                <a16:creationId xmlns:a16="http://schemas.microsoft.com/office/drawing/2014/main" id="{B93C94A4-D223-C226-398A-59B1A3955C6C}"/>
-              </a:ext>
-            </a:extLst>
-          </p:cNvPr>
-          <p:cNvSpPr>
-            <a:spLocks noGrp="1"/>
-          </p:cNvSpPr>
-          <p:nvPr>
-            <p:ph idx="12" sz="quarter" type="sldNum"/>
-          </p:nvPr>
-        </p:nvSpPr>
-        <p:spPr>
-          <a:xfrm>
-            <a:off x="8610599" y="6356350"/>
-            <a:ext cx="3135001" cy="365125"/>
-          </a:xfrm>
-        </p:spPr>
-        <p:txBody>
-          <a:bodyPr/>
-          <a:lstStyle/>
-          <a:p>
-            <a:fld id="{7FEFBAB6-26D0-44D8-BD53-612461CE1ACC}" type="slidenum">
-              <a:rPr lang="de-DE" smtClean="0"/>
-              <a:t>‹#›</a:t>
-            </a:fld>
-            <a:endParaRPr lang="de-DE"/>
-          </a:p>
-        </p:txBody>
-      </p:sp>
-    </p:spTree>
-  </p:cSld>
-</p:sld>
-</file>
-
-<file path=ppt/slides/slide31.xml><?xml version="1.0" encoding="utf-8"?>
+<file path=ppt/slides/slide26.xml><?xml version="1.0" encoding="utf-8"?>
 <p:sld xmlns:a="http://schemas.openxmlformats.org/drawingml/2006/main" xmlns:r="http://schemas.openxmlformats.org/officeDocument/2006/relationships" xmlns:p="http://schemas.openxmlformats.org/presentationml/2006/main">
   <p:cSld>
     <p:spTree>
@@ -15385,7 +14121,7 @@
 </p:sld>
 </file>
 
-<file path=ppt/slides/slide32.xml><?xml version="1.0" encoding="utf-8"?>
+<file path=ppt/slides/slide27.xml><?xml version="1.0" encoding="utf-8"?>
 <p:sld xmlns:a="http://schemas.openxmlformats.org/drawingml/2006/main" xmlns:r="http://schemas.openxmlformats.org/officeDocument/2006/relationships" xmlns:p="http://schemas.openxmlformats.org/presentationml/2006/main">
   <p:cSld>
     <p:spTree>
@@ -15507,7 +14243,7 @@
 </p:sld>
 </file>
 
-<file path=ppt/slides/slide33.xml><?xml version="1.0" encoding="utf-8"?>
+<file path=ppt/slides/slide28.xml><?xml version="1.0" encoding="utf-8"?>
 <p:sld xmlns:a="http://schemas.openxmlformats.org/drawingml/2006/main" xmlns:r="http://schemas.openxmlformats.org/officeDocument/2006/relationships" xmlns:p="http://schemas.openxmlformats.org/presentationml/2006/main">
   <p:cSld>
     <p:spTree>
@@ -15837,7 +14573,7 @@
 </p:sld>
 </file>
 
-<file path=ppt/slides/slide34.xml><?xml version="1.0" encoding="utf-8"?>
+<file path=ppt/slides/slide29.xml><?xml version="1.0" encoding="utf-8"?>
 <p:sld xmlns:a="http://schemas.openxmlformats.org/drawingml/2006/main" xmlns:r="http://schemas.openxmlformats.org/officeDocument/2006/relationships" xmlns:p="http://schemas.openxmlformats.org/presentationml/2006/main">
   <p:cSld>
     <p:spTree>
@@ -16272,7 +15008,143 @@
 </p:sld>
 </file>
 
-<file path=ppt/slides/slide35.xml><?xml version="1.0" encoding="utf-8"?>
+<file path=ppt/slides/slide3.xml><?xml version="1.0" encoding="utf-8"?>
+<p:sld xmlns:a="http://schemas.openxmlformats.org/drawingml/2006/main" xmlns:r="http://schemas.openxmlformats.org/officeDocument/2006/relationships" xmlns:p="http://schemas.openxmlformats.org/presentationml/2006/main">
+  <p:cSld>
+    <p:spTree>
+      <p:nvGrpSpPr>
+        <p:cNvPr id="1" name=""/>
+        <p:cNvGrpSpPr/>
+        <p:nvPr/>
+      </p:nvGrpSpPr>
+      <p:grpSpPr>
+        <a:xfrm>
+          <a:off x="0" y="0"/>
+          <a:ext cx="0" cy="0"/>
+          <a:chOff x="0" y="0"/>
+          <a:chExt cx="0" cy="0"/>
+        </a:xfrm>
+      </p:grpSpPr>
+      <p:sp>
+        <p:nvSpPr>
+          <p:cNvPr id="3" name="Content Placeholder 2">
+            <a:extLst>
+              <a:ext uri="{FF2B5EF4-FFF2-40B4-BE49-F238E27FC236}">
+                <a16:creationId xmlns:a16="http://schemas.microsoft.com/office/drawing/2014/main" id="{372FA590-20E9-0368-85B4-90C26598F852}"/>
+              </a:ext>
+            </a:extLst>
+          </p:cNvPr>
+          <p:cNvSpPr>
+            <a:spLocks noGrp="1"/>
+          </p:cNvSpPr>
+          <p:nvPr>
+            <p:ph idx="1"/>
+          </p:nvPr>
+        </p:nvSpPr>
+        <p:spPr/>
+        <p:txBody>
+          <a:bodyPr/>
+          <a:lstStyle/>
+          <a:p>
+            <a:pPr lvl="0" indent="0" marL="0">
+              <a:spcBef>
+                <a:spcPts val="3000"/>
+              </a:spcBef>
+              <a:buNone/>
+            </a:pPr>
+            <a:r>
+              <a:rPr b="1"/>
+              <a:t>Contribution statement</a:t>
+            </a:r>
+          </a:p>
+          <a:p>
+            <a:pPr lvl="0" indent="0" marL="0">
+              <a:buNone/>
+            </a:pPr>
+            <a:r>
+              <a:rPr b="1"/>
+              <a:t>Creator</a:t>
+            </a:r>
+            <a:r>
+              <a:rPr/>
+              <a:t>: Sharma, Tejaswini (</a:t>
+            </a:r>
+            <a:r>
+              <a:rPr>
+                <a:hlinkClick r:id="rId2"/>
+              </a:rPr>
+              <a:t>Orcid-ID: 00009-0000-0305-9751</a:t>
+            </a:r>
+            <a:r>
+              <a:rPr/>
+              <a:t>)</a:t>
+            </a:r>
+          </a:p>
+          <a:p>
+            <a:pPr lvl="0" indent="0" marL="0">
+              <a:buNone/>
+            </a:pPr>
+            <a:r>
+              <a:rPr b="1"/>
+              <a:t>Reviewer</a:t>
+            </a:r>
+            <a:r>
+              <a:rPr/>
+              <a:t>: Von Grebmer zu Wolfsthurn, Sarah (</a:t>
+            </a:r>
+            <a:r>
+              <a:rPr>
+                <a:hlinkClick r:id="rId3"/>
+              </a:rPr>
+              <a:t>Ordcid-ID: 0000-0002-6413-3895</a:t>
+            </a:r>
+            <a:r>
+              <a:rPr/>
+              <a:t>)</a:t>
+            </a:r>
+          </a:p>
+        </p:txBody>
+      </p:sp>
+      <p:sp>
+        <p:nvSpPr>
+          <p:cNvPr id="6" name="Slide Number Placeholder 5">
+            <a:extLst>
+              <a:ext uri="{FF2B5EF4-FFF2-40B4-BE49-F238E27FC236}">
+                <a16:creationId xmlns:a16="http://schemas.microsoft.com/office/drawing/2014/main" id="{5F33F24B-1A9E-2EAF-F2AB-89426454DEE9}"/>
+              </a:ext>
+            </a:extLst>
+          </p:cNvPr>
+          <p:cNvSpPr>
+            <a:spLocks noGrp="1"/>
+          </p:cNvSpPr>
+          <p:nvPr>
+            <p:ph idx="12" sz="quarter" type="sldNum"/>
+          </p:nvPr>
+        </p:nvSpPr>
+        <p:spPr>
+          <a:xfrm>
+            <a:off x="8610599" y="6356350"/>
+            <a:ext cx="3135001" cy="365125"/>
+          </a:xfrm>
+        </p:spPr>
+        <p:txBody>
+          <a:bodyPr/>
+          <a:lstStyle/>
+          <a:p>
+            <a:fld id="{7FEFBAB6-26D0-44D8-BD53-612461CE1ACC}" type="slidenum">
+              <a:rPr lang="de-DE" smtClean="0"/>
+              <a:t>‹#›</a:t>
+            </a:fld>
+            <a:endParaRPr lang="de-DE"/>
+          </a:p>
+        </p:txBody>
+      </p:sp>
+    </p:spTree>
+  </p:cSld>
+</p:sld>
+</file>
+
+<file path=ppt/slides/slide30.xml><?xml version="1.0" encoding="utf-8"?>
 <p:sld xmlns:a="http://schemas.openxmlformats.org/drawingml/2006/main" xmlns:r="http://schemas.openxmlformats.org/officeDocument/2006/relationships" xmlns:p="http://schemas.openxmlformats.org/presentationml/2006/main">
   <p:cSld>
     <p:spTree>
@@ -16727,7 +15599,7 @@
 </p:sld>
 </file>
 
-<file path=ppt/slides/slide36.xml><?xml version="1.0" encoding="utf-8"?>
+<file path=ppt/slides/slide31.xml><?xml version="1.0" encoding="utf-8"?>
 <p:sld xmlns:a="http://schemas.openxmlformats.org/drawingml/2006/main" xmlns:r="http://schemas.openxmlformats.org/officeDocument/2006/relationships" xmlns:p="http://schemas.openxmlformats.org/presentationml/2006/main">
   <p:cSld>
     <p:spTree>
@@ -17036,7 +15908,7 @@
 </p:sld>
 </file>
 
-<file path=ppt/slides/slide37.xml><?xml version="1.0" encoding="utf-8"?>
+<file path=ppt/slides/slide32.xml><?xml version="1.0" encoding="utf-8"?>
 <p:sld xmlns:a="http://schemas.openxmlformats.org/drawingml/2006/main" xmlns:r="http://schemas.openxmlformats.org/officeDocument/2006/relationships" xmlns:p="http://schemas.openxmlformats.org/presentationml/2006/main">
   <p:cSld>
     <p:spTree>
@@ -17492,7 +16364,7 @@
 </p:sld>
 </file>
 
-<file path=ppt/slides/slide38.xml><?xml version="1.0" encoding="utf-8"?>
+<file path=ppt/slides/slide33.xml><?xml version="1.0" encoding="utf-8"?>
 <p:sld xmlns:a="http://schemas.openxmlformats.org/drawingml/2006/main" xmlns:r="http://schemas.openxmlformats.org/officeDocument/2006/relationships" xmlns:p="http://schemas.openxmlformats.org/presentationml/2006/main">
   <p:cSld>
     <p:spTree>
@@ -17584,7 +16456,7 @@
 </p:sld>
 </file>
 
-<file path=ppt/slides/slide39.xml><?xml version="1.0" encoding="utf-8"?>
+<file path=ppt/slides/slide34.xml><?xml version="1.0" encoding="utf-8"?>
 <p:sld xmlns:a="http://schemas.openxmlformats.org/drawingml/2006/main" xmlns:r="http://schemas.openxmlformats.org/officeDocument/2006/relationships" xmlns:p="http://schemas.openxmlformats.org/presentationml/2006/main">
   <p:cSld>
     <p:spTree>
@@ -17936,94 +16808,7 @@
 </p:sld>
 </file>
 
-<file path=ppt/slides/slide4.xml><?xml version="1.0" encoding="utf-8"?>
-<p:sld xmlns:a="http://schemas.openxmlformats.org/drawingml/2006/main" xmlns:r="http://schemas.openxmlformats.org/officeDocument/2006/relationships" xmlns:p="http://schemas.openxmlformats.org/presentationml/2006/main">
-  <p:cSld>
-    <p:spTree>
-      <p:nvGrpSpPr>
-        <p:cNvPr id="1" name=""/>
-        <p:cNvGrpSpPr/>
-        <p:nvPr/>
-      </p:nvGrpSpPr>
-      <p:grpSpPr>
-        <a:xfrm>
-          <a:off x="0" y="0"/>
-          <a:ext cx="0" cy="0"/>
-          <a:chOff x="0" y="0"/>
-          <a:chExt cx="0" cy="0"/>
-        </a:xfrm>
-      </p:grpSpPr>
-      <p:sp>
-        <p:nvSpPr>
-          <p:cNvPr id="3" name="Content Placeholder 2">
-            <a:extLst>
-              <a:ext uri="{FF2B5EF4-FFF2-40B4-BE49-F238E27FC236}">
-                <a16:creationId xmlns:a16="http://schemas.microsoft.com/office/drawing/2014/main" id="{372FA590-20E9-0368-85B4-90C26598F852}"/>
-              </a:ext>
-            </a:extLst>
-          </p:cNvPr>
-          <p:cNvSpPr>
-            <a:spLocks noGrp="1"/>
-          </p:cNvSpPr>
-          <p:nvPr>
-            <p:ph idx="1"/>
-          </p:nvPr>
-        </p:nvSpPr>
-        <p:spPr/>
-        <p:txBody>
-          <a:bodyPr/>
-          <a:lstStyle/>
-          <a:p>
-            <a:pPr lvl="0" indent="0" marL="0">
-              <a:buNone/>
-            </a:pPr>
-            <a:r>
-              <a:rPr/>
-              <a:t>content in section header?</a:t>
-            </a:r>
-          </a:p>
-        </p:txBody>
-      </p:sp>
-      <p:sp>
-        <p:nvSpPr>
-          <p:cNvPr id="6" name="Slide Number Placeholder 5">
-            <a:extLst>
-              <a:ext uri="{FF2B5EF4-FFF2-40B4-BE49-F238E27FC236}">
-                <a16:creationId xmlns:a16="http://schemas.microsoft.com/office/drawing/2014/main" id="{5F33F24B-1A9E-2EAF-F2AB-89426454DEE9}"/>
-              </a:ext>
-            </a:extLst>
-          </p:cNvPr>
-          <p:cNvSpPr>
-            <a:spLocks noGrp="1"/>
-          </p:cNvSpPr>
-          <p:nvPr>
-            <p:ph idx="12" sz="quarter" type="sldNum"/>
-          </p:nvPr>
-        </p:nvSpPr>
-        <p:spPr>
-          <a:xfrm>
-            <a:off x="8610599" y="6356350"/>
-            <a:ext cx="3135001" cy="365125"/>
-          </a:xfrm>
-        </p:spPr>
-        <p:txBody>
-          <a:bodyPr/>
-          <a:lstStyle/>
-          <a:p>
-            <a:fld id="{7FEFBAB6-26D0-44D8-BD53-612461CE1ACC}" type="slidenum">
-              <a:rPr lang="de-DE" smtClean="0"/>
-              <a:t>‹#›</a:t>
-            </a:fld>
-            <a:endParaRPr lang="de-DE"/>
-          </a:p>
-        </p:txBody>
-      </p:sp>
-    </p:spTree>
-  </p:cSld>
-</p:sld>
-</file>
-
-<file path=ppt/slides/slide40.xml><?xml version="1.0" encoding="utf-8"?>
+<file path=ppt/slides/slide35.xml><?xml version="1.0" encoding="utf-8"?>
 <p:sld xmlns:a="http://schemas.openxmlformats.org/drawingml/2006/main" xmlns:r="http://schemas.openxmlformats.org/officeDocument/2006/relationships" xmlns:p="http://schemas.openxmlformats.org/presentationml/2006/main">
   <p:cSld>
     <p:spTree>
@@ -18441,7 +17226,7 @@
 </p:sld>
 </file>
 
-<file path=ppt/slides/slide41.xml><?xml version="1.0" encoding="utf-8"?>
+<file path=ppt/slides/slide36.xml><?xml version="1.0" encoding="utf-8"?>
 <p:sld xmlns:a="http://schemas.openxmlformats.org/drawingml/2006/main" xmlns:r="http://schemas.openxmlformats.org/officeDocument/2006/relationships" xmlns:p="http://schemas.openxmlformats.org/presentationml/2006/main">
   <p:cSld>
     <p:spTree>
@@ -18564,7 +17349,7 @@
 </p:sld>
 </file>
 
-<file path=ppt/slides/slide42.xml><?xml version="1.0" encoding="utf-8"?>
+<file path=ppt/slides/slide37.xml><?xml version="1.0" encoding="utf-8"?>
 <p:sld xmlns:a="http://schemas.openxmlformats.org/drawingml/2006/main" xmlns:r="http://schemas.openxmlformats.org/officeDocument/2006/relationships" xmlns:p="http://schemas.openxmlformats.org/presentationml/2006/main">
   <p:cSld>
     <p:spTree>
@@ -18619,45 +17404,6 @@
       </p:sp>
       <p:sp>
         <p:nvSpPr>
-          <p:cNvPr id="3" name="Content Placeholder 2">
-            <a:extLst>
-              <a:ext uri="{FF2B5EF4-FFF2-40B4-BE49-F238E27FC236}">
-                <a16:creationId xmlns:a16="http://schemas.microsoft.com/office/drawing/2014/main" id="{372FA590-20E9-0368-85B4-90C26598F852}"/>
-              </a:ext>
-            </a:extLst>
-          </p:cNvPr>
-          <p:cNvSpPr>
-            <a:spLocks noGrp="1"/>
-          </p:cNvSpPr>
-          <p:nvPr>
-            <p:ph idx="1"/>
-          </p:nvPr>
-        </p:nvSpPr>
-        <p:spPr/>
-        <p:txBody>
-          <a:bodyPr/>
-          <a:lstStyle/>
-          <a:p>
-            <a:pPr lvl="0" indent="0" marL="0">
-              <a:buNone/>
-            </a:pPr>
-            <a:r>
-              <a:rPr/>
-              <a:t>Jackson, P. (1990). The Daily Grind. In </a:t>
-            </a:r>
-            <a:r>
-              <a:rPr i="1"/>
-              <a:t>Life in Classrooms</a:t>
-            </a:r>
-            <a:r>
-              <a:rPr/>
-              <a:t> (2nd ed., pp. 34–35). Teachers College Press.</a:t>
-            </a:r>
-          </a:p>
-        </p:txBody>
-      </p:sp>
-      <p:sp>
-        <p:nvSpPr>
           <p:cNvPr id="6" name="Slide Number Placeholder 5">
             <a:extLst>
               <a:ext uri="{FF2B5EF4-FFF2-40B4-BE49-F238E27FC236}">
@@ -18695,7 +17441,7 @@
 </p:sld>
 </file>
 
-<file path=ppt/slides/slide43.xml><?xml version="1.0" encoding="utf-8"?>
+<file path=ppt/slides/slide38.xml><?xml version="1.0" encoding="utf-8"?>
 <p:sld xmlns:a="http://schemas.openxmlformats.org/drawingml/2006/main" xmlns:r="http://schemas.openxmlformats.org/officeDocument/2006/relationships" xmlns:p="http://schemas.openxmlformats.org/presentationml/2006/main">
   <p:cSld>
     <p:spTree>
@@ -18818,7 +17564,7 @@
 </p:sld>
 </file>
 
-<file path=ppt/slides/slide44.xml><?xml version="1.0" encoding="utf-8"?>
+<file path=ppt/slides/slide39.xml><?xml version="1.0" encoding="utf-8"?>
 <p:sld xmlns:a="http://schemas.openxmlformats.org/drawingml/2006/main" xmlns:r="http://schemas.openxmlformats.org/officeDocument/2006/relationships" xmlns:p="http://schemas.openxmlformats.org/presentationml/2006/main">
   <p:cSld>
     <p:spTree>
@@ -19025,939 +17771,7 @@
 </p:sld>
 </file>
 
-<file path=ppt/slides/slide45.xml><?xml version="1.0" encoding="utf-8"?>
-<p:sld xmlns:a="http://schemas.openxmlformats.org/drawingml/2006/main" xmlns:r="http://schemas.openxmlformats.org/officeDocument/2006/relationships" xmlns:p="http://schemas.openxmlformats.org/presentationml/2006/main">
-  <p:cSld>
-    <p:spTree>
-      <p:nvGrpSpPr>
-        <p:cNvPr id="1" name=""/>
-        <p:cNvGrpSpPr/>
-        <p:nvPr/>
-      </p:nvGrpSpPr>
-      <p:grpSpPr>
-        <a:xfrm>
-          <a:off x="0" y="0"/>
-          <a:ext cx="0" cy="0"/>
-          <a:chOff x="0" y="0"/>
-          <a:chExt cx="0" cy="0"/>
-        </a:xfrm>
-      </p:grpSpPr>
-      <p:sp>
-        <p:nvSpPr>
-          <p:cNvPr id="2" name="Title 1">
-            <a:extLst>
-              <a:ext uri="{FF2B5EF4-FFF2-40B4-BE49-F238E27FC236}">
-                <a16:creationId xmlns:a16="http://schemas.microsoft.com/office/drawing/2014/main" id="{6BF04AE0-F94F-A586-34B8-68D9CAB6C6D1}"/>
-              </a:ext>
-            </a:extLst>
-          </p:cNvPr>
-          <p:cNvSpPr>
-            <a:spLocks noGrp="1"/>
-          </p:cNvSpPr>
-          <p:nvPr>
-            <p:ph type="title"/>
-          </p:nvPr>
-        </p:nvSpPr>
-        <p:spPr>
-          <a:xfrm>
-            <a:off x="2295524" y="432532"/>
-            <a:ext cx="9450077" cy="825501"/>
-          </a:xfrm>
-        </p:spPr>
-        <p:txBody>
-          <a:bodyPr/>
-          <a:lstStyle/>
-          <a:p>
-            <a:pPr lvl="0" indent="0" marL="0">
-              <a:buNone/>
-            </a:pPr>
-            <a:r>
-              <a:rPr/>
-              <a:t>CREDiT Contribution Statement - TO DO</a:t>
-            </a:r>
-          </a:p>
-        </p:txBody>
-      </p:sp>
-      <p:sp>
-        <p:nvSpPr>
-          <p:cNvPr id="3" name="Content Placeholder 2">
-            <a:extLst>
-              <a:ext uri="{FF2B5EF4-FFF2-40B4-BE49-F238E27FC236}">
-                <a16:creationId xmlns:a16="http://schemas.microsoft.com/office/drawing/2014/main" id="{372FA590-20E9-0368-85B4-90C26598F852}"/>
-              </a:ext>
-            </a:extLst>
-          </p:cNvPr>
-          <p:cNvSpPr>
-            <a:spLocks noGrp="1"/>
-          </p:cNvSpPr>
-          <p:nvPr>
-            <p:ph idx="1"/>
-          </p:nvPr>
-        </p:nvSpPr>
-        <p:spPr/>
-        <p:txBody>
-          <a:bodyPr/>
-          <a:lstStyle/>
-          <a:p>
-            <a:pPr lvl="0" indent="0" marL="0">
-              <a:buNone/>
-            </a:pPr>
-            <a:r>
-              <a:rPr/>
-              <a:t>Possible roles using the CRediT contribition system or the Zenodo Contribution System:</a:t>
-            </a:r>
-          </a:p>
-          <a:p>
-            <a:pPr lvl="0" indent="0" marL="0">
-              <a:buNone/>
-            </a:pPr>
-            <a:r>
-              <a:rPr b="1"/>
-              <a:t>Name main content creator</a:t>
-            </a:r>
-            <a:r>
-              <a:rPr/>
-              <a:t>: Conceptualization, Software, Writing - Original Draft, Visualization. </a:t>
-            </a:r>
-            <a:r>
-              <a:rPr b="1"/>
-              <a:t>Sara Lil Middleton</a:t>
-            </a:r>
-            <a:r>
-              <a:rPr/>
-              <a:t>: Writing - Review &amp; Editing, Supervision. </a:t>
-            </a:r>
-            <a:r>
-              <a:rPr b="1"/>
-              <a:t>Sarah von Grebmer zu Wolfsthurn</a:t>
-            </a:r>
-            <a:r>
-              <a:rPr/>
-              <a:t>: Conceptualisation, Writing - Review &amp; Editing, Supervision, Project Administration, Validation.</a:t>
-            </a:r>
-          </a:p>
-        </p:txBody>
-      </p:sp>
-      <p:sp>
-        <p:nvSpPr>
-          <p:cNvPr id="6" name="Slide Number Placeholder 5">
-            <a:extLst>
-              <a:ext uri="{FF2B5EF4-FFF2-40B4-BE49-F238E27FC236}">
-                <a16:creationId xmlns:a16="http://schemas.microsoft.com/office/drawing/2014/main" id="{5F33F24B-1A9E-2EAF-F2AB-89426454DEE9}"/>
-              </a:ext>
-            </a:extLst>
-          </p:cNvPr>
-          <p:cNvSpPr>
-            <a:spLocks noGrp="1"/>
-          </p:cNvSpPr>
-          <p:nvPr>
-            <p:ph idx="12" sz="quarter" type="sldNum"/>
-          </p:nvPr>
-        </p:nvSpPr>
-        <p:spPr>
-          <a:xfrm>
-            <a:off x="8610599" y="6356350"/>
-            <a:ext cx="3135001" cy="365125"/>
-          </a:xfrm>
-        </p:spPr>
-        <p:txBody>
-          <a:bodyPr/>
-          <a:lstStyle/>
-          <a:p>
-            <a:fld id="{7FEFBAB6-26D0-44D8-BD53-612461CE1ACC}" type="slidenum">
-              <a:rPr lang="de-DE" smtClean="0"/>
-              <a:t>‹#›</a:t>
-            </a:fld>
-            <a:endParaRPr lang="de-DE"/>
-          </a:p>
-        </p:txBody>
-      </p:sp>
-    </p:spTree>
-  </p:cSld>
-</p:sld>
-</file>
-
-<file path=ppt/slides/slide5.xml><?xml version="1.0" encoding="utf-8"?>
-<p:sld xmlns:a="http://schemas.openxmlformats.org/drawingml/2006/main" xmlns:r="http://schemas.openxmlformats.org/officeDocument/2006/relationships" xmlns:p="http://schemas.openxmlformats.org/presentationml/2006/main">
-  <p:cSld>
-    <p:spTree>
-      <p:nvGrpSpPr>
-        <p:cNvPr id="1" name=""/>
-        <p:cNvGrpSpPr/>
-        <p:nvPr/>
-      </p:nvGrpSpPr>
-      <p:grpSpPr>
-        <a:xfrm>
-          <a:off x="0" y="0"/>
-          <a:ext cx="0" cy="0"/>
-          <a:chOff x="0" y="0"/>
-          <a:chExt cx="0" cy="0"/>
-        </a:xfrm>
-      </p:grpSpPr>
-      <p:sp>
-        <p:nvSpPr>
-          <p:cNvPr id="2" name="Title 1">
-            <a:extLst>
-              <a:ext uri="{FF2B5EF4-FFF2-40B4-BE49-F238E27FC236}">
-                <a16:creationId xmlns:a16="http://schemas.microsoft.com/office/drawing/2014/main" id="{6BF04AE0-F94F-A586-34B8-68D9CAB6C6D1}"/>
-              </a:ext>
-            </a:extLst>
-          </p:cNvPr>
-          <p:cNvSpPr>
-            <a:spLocks noGrp="1"/>
-          </p:cNvSpPr>
-          <p:nvPr>
-            <p:ph type="title"/>
-          </p:nvPr>
-        </p:nvSpPr>
-        <p:spPr>
-          <a:xfrm>
-            <a:off x="2295524" y="432532"/>
-            <a:ext cx="9450077" cy="825501"/>
-          </a:xfrm>
-        </p:spPr>
-        <p:txBody>
-          <a:bodyPr/>
-          <a:lstStyle/>
-          <a:p>
-            <a:pPr lvl="0" indent="0" marL="0">
-              <a:buNone/>
-            </a:pPr>
-            <a:r>
-              <a:rPr/>
-              <a:t>a section</a:t>
-            </a:r>
-          </a:p>
-        </p:txBody>
-      </p:sp>
-      <p:sp>
-        <p:nvSpPr>
-          <p:cNvPr id="3" name="Content Placeholder 2">
-            <a:extLst>
-              <a:ext uri="{FF2B5EF4-FFF2-40B4-BE49-F238E27FC236}">
-                <a16:creationId xmlns:a16="http://schemas.microsoft.com/office/drawing/2014/main" id="{372FA590-20E9-0368-85B4-90C26598F852}"/>
-              </a:ext>
-            </a:extLst>
-          </p:cNvPr>
-          <p:cNvSpPr>
-            <a:spLocks noGrp="1"/>
-          </p:cNvSpPr>
-          <p:nvPr>
-            <p:ph idx="1"/>
-          </p:nvPr>
-        </p:nvSpPr>
-        <p:spPr/>
-        <p:txBody>
-          <a:bodyPr/>
-          <a:lstStyle/>
-          <a:p>
-            <a:pPr lvl="0"/>
-            <a:r>
-              <a:rPr/>
-              <a:t>some text</a:t>
-            </a:r>
-          </a:p>
-          <a:p>
-            <a:pPr lvl="0"/>
-            <a:r>
-              <a:rPr/>
-              <a:t>another bullet point</a:t>
-            </a:r>
-          </a:p>
-          <a:p>
-            <a:pPr lvl="0"/>
-            <a:r>
-              <a:rPr b="1"/>
-              <a:t>bold</a:t>
-            </a:r>
-          </a:p>
-          <a:p>
-            <a:pPr lvl="0"/>
-            <a:r>
-              <a:rPr i="1"/>
-              <a:t>italics</a:t>
-            </a:r>
-          </a:p>
-        </p:txBody>
-      </p:sp>
-      <p:sp>
-        <p:nvSpPr>
-          <p:cNvPr id="6" name="Slide Number Placeholder 5">
-            <a:extLst>
-              <a:ext uri="{FF2B5EF4-FFF2-40B4-BE49-F238E27FC236}">
-                <a16:creationId xmlns:a16="http://schemas.microsoft.com/office/drawing/2014/main" id="{5F33F24B-1A9E-2EAF-F2AB-89426454DEE9}"/>
-              </a:ext>
-            </a:extLst>
-          </p:cNvPr>
-          <p:cNvSpPr>
-            <a:spLocks noGrp="1"/>
-          </p:cNvSpPr>
-          <p:nvPr>
-            <p:ph idx="12" sz="quarter" type="sldNum"/>
-          </p:nvPr>
-        </p:nvSpPr>
-        <p:spPr>
-          <a:xfrm>
-            <a:off x="8610599" y="6356350"/>
-            <a:ext cx="3135001" cy="365125"/>
-          </a:xfrm>
-        </p:spPr>
-        <p:txBody>
-          <a:bodyPr/>
-          <a:lstStyle/>
-          <a:p>
-            <a:fld id="{7FEFBAB6-26D0-44D8-BD53-612461CE1ACC}" type="slidenum">
-              <a:rPr lang="de-DE" smtClean="0"/>
-              <a:t>‹#›</a:t>
-            </a:fld>
-            <a:endParaRPr lang="de-DE"/>
-          </a:p>
-        </p:txBody>
-      </p:sp>
-    </p:spTree>
-  </p:cSld>
-  <p:timing>
-    <p:tnLst>
-      <p:par>
-        <p:cTn id="1" dur="indefinite" restart="never" nodeType="tmRoot">
-          <p:childTnLst>
-            <p:seq concurrent="1" nextAc="seek">
-              <p:cTn id="2" dur="indefinite" nodeType="mainSeq">
-                <p:childTnLst>
-                  <p:par>
-                    <p:cTn id="3" fill="hold">
-                      <p:stCondLst>
-                        <p:cond delay="indefinite"/>
-                      </p:stCondLst>
-                      <p:childTnLst>
-                        <p:par>
-                          <p:cTn id="4" fill="hold">
-                            <p:stCondLst>
-                              <p:cond delay="0"/>
-                            </p:stCondLst>
-                            <p:childTnLst>
-                              <p:par>
-                                <p:cTn id="5" presetID="1" presetClass="entr" presetSubtype="0" fill="hold" grpId="0" nodeType="clickEffect">
-                                  <p:stCondLst>
-                                    <p:cond delay="0"/>
-                                  </p:stCondLst>
-                                  <p:childTnLst>
-                                    <p:set>
-                                      <p:cBhvr>
-                                        <p:cTn id="6" dur="1" fill="hold">
-                                          <p:stCondLst>
-                                            <p:cond delay="0"/>
-                                          </p:stCondLst>
-                                        </p:cTn>
-                                        <p:tgtEl>
-                                          <p:spTgt spid="3">
-                                            <p:txEl>
-                                              <p:pRg st="0" end="0"/>
-                                            </p:txEl>
-                                          </p:spTgt>
-                                        </p:tgtEl>
-                                        <p:attrNameLst>
-                                          <p:attrName>style.visibility</p:attrName>
-                                        </p:attrNameLst>
-                                      </p:cBhvr>
-                                      <p:to>
-                                        <p:strVal val="visible"/>
-                                      </p:to>
-                                    </p:set>
-                                  </p:childTnLst>
-                                </p:cTn>
-                              </p:par>
-                            </p:childTnLst>
-                          </p:cTn>
-                        </p:par>
-                      </p:childTnLst>
-                    </p:cTn>
-                  </p:par>
-                  <p:par>
-                    <p:cTn id="7" fill="hold">
-                      <p:stCondLst>
-                        <p:cond delay="indefinite"/>
-                      </p:stCondLst>
-                      <p:childTnLst>
-                        <p:par>
-                          <p:cTn id="8" fill="hold">
-                            <p:stCondLst>
-                              <p:cond delay="0"/>
-                            </p:stCondLst>
-                            <p:childTnLst>
-                              <p:par>
-                                <p:cTn id="9" presetID="1" presetClass="entr" presetSubtype="0" fill="hold" grpId="0" nodeType="clickEffect">
-                                  <p:stCondLst>
-                                    <p:cond delay="0"/>
-                                  </p:stCondLst>
-                                  <p:childTnLst>
-                                    <p:set>
-                                      <p:cBhvr>
-                                        <p:cTn id="10" dur="1" fill="hold">
-                                          <p:stCondLst>
-                                            <p:cond delay="0"/>
-                                          </p:stCondLst>
-                                        </p:cTn>
-                                        <p:tgtEl>
-                                          <p:spTgt spid="3">
-                                            <p:txEl>
-                                              <p:pRg st="1" end="1"/>
-                                            </p:txEl>
-                                          </p:spTgt>
-                                        </p:tgtEl>
-                                        <p:attrNameLst>
-                                          <p:attrName>style.visibility</p:attrName>
-                                        </p:attrNameLst>
-                                      </p:cBhvr>
-                                      <p:to>
-                                        <p:strVal val="visible"/>
-                                      </p:to>
-                                    </p:set>
-                                  </p:childTnLst>
-                                </p:cTn>
-                              </p:par>
-                            </p:childTnLst>
-                          </p:cTn>
-                        </p:par>
-                      </p:childTnLst>
-                    </p:cTn>
-                  </p:par>
-                  <p:par>
-                    <p:cTn id="11" fill="hold">
-                      <p:stCondLst>
-                        <p:cond delay="indefinite"/>
-                      </p:stCondLst>
-                      <p:childTnLst>
-                        <p:par>
-                          <p:cTn id="12" fill="hold">
-                            <p:stCondLst>
-                              <p:cond delay="0"/>
-                            </p:stCondLst>
-                            <p:childTnLst>
-                              <p:par>
-                                <p:cTn id="13" presetID="1" presetClass="entr" presetSubtype="0" fill="hold" grpId="0" nodeType="clickEffect">
-                                  <p:stCondLst>
-                                    <p:cond delay="0"/>
-                                  </p:stCondLst>
-                                  <p:childTnLst>
-                                    <p:set>
-                                      <p:cBhvr>
-                                        <p:cTn id="14" dur="1" fill="hold">
-                                          <p:stCondLst>
-                                            <p:cond delay="0"/>
-                                          </p:stCondLst>
-                                        </p:cTn>
-                                        <p:tgtEl>
-                                          <p:spTgt spid="3">
-                                            <p:txEl>
-                                              <p:pRg st="2" end="2"/>
-                                            </p:txEl>
-                                          </p:spTgt>
-                                        </p:tgtEl>
-                                        <p:attrNameLst>
-                                          <p:attrName>style.visibility</p:attrName>
-                                        </p:attrNameLst>
-                                      </p:cBhvr>
-                                      <p:to>
-                                        <p:strVal val="visible"/>
-                                      </p:to>
-                                    </p:set>
-                                  </p:childTnLst>
-                                </p:cTn>
-                              </p:par>
-                            </p:childTnLst>
-                          </p:cTn>
-                        </p:par>
-                      </p:childTnLst>
-                    </p:cTn>
-                  </p:par>
-                  <p:par>
-                    <p:cTn id="15" fill="hold">
-                      <p:stCondLst>
-                        <p:cond delay="indefinite"/>
-                      </p:stCondLst>
-                      <p:childTnLst>
-                        <p:par>
-                          <p:cTn id="16" fill="hold">
-                            <p:stCondLst>
-                              <p:cond delay="0"/>
-                            </p:stCondLst>
-                            <p:childTnLst>
-                              <p:par>
-                                <p:cTn id="17" presetID="1" presetClass="entr" presetSubtype="0" fill="hold" grpId="0" nodeType="clickEffect">
-                                  <p:stCondLst>
-                                    <p:cond delay="0"/>
-                                  </p:stCondLst>
-                                  <p:childTnLst>
-                                    <p:set>
-                                      <p:cBhvr>
-                                        <p:cTn id="18" dur="1" fill="hold">
-                                          <p:stCondLst>
-                                            <p:cond delay="0"/>
-                                          </p:stCondLst>
-                                        </p:cTn>
-                                        <p:tgtEl>
-                                          <p:spTgt spid="3">
-                                            <p:txEl>
-                                              <p:pRg st="3" end="3"/>
-                                            </p:txEl>
-                                          </p:spTgt>
-                                        </p:tgtEl>
-                                        <p:attrNameLst>
-                                          <p:attrName>style.visibility</p:attrName>
-                                        </p:attrNameLst>
-                                      </p:cBhvr>
-                                      <p:to>
-                                        <p:strVal val="visible"/>
-                                      </p:to>
-                                    </p:set>
-                                  </p:childTnLst>
-                                </p:cTn>
-                              </p:par>
-                            </p:childTnLst>
-                          </p:cTn>
-                        </p:par>
-                      </p:childTnLst>
-                    </p:cTn>
-                  </p:par>
-                </p:childTnLst>
-              </p:cTn>
-              <p:prevCondLst>
-                <p:cond evt="onPrev" delay="0">
-                  <p:tgtEl>
-                    <p:sldTgt/>
-                  </p:tgtEl>
-                </p:cond>
-              </p:prevCondLst>
-              <p:nextCondLst>
-                <p:cond evt="onNext" delay="0">
-                  <p:tgtEl>
-                    <p:sldTgt/>
-                  </p:tgtEl>
-                </p:cond>
-              </p:nextCondLst>
-            </p:seq>
-          </p:childTnLst>
-        </p:cTn>
-      </p:par>
-    </p:tnLst>
-    <p:bldLst>
-      <p:bldP spid="3" grpId="0" uiExpand="1" build="p"/>
-    </p:bldLst>
-  </p:timing>
-</p:sld>
-</file>
-
-<file path=ppt/slides/slide6.xml><?xml version="1.0" encoding="utf-8"?>
-<p:sld xmlns:a="http://schemas.openxmlformats.org/drawingml/2006/main" xmlns:r="http://schemas.openxmlformats.org/officeDocument/2006/relationships" xmlns:p="http://schemas.openxmlformats.org/presentationml/2006/main">
-  <p:cSld>
-    <p:spTree>
-      <p:nvGrpSpPr>
-        <p:cNvPr id="1" name=""/>
-        <p:cNvGrpSpPr/>
-        <p:nvPr/>
-      </p:nvGrpSpPr>
-      <p:grpSpPr>
-        <a:xfrm>
-          <a:off x="0" y="0"/>
-          <a:ext cx="0" cy="0"/>
-          <a:chOff x="0" y="0"/>
-          <a:chExt cx="0" cy="0"/>
-        </a:xfrm>
-      </p:grpSpPr>
-      <p:sp>
-        <p:nvSpPr>
-          <p:cNvPr id="3" name="Content Placeholder 2">
-            <a:extLst>
-              <a:ext uri="{FF2B5EF4-FFF2-40B4-BE49-F238E27FC236}">
-                <a16:creationId xmlns:a16="http://schemas.microsoft.com/office/drawing/2014/main" id="{372FA590-20E9-0368-85B4-90C26598F852}"/>
-              </a:ext>
-            </a:extLst>
-          </p:cNvPr>
-          <p:cNvSpPr>
-            <a:spLocks noGrp="1"/>
-          </p:cNvSpPr>
-          <p:nvPr>
-            <p:ph idx="1"/>
-          </p:nvPr>
-        </p:nvSpPr>
-        <p:spPr/>
-        <p:txBody>
-          <a:bodyPr/>
-          <a:lstStyle/>
-          <a:p>
-            <a:pPr lvl="0" indent="0" marL="0">
-              <a:spcBef>
-                <a:spcPts val="3000"/>
-              </a:spcBef>
-              <a:buNone/>
-            </a:pPr>
-            <a:r>
-              <a:rPr b="1"/>
-              <a:t>this is a level three headers</a:t>
-            </a:r>
-          </a:p>
-        </p:txBody>
-      </p:sp>
-      <p:sp>
-        <p:nvSpPr>
-          <p:cNvPr id="6" name="Slide Number Placeholder 5">
-            <a:extLst>
-              <a:ext uri="{FF2B5EF4-FFF2-40B4-BE49-F238E27FC236}">
-                <a16:creationId xmlns:a16="http://schemas.microsoft.com/office/drawing/2014/main" id="{5F33F24B-1A9E-2EAF-F2AB-89426454DEE9}"/>
-              </a:ext>
-            </a:extLst>
-          </p:cNvPr>
-          <p:cNvSpPr>
-            <a:spLocks noGrp="1"/>
-          </p:cNvSpPr>
-          <p:nvPr>
-            <p:ph idx="12" sz="quarter" type="sldNum"/>
-          </p:nvPr>
-        </p:nvSpPr>
-        <p:spPr>
-          <a:xfrm>
-            <a:off x="8610599" y="6356350"/>
-            <a:ext cx="3135001" cy="365125"/>
-          </a:xfrm>
-        </p:spPr>
-        <p:txBody>
-          <a:bodyPr/>
-          <a:lstStyle/>
-          <a:p>
-            <a:fld id="{7FEFBAB6-26D0-44D8-BD53-612461CE1ACC}" type="slidenum">
-              <a:rPr lang="de-DE" smtClean="0"/>
-              <a:t>‹#›</a:t>
-            </a:fld>
-            <a:endParaRPr lang="de-DE"/>
-          </a:p>
-        </p:txBody>
-      </p:sp>
-    </p:spTree>
-  </p:cSld>
-</p:sld>
-</file>
-
-<file path=ppt/slides/slide7.xml><?xml version="1.0" encoding="utf-8"?>
-<p:sld xmlns:a="http://schemas.openxmlformats.org/drawingml/2006/main" xmlns:r="http://schemas.openxmlformats.org/officeDocument/2006/relationships" xmlns:p="http://schemas.openxmlformats.org/presentationml/2006/main">
-  <p:cSld>
-    <p:spTree>
-      <p:nvGrpSpPr>
-        <p:cNvPr id="1" name=""/>
-        <p:cNvGrpSpPr/>
-        <p:nvPr/>
-      </p:nvGrpSpPr>
-      <p:grpSpPr>
-        <a:xfrm>
-          <a:off x="0" y="0"/>
-          <a:ext cx="0" cy="0"/>
-          <a:chOff x="0" y="0"/>
-          <a:chExt cx="0" cy="0"/>
-        </a:xfrm>
-      </p:grpSpPr>
-      <p:sp>
-        <p:nvSpPr>
-          <p:cNvPr id="2" name="Title 1">
-            <a:extLst>
-              <a:ext uri="{FF2B5EF4-FFF2-40B4-BE49-F238E27FC236}">
-                <a16:creationId xmlns:a16="http://schemas.microsoft.com/office/drawing/2014/main" id="{6BF04AE0-F94F-A586-34B8-68D9CAB6C6D1}"/>
-              </a:ext>
-            </a:extLst>
-          </p:cNvPr>
-          <p:cNvSpPr>
-            <a:spLocks noGrp="1"/>
-          </p:cNvSpPr>
-          <p:nvPr>
-            <p:ph type="title"/>
-          </p:nvPr>
-        </p:nvSpPr>
-        <p:spPr>
-          <a:xfrm>
-            <a:off x="2295524" y="432532"/>
-            <a:ext cx="9450077" cy="825501"/>
-          </a:xfrm>
-        </p:spPr>
-        <p:txBody>
-          <a:bodyPr/>
-          <a:lstStyle/>
-          <a:p>
-            <a:pPr lvl="0" indent="0" marL="0">
-              <a:buNone/>
-            </a:pPr>
-            <a:r>
-              <a:rPr/>
-              <a:t>Licence</a:t>
-            </a:r>
-          </a:p>
-        </p:txBody>
-      </p:sp>
-      <p:sp>
-        <p:nvSpPr>
-          <p:cNvPr id="3" name="Content Placeholder 2">
-            <a:extLst>
-              <a:ext uri="{FF2B5EF4-FFF2-40B4-BE49-F238E27FC236}">
-                <a16:creationId xmlns:a16="http://schemas.microsoft.com/office/drawing/2014/main" id="{372FA590-20E9-0368-85B4-90C26598F852}"/>
-              </a:ext>
-            </a:extLst>
-          </p:cNvPr>
-          <p:cNvSpPr>
-            <a:spLocks noGrp="1"/>
-          </p:cNvSpPr>
-          <p:nvPr>
-            <p:ph idx="1"/>
-          </p:nvPr>
-        </p:nvSpPr>
-        <p:spPr/>
-        <p:txBody>
-          <a:bodyPr/>
-          <a:lstStyle/>
-          <a:p>
-            <a:pPr lvl="0" indent="0" marL="0">
-              <a:buNone/>
-            </a:pPr>
-            <a:r>
-              <a:rPr/>
-              <a:t>This work was originally created by Pat Callahan and Dejana Damjanovic under a CC-BY-SA 4.0 </a:t>
-            </a:r>
-            <a:r>
-              <a:rPr>
-                <a:hlinkClick r:id="rId3"/>
-              </a:rPr>
-              <a:t>Creative Commons Attribution 4.0 International License</a:t>
-            </a:r>
-            <a:r>
-              <a:rPr/>
-              <a:t> and a CC0 1.0 </a:t>
-            </a:r>
-            <a:r>
-              <a:rPr>
-                <a:hlinkClick r:id="rId4"/>
-              </a:rPr>
-              <a:t>Creative Commons Universal</a:t>
-            </a:r>
-            <a:r>
-              <a:rPr/>
-              <a:t> licence for code snippets. It was subsequently adapted and revised by </a:t>
-            </a:r>
-            <a:r>
-              <a:rPr>
-                <a:hlinkClick r:id="rId5"/>
-              </a:rPr>
-              <a:t>Sarah von Grebmer zu Wolfsthurn</a:t>
-            </a:r>
-            <a:r>
-              <a:rPr/>
-              <a:t>. This current work by </a:t>
-            </a:r>
-            <a:r>
-              <a:rPr>
-                <a:hlinkClick r:id="rId6"/>
-              </a:rPr>
-              <a:t>Tejaswini Sharma</a:t>
-            </a:r>
-            <a:r>
-              <a:rPr/>
-              <a:t> and Sarah von Grebmer zu Wolfsthurn is licensed under a CC-BY-SA 4.0 </a:t>
-            </a:r>
-            <a:r>
-              <a:rPr>
-                <a:hlinkClick r:id="rId7"/>
-              </a:rPr>
-              <a:t>Creative Commons Attribution 4.0 International SA License</a:t>
-            </a:r>
-            <a:r>
-              <a:rPr/>
-              <a:t>. permits unrestricted re-use, distribution, and reproduction in any medium, provided the original work is properly cited. If you remix, transform, or build upon the material, you must distribute your contributions under the same license as the original. Code snippets are dedicated to the public domain and licenced under a CC0 1.0 </a:t>
-            </a:r>
-            <a:r>
-              <a:rPr>
-                <a:hlinkClick r:id="rId8"/>
-              </a:rPr>
-              <a:t>Creative Commons Universal Licence</a:t>
-            </a:r>
-            <a:r>
-              <a:rPr/>
-              <a:t>. You may use, modify, distribute, and sell the code snippets for any purpose, without permission or attribution. The code snippets are provided “as is”, without warranty of any kind.</a:t>
-            </a:r>
-          </a:p>
-        </p:txBody>
-      </p:sp>
-      <p:sp>
-        <p:nvSpPr>
-          <p:cNvPr id="6" name="Slide Number Placeholder 5">
-            <a:extLst>
-              <a:ext uri="{FF2B5EF4-FFF2-40B4-BE49-F238E27FC236}">
-                <a16:creationId xmlns:a16="http://schemas.microsoft.com/office/drawing/2014/main" id="{5F33F24B-1A9E-2EAF-F2AB-89426454DEE9}"/>
-              </a:ext>
-            </a:extLst>
-          </p:cNvPr>
-          <p:cNvSpPr>
-            <a:spLocks noGrp="1"/>
-          </p:cNvSpPr>
-          <p:nvPr>
-            <p:ph idx="12" sz="quarter" type="sldNum"/>
-          </p:nvPr>
-        </p:nvSpPr>
-        <p:spPr>
-          <a:xfrm>
-            <a:off x="8610599" y="6356350"/>
-            <a:ext cx="3135001" cy="365125"/>
-          </a:xfrm>
-        </p:spPr>
-        <p:txBody>
-          <a:bodyPr/>
-          <a:lstStyle/>
-          <a:p>
-            <a:fld id="{7FEFBAB6-26D0-44D8-BD53-612461CE1ACC}" type="slidenum">
-              <a:rPr lang="de-DE" smtClean="0"/>
-              <a:t>‹#›</a:t>
-            </a:fld>
-            <a:endParaRPr lang="de-DE"/>
-          </a:p>
-        </p:txBody>
-      </p:sp>
-    </p:spTree>
-  </p:cSld>
-</p:sld>
-</file>
-
-<file path=ppt/slides/slide8.xml><?xml version="1.0" encoding="utf-8"?>
-<p:sld xmlns:a="http://schemas.openxmlformats.org/drawingml/2006/main" xmlns:r="http://schemas.openxmlformats.org/officeDocument/2006/relationships" xmlns:p="http://schemas.openxmlformats.org/presentationml/2006/main">
-  <p:cSld>
-    <p:spTree>
-      <p:nvGrpSpPr>
-        <p:cNvPr id="1" name=""/>
-        <p:cNvGrpSpPr/>
-        <p:nvPr/>
-      </p:nvGrpSpPr>
-      <p:grpSpPr>
-        <a:xfrm>
-          <a:off x="0" y="0"/>
-          <a:ext cx="0" cy="0"/>
-          <a:chOff x="0" y="0"/>
-          <a:chExt cx="0" cy="0"/>
-        </a:xfrm>
-      </p:grpSpPr>
-      <p:sp>
-        <p:nvSpPr>
-          <p:cNvPr id="3" name="Content Placeholder 2">
-            <a:extLst>
-              <a:ext uri="{FF2B5EF4-FFF2-40B4-BE49-F238E27FC236}">
-                <a16:creationId xmlns:a16="http://schemas.microsoft.com/office/drawing/2014/main" id="{372FA590-20E9-0368-85B4-90C26598F852}"/>
-              </a:ext>
-            </a:extLst>
-          </p:cNvPr>
-          <p:cNvSpPr>
-            <a:spLocks noGrp="1"/>
-          </p:cNvSpPr>
-          <p:nvPr>
-            <p:ph idx="1"/>
-          </p:nvPr>
-        </p:nvSpPr>
-        <p:spPr/>
-        <p:txBody>
-          <a:bodyPr/>
-          <a:lstStyle/>
-          <a:p>
-            <a:pPr lvl="0" indent="0" marL="0">
-              <a:spcBef>
-                <a:spcPts val="3000"/>
-              </a:spcBef>
-              <a:buNone/>
-            </a:pPr>
-            <a:r>
-              <a:rPr b="1"/>
-              <a:t>Contribution statement</a:t>
-            </a:r>
-          </a:p>
-          <a:p>
-            <a:pPr lvl="0" indent="0" marL="0">
-              <a:buNone/>
-            </a:pPr>
-            <a:r>
-              <a:rPr b="1"/>
-              <a:t>Creator</a:t>
-            </a:r>
-            <a:r>
-              <a:rPr/>
-              <a:t>: Sharma, Tejaswini (</a:t>
-            </a:r>
-            <a:r>
-              <a:rPr>
-                <a:hlinkClick r:id="rId2"/>
-              </a:rPr>
-              <a:t>Orcid-ID: 00009-0000-0305-9751</a:t>
-            </a:r>
-            <a:r>
-              <a:rPr/>
-              <a:t>)</a:t>
-            </a:r>
-          </a:p>
-          <a:p>
-            <a:pPr lvl="0" indent="0" marL="0">
-              <a:buNone/>
-            </a:pPr>
-            <a:r>
-              <a:rPr b="1"/>
-              <a:t>Reviewer</a:t>
-            </a:r>
-            <a:r>
-              <a:rPr/>
-              <a:t>: Von Grebmer zu Wolfsthurn, Sarah (</a:t>
-            </a:r>
-            <a:r>
-              <a:rPr>
-                <a:hlinkClick r:id="rId3"/>
-              </a:rPr>
-              <a:t>Ordcid-ID: 0000-0002-6413-3895</a:t>
-            </a:r>
-            <a:r>
-              <a:rPr/>
-              <a:t>)</a:t>
-            </a:r>
-          </a:p>
-        </p:txBody>
-      </p:sp>
-      <p:sp>
-        <p:nvSpPr>
-          <p:cNvPr id="6" name="Slide Number Placeholder 5">
-            <a:extLst>
-              <a:ext uri="{FF2B5EF4-FFF2-40B4-BE49-F238E27FC236}">
-                <a16:creationId xmlns:a16="http://schemas.microsoft.com/office/drawing/2014/main" id="{5F33F24B-1A9E-2EAF-F2AB-89426454DEE9}"/>
-              </a:ext>
-            </a:extLst>
-          </p:cNvPr>
-          <p:cNvSpPr>
-            <a:spLocks noGrp="1"/>
-          </p:cNvSpPr>
-          <p:nvPr>
-            <p:ph idx="12" sz="quarter" type="sldNum"/>
-          </p:nvPr>
-        </p:nvSpPr>
-        <p:spPr>
-          <a:xfrm>
-            <a:off x="8610599" y="6356350"/>
-            <a:ext cx="3135001" cy="365125"/>
-          </a:xfrm>
-        </p:spPr>
-        <p:txBody>
-          <a:bodyPr/>
-          <a:lstStyle/>
-          <a:p>
-            <a:fld id="{7FEFBAB6-26D0-44D8-BD53-612461CE1ACC}" type="slidenum">
-              <a:rPr lang="de-DE" smtClean="0"/>
-              <a:t>‹#›</a:t>
-            </a:fld>
-            <a:endParaRPr lang="de-DE"/>
-          </a:p>
-        </p:txBody>
-      </p:sp>
-    </p:spTree>
-  </p:cSld>
-</p:sld>
-</file>
-
-<file path=ppt/slides/slide9.xml><?xml version="1.0" encoding="utf-8"?>
+<file path=ppt/slides/slide4.xml><?xml version="1.0" encoding="utf-8"?>
 <p:sld xmlns:a="http://schemas.openxmlformats.org/drawingml/2006/main" xmlns:r="http://schemas.openxmlformats.org/officeDocument/2006/relationships" xmlns:p="http://schemas.openxmlformats.org/presentationml/2006/main">
   <p:cSld>
     <p:spTree>
@@ -20307,6 +18121,1361 @@
       </p:sp>
     </p:spTree>
   </p:cSld>
+</p:sld>
+</file>
+
+<file path=ppt/slides/slide40.xml><?xml version="1.0" encoding="utf-8"?>
+<p:sld xmlns:a="http://schemas.openxmlformats.org/drawingml/2006/main" xmlns:r="http://schemas.openxmlformats.org/officeDocument/2006/relationships" xmlns:p="http://schemas.openxmlformats.org/presentationml/2006/main">
+  <p:cSld>
+    <p:spTree>
+      <p:nvGrpSpPr>
+        <p:cNvPr id="1" name=""/>
+        <p:cNvGrpSpPr/>
+        <p:nvPr/>
+      </p:nvGrpSpPr>
+      <p:grpSpPr>
+        <a:xfrm>
+          <a:off x="0" y="0"/>
+          <a:ext cx="0" cy="0"/>
+          <a:chOff x="0" y="0"/>
+          <a:chExt cx="0" cy="0"/>
+        </a:xfrm>
+      </p:grpSpPr>
+      <p:sp>
+        <p:nvSpPr>
+          <p:cNvPr id="2" name="Title 1">
+            <a:extLst>
+              <a:ext uri="{FF2B5EF4-FFF2-40B4-BE49-F238E27FC236}">
+                <a16:creationId xmlns:a16="http://schemas.microsoft.com/office/drawing/2014/main" id="{6BF04AE0-F94F-A586-34B8-68D9CAB6C6D1}"/>
+              </a:ext>
+            </a:extLst>
+          </p:cNvPr>
+          <p:cNvSpPr>
+            <a:spLocks noGrp="1"/>
+          </p:cNvSpPr>
+          <p:nvPr>
+            <p:ph type="title"/>
+          </p:nvPr>
+        </p:nvSpPr>
+        <p:spPr>
+          <a:xfrm>
+            <a:off x="2295524" y="432532"/>
+            <a:ext cx="9450077" cy="825501"/>
+          </a:xfrm>
+        </p:spPr>
+        <p:txBody>
+          <a:bodyPr/>
+          <a:lstStyle/>
+          <a:p>
+            <a:pPr lvl="0" indent="0" marL="0">
+              <a:buNone/>
+            </a:pPr>
+            <a:r>
+              <a:rPr/>
+              <a:t>CREDiT Contribution Statement - TO DO</a:t>
+            </a:r>
+          </a:p>
+        </p:txBody>
+      </p:sp>
+      <p:sp>
+        <p:nvSpPr>
+          <p:cNvPr id="3" name="Content Placeholder 2">
+            <a:extLst>
+              <a:ext uri="{FF2B5EF4-FFF2-40B4-BE49-F238E27FC236}">
+                <a16:creationId xmlns:a16="http://schemas.microsoft.com/office/drawing/2014/main" id="{372FA590-20E9-0368-85B4-90C26598F852}"/>
+              </a:ext>
+            </a:extLst>
+          </p:cNvPr>
+          <p:cNvSpPr>
+            <a:spLocks noGrp="1"/>
+          </p:cNvSpPr>
+          <p:nvPr>
+            <p:ph idx="1"/>
+          </p:nvPr>
+        </p:nvSpPr>
+        <p:spPr/>
+        <p:txBody>
+          <a:bodyPr/>
+          <a:lstStyle/>
+          <a:p>
+            <a:pPr lvl="0" indent="0" marL="0">
+              <a:buNone/>
+            </a:pPr>
+            <a:r>
+              <a:rPr/>
+              <a:t>Possible roles using the CRediT contribition system or the Zenodo Contribution System:</a:t>
+            </a:r>
+          </a:p>
+          <a:p>
+            <a:pPr lvl="0" indent="0" marL="0">
+              <a:buNone/>
+            </a:pPr>
+            <a:r>
+              <a:rPr b="1"/>
+              <a:t>Name main content creator</a:t>
+            </a:r>
+            <a:r>
+              <a:rPr/>
+              <a:t>: Conceptualization, Software, Writing - Original Draft, Visualization. </a:t>
+            </a:r>
+            <a:r>
+              <a:rPr b="1"/>
+              <a:t>Sara Lil Middleton</a:t>
+            </a:r>
+            <a:r>
+              <a:rPr/>
+              <a:t>: Writing - Review &amp; Editing, Supervision. </a:t>
+            </a:r>
+            <a:r>
+              <a:rPr b="1"/>
+              <a:t>Sarah von Grebmer zu Wolfsthurn</a:t>
+            </a:r>
+            <a:r>
+              <a:rPr/>
+              <a:t>: Conceptualisation, Writing - Review &amp; Editing, Supervision, Project Administration, Validation.</a:t>
+            </a:r>
+          </a:p>
+        </p:txBody>
+      </p:sp>
+      <p:sp>
+        <p:nvSpPr>
+          <p:cNvPr id="6" name="Slide Number Placeholder 5">
+            <a:extLst>
+              <a:ext uri="{FF2B5EF4-FFF2-40B4-BE49-F238E27FC236}">
+                <a16:creationId xmlns:a16="http://schemas.microsoft.com/office/drawing/2014/main" id="{5F33F24B-1A9E-2EAF-F2AB-89426454DEE9}"/>
+              </a:ext>
+            </a:extLst>
+          </p:cNvPr>
+          <p:cNvSpPr>
+            <a:spLocks noGrp="1"/>
+          </p:cNvSpPr>
+          <p:nvPr>
+            <p:ph idx="12" sz="quarter" type="sldNum"/>
+          </p:nvPr>
+        </p:nvSpPr>
+        <p:spPr>
+          <a:xfrm>
+            <a:off x="8610599" y="6356350"/>
+            <a:ext cx="3135001" cy="365125"/>
+          </a:xfrm>
+        </p:spPr>
+        <p:txBody>
+          <a:bodyPr/>
+          <a:lstStyle/>
+          <a:p>
+            <a:fld id="{7FEFBAB6-26D0-44D8-BD53-612461CE1ACC}" type="slidenum">
+              <a:rPr lang="de-DE" smtClean="0"/>
+              <a:t>‹#›</a:t>
+            </a:fld>
+            <a:endParaRPr lang="de-DE"/>
+          </a:p>
+        </p:txBody>
+      </p:sp>
+    </p:spTree>
+  </p:cSld>
+</p:sld>
+</file>
+
+<file path=ppt/slides/slide5.xml><?xml version="1.0" encoding="utf-8"?>
+<p:sld xmlns:a="http://schemas.openxmlformats.org/drawingml/2006/main" xmlns:r="http://schemas.openxmlformats.org/officeDocument/2006/relationships" xmlns:p="http://schemas.openxmlformats.org/presentationml/2006/main">
+  <p:cSld>
+    <p:spTree>
+      <p:nvGrpSpPr>
+        <p:cNvPr id="1" name=""/>
+        <p:cNvGrpSpPr/>
+        <p:nvPr/>
+      </p:nvGrpSpPr>
+      <p:grpSpPr>
+        <a:xfrm>
+          <a:off x="0" y="0"/>
+          <a:ext cx="0" cy="0"/>
+          <a:chOff x="0" y="0"/>
+          <a:chExt cx="0" cy="0"/>
+        </a:xfrm>
+      </p:grpSpPr>
+      <p:sp>
+        <p:nvSpPr>
+          <p:cNvPr id="2" name="Title 1">
+            <a:extLst>
+              <a:ext uri="{FF2B5EF4-FFF2-40B4-BE49-F238E27FC236}">
+                <a16:creationId xmlns:a16="http://schemas.microsoft.com/office/drawing/2014/main" id="{12131F71-CF7E-3DA4-7847-3ACEC01625C3}"/>
+              </a:ext>
+            </a:extLst>
+          </p:cNvPr>
+          <p:cNvSpPr>
+            <a:spLocks noGrp="1"/>
+          </p:cNvSpPr>
+          <p:nvPr>
+            <p:ph type="title"/>
+          </p:nvPr>
+        </p:nvSpPr>
+        <p:spPr>
+          <a:xfrm>
+            <a:off x="446399" y="1392999"/>
+            <a:ext cx="4735201" cy="996952"/>
+          </a:xfrm>
+        </p:spPr>
+        <p:txBody>
+          <a:bodyPr/>
+          <a:lstStyle/>
+          <a:p>
+            <a:pPr lvl="0" indent="0" marL="0">
+              <a:buNone/>
+            </a:pPr>
+            <a:r>
+              <a:rPr/>
+              <a:t>Prerequisites (cont.)</a:t>
+            </a:r>
+          </a:p>
+        </p:txBody>
+      </p:sp>
+      <p:sp>
+        <p:nvSpPr>
+          <p:cNvPr id="4" name="Text Placeholder 3">
+            <a:extLst>
+              <a:ext uri="{FF2B5EF4-FFF2-40B4-BE49-F238E27FC236}">
+                <a16:creationId xmlns:a16="http://schemas.microsoft.com/office/drawing/2014/main" id="{7381D285-C44D-D095-90F1-6D3CF7B2C883}"/>
+              </a:ext>
+            </a:extLst>
+          </p:cNvPr>
+          <p:cNvSpPr>
+            <a:spLocks noGrp="1"/>
+          </p:cNvSpPr>
+          <p:nvPr>
+            <p:ph idx="2" sz="half" type="body"/>
+          </p:nvPr>
+        </p:nvSpPr>
+        <p:spPr/>
+        <p:txBody>
+          <a:bodyPr/>
+          <a:lstStyle/>
+          <a:p>
+            <a:pPr lvl="0"/>
+            <a:r>
+              <a:rPr/>
+              <a:t>Familiarity with the concept of </a:t>
+            </a:r>
+            <a:r>
+              <a:rPr b="1"/>
+              <a:t>literature review</a:t>
+            </a:r>
+            <a:r>
+              <a:rPr/>
+              <a:t>; how and where to access scientific papers, such as </a:t>
+            </a:r>
+            <a:r>
+              <a:rPr i="1"/>
+              <a:t>Google Scholar</a:t>
+            </a:r>
+            <a:r>
+              <a:rPr/>
+              <a:t>.</a:t>
+            </a:r>
+          </a:p>
+        </p:txBody>
+      </p:sp>
+      <p:pic>
+        <p:nvPicPr>
+          <p:cNvPr descr="images/GoogleScholar.png" id="0" name="Picture 1"/>
+          <p:cNvPicPr>
+            <a:picLocks noGrp="1" noChangeAspect="1"/>
+          </p:cNvPicPr>
+          <p:nvPr/>
+        </p:nvPicPr>
+        <p:blipFill>
+          <a:blip r:embed="rId3"/>
+          <a:stretch>
+            <a:fillRect/>
+          </a:stretch>
+        </p:blipFill>
+        <p:spPr bwMode="auto">
+          <a:xfrm>
+            <a:off x="5372100" y="1892300"/>
+            <a:ext cx="6362700" cy="3810000"/>
+          </a:xfrm>
+          <a:prstGeom prst="rect">
+            <a:avLst/>
+          </a:prstGeom>
+          <a:noFill/>
+          <a:ln w="9525">
+            <a:noFill/>
+            <a:headEnd/>
+            <a:tailEnd/>
+          </a:ln>
+        </p:spPr>
+      </p:pic>
+      <p:sp>
+        <p:nvSpPr>
+          <p:cNvPr id="7" name="Slide Number Placeholder 6">
+            <a:extLst>
+              <a:ext uri="{FF2B5EF4-FFF2-40B4-BE49-F238E27FC236}">
+                <a16:creationId xmlns:a16="http://schemas.microsoft.com/office/drawing/2014/main" id="{7EC0C6E5-A864-8D29-B45D-21E23026496C}"/>
+              </a:ext>
+            </a:extLst>
+          </p:cNvPr>
+          <p:cNvSpPr>
+            <a:spLocks noGrp="1"/>
+          </p:cNvSpPr>
+          <p:nvPr>
+            <p:ph idx="12" sz="quarter" type="sldNum"/>
+          </p:nvPr>
+        </p:nvSpPr>
+        <p:spPr>
+          <a:xfrm>
+            <a:off x="8610600" y="6356350"/>
+            <a:ext cx="3135000" cy="365125"/>
+          </a:xfrm>
+        </p:spPr>
+        <p:txBody>
+          <a:bodyPr/>
+          <a:lstStyle/>
+          <a:p>
+            <a:fld id="{7FEFBAB6-26D0-44D8-BD53-612461CE1ACC}" type="slidenum">
+              <a:rPr lang="de-DE" smtClean="0"/>
+              <a:t>‹#›</a:t>
+            </a:fld>
+            <a:endParaRPr lang="de-DE"/>
+          </a:p>
+        </p:txBody>
+      </p:sp>
+    </p:spTree>
+  </p:cSld>
+  <p:timing>
+    <p:tnLst>
+      <p:par>
+        <p:cTn id="1" dur="indefinite" restart="never" nodeType="tmRoot">
+          <p:childTnLst>
+            <p:seq concurrent="1" nextAc="seek">
+              <p:cTn id="2" dur="indefinite" nodeType="mainSeq">
+                <p:childTnLst>
+                  <p:par>
+                    <p:cTn id="3" fill="hold">
+                      <p:stCondLst>
+                        <p:cond delay="indefinite"/>
+                      </p:stCondLst>
+                      <p:childTnLst>
+                        <p:par>
+                          <p:cTn id="4" fill="hold">
+                            <p:stCondLst>
+                              <p:cond delay="0"/>
+                            </p:stCondLst>
+                            <p:childTnLst>
+                              <p:par>
+                                <p:cTn id="5" presetID="1" presetClass="entr" presetSubtype="0" fill="hold" grpId="0" nodeType="clickEffect">
+                                  <p:stCondLst>
+                                    <p:cond delay="0"/>
+                                  </p:stCondLst>
+                                  <p:childTnLst>
+                                    <p:set>
+                                      <p:cBhvr>
+                                        <p:cTn id="6" dur="1" fill="hold">
+                                          <p:stCondLst>
+                                            <p:cond delay="0"/>
+                                          </p:stCondLst>
+                                        </p:cTn>
+                                        <p:tgtEl>
+                                          <p:spTgt spid="4">
+                                            <p:txEl>
+                                              <p:pRg st="0" end="0"/>
+                                            </p:txEl>
+                                          </p:spTgt>
+                                        </p:tgtEl>
+                                        <p:attrNameLst>
+                                          <p:attrName>style.visibility</p:attrName>
+                                        </p:attrNameLst>
+                                      </p:cBhvr>
+                                      <p:to>
+                                        <p:strVal val="visible"/>
+                                      </p:to>
+                                    </p:set>
+                                  </p:childTnLst>
+                                </p:cTn>
+                              </p:par>
+                            </p:childTnLst>
+                          </p:cTn>
+                        </p:par>
+                      </p:childTnLst>
+                    </p:cTn>
+                  </p:par>
+                </p:childTnLst>
+              </p:cTn>
+              <p:prevCondLst>
+                <p:cond evt="onPrev" delay="0">
+                  <p:tgtEl>
+                    <p:sldTgt/>
+                  </p:tgtEl>
+                </p:cond>
+              </p:prevCondLst>
+              <p:nextCondLst>
+                <p:cond evt="onNext" delay="0">
+                  <p:tgtEl>
+                    <p:sldTgt/>
+                  </p:tgtEl>
+                </p:cond>
+              </p:nextCondLst>
+            </p:seq>
+          </p:childTnLst>
+        </p:cTn>
+      </p:par>
+    </p:tnLst>
+    <p:bldLst>
+      <p:bldP spid="4" grpId="0" uiExpand="1" build="p"/>
+    </p:bldLst>
+  </p:timing>
+</p:sld>
+</file>
+
+<file path=ppt/slides/slide6.xml><?xml version="1.0" encoding="utf-8"?>
+<p:sld xmlns:a="http://schemas.openxmlformats.org/drawingml/2006/main" xmlns:r="http://schemas.openxmlformats.org/officeDocument/2006/relationships" xmlns:p="http://schemas.openxmlformats.org/presentationml/2006/main">
+  <p:cSld>
+    <p:spTree>
+      <p:nvGrpSpPr>
+        <p:cNvPr id="1" name=""/>
+        <p:cNvGrpSpPr/>
+        <p:nvPr/>
+      </p:nvGrpSpPr>
+      <p:grpSpPr>
+        <a:xfrm>
+          <a:off x="0" y="0"/>
+          <a:ext cx="0" cy="0"/>
+          <a:chOff x="0" y="0"/>
+          <a:chExt cx="0" cy="0"/>
+        </a:xfrm>
+      </p:grpSpPr>
+      <p:sp>
+        <p:nvSpPr>
+          <p:cNvPr id="2" name="Title 1">
+            <a:extLst>
+              <a:ext uri="{FF2B5EF4-FFF2-40B4-BE49-F238E27FC236}">
+                <a16:creationId xmlns:a16="http://schemas.microsoft.com/office/drawing/2014/main" id="{6BF04AE0-F94F-A586-34B8-68D9CAB6C6D1}"/>
+              </a:ext>
+            </a:extLst>
+          </p:cNvPr>
+          <p:cNvSpPr>
+            <a:spLocks noGrp="1"/>
+          </p:cNvSpPr>
+          <p:nvPr>
+            <p:ph type="title"/>
+          </p:nvPr>
+        </p:nvSpPr>
+        <p:spPr>
+          <a:xfrm>
+            <a:off x="2295524" y="432532"/>
+            <a:ext cx="9450077" cy="825501"/>
+          </a:xfrm>
+        </p:spPr>
+        <p:txBody>
+          <a:bodyPr/>
+          <a:lstStyle/>
+          <a:p>
+            <a:pPr lvl="0" indent="0" marL="0">
+              <a:buNone/>
+            </a:pPr>
+            <a:r>
+              <a:rPr/>
+              <a:t>Questions from the previous submodule?</a:t>
+            </a:r>
+          </a:p>
+        </p:txBody>
+      </p:sp>
+      <p:sp>
+        <p:nvSpPr>
+          <p:cNvPr id="6" name="Slide Number Placeholder 5">
+            <a:extLst>
+              <a:ext uri="{FF2B5EF4-FFF2-40B4-BE49-F238E27FC236}">
+                <a16:creationId xmlns:a16="http://schemas.microsoft.com/office/drawing/2014/main" id="{5F33F24B-1A9E-2EAF-F2AB-89426454DEE9}"/>
+              </a:ext>
+            </a:extLst>
+          </p:cNvPr>
+          <p:cNvSpPr>
+            <a:spLocks noGrp="1"/>
+          </p:cNvSpPr>
+          <p:nvPr>
+            <p:ph idx="12" sz="quarter" type="sldNum"/>
+          </p:nvPr>
+        </p:nvSpPr>
+        <p:spPr>
+          <a:xfrm>
+            <a:off x="8610599" y="6356350"/>
+            <a:ext cx="3135001" cy="365125"/>
+          </a:xfrm>
+        </p:spPr>
+        <p:txBody>
+          <a:bodyPr/>
+          <a:lstStyle/>
+          <a:p>
+            <a:fld id="{7FEFBAB6-26D0-44D8-BD53-612461CE1ACC}" type="slidenum">
+              <a:rPr lang="de-DE" smtClean="0"/>
+              <a:t>‹#›</a:t>
+            </a:fld>
+            <a:endParaRPr lang="de-DE"/>
+          </a:p>
+        </p:txBody>
+      </p:sp>
+    </p:spTree>
+  </p:cSld>
+</p:sld>
+</file>
+
+<file path=ppt/slides/slide7.xml><?xml version="1.0" encoding="utf-8"?>
+<p:sld xmlns:a="http://schemas.openxmlformats.org/drawingml/2006/main" xmlns:r="http://schemas.openxmlformats.org/officeDocument/2006/relationships" xmlns:p="http://schemas.openxmlformats.org/presentationml/2006/main">
+  <p:cSld>
+    <p:spTree>
+      <p:nvGrpSpPr>
+        <p:cNvPr id="1" name=""/>
+        <p:cNvGrpSpPr/>
+        <p:nvPr/>
+      </p:nvGrpSpPr>
+      <p:grpSpPr>
+        <a:xfrm>
+          <a:off x="0" y="0"/>
+          <a:ext cx="0" cy="0"/>
+          <a:chOff x="0" y="0"/>
+          <a:chExt cx="0" cy="0"/>
+        </a:xfrm>
+      </p:grpSpPr>
+      <p:sp>
+        <p:nvSpPr>
+          <p:cNvPr id="2" name="Title 1">
+            <a:extLst>
+              <a:ext uri="{FF2B5EF4-FFF2-40B4-BE49-F238E27FC236}">
+                <a16:creationId xmlns:a16="http://schemas.microsoft.com/office/drawing/2014/main" id="{6BF04AE0-F94F-A586-34B8-68D9CAB6C6D1}"/>
+              </a:ext>
+            </a:extLst>
+          </p:cNvPr>
+          <p:cNvSpPr>
+            <a:spLocks noGrp="1"/>
+          </p:cNvSpPr>
+          <p:nvPr>
+            <p:ph type="title"/>
+          </p:nvPr>
+        </p:nvSpPr>
+        <p:spPr>
+          <a:xfrm>
+            <a:off x="2295524" y="432532"/>
+            <a:ext cx="9450077" cy="825501"/>
+          </a:xfrm>
+        </p:spPr>
+        <p:txBody>
+          <a:bodyPr/>
+          <a:lstStyle/>
+          <a:p>
+            <a:pPr lvl="0" indent="0" marL="0">
+              <a:buNone/>
+            </a:pPr>
+            <a:r>
+              <a:rPr/>
+              <a:t>Before we start: Survey time!</a:t>
+            </a:r>
+          </a:p>
+        </p:txBody>
+      </p:sp>
+      <p:sp>
+        <p:nvSpPr>
+          <p:cNvPr id="6" name="Slide Number Placeholder 5">
+            <a:extLst>
+              <a:ext uri="{FF2B5EF4-FFF2-40B4-BE49-F238E27FC236}">
+                <a16:creationId xmlns:a16="http://schemas.microsoft.com/office/drawing/2014/main" id="{5F33F24B-1A9E-2EAF-F2AB-89426454DEE9}"/>
+              </a:ext>
+            </a:extLst>
+          </p:cNvPr>
+          <p:cNvSpPr>
+            <a:spLocks noGrp="1"/>
+          </p:cNvSpPr>
+          <p:nvPr>
+            <p:ph idx="12" sz="quarter" type="sldNum"/>
+          </p:nvPr>
+        </p:nvSpPr>
+        <p:spPr>
+          <a:xfrm>
+            <a:off x="8610599" y="6356350"/>
+            <a:ext cx="3135001" cy="365125"/>
+          </a:xfrm>
+        </p:spPr>
+        <p:txBody>
+          <a:bodyPr/>
+          <a:lstStyle/>
+          <a:p>
+            <a:fld id="{7FEFBAB6-26D0-44D8-BD53-612461CE1ACC}" type="slidenum">
+              <a:rPr lang="de-DE" smtClean="0"/>
+              <a:t>‹#›</a:t>
+            </a:fld>
+            <a:endParaRPr lang="de-DE"/>
+          </a:p>
+        </p:txBody>
+      </p:sp>
+    </p:spTree>
+  </p:cSld>
+</p:sld>
+</file>
+
+<file path=ppt/slides/slide8.xml><?xml version="1.0" encoding="utf-8"?>
+<p:sld xmlns:a="http://schemas.openxmlformats.org/drawingml/2006/main" xmlns:r="http://schemas.openxmlformats.org/officeDocument/2006/relationships" xmlns:p="http://schemas.openxmlformats.org/presentationml/2006/main">
+  <p:cSld>
+    <p:spTree>
+      <p:nvGrpSpPr>
+        <p:cNvPr id="1" name=""/>
+        <p:cNvGrpSpPr/>
+        <p:nvPr/>
+      </p:nvGrpSpPr>
+      <p:grpSpPr>
+        <a:xfrm>
+          <a:off x="0" y="0"/>
+          <a:ext cx="0" cy="0"/>
+          <a:chOff x="0" y="0"/>
+          <a:chExt cx="0" cy="0"/>
+        </a:xfrm>
+      </p:grpSpPr>
+      <p:sp>
+        <p:nvSpPr>
+          <p:cNvPr id="3" name="Content Placeholder 2">
+            <a:extLst>
+              <a:ext uri="{FF2B5EF4-FFF2-40B4-BE49-F238E27FC236}">
+                <a16:creationId xmlns:a16="http://schemas.microsoft.com/office/drawing/2014/main" id="{372FA590-20E9-0368-85B4-90C26598F852}"/>
+              </a:ext>
+            </a:extLst>
+          </p:cNvPr>
+          <p:cNvSpPr>
+            <a:spLocks noGrp="1"/>
+          </p:cNvSpPr>
+          <p:nvPr>
+            <p:ph idx="1"/>
+          </p:nvPr>
+        </p:nvSpPr>
+        <p:spPr/>
+        <p:txBody>
+          <a:bodyPr/>
+          <a:lstStyle/>
+          <a:p>
+            <a:pPr lvl="0" indent="0" marL="0">
+              <a:buNone/>
+            </a:pPr>
+            <a:r>
+              <a:rPr b="1"/>
+              <a:t>What is your level of familiarity with citing and referencing scientific papers?</a:t>
+            </a:r>
+          </a:p>
+          <a:p>
+            <a:pPr lvl="0" indent="-457200" marL="457200">
+              <a:buAutoNum type="alphaLcPeriod"/>
+            </a:pPr>
+            <a:r>
+              <a:rPr/>
+              <a:t>I have never heard of it before.</a:t>
+            </a:r>
+          </a:p>
+          <a:p>
+            <a:pPr lvl="0" indent="-457200" marL="457200">
+              <a:buAutoNum type="alphaLcPeriod"/>
+            </a:pPr>
+            <a:r>
+              <a:rPr/>
+              <a:t>I have heard of it but have never worked with it.</a:t>
+            </a:r>
+          </a:p>
+          <a:p>
+            <a:pPr lvl="0" indent="-457200" marL="457200">
+              <a:buAutoNum type="alphaLcPeriod"/>
+            </a:pPr>
+            <a:r>
+              <a:rPr/>
+              <a:t>I have basic understanding and experience with it.</a:t>
+            </a:r>
+          </a:p>
+          <a:p>
+            <a:pPr lvl="0" indent="-457200" marL="457200">
+              <a:buAutoNum type="alphaLcPeriod"/>
+            </a:pPr>
+            <a:r>
+              <a:rPr/>
+              <a:t>I am very familiar and have worked with it extensively.</a:t>
+            </a:r>
+          </a:p>
+        </p:txBody>
+      </p:sp>
+      <p:sp>
+        <p:nvSpPr>
+          <p:cNvPr id="6" name="Slide Number Placeholder 5">
+            <a:extLst>
+              <a:ext uri="{FF2B5EF4-FFF2-40B4-BE49-F238E27FC236}">
+                <a16:creationId xmlns:a16="http://schemas.microsoft.com/office/drawing/2014/main" id="{5F33F24B-1A9E-2EAF-F2AB-89426454DEE9}"/>
+              </a:ext>
+            </a:extLst>
+          </p:cNvPr>
+          <p:cNvSpPr>
+            <a:spLocks noGrp="1"/>
+          </p:cNvSpPr>
+          <p:nvPr>
+            <p:ph idx="12" sz="quarter" type="sldNum"/>
+          </p:nvPr>
+        </p:nvSpPr>
+        <p:spPr>
+          <a:xfrm>
+            <a:off x="8610599" y="6356350"/>
+            <a:ext cx="3135001" cy="365125"/>
+          </a:xfrm>
+        </p:spPr>
+        <p:txBody>
+          <a:bodyPr/>
+          <a:lstStyle/>
+          <a:p>
+            <a:fld id="{7FEFBAB6-26D0-44D8-BD53-612461CE1ACC}" type="slidenum">
+              <a:rPr lang="de-DE" smtClean="0"/>
+              <a:t>‹#›</a:t>
+            </a:fld>
+            <a:endParaRPr lang="de-DE"/>
+          </a:p>
+        </p:txBody>
+      </p:sp>
+    </p:spTree>
+  </p:cSld>
+  <p:timing>
+    <p:tnLst>
+      <p:par>
+        <p:cTn id="1" dur="indefinite" restart="never" nodeType="tmRoot">
+          <p:childTnLst>
+            <p:seq concurrent="1" nextAc="seek">
+              <p:cTn id="2" dur="indefinite" nodeType="mainSeq">
+                <p:childTnLst>
+                  <p:par>
+                    <p:cTn id="3" fill="hold">
+                      <p:stCondLst>
+                        <p:cond delay="indefinite"/>
+                      </p:stCondLst>
+                      <p:childTnLst>
+                        <p:par>
+                          <p:cTn id="4" fill="hold">
+                            <p:stCondLst>
+                              <p:cond delay="0"/>
+                            </p:stCondLst>
+                            <p:childTnLst>
+                              <p:par>
+                                <p:cTn id="5" presetID="1" presetClass="entr" presetSubtype="0" fill="hold" grpId="0" nodeType="clickEffect">
+                                  <p:stCondLst>
+                                    <p:cond delay="0"/>
+                                  </p:stCondLst>
+                                  <p:childTnLst>
+                                    <p:set>
+                                      <p:cBhvr>
+                                        <p:cTn id="6" dur="1" fill="hold">
+                                          <p:stCondLst>
+                                            <p:cond delay="0"/>
+                                          </p:stCondLst>
+                                        </p:cTn>
+                                        <p:tgtEl>
+                                          <p:spTgt spid="3">
+                                            <p:txEl>
+                                              <p:pRg st="1" end="1"/>
+                                            </p:txEl>
+                                          </p:spTgt>
+                                        </p:tgtEl>
+                                        <p:attrNameLst>
+                                          <p:attrName>style.visibility</p:attrName>
+                                        </p:attrNameLst>
+                                      </p:cBhvr>
+                                      <p:to>
+                                        <p:strVal val="visible"/>
+                                      </p:to>
+                                    </p:set>
+                                  </p:childTnLst>
+                                </p:cTn>
+                              </p:par>
+                            </p:childTnLst>
+                          </p:cTn>
+                        </p:par>
+                      </p:childTnLst>
+                    </p:cTn>
+                  </p:par>
+                  <p:par>
+                    <p:cTn id="7" fill="hold">
+                      <p:stCondLst>
+                        <p:cond delay="indefinite"/>
+                      </p:stCondLst>
+                      <p:childTnLst>
+                        <p:par>
+                          <p:cTn id="8" fill="hold">
+                            <p:stCondLst>
+                              <p:cond delay="0"/>
+                            </p:stCondLst>
+                            <p:childTnLst>
+                              <p:par>
+                                <p:cTn id="9" presetID="1" presetClass="entr" presetSubtype="0" fill="hold" grpId="0" nodeType="clickEffect">
+                                  <p:stCondLst>
+                                    <p:cond delay="0"/>
+                                  </p:stCondLst>
+                                  <p:childTnLst>
+                                    <p:set>
+                                      <p:cBhvr>
+                                        <p:cTn id="10" dur="1" fill="hold">
+                                          <p:stCondLst>
+                                            <p:cond delay="0"/>
+                                          </p:stCondLst>
+                                        </p:cTn>
+                                        <p:tgtEl>
+                                          <p:spTgt spid="3">
+                                            <p:txEl>
+                                              <p:pRg st="2" end="2"/>
+                                            </p:txEl>
+                                          </p:spTgt>
+                                        </p:tgtEl>
+                                        <p:attrNameLst>
+                                          <p:attrName>style.visibility</p:attrName>
+                                        </p:attrNameLst>
+                                      </p:cBhvr>
+                                      <p:to>
+                                        <p:strVal val="visible"/>
+                                      </p:to>
+                                    </p:set>
+                                  </p:childTnLst>
+                                </p:cTn>
+                              </p:par>
+                            </p:childTnLst>
+                          </p:cTn>
+                        </p:par>
+                      </p:childTnLst>
+                    </p:cTn>
+                  </p:par>
+                  <p:par>
+                    <p:cTn id="11" fill="hold">
+                      <p:stCondLst>
+                        <p:cond delay="indefinite"/>
+                      </p:stCondLst>
+                      <p:childTnLst>
+                        <p:par>
+                          <p:cTn id="12" fill="hold">
+                            <p:stCondLst>
+                              <p:cond delay="0"/>
+                            </p:stCondLst>
+                            <p:childTnLst>
+                              <p:par>
+                                <p:cTn id="13" presetID="1" presetClass="entr" presetSubtype="0" fill="hold" grpId="0" nodeType="clickEffect">
+                                  <p:stCondLst>
+                                    <p:cond delay="0"/>
+                                  </p:stCondLst>
+                                  <p:childTnLst>
+                                    <p:set>
+                                      <p:cBhvr>
+                                        <p:cTn id="14" dur="1" fill="hold">
+                                          <p:stCondLst>
+                                            <p:cond delay="0"/>
+                                          </p:stCondLst>
+                                        </p:cTn>
+                                        <p:tgtEl>
+                                          <p:spTgt spid="3">
+                                            <p:txEl>
+                                              <p:pRg st="3" end="3"/>
+                                            </p:txEl>
+                                          </p:spTgt>
+                                        </p:tgtEl>
+                                        <p:attrNameLst>
+                                          <p:attrName>style.visibility</p:attrName>
+                                        </p:attrNameLst>
+                                      </p:cBhvr>
+                                      <p:to>
+                                        <p:strVal val="visible"/>
+                                      </p:to>
+                                    </p:set>
+                                  </p:childTnLst>
+                                </p:cTn>
+                              </p:par>
+                            </p:childTnLst>
+                          </p:cTn>
+                        </p:par>
+                      </p:childTnLst>
+                    </p:cTn>
+                  </p:par>
+                  <p:par>
+                    <p:cTn id="15" fill="hold">
+                      <p:stCondLst>
+                        <p:cond delay="indefinite"/>
+                      </p:stCondLst>
+                      <p:childTnLst>
+                        <p:par>
+                          <p:cTn id="16" fill="hold">
+                            <p:stCondLst>
+                              <p:cond delay="0"/>
+                            </p:stCondLst>
+                            <p:childTnLst>
+                              <p:par>
+                                <p:cTn id="17" presetID="1" presetClass="entr" presetSubtype="0" fill="hold" grpId="0" nodeType="clickEffect">
+                                  <p:stCondLst>
+                                    <p:cond delay="0"/>
+                                  </p:stCondLst>
+                                  <p:childTnLst>
+                                    <p:set>
+                                      <p:cBhvr>
+                                        <p:cTn id="18" dur="1" fill="hold">
+                                          <p:stCondLst>
+                                            <p:cond delay="0"/>
+                                          </p:stCondLst>
+                                        </p:cTn>
+                                        <p:tgtEl>
+                                          <p:spTgt spid="3">
+                                            <p:txEl>
+                                              <p:pRg st="4" end="4"/>
+                                            </p:txEl>
+                                          </p:spTgt>
+                                        </p:tgtEl>
+                                        <p:attrNameLst>
+                                          <p:attrName>style.visibility</p:attrName>
+                                        </p:attrNameLst>
+                                      </p:cBhvr>
+                                      <p:to>
+                                        <p:strVal val="visible"/>
+                                      </p:to>
+                                    </p:set>
+                                  </p:childTnLst>
+                                </p:cTn>
+                              </p:par>
+                            </p:childTnLst>
+                          </p:cTn>
+                        </p:par>
+                      </p:childTnLst>
+                    </p:cTn>
+                  </p:par>
+                </p:childTnLst>
+              </p:cTn>
+              <p:prevCondLst>
+                <p:cond evt="onPrev" delay="0">
+                  <p:tgtEl>
+                    <p:sldTgt/>
+                  </p:tgtEl>
+                </p:cond>
+              </p:prevCondLst>
+              <p:nextCondLst>
+                <p:cond evt="onNext" delay="0">
+                  <p:tgtEl>
+                    <p:sldTgt/>
+                  </p:tgtEl>
+                </p:cond>
+              </p:nextCondLst>
+            </p:seq>
+          </p:childTnLst>
+        </p:cTn>
+      </p:par>
+    </p:tnLst>
+    <p:bldLst>
+      <p:bldP spid="3" grpId="0" uiExpand="1" build="p"/>
+    </p:bldLst>
+  </p:timing>
+</p:sld>
+</file>
+
+<file path=ppt/slides/slide9.xml><?xml version="1.0" encoding="utf-8"?>
+<p:sld xmlns:a="http://schemas.openxmlformats.org/drawingml/2006/main" xmlns:r="http://schemas.openxmlformats.org/officeDocument/2006/relationships" xmlns:p="http://schemas.openxmlformats.org/presentationml/2006/main">
+  <p:cSld>
+    <p:spTree>
+      <p:nvGrpSpPr>
+        <p:cNvPr id="1" name=""/>
+        <p:cNvGrpSpPr/>
+        <p:nvPr/>
+      </p:nvGrpSpPr>
+      <p:grpSpPr>
+        <a:xfrm>
+          <a:off x="0" y="0"/>
+          <a:ext cx="0" cy="0"/>
+          <a:chOff x="0" y="0"/>
+          <a:chExt cx="0" cy="0"/>
+        </a:xfrm>
+      </p:grpSpPr>
+      <p:sp>
+        <p:nvSpPr>
+          <p:cNvPr id="3" name="Content Placeholder 2">
+            <a:extLst>
+              <a:ext uri="{FF2B5EF4-FFF2-40B4-BE49-F238E27FC236}">
+                <a16:creationId xmlns:a16="http://schemas.microsoft.com/office/drawing/2014/main" id="{372FA590-20E9-0368-85B4-90C26598F852}"/>
+              </a:ext>
+            </a:extLst>
+          </p:cNvPr>
+          <p:cNvSpPr>
+            <a:spLocks noGrp="1"/>
+          </p:cNvSpPr>
+          <p:nvPr>
+            <p:ph idx="1"/>
+          </p:nvPr>
+        </p:nvSpPr>
+        <p:spPr/>
+        <p:txBody>
+          <a:bodyPr/>
+          <a:lstStyle/>
+          <a:p>
+            <a:pPr lvl="0" indent="0" marL="0">
+              <a:buNone/>
+            </a:pPr>
+            <a:r>
+              <a:rPr b="1"/>
+              <a:t>How confident do you feel with the Zotero workflow of collection, organisation, and citing?</a:t>
+            </a:r>
+            <a:r>
+              <a:rPr/>
+              <a:t> </a:t>
+            </a:r>
+            <a:r>
+              <a:rPr i="1"/>
+              <a:t>(1 = Not confident at all, 5 = Very confident)</a:t>
+            </a:r>
+          </a:p>
+          <a:p>
+            <a:pPr lvl="0" indent="-457200" marL="457200">
+              <a:buAutoNum type="alphaLcPeriod"/>
+            </a:pPr>
+            <a:r>
+              <a:rPr/>
+              <a:t>1</a:t>
+            </a:r>
+          </a:p>
+          <a:p>
+            <a:pPr lvl="0" indent="-457200" marL="457200">
+              <a:buAutoNum type="alphaLcPeriod"/>
+            </a:pPr>
+            <a:r>
+              <a:rPr/>
+              <a:t>2</a:t>
+            </a:r>
+          </a:p>
+          <a:p>
+            <a:pPr lvl="0" indent="-457200" marL="457200">
+              <a:buAutoNum type="alphaLcPeriod"/>
+            </a:pPr>
+            <a:r>
+              <a:rPr/>
+              <a:t>3</a:t>
+            </a:r>
+          </a:p>
+          <a:p>
+            <a:pPr lvl="0" indent="-457200" marL="457200">
+              <a:buAutoNum type="alphaLcPeriod"/>
+            </a:pPr>
+            <a:r>
+              <a:rPr/>
+              <a:t>4</a:t>
+            </a:r>
+          </a:p>
+          <a:p>
+            <a:pPr lvl="0" indent="-457200" marL="457200">
+              <a:buAutoNum type="alphaLcPeriod"/>
+            </a:pPr>
+            <a:r>
+              <a:rPr/>
+              <a:t>5</a:t>
+            </a:r>
+          </a:p>
+        </p:txBody>
+      </p:sp>
+      <p:sp>
+        <p:nvSpPr>
+          <p:cNvPr id="6" name="Slide Number Placeholder 5">
+            <a:extLst>
+              <a:ext uri="{FF2B5EF4-FFF2-40B4-BE49-F238E27FC236}">
+                <a16:creationId xmlns:a16="http://schemas.microsoft.com/office/drawing/2014/main" id="{5F33F24B-1A9E-2EAF-F2AB-89426454DEE9}"/>
+              </a:ext>
+            </a:extLst>
+          </p:cNvPr>
+          <p:cNvSpPr>
+            <a:spLocks noGrp="1"/>
+          </p:cNvSpPr>
+          <p:nvPr>
+            <p:ph idx="12" sz="quarter" type="sldNum"/>
+          </p:nvPr>
+        </p:nvSpPr>
+        <p:spPr>
+          <a:xfrm>
+            <a:off x="8610599" y="6356350"/>
+            <a:ext cx="3135001" cy="365125"/>
+          </a:xfrm>
+        </p:spPr>
+        <p:txBody>
+          <a:bodyPr/>
+          <a:lstStyle/>
+          <a:p>
+            <a:fld id="{7FEFBAB6-26D0-44D8-BD53-612461CE1ACC}" type="slidenum">
+              <a:rPr lang="de-DE" smtClean="0"/>
+              <a:t>‹#›</a:t>
+            </a:fld>
+            <a:endParaRPr lang="de-DE"/>
+          </a:p>
+        </p:txBody>
+      </p:sp>
+    </p:spTree>
+  </p:cSld>
+  <p:timing>
+    <p:tnLst>
+      <p:par>
+        <p:cTn id="1" dur="indefinite" restart="never" nodeType="tmRoot">
+          <p:childTnLst>
+            <p:seq concurrent="1" nextAc="seek">
+              <p:cTn id="2" dur="indefinite" nodeType="mainSeq">
+                <p:childTnLst>
+                  <p:par>
+                    <p:cTn id="3" fill="hold">
+                      <p:stCondLst>
+                        <p:cond delay="indefinite"/>
+                      </p:stCondLst>
+                      <p:childTnLst>
+                        <p:par>
+                          <p:cTn id="4" fill="hold">
+                            <p:stCondLst>
+                              <p:cond delay="0"/>
+                            </p:stCondLst>
+                            <p:childTnLst>
+                              <p:par>
+                                <p:cTn id="5" presetID="1" presetClass="entr" presetSubtype="0" fill="hold" grpId="0" nodeType="clickEffect">
+                                  <p:stCondLst>
+                                    <p:cond delay="0"/>
+                                  </p:stCondLst>
+                                  <p:childTnLst>
+                                    <p:set>
+                                      <p:cBhvr>
+                                        <p:cTn id="6" dur="1" fill="hold">
+                                          <p:stCondLst>
+                                            <p:cond delay="0"/>
+                                          </p:stCondLst>
+                                        </p:cTn>
+                                        <p:tgtEl>
+                                          <p:spTgt spid="3">
+                                            <p:txEl>
+                                              <p:pRg st="1" end="1"/>
+                                            </p:txEl>
+                                          </p:spTgt>
+                                        </p:tgtEl>
+                                        <p:attrNameLst>
+                                          <p:attrName>style.visibility</p:attrName>
+                                        </p:attrNameLst>
+                                      </p:cBhvr>
+                                      <p:to>
+                                        <p:strVal val="visible"/>
+                                      </p:to>
+                                    </p:set>
+                                  </p:childTnLst>
+                                </p:cTn>
+                              </p:par>
+                            </p:childTnLst>
+                          </p:cTn>
+                        </p:par>
+                      </p:childTnLst>
+                    </p:cTn>
+                  </p:par>
+                  <p:par>
+                    <p:cTn id="7" fill="hold">
+                      <p:stCondLst>
+                        <p:cond delay="indefinite"/>
+                      </p:stCondLst>
+                      <p:childTnLst>
+                        <p:par>
+                          <p:cTn id="8" fill="hold">
+                            <p:stCondLst>
+                              <p:cond delay="0"/>
+                            </p:stCondLst>
+                            <p:childTnLst>
+                              <p:par>
+                                <p:cTn id="9" presetID="1" presetClass="entr" presetSubtype="0" fill="hold" grpId="0" nodeType="clickEffect">
+                                  <p:stCondLst>
+                                    <p:cond delay="0"/>
+                                  </p:stCondLst>
+                                  <p:childTnLst>
+                                    <p:set>
+                                      <p:cBhvr>
+                                        <p:cTn id="10" dur="1" fill="hold">
+                                          <p:stCondLst>
+                                            <p:cond delay="0"/>
+                                          </p:stCondLst>
+                                        </p:cTn>
+                                        <p:tgtEl>
+                                          <p:spTgt spid="3">
+                                            <p:txEl>
+                                              <p:pRg st="2" end="2"/>
+                                            </p:txEl>
+                                          </p:spTgt>
+                                        </p:tgtEl>
+                                        <p:attrNameLst>
+                                          <p:attrName>style.visibility</p:attrName>
+                                        </p:attrNameLst>
+                                      </p:cBhvr>
+                                      <p:to>
+                                        <p:strVal val="visible"/>
+                                      </p:to>
+                                    </p:set>
+                                  </p:childTnLst>
+                                </p:cTn>
+                              </p:par>
+                            </p:childTnLst>
+                          </p:cTn>
+                        </p:par>
+                      </p:childTnLst>
+                    </p:cTn>
+                  </p:par>
+                  <p:par>
+                    <p:cTn id="11" fill="hold">
+                      <p:stCondLst>
+                        <p:cond delay="indefinite"/>
+                      </p:stCondLst>
+                      <p:childTnLst>
+                        <p:par>
+                          <p:cTn id="12" fill="hold">
+                            <p:stCondLst>
+                              <p:cond delay="0"/>
+                            </p:stCondLst>
+                            <p:childTnLst>
+                              <p:par>
+                                <p:cTn id="13" presetID="1" presetClass="entr" presetSubtype="0" fill="hold" grpId="0" nodeType="clickEffect">
+                                  <p:stCondLst>
+                                    <p:cond delay="0"/>
+                                  </p:stCondLst>
+                                  <p:childTnLst>
+                                    <p:set>
+                                      <p:cBhvr>
+                                        <p:cTn id="14" dur="1" fill="hold">
+                                          <p:stCondLst>
+                                            <p:cond delay="0"/>
+                                          </p:stCondLst>
+                                        </p:cTn>
+                                        <p:tgtEl>
+                                          <p:spTgt spid="3">
+                                            <p:txEl>
+                                              <p:pRg st="3" end="3"/>
+                                            </p:txEl>
+                                          </p:spTgt>
+                                        </p:tgtEl>
+                                        <p:attrNameLst>
+                                          <p:attrName>style.visibility</p:attrName>
+                                        </p:attrNameLst>
+                                      </p:cBhvr>
+                                      <p:to>
+                                        <p:strVal val="visible"/>
+                                      </p:to>
+                                    </p:set>
+                                  </p:childTnLst>
+                                </p:cTn>
+                              </p:par>
+                            </p:childTnLst>
+                          </p:cTn>
+                        </p:par>
+                      </p:childTnLst>
+                    </p:cTn>
+                  </p:par>
+                  <p:par>
+                    <p:cTn id="15" fill="hold">
+                      <p:stCondLst>
+                        <p:cond delay="indefinite"/>
+                      </p:stCondLst>
+                      <p:childTnLst>
+                        <p:par>
+                          <p:cTn id="16" fill="hold">
+                            <p:stCondLst>
+                              <p:cond delay="0"/>
+                            </p:stCondLst>
+                            <p:childTnLst>
+                              <p:par>
+                                <p:cTn id="17" presetID="1" presetClass="entr" presetSubtype="0" fill="hold" grpId="0" nodeType="clickEffect">
+                                  <p:stCondLst>
+                                    <p:cond delay="0"/>
+                                  </p:stCondLst>
+                                  <p:childTnLst>
+                                    <p:set>
+                                      <p:cBhvr>
+                                        <p:cTn id="18" dur="1" fill="hold">
+                                          <p:stCondLst>
+                                            <p:cond delay="0"/>
+                                          </p:stCondLst>
+                                        </p:cTn>
+                                        <p:tgtEl>
+                                          <p:spTgt spid="3">
+                                            <p:txEl>
+                                              <p:pRg st="4" end="4"/>
+                                            </p:txEl>
+                                          </p:spTgt>
+                                        </p:tgtEl>
+                                        <p:attrNameLst>
+                                          <p:attrName>style.visibility</p:attrName>
+                                        </p:attrNameLst>
+                                      </p:cBhvr>
+                                      <p:to>
+                                        <p:strVal val="visible"/>
+                                      </p:to>
+                                    </p:set>
+                                  </p:childTnLst>
+                                </p:cTn>
+                              </p:par>
+                            </p:childTnLst>
+                          </p:cTn>
+                        </p:par>
+                      </p:childTnLst>
+                    </p:cTn>
+                  </p:par>
+                  <p:par>
+                    <p:cTn id="19" fill="hold">
+                      <p:stCondLst>
+                        <p:cond delay="indefinite"/>
+                      </p:stCondLst>
+                      <p:childTnLst>
+                        <p:par>
+                          <p:cTn id="20" fill="hold">
+                            <p:stCondLst>
+                              <p:cond delay="0"/>
+                            </p:stCondLst>
+                            <p:childTnLst>
+                              <p:par>
+                                <p:cTn id="21" presetID="1" presetClass="entr" presetSubtype="0" fill="hold" grpId="0" nodeType="clickEffect">
+                                  <p:stCondLst>
+                                    <p:cond delay="0"/>
+                                  </p:stCondLst>
+                                  <p:childTnLst>
+                                    <p:set>
+                                      <p:cBhvr>
+                                        <p:cTn id="22" dur="1" fill="hold">
+                                          <p:stCondLst>
+                                            <p:cond delay="0"/>
+                                          </p:stCondLst>
+                                        </p:cTn>
+                                        <p:tgtEl>
+                                          <p:spTgt spid="3">
+                                            <p:txEl>
+                                              <p:pRg st="5" end="5"/>
+                                            </p:txEl>
+                                          </p:spTgt>
+                                        </p:tgtEl>
+                                        <p:attrNameLst>
+                                          <p:attrName>style.visibility</p:attrName>
+                                        </p:attrNameLst>
+                                      </p:cBhvr>
+                                      <p:to>
+                                        <p:strVal val="visible"/>
+                                      </p:to>
+                                    </p:set>
+                                  </p:childTnLst>
+                                </p:cTn>
+                              </p:par>
+                            </p:childTnLst>
+                          </p:cTn>
+                        </p:par>
+                      </p:childTnLst>
+                    </p:cTn>
+                  </p:par>
+                </p:childTnLst>
+              </p:cTn>
+              <p:prevCondLst>
+                <p:cond evt="onPrev" delay="0">
+                  <p:tgtEl>
+                    <p:sldTgt/>
+                  </p:tgtEl>
+                </p:cond>
+              </p:prevCondLst>
+              <p:nextCondLst>
+                <p:cond evt="onNext" delay="0">
+                  <p:tgtEl>
+                    <p:sldTgt/>
+                  </p:tgtEl>
+                </p:cond>
+              </p:nextCondLst>
+            </p:seq>
+          </p:childTnLst>
+        </p:cTn>
+      </p:par>
+    </p:tnLst>
+    <p:bldLst>
+      <p:bldP spid="3" grpId="0" uiExpand="1" build="p"/>
+    </p:bldLst>
+  </p:timing>
 </p:sld>
 </file>
 
